--- a/output/wordlabs-sub-prefix-3day.pptx
+++ b/output/wordlabs-sub-prefix-3day.pptx
@@ -4240,7 +4240,7 @@
                 <a:ea typeface="Calibri" pitchFamily="34" charset="-122"/>
                 <a:cs typeface="Calibri" pitchFamily="34" charset="-120"/>
               </a:rPr>
-              <a:t>"under, below, beneath"</a:t>
+              <a:t>"under, below, less than"</a:t>
             </a:r>
             <a:endParaRPr lang="en-US" sz="2200" dirty="0"/>
           </a:p>
@@ -5288,7 +5288,7 @@
                 <a:ea typeface="Calibri" pitchFamily="34" charset="-122"/>
                 <a:cs typeface="Calibri" pitchFamily="34" charset="-120"/>
               </a:rPr>
-              <a:t>Word Labs  •  wordlabs.app  •  Prefix: 'sub-' = under, below, beneath</a:t>
+              <a:t>Word Labs  •  wordlabs.app  •  Prefix: 'sub-' = under, below, less than</a:t>
             </a:r>
             <a:endParaRPr lang="en-US" sz="800" dirty="0"/>
           </a:p>
@@ -5928,7 +5928,7 @@
                 <a:ea typeface="Calibri" pitchFamily="34" charset="-122"/>
                 <a:cs typeface="Calibri" pitchFamily="34" charset="-120"/>
               </a:rPr>
-              <a:t>Word Labs  •  wordlabs.app  •  Prefix: 'sub-' = under, below, beneath</a:t>
+              <a:t>Word Labs  •  wordlabs.app  •  Prefix: 'sub-' = under, below, less than</a:t>
             </a:r>
             <a:endParaRPr lang="en-US" sz="800" dirty="0"/>
           </a:p>
@@ -6716,7 +6716,7 @@
                 <a:ea typeface="Calibri" pitchFamily="34" charset="-122"/>
                 <a:cs typeface="Calibri" pitchFamily="34" charset="-120"/>
               </a:rPr>
-              <a:t>Word Labs  •  wordlabs.app  •  Prefix: 'sub-' = under, below, beneath</a:t>
+              <a:t>Word Labs  •  wordlabs.app  •  Prefix: 'sub-' = under, below, less than</a:t>
             </a:r>
             <a:endParaRPr lang="en-US" sz="800" dirty="0"/>
           </a:p>
@@ -7543,7 +7543,7 @@
                 <a:ea typeface="Calibri" pitchFamily="34" charset="-122"/>
                 <a:cs typeface="Calibri" pitchFamily="34" charset="-120"/>
               </a:rPr>
-              <a:t>Word Labs  •  wordlabs.app  •  Prefix: 'sub-' = under, below, beneath</a:t>
+              <a:t>Word Labs  •  wordlabs.app  •  Prefix: 'sub-' = under, below, less than</a:t>
             </a:r>
             <a:endParaRPr lang="en-US" sz="800" dirty="0"/>
           </a:p>
@@ -7762,7 +7762,7 @@
         </p:nvSpPr>
         <p:spPr>
           <a:xfrm>
-            <a:off x="2221992" y="2258568"/>
+            <a:off x="2938272" y="2258568"/>
             <a:ext cx="1828800" cy="292608"/>
           </a:xfrm>
           <a:prstGeom prst="rect">
@@ -7796,7 +7796,7 @@
         </p:nvSpPr>
         <p:spPr>
           <a:xfrm>
-            <a:off x="2221992" y="2258568"/>
+            <a:off x="2938272" y="2258568"/>
             <a:ext cx="1828800" cy="292608"/>
           </a:xfrm>
           <a:prstGeom prst="rect">
@@ -7835,7 +7835,7 @@
         </p:nvSpPr>
         <p:spPr>
           <a:xfrm>
-            <a:off x="2221992" y="2569464"/>
+            <a:off x="2938272" y="2569464"/>
             <a:ext cx="1828800" cy="201168"/>
           </a:xfrm>
           <a:prstGeom prst="rect">
@@ -7874,7 +7874,7 @@
         </p:nvSpPr>
         <p:spPr>
           <a:xfrm>
-            <a:off x="4370832" y="2258568"/>
+            <a:off x="5803392" y="2258568"/>
             <a:ext cx="1828800" cy="292608"/>
           </a:xfrm>
           <a:prstGeom prst="rect">
@@ -7908,7 +7908,7 @@
         </p:nvSpPr>
         <p:spPr>
           <a:xfrm>
-            <a:off x="4370832" y="2258568"/>
+            <a:off x="5803392" y="2258568"/>
             <a:ext cx="1828800" cy="292608"/>
           </a:xfrm>
           <a:prstGeom prst="rect">
@@ -7933,7 +7933,7 @@
                 <a:ea typeface="Trebuchet MS" pitchFamily="34" charset="-122"/>
                 <a:cs typeface="Trebuchet MS" pitchFamily="34" charset="-120"/>
               </a:rPr>
-              <a:t>mar</a:t>
+              <a:t>marine</a:t>
             </a:r>
             <a:endParaRPr lang="en-US" sz="1300" dirty="0"/>
           </a:p>
@@ -7947,7 +7947,7 @@
         </p:nvSpPr>
         <p:spPr>
           <a:xfrm>
-            <a:off x="4370832" y="2569464"/>
+            <a:off x="5803392" y="2569464"/>
             <a:ext cx="1828800" cy="201168"/>
           </a:xfrm>
           <a:prstGeom prst="rect">
@@ -7972,7 +7972,7 @@
                 <a:ea typeface="Calibri" pitchFamily="34" charset="-122"/>
                 <a:cs typeface="Calibri" pitchFamily="34" charset="-120"/>
               </a:rPr>
-              <a:t>sea</a:t>
+              <a:t>of the sea</a:t>
             </a:r>
             <a:endParaRPr lang="en-US" sz="850" dirty="0"/>
           </a:p>
@@ -7986,30 +7986,23 @@
         </p:nvSpPr>
         <p:spPr>
           <a:xfrm>
-            <a:off x="6519672" y="2258568"/>
-            <a:ext cx="1828800" cy="292608"/>
+            <a:off x="365760" y="3273552"/>
+            <a:ext cx="1371600" cy="658368"/>
           </a:xfrm>
           <a:prstGeom prst="rect">
             <a:avLst>
-              <a:gd name="adj" fmla="val 25000"/>
+              <a:gd name="adj" fmla="val 8333"/>
             </a:avLst>
           </a:prstGeom>
           <a:solidFill>
-            <a:srgbClr val="FCE7F3"/>
-          </a:solidFill>
-          <a:ln w="19050">
-            <a:solidFill>
-              <a:srgbClr val="DB2777"/>
-            </a:solidFill>
-            <a:prstDash val="solid"/>
-          </a:ln>
-          <a:effectLst>
-            <a:outerShdw sx="100000" sy="100000" kx="0" ky="0" algn="bl" rotWithShape="0" blurRad="101600" dist="38100" dir="8100000">
-              <a:srgbClr val="000000">
-                <a:alpha val="12000"/>
-              </a:srgbClr>
-            </a:outerShdw>
-          </a:effectLst>
+            <a:srgbClr val="E2E8F0"/>
+          </a:solidFill>
+          <a:ln w="12700">
+            <a:solidFill>
+              <a:srgbClr val="E2E8F0"/>
+            </a:solidFill>
+            <a:prstDash val="solid"/>
+          </a:ln>
         </p:spPr>
       </p:sp>
       <p:sp>
@@ -8020,90 +8013,117 @@
         </p:nvSpPr>
         <p:spPr>
           <a:xfrm>
-            <a:off x="6519672" y="2258568"/>
-            <a:ext cx="1828800" cy="292608"/>
-          </a:xfrm>
-          <a:prstGeom prst="rect">
-            <a:avLst/>
-          </a:prstGeom>
-          <a:noFill/>
-          <a:ln/>
-        </p:spPr>
-        <p:txBody>
-          <a:bodyPr wrap="square" lIns="0" tIns="0" rIns="0" bIns="0" rtlCol="0" anchor="ctr"/>
-          <a:lstStyle/>
-          <a:p>
-            <a:pPr algn="ctr" indent="0" marL="0">
-              <a:buNone/>
-            </a:pPr>
-            <a:r>
-              <a:rPr lang="en-US" sz="1300" b="1" dirty="0">
-                <a:solidFill>
-                  <a:srgbClr val="9D174D"/>
+            <a:off x="365760" y="3273552"/>
+            <a:ext cx="1371600" cy="658368"/>
+          </a:xfrm>
+          <a:prstGeom prst="rect">
+            <a:avLst/>
+          </a:prstGeom>
+          <a:noFill/>
+          <a:ln/>
+        </p:spPr>
+        <p:txBody>
+          <a:bodyPr wrap="square" lIns="0" tIns="0" rIns="0" bIns="0" rtlCol="0" anchor="ctr"/>
+          <a:lstStyle/>
+          <a:p>
+            <a:pPr algn="ctr" indent="0" marL="0">
+              <a:buNone/>
+            </a:pPr>
+            <a:r>
+              <a:rPr lang="en-US" sz="1100" b="1" dirty="0">
+                <a:solidFill>
+                  <a:srgbClr val="475569"/>
                 </a:solidFill>
                 <a:latin typeface="Trebuchet MS" pitchFamily="34" charset="0"/>
                 <a:ea typeface="Trebuchet MS" pitchFamily="34" charset="-122"/>
                 <a:cs typeface="Trebuchet MS" pitchFamily="34" charset="-120"/>
               </a:rPr>
-              <a:t>ine</a:t>
-            </a:r>
-            <a:endParaRPr lang="en-US" sz="1300" dirty="0"/>
-          </a:p>
-        </p:txBody>
-      </p:sp>
-      <p:sp>
-        <p:nvSpPr>
-          <p:cNvPr id="24" name="Text 22"/>
-          <p:cNvSpPr/>
-          <p:nvPr/>
-        </p:nvSpPr>
-        <p:spPr>
-          <a:xfrm>
-            <a:off x="6519672" y="2569464"/>
-            <a:ext cx="1828800" cy="201168"/>
-          </a:xfrm>
-          <a:prstGeom prst="rect">
-            <a:avLst/>
-          </a:prstGeom>
-          <a:noFill/>
-          <a:ln/>
-        </p:spPr>
-        <p:txBody>
-          <a:bodyPr wrap="square" lIns="0" tIns="0" rIns="0" bIns="0" rtlCol="0" anchor="t"/>
-          <a:lstStyle/>
-          <a:p>
-            <a:pPr algn="ctr" indent="0" marL="0">
-              <a:buNone/>
-            </a:pPr>
-            <a:r>
-              <a:rPr lang="en-US" sz="850" dirty="0">
-                <a:solidFill>
-                  <a:srgbClr val="475569"/>
+              <a:t>Syllables</a:t>
+            </a:r>
+            <a:endParaRPr lang="en-US" sz="1100" dirty="0"/>
+          </a:p>
+        </p:txBody>
+      </p:sp>
+      <p:sp>
+        <p:nvSpPr>
+          <p:cNvPr id="24" name="Shape 22"/>
+          <p:cNvSpPr/>
+          <p:nvPr/>
+        </p:nvSpPr>
+        <p:spPr>
+          <a:xfrm>
+            <a:off x="1874520" y="3273552"/>
+            <a:ext cx="6903720" cy="658368"/>
+          </a:xfrm>
+          <a:prstGeom prst="rect">
+            <a:avLst>
+              <a:gd name="adj" fmla="val 8333"/>
+            </a:avLst>
+          </a:prstGeom>
+          <a:solidFill>
+            <a:srgbClr val="F8FAFC"/>
+          </a:solidFill>
+          <a:ln w="12700">
+            <a:solidFill>
+              <a:srgbClr val="E2E8F0"/>
+            </a:solidFill>
+            <a:prstDash val="dash"/>
+          </a:ln>
+        </p:spPr>
+      </p:sp>
+      <p:sp>
+        <p:nvSpPr>
+          <p:cNvPr id="25" name="Text 23"/>
+          <p:cNvSpPr/>
+          <p:nvPr/>
+        </p:nvSpPr>
+        <p:spPr>
+          <a:xfrm>
+            <a:off x="1874520" y="3273552"/>
+            <a:ext cx="6903720" cy="658368"/>
+          </a:xfrm>
+          <a:prstGeom prst="rect">
+            <a:avLst/>
+          </a:prstGeom>
+          <a:noFill/>
+          <a:ln/>
+        </p:spPr>
+        <p:txBody>
+          <a:bodyPr wrap="square" rtlCol="0" anchor="ctr"/>
+          <a:lstStyle/>
+          <a:p>
+            <a:pPr algn="ctr" indent="0" marL="0">
+              <a:buNone/>
+            </a:pPr>
+            <a:r>
+              <a:rPr lang="en-US" sz="1100" i="1" dirty="0">
+                <a:solidFill>
+                  <a:srgbClr val="CBD5E1"/>
                 </a:solidFill>
                 <a:latin typeface="Calibri" pitchFamily="34" charset="0"/>
                 <a:ea typeface="Calibri" pitchFamily="34" charset="-122"/>
                 <a:cs typeface="Calibri" pitchFamily="34" charset="-120"/>
               </a:rPr>
-              <a:t>relating to</a:t>
-            </a:r>
-            <a:endParaRPr lang="en-US" sz="850" dirty="0"/>
-          </a:p>
-        </p:txBody>
-      </p:sp>
-      <p:sp>
-        <p:nvSpPr>
-          <p:cNvPr id="25" name="Shape 23"/>
-          <p:cNvSpPr/>
-          <p:nvPr/>
-        </p:nvSpPr>
-        <p:spPr>
-          <a:xfrm>
-            <a:off x="365760" y="3273552"/>
-            <a:ext cx="1371600" cy="658368"/>
+              <a:t>Write here...</a:t>
+            </a:r>
+            <a:endParaRPr lang="en-US" sz="1100" dirty="0"/>
+          </a:p>
+        </p:txBody>
+      </p:sp>
+      <p:sp>
+        <p:nvSpPr>
+          <p:cNvPr id="26" name="Shape 24"/>
+          <p:cNvSpPr/>
+          <p:nvPr/>
+        </p:nvSpPr>
+        <p:spPr>
+          <a:xfrm>
+            <a:off x="365760" y="4096512"/>
+            <a:ext cx="1371600" cy="804672"/>
           </a:xfrm>
           <a:prstGeom prst="rect">
             <a:avLst>
-              <a:gd name="adj" fmla="val 8333"/>
+              <a:gd name="adj" fmla="val 6818"/>
             </a:avLst>
           </a:prstGeom>
           <a:solidFill>
@@ -8119,14 +8139,14 @@
       </p:sp>
       <p:sp>
         <p:nvSpPr>
-          <p:cNvPr id="26" name="Text 24"/>
-          <p:cNvSpPr/>
-          <p:nvPr/>
-        </p:nvSpPr>
-        <p:spPr>
-          <a:xfrm>
-            <a:off x="365760" y="3273552"/>
-            <a:ext cx="1371600" cy="658368"/>
+          <p:cNvPr id="27" name="Text 25"/>
+          <p:cNvSpPr/>
+          <p:nvPr/>
+        </p:nvSpPr>
+        <p:spPr>
+          <a:xfrm>
+            <a:off x="365760" y="4096512"/>
+            <a:ext cx="1371600" cy="804672"/>
           </a:xfrm>
           <a:prstGeom prst="rect">
             <a:avLst/>
@@ -8150,7 +8170,7 @@
                 <a:ea typeface="Trebuchet MS" pitchFamily="34" charset="-122"/>
                 <a:cs typeface="Trebuchet MS" pitchFamily="34" charset="-120"/>
               </a:rPr>
-              <a:t>Syllables</a:t>
+              <a:t>Phonemes</a:t>
             </a:r>
             <a:endParaRPr lang="en-US" sz="1100" dirty="0"/>
           </a:p>
@@ -8158,80 +8178,14 @@
       </p:sp>
       <p:sp>
         <p:nvSpPr>
-          <p:cNvPr id="27" name="Shape 25"/>
-          <p:cNvSpPr/>
-          <p:nvPr/>
-        </p:nvSpPr>
-        <p:spPr>
-          <a:xfrm>
-            <a:off x="1874520" y="3273552"/>
-            <a:ext cx="6903720" cy="658368"/>
-          </a:xfrm>
-          <a:prstGeom prst="rect">
-            <a:avLst>
-              <a:gd name="adj" fmla="val 8333"/>
-            </a:avLst>
-          </a:prstGeom>
-          <a:solidFill>
-            <a:srgbClr val="F8FAFC"/>
-          </a:solidFill>
-          <a:ln w="12700">
-            <a:solidFill>
-              <a:srgbClr val="E2E8F0"/>
-            </a:solidFill>
-            <a:prstDash val="dash"/>
-          </a:ln>
-        </p:spPr>
-      </p:sp>
-      <p:sp>
-        <p:nvSpPr>
-          <p:cNvPr id="28" name="Text 26"/>
-          <p:cNvSpPr/>
-          <p:nvPr/>
-        </p:nvSpPr>
-        <p:spPr>
-          <a:xfrm>
-            <a:off x="1874520" y="3273552"/>
-            <a:ext cx="6903720" cy="658368"/>
-          </a:xfrm>
-          <a:prstGeom prst="rect">
-            <a:avLst/>
-          </a:prstGeom>
-          <a:noFill/>
-          <a:ln/>
-        </p:spPr>
-        <p:txBody>
-          <a:bodyPr wrap="square" rtlCol="0" anchor="ctr"/>
-          <a:lstStyle/>
-          <a:p>
-            <a:pPr algn="ctr" indent="0" marL="0">
-              <a:buNone/>
-            </a:pPr>
-            <a:r>
-              <a:rPr lang="en-US" sz="1100" i="1" dirty="0">
-                <a:solidFill>
-                  <a:srgbClr val="CBD5E1"/>
-                </a:solidFill>
-                <a:latin typeface="Calibri" pitchFamily="34" charset="0"/>
-                <a:ea typeface="Calibri" pitchFamily="34" charset="-122"/>
-                <a:cs typeface="Calibri" pitchFamily="34" charset="-120"/>
-              </a:rPr>
-              <a:t>Write here...</a:t>
-            </a:r>
-            <a:endParaRPr lang="en-US" sz="1100" dirty="0"/>
-          </a:p>
-        </p:txBody>
-      </p:sp>
-      <p:sp>
-        <p:nvSpPr>
-          <p:cNvPr id="29" name="Shape 27"/>
-          <p:cNvSpPr/>
-          <p:nvPr/>
-        </p:nvSpPr>
-        <p:spPr>
-          <a:xfrm>
-            <a:off x="365760" y="4096512"/>
-            <a:ext cx="1371600" cy="804672"/>
+          <p:cNvPr id="28" name="Shape 26"/>
+          <p:cNvSpPr/>
+          <p:nvPr/>
+        </p:nvSpPr>
+        <p:spPr>
+          <a:xfrm>
+            <a:off x="1874520" y="4096512"/>
+            <a:ext cx="6903720" cy="804672"/>
           </a:xfrm>
           <a:prstGeom prst="rect">
             <a:avLst>
@@ -8239,85 +8193,19 @@
             </a:avLst>
           </a:prstGeom>
           <a:solidFill>
-            <a:srgbClr val="E2E8F0"/>
+            <a:srgbClr val="F8FAFC"/>
           </a:solidFill>
           <a:ln w="12700">
             <a:solidFill>
               <a:srgbClr val="E2E8F0"/>
             </a:solidFill>
-            <a:prstDash val="solid"/>
-          </a:ln>
-        </p:spPr>
-      </p:sp>
-      <p:sp>
-        <p:nvSpPr>
-          <p:cNvPr id="30" name="Text 28"/>
-          <p:cNvSpPr/>
-          <p:nvPr/>
-        </p:nvSpPr>
-        <p:spPr>
-          <a:xfrm>
-            <a:off x="365760" y="4096512"/>
-            <a:ext cx="1371600" cy="804672"/>
-          </a:xfrm>
-          <a:prstGeom prst="rect">
-            <a:avLst/>
-          </a:prstGeom>
-          <a:noFill/>
-          <a:ln/>
-        </p:spPr>
-        <p:txBody>
-          <a:bodyPr wrap="square" lIns="0" tIns="0" rIns="0" bIns="0" rtlCol="0" anchor="ctr"/>
-          <a:lstStyle/>
-          <a:p>
-            <a:pPr algn="ctr" indent="0" marL="0">
-              <a:buNone/>
-            </a:pPr>
-            <a:r>
-              <a:rPr lang="en-US" sz="1100" b="1" dirty="0">
-                <a:solidFill>
-                  <a:srgbClr val="475569"/>
-                </a:solidFill>
-                <a:latin typeface="Trebuchet MS" pitchFamily="34" charset="0"/>
-                <a:ea typeface="Trebuchet MS" pitchFamily="34" charset="-122"/>
-                <a:cs typeface="Trebuchet MS" pitchFamily="34" charset="-120"/>
-              </a:rPr>
-              <a:t>Phonemes</a:t>
-            </a:r>
-            <a:endParaRPr lang="en-US" sz="1100" dirty="0"/>
-          </a:p>
-        </p:txBody>
-      </p:sp>
-      <p:sp>
-        <p:nvSpPr>
-          <p:cNvPr id="31" name="Shape 29"/>
-          <p:cNvSpPr/>
-          <p:nvPr/>
-        </p:nvSpPr>
-        <p:spPr>
-          <a:xfrm>
-            <a:off x="1874520" y="4096512"/>
-            <a:ext cx="6903720" cy="804672"/>
-          </a:xfrm>
-          <a:prstGeom prst="rect">
-            <a:avLst>
-              <a:gd name="adj" fmla="val 6818"/>
-            </a:avLst>
-          </a:prstGeom>
-          <a:solidFill>
-            <a:srgbClr val="F8FAFC"/>
-          </a:solidFill>
-          <a:ln w="12700">
-            <a:solidFill>
-              <a:srgbClr val="E2E8F0"/>
-            </a:solidFill>
             <a:prstDash val="dash"/>
           </a:ln>
         </p:spPr>
       </p:sp>
       <p:sp>
         <p:nvSpPr>
-          <p:cNvPr id="32" name="Text 30"/>
+          <p:cNvPr id="29" name="Text 27"/>
           <p:cNvSpPr/>
           <p:nvPr/>
         </p:nvSpPr>
@@ -8640,7 +8528,7 @@
                 <a:ea typeface="Calibri" pitchFamily="34" charset="-122"/>
                 <a:cs typeface="Calibri" pitchFamily="34" charset="-120"/>
               </a:rPr>
-              <a:t>Word Labs  •  wordlabs.app  •  Prefix: 'sub-' = under, below, beneath</a:t>
+              <a:t>Word Labs  •  wordlabs.app  •  Prefix: 'sub-' = under, below, less than</a:t>
             </a:r>
             <a:endParaRPr lang="en-US" sz="800" dirty="0"/>
           </a:p>
@@ -8859,7 +8747,7 @@
         </p:nvSpPr>
         <p:spPr>
           <a:xfrm>
-            <a:off x="2221992" y="2258568"/>
+            <a:off x="2938272" y="2258568"/>
             <a:ext cx="1828800" cy="292608"/>
           </a:xfrm>
           <a:prstGeom prst="rect">
@@ -8893,7 +8781,7 @@
         </p:nvSpPr>
         <p:spPr>
           <a:xfrm>
-            <a:off x="2221992" y="2258568"/>
+            <a:off x="2938272" y="2258568"/>
             <a:ext cx="1828800" cy="292608"/>
           </a:xfrm>
           <a:prstGeom prst="rect">
@@ -8932,7 +8820,7 @@
         </p:nvSpPr>
         <p:spPr>
           <a:xfrm>
-            <a:off x="2221992" y="2569464"/>
+            <a:off x="2938272" y="2569464"/>
             <a:ext cx="1828800" cy="201168"/>
           </a:xfrm>
           <a:prstGeom prst="rect">
@@ -8971,7 +8859,7 @@
         </p:nvSpPr>
         <p:spPr>
           <a:xfrm>
-            <a:off x="4370832" y="2258568"/>
+            <a:off x="5803392" y="2258568"/>
             <a:ext cx="1828800" cy="292608"/>
           </a:xfrm>
           <a:prstGeom prst="rect">
@@ -9005,7 +8893,7 @@
         </p:nvSpPr>
         <p:spPr>
           <a:xfrm>
-            <a:off x="4370832" y="2258568"/>
+            <a:off x="5803392" y="2258568"/>
             <a:ext cx="1828800" cy="292608"/>
           </a:xfrm>
           <a:prstGeom prst="rect">
@@ -9030,7 +8918,7 @@
                 <a:ea typeface="Trebuchet MS" pitchFamily="34" charset="-122"/>
                 <a:cs typeface="Trebuchet MS" pitchFamily="34" charset="-120"/>
               </a:rPr>
-              <a:t>mar</a:t>
+              <a:t>marine</a:t>
             </a:r>
             <a:endParaRPr lang="en-US" sz="1300" dirty="0"/>
           </a:p>
@@ -9044,7 +8932,7 @@
         </p:nvSpPr>
         <p:spPr>
           <a:xfrm>
-            <a:off x="4370832" y="2569464"/>
+            <a:off x="5803392" y="2569464"/>
             <a:ext cx="1828800" cy="201168"/>
           </a:xfrm>
           <a:prstGeom prst="rect">
@@ -9069,7 +8957,7 @@
                 <a:ea typeface="Calibri" pitchFamily="34" charset="-122"/>
                 <a:cs typeface="Calibri" pitchFamily="34" charset="-120"/>
               </a:rPr>
-              <a:t>sea</a:t>
+              <a:t>of the sea</a:t>
             </a:r>
             <a:endParaRPr lang="en-US" sz="850" dirty="0"/>
           </a:p>
@@ -9083,30 +8971,23 @@
         </p:nvSpPr>
         <p:spPr>
           <a:xfrm>
-            <a:off x="6519672" y="2258568"/>
-            <a:ext cx="1828800" cy="292608"/>
+            <a:off x="365760" y="3273552"/>
+            <a:ext cx="1371600" cy="658368"/>
           </a:xfrm>
           <a:prstGeom prst="rect">
             <a:avLst>
-              <a:gd name="adj" fmla="val 25000"/>
+              <a:gd name="adj" fmla="val 8333"/>
             </a:avLst>
           </a:prstGeom>
           <a:solidFill>
-            <a:srgbClr val="FCE7F3"/>
-          </a:solidFill>
-          <a:ln w="19050">
-            <a:solidFill>
-              <a:srgbClr val="DB2777"/>
-            </a:solidFill>
-            <a:prstDash val="solid"/>
-          </a:ln>
-          <a:effectLst>
-            <a:outerShdw sx="100000" sy="100000" kx="0" ky="0" algn="bl" rotWithShape="0" blurRad="101600" dist="38100" dir="8100000">
-              <a:srgbClr val="000000">
-                <a:alpha val="12000"/>
-              </a:srgbClr>
-            </a:outerShdw>
-          </a:effectLst>
+            <a:srgbClr val="E2E8F0"/>
+          </a:solidFill>
+          <a:ln w="12700">
+            <a:solidFill>
+              <a:srgbClr val="E2E8F0"/>
+            </a:solidFill>
+            <a:prstDash val="solid"/>
+          </a:ln>
         </p:spPr>
       </p:sp>
       <p:sp>
@@ -9117,86 +8998,47 @@
         </p:nvSpPr>
         <p:spPr>
           <a:xfrm>
-            <a:off x="6519672" y="2258568"/>
-            <a:ext cx="1828800" cy="292608"/>
-          </a:xfrm>
-          <a:prstGeom prst="rect">
-            <a:avLst/>
-          </a:prstGeom>
-          <a:noFill/>
-          <a:ln/>
-        </p:spPr>
-        <p:txBody>
-          <a:bodyPr wrap="square" lIns="0" tIns="0" rIns="0" bIns="0" rtlCol="0" anchor="ctr"/>
-          <a:lstStyle/>
-          <a:p>
-            <a:pPr algn="ctr" indent="0" marL="0">
-              <a:buNone/>
-            </a:pPr>
-            <a:r>
-              <a:rPr lang="en-US" sz="1300" b="1" dirty="0">
-                <a:solidFill>
-                  <a:srgbClr val="9D174D"/>
+            <a:off x="365760" y="3273552"/>
+            <a:ext cx="1371600" cy="658368"/>
+          </a:xfrm>
+          <a:prstGeom prst="rect">
+            <a:avLst/>
+          </a:prstGeom>
+          <a:noFill/>
+          <a:ln/>
+        </p:spPr>
+        <p:txBody>
+          <a:bodyPr wrap="square" lIns="0" tIns="0" rIns="0" bIns="0" rtlCol="0" anchor="ctr"/>
+          <a:lstStyle/>
+          <a:p>
+            <a:pPr algn="ctr" indent="0" marL="0">
+              <a:buNone/>
+            </a:pPr>
+            <a:r>
+              <a:rPr lang="en-US" sz="1100" b="1" dirty="0">
+                <a:solidFill>
+                  <a:srgbClr val="475569"/>
                 </a:solidFill>
                 <a:latin typeface="Trebuchet MS" pitchFamily="34" charset="0"/>
                 <a:ea typeface="Trebuchet MS" pitchFamily="34" charset="-122"/>
                 <a:cs typeface="Trebuchet MS" pitchFamily="34" charset="-120"/>
               </a:rPr>
-              <a:t>ine</a:t>
-            </a:r>
-            <a:endParaRPr lang="en-US" sz="1300" dirty="0"/>
-          </a:p>
-        </p:txBody>
-      </p:sp>
-      <p:sp>
-        <p:nvSpPr>
-          <p:cNvPr id="24" name="Text 22"/>
-          <p:cNvSpPr/>
-          <p:nvPr/>
-        </p:nvSpPr>
-        <p:spPr>
-          <a:xfrm>
-            <a:off x="6519672" y="2569464"/>
-            <a:ext cx="1828800" cy="201168"/>
-          </a:xfrm>
-          <a:prstGeom prst="rect">
-            <a:avLst/>
-          </a:prstGeom>
-          <a:noFill/>
-          <a:ln/>
-        </p:spPr>
-        <p:txBody>
-          <a:bodyPr wrap="square" lIns="0" tIns="0" rIns="0" bIns="0" rtlCol="0" anchor="t"/>
-          <a:lstStyle/>
-          <a:p>
-            <a:pPr algn="ctr" indent="0" marL="0">
-              <a:buNone/>
-            </a:pPr>
-            <a:r>
-              <a:rPr lang="en-US" sz="850" dirty="0">
-                <a:solidFill>
-                  <a:srgbClr val="475569"/>
-                </a:solidFill>
-                <a:latin typeface="Calibri" pitchFamily="34" charset="0"/>
-                <a:ea typeface="Calibri" pitchFamily="34" charset="-122"/>
-                <a:cs typeface="Calibri" pitchFamily="34" charset="-120"/>
-              </a:rPr>
-              <a:t>relating to</a:t>
-            </a:r>
-            <a:endParaRPr lang="en-US" sz="850" dirty="0"/>
-          </a:p>
-        </p:txBody>
-      </p:sp>
-      <p:sp>
-        <p:nvSpPr>
-          <p:cNvPr id="25" name="Shape 23"/>
-          <p:cNvSpPr/>
-          <p:nvPr/>
-        </p:nvSpPr>
-        <p:spPr>
-          <a:xfrm>
-            <a:off x="365760" y="3273552"/>
-            <a:ext cx="1371600" cy="658368"/>
+              <a:t>Syllables</a:t>
+            </a:r>
+            <a:endParaRPr lang="en-US" sz="1100" dirty="0"/>
+          </a:p>
+        </p:txBody>
+      </p:sp>
+      <p:sp>
+        <p:nvSpPr>
+          <p:cNvPr id="24" name="Shape 22"/>
+          <p:cNvSpPr/>
+          <p:nvPr/>
+        </p:nvSpPr>
+        <p:spPr>
+          <a:xfrm>
+            <a:off x="1874520" y="3273552"/>
+            <a:ext cx="6903720" cy="658368"/>
           </a:xfrm>
           <a:prstGeom prst="rect">
             <a:avLst>
@@ -9204,11 +9046,38 @@
             </a:avLst>
           </a:prstGeom>
           <a:solidFill>
-            <a:srgbClr val="E2E8F0"/>
-          </a:solidFill>
-          <a:ln w="12700">
-            <a:solidFill>
-              <a:srgbClr val="E2E8F0"/>
+            <a:srgbClr val="CCFBF1"/>
+          </a:solidFill>
+          <a:ln w="12700">
+            <a:solidFill>
+              <a:srgbClr val="0D9488"/>
+            </a:solidFill>
+            <a:prstDash val="solid"/>
+          </a:ln>
+        </p:spPr>
+      </p:sp>
+      <p:sp>
+        <p:nvSpPr>
+          <p:cNvPr id="25" name="Shape 23"/>
+          <p:cNvSpPr/>
+          <p:nvPr/>
+        </p:nvSpPr>
+        <p:spPr>
+          <a:xfrm>
+            <a:off x="2313432" y="3364992"/>
+            <a:ext cx="1645920" cy="475488"/>
+          </a:xfrm>
+          <a:prstGeom prst="rect">
+            <a:avLst>
+              <a:gd name="adj" fmla="val 9615"/>
+            </a:avLst>
+          </a:prstGeom>
+          <a:solidFill>
+            <a:srgbClr val="FFFFFF"/>
+          </a:solidFill>
+          <a:ln w="12700">
+            <a:solidFill>
+              <a:srgbClr val="0D9488"/>
             </a:solidFill>
             <a:prstDash val="solid"/>
           </a:ln>
@@ -9222,63 +9091,75 @@
         </p:nvSpPr>
         <p:spPr>
           <a:xfrm>
-            <a:off x="365760" y="3273552"/>
-            <a:ext cx="1371600" cy="658368"/>
-          </a:xfrm>
-          <a:prstGeom prst="rect">
-            <a:avLst/>
-          </a:prstGeom>
-          <a:noFill/>
-          <a:ln/>
-        </p:spPr>
-        <p:txBody>
-          <a:bodyPr wrap="square" lIns="0" tIns="0" rIns="0" bIns="0" rtlCol="0" anchor="ctr"/>
-          <a:lstStyle/>
-          <a:p>
-            <a:pPr algn="ctr" indent="0" marL="0">
-              <a:buNone/>
-            </a:pPr>
-            <a:r>
-              <a:rPr lang="en-US" sz="1100" b="1" dirty="0">
-                <a:solidFill>
-                  <a:srgbClr val="475569"/>
+            <a:off x="2313432" y="3364992"/>
+            <a:ext cx="1645920" cy="475488"/>
+          </a:xfrm>
+          <a:prstGeom prst="rect">
+            <a:avLst/>
+          </a:prstGeom>
+          <a:noFill/>
+          <a:ln/>
+        </p:spPr>
+        <p:txBody>
+          <a:bodyPr wrap="square" lIns="0" tIns="0" rIns="0" bIns="0" rtlCol="0" anchor="ctr"/>
+          <a:lstStyle/>
+          <a:p>
+            <a:pPr algn="ctr" indent="0" marL="0">
+              <a:buNone/>
+            </a:pPr>
+            <a:r>
+              <a:rPr lang="en-US" sz="1400" b="1" dirty="0">
+                <a:solidFill>
+                  <a:srgbClr val="0D9488"/>
                 </a:solidFill>
                 <a:latin typeface="Trebuchet MS" pitchFamily="34" charset="0"/>
                 <a:ea typeface="Trebuchet MS" pitchFamily="34" charset="-122"/>
                 <a:cs typeface="Trebuchet MS" pitchFamily="34" charset="-120"/>
               </a:rPr>
-              <a:t>Syllables</a:t>
-            </a:r>
-            <a:endParaRPr lang="en-US" sz="1100" dirty="0"/>
-          </a:p>
-        </p:txBody>
-      </p:sp>
-      <p:sp>
-        <p:nvSpPr>
-          <p:cNvPr id="27" name="Shape 25"/>
-          <p:cNvSpPr/>
-          <p:nvPr/>
-        </p:nvSpPr>
-        <p:spPr>
-          <a:xfrm>
-            <a:off x="1874520" y="3273552"/>
-            <a:ext cx="6903720" cy="658368"/>
-          </a:xfrm>
-          <a:prstGeom prst="rect">
-            <a:avLst>
-              <a:gd name="adj" fmla="val 8333"/>
-            </a:avLst>
-          </a:prstGeom>
-          <a:solidFill>
-            <a:srgbClr val="CCFBF1"/>
-          </a:solidFill>
-          <a:ln w="12700">
-            <a:solidFill>
-              <a:srgbClr val="0D9488"/>
-            </a:solidFill>
-            <a:prstDash val="solid"/>
-          </a:ln>
-        </p:spPr>
+              <a:t>sub</a:t>
+            </a:r>
+            <a:endParaRPr lang="en-US" sz="1400" dirty="0"/>
+          </a:p>
+        </p:txBody>
+      </p:sp>
+      <p:sp>
+        <p:nvSpPr>
+          <p:cNvPr id="27" name="Text 25"/>
+          <p:cNvSpPr/>
+          <p:nvPr/>
+        </p:nvSpPr>
+        <p:spPr>
+          <a:xfrm>
+            <a:off x="3959352" y="3364992"/>
+            <a:ext cx="411480" cy="475488"/>
+          </a:xfrm>
+          <a:prstGeom prst="rect">
+            <a:avLst/>
+          </a:prstGeom>
+          <a:noFill/>
+          <a:ln/>
+        </p:spPr>
+        <p:txBody>
+          <a:bodyPr wrap="square" lIns="0" tIns="0" rIns="0" bIns="0" rtlCol="0" anchor="ctr"/>
+          <a:lstStyle/>
+          <a:p>
+            <a:pPr algn="ctr" indent="0" marL="0">
+              <a:buNone/>
+            </a:pPr>
+            <a:r>
+              <a:rPr lang="en-US" sz="1600" b="1" dirty="0">
+                <a:solidFill>
+                  <a:srgbClr val="0D9488"/>
+                </a:solidFill>
+                <a:latin typeface="Trebuchet MS" pitchFamily="34" charset="0"/>
+                <a:ea typeface="Trebuchet MS" pitchFamily="34" charset="-122"/>
+                <a:cs typeface="Trebuchet MS" pitchFamily="34" charset="-120"/>
+              </a:rPr>
+              <a:t>·</a:t>
+            </a:r>
+            <a:endParaRPr lang="en-US" sz="1600" dirty="0"/>
+          </a:p>
+        </p:txBody>
       </p:sp>
       <p:sp>
         <p:nvSpPr>
@@ -9288,7 +9169,7 @@
         </p:nvSpPr>
         <p:spPr>
           <a:xfrm>
-            <a:off x="2313432" y="3364992"/>
+            <a:off x="4370832" y="3364992"/>
             <a:ext cx="1645920" cy="475488"/>
           </a:xfrm>
           <a:prstGeom prst="rect">
@@ -9315,7 +9196,7 @@
         </p:nvSpPr>
         <p:spPr>
           <a:xfrm>
-            <a:off x="2313432" y="3364992"/>
+            <a:off x="4370832" y="3364992"/>
             <a:ext cx="1645920" cy="475488"/>
           </a:xfrm>
           <a:prstGeom prst="rect">
@@ -9340,7 +9221,7 @@
                 <a:ea typeface="Trebuchet MS" pitchFamily="34" charset="-122"/>
                 <a:cs typeface="Trebuchet MS" pitchFamily="34" charset="-120"/>
               </a:rPr>
-              <a:t>sub</a:t>
+              <a:t>ma</a:t>
             </a:r>
             <a:endParaRPr lang="en-US" sz="1400" dirty="0"/>
           </a:p>
@@ -9354,7 +9235,7 @@
         </p:nvSpPr>
         <p:spPr>
           <a:xfrm>
-            <a:off x="3959352" y="3364992"/>
+            <a:off x="6016752" y="3364992"/>
             <a:ext cx="411480" cy="475488"/>
           </a:xfrm>
           <a:prstGeom prst="rect">
@@ -9393,7 +9274,7 @@
         </p:nvSpPr>
         <p:spPr>
           <a:xfrm>
-            <a:off x="4370832" y="3364992"/>
+            <a:off x="6428232" y="3364992"/>
             <a:ext cx="1645920" cy="475488"/>
           </a:xfrm>
           <a:prstGeom prst="rect">
@@ -9420,7 +9301,7 @@
         </p:nvSpPr>
         <p:spPr>
           <a:xfrm>
-            <a:off x="4370832" y="3364992"/>
+            <a:off x="6428232" y="3364992"/>
             <a:ext cx="1645920" cy="475488"/>
           </a:xfrm>
           <a:prstGeom prst="rect">
@@ -9445,7 +9326,7 @@
                 <a:ea typeface="Trebuchet MS" pitchFamily="34" charset="-122"/>
                 <a:cs typeface="Trebuchet MS" pitchFamily="34" charset="-120"/>
               </a:rPr>
-              <a:t>ma</a:t>
+              <a:t>rine</a:t>
             </a:r>
             <a:endParaRPr lang="en-US" sz="1400" dirty="0"/>
           </a:p>
@@ -9453,119 +9334,80 @@
       </p:sp>
       <p:sp>
         <p:nvSpPr>
-          <p:cNvPr id="33" name="Text 31"/>
-          <p:cNvSpPr/>
-          <p:nvPr/>
-        </p:nvSpPr>
-        <p:spPr>
-          <a:xfrm>
-            <a:off x="6016752" y="3364992"/>
-            <a:ext cx="411480" cy="475488"/>
-          </a:xfrm>
-          <a:prstGeom prst="rect">
-            <a:avLst/>
-          </a:prstGeom>
-          <a:noFill/>
-          <a:ln/>
-        </p:spPr>
-        <p:txBody>
-          <a:bodyPr wrap="square" lIns="0" tIns="0" rIns="0" bIns="0" rtlCol="0" anchor="ctr"/>
-          <a:lstStyle/>
-          <a:p>
-            <a:pPr algn="ctr" indent="0" marL="0">
-              <a:buNone/>
-            </a:pPr>
-            <a:r>
-              <a:rPr lang="en-US" sz="1600" b="1" dirty="0">
-                <a:solidFill>
-                  <a:srgbClr val="0D9488"/>
+          <p:cNvPr id="33" name="Shape 31"/>
+          <p:cNvSpPr/>
+          <p:nvPr/>
+        </p:nvSpPr>
+        <p:spPr>
+          <a:xfrm>
+            <a:off x="365760" y="4096512"/>
+            <a:ext cx="1371600" cy="804672"/>
+          </a:xfrm>
+          <a:prstGeom prst="rect">
+            <a:avLst>
+              <a:gd name="adj" fmla="val 6818"/>
+            </a:avLst>
+          </a:prstGeom>
+          <a:solidFill>
+            <a:srgbClr val="E2E8F0"/>
+          </a:solidFill>
+          <a:ln w="12700">
+            <a:solidFill>
+              <a:srgbClr val="E2E8F0"/>
+            </a:solidFill>
+            <a:prstDash val="solid"/>
+          </a:ln>
+        </p:spPr>
+      </p:sp>
+      <p:sp>
+        <p:nvSpPr>
+          <p:cNvPr id="34" name="Text 32"/>
+          <p:cNvSpPr/>
+          <p:nvPr/>
+        </p:nvSpPr>
+        <p:spPr>
+          <a:xfrm>
+            <a:off x="365760" y="4096512"/>
+            <a:ext cx="1371600" cy="804672"/>
+          </a:xfrm>
+          <a:prstGeom prst="rect">
+            <a:avLst/>
+          </a:prstGeom>
+          <a:noFill/>
+          <a:ln/>
+        </p:spPr>
+        <p:txBody>
+          <a:bodyPr wrap="square" lIns="0" tIns="0" rIns="0" bIns="0" rtlCol="0" anchor="ctr"/>
+          <a:lstStyle/>
+          <a:p>
+            <a:pPr algn="ctr" indent="0" marL="0">
+              <a:buNone/>
+            </a:pPr>
+            <a:r>
+              <a:rPr lang="en-US" sz="1100" b="1" dirty="0">
+                <a:solidFill>
+                  <a:srgbClr val="475569"/>
                 </a:solidFill>
                 <a:latin typeface="Trebuchet MS" pitchFamily="34" charset="0"/>
                 <a:ea typeface="Trebuchet MS" pitchFamily="34" charset="-122"/>
                 <a:cs typeface="Trebuchet MS" pitchFamily="34" charset="-120"/>
               </a:rPr>
-              <a:t>·</a:t>
-            </a:r>
-            <a:endParaRPr lang="en-US" sz="1600" dirty="0"/>
-          </a:p>
-        </p:txBody>
-      </p:sp>
-      <p:sp>
-        <p:nvSpPr>
-          <p:cNvPr id="34" name="Shape 32"/>
-          <p:cNvSpPr/>
-          <p:nvPr/>
-        </p:nvSpPr>
-        <p:spPr>
-          <a:xfrm>
-            <a:off x="6428232" y="3364992"/>
-            <a:ext cx="1645920" cy="475488"/>
-          </a:xfrm>
-          <a:prstGeom prst="rect">
-            <a:avLst>
-              <a:gd name="adj" fmla="val 9615"/>
-            </a:avLst>
-          </a:prstGeom>
-          <a:solidFill>
-            <a:srgbClr val="FFFFFF"/>
-          </a:solidFill>
-          <a:ln w="12700">
-            <a:solidFill>
-              <a:srgbClr val="0D9488"/>
-            </a:solidFill>
-            <a:prstDash val="solid"/>
-          </a:ln>
-        </p:spPr>
-      </p:sp>
-      <p:sp>
-        <p:nvSpPr>
-          <p:cNvPr id="35" name="Text 33"/>
-          <p:cNvSpPr/>
-          <p:nvPr/>
-        </p:nvSpPr>
-        <p:spPr>
-          <a:xfrm>
-            <a:off x="6428232" y="3364992"/>
-            <a:ext cx="1645920" cy="475488"/>
-          </a:xfrm>
-          <a:prstGeom prst="rect">
-            <a:avLst/>
-          </a:prstGeom>
-          <a:noFill/>
-          <a:ln/>
-        </p:spPr>
-        <p:txBody>
-          <a:bodyPr wrap="square" lIns="0" tIns="0" rIns="0" bIns="0" rtlCol="0" anchor="ctr"/>
-          <a:lstStyle/>
-          <a:p>
-            <a:pPr algn="ctr" indent="0" marL="0">
-              <a:buNone/>
-            </a:pPr>
-            <a:r>
-              <a:rPr lang="en-US" sz="1400" b="1" dirty="0">
-                <a:solidFill>
-                  <a:srgbClr val="0D9488"/>
-                </a:solidFill>
-                <a:latin typeface="Trebuchet MS" pitchFamily="34" charset="0"/>
-                <a:ea typeface="Trebuchet MS" pitchFamily="34" charset="-122"/>
-                <a:cs typeface="Trebuchet MS" pitchFamily="34" charset="-120"/>
-              </a:rPr>
-              <a:t>rine</a:t>
-            </a:r>
-            <a:endParaRPr lang="en-US" sz="1400" dirty="0"/>
-          </a:p>
-        </p:txBody>
-      </p:sp>
-      <p:sp>
-        <p:nvSpPr>
-          <p:cNvPr id="36" name="Shape 34"/>
-          <p:cNvSpPr/>
-          <p:nvPr/>
-        </p:nvSpPr>
-        <p:spPr>
-          <a:xfrm>
-            <a:off x="365760" y="4096512"/>
-            <a:ext cx="1371600" cy="804672"/>
+              <a:t>Phonemes</a:t>
+            </a:r>
+            <a:endParaRPr lang="en-US" sz="1100" dirty="0"/>
+          </a:p>
+        </p:txBody>
+      </p:sp>
+      <p:sp>
+        <p:nvSpPr>
+          <p:cNvPr id="35" name="Shape 33"/>
+          <p:cNvSpPr/>
+          <p:nvPr/>
+        </p:nvSpPr>
+        <p:spPr>
+          <a:xfrm>
+            <a:off x="1874520" y="4096512"/>
+            <a:ext cx="6903720" cy="804672"/>
           </a:xfrm>
           <a:prstGeom prst="rect">
             <a:avLst>
@@ -9573,85 +9415,19 @@
             </a:avLst>
           </a:prstGeom>
           <a:solidFill>
-            <a:srgbClr val="E2E8F0"/>
+            <a:srgbClr val="F8FAFC"/>
           </a:solidFill>
           <a:ln w="12700">
             <a:solidFill>
               <a:srgbClr val="E2E8F0"/>
             </a:solidFill>
-            <a:prstDash val="solid"/>
-          </a:ln>
-        </p:spPr>
-      </p:sp>
-      <p:sp>
-        <p:nvSpPr>
-          <p:cNvPr id="37" name="Text 35"/>
-          <p:cNvSpPr/>
-          <p:nvPr/>
-        </p:nvSpPr>
-        <p:spPr>
-          <a:xfrm>
-            <a:off x="365760" y="4096512"/>
-            <a:ext cx="1371600" cy="804672"/>
-          </a:xfrm>
-          <a:prstGeom prst="rect">
-            <a:avLst/>
-          </a:prstGeom>
-          <a:noFill/>
-          <a:ln/>
-        </p:spPr>
-        <p:txBody>
-          <a:bodyPr wrap="square" lIns="0" tIns="0" rIns="0" bIns="0" rtlCol="0" anchor="ctr"/>
-          <a:lstStyle/>
-          <a:p>
-            <a:pPr algn="ctr" indent="0" marL="0">
-              <a:buNone/>
-            </a:pPr>
-            <a:r>
-              <a:rPr lang="en-US" sz="1100" b="1" dirty="0">
-                <a:solidFill>
-                  <a:srgbClr val="475569"/>
-                </a:solidFill>
-                <a:latin typeface="Trebuchet MS" pitchFamily="34" charset="0"/>
-                <a:ea typeface="Trebuchet MS" pitchFamily="34" charset="-122"/>
-                <a:cs typeface="Trebuchet MS" pitchFamily="34" charset="-120"/>
-              </a:rPr>
-              <a:t>Phonemes</a:t>
-            </a:r>
-            <a:endParaRPr lang="en-US" sz="1100" dirty="0"/>
-          </a:p>
-        </p:txBody>
-      </p:sp>
-      <p:sp>
-        <p:nvSpPr>
-          <p:cNvPr id="38" name="Shape 36"/>
-          <p:cNvSpPr/>
-          <p:nvPr/>
-        </p:nvSpPr>
-        <p:spPr>
-          <a:xfrm>
-            <a:off x="1874520" y="4096512"/>
-            <a:ext cx="6903720" cy="804672"/>
-          </a:xfrm>
-          <a:prstGeom prst="rect">
-            <a:avLst>
-              <a:gd name="adj" fmla="val 6818"/>
-            </a:avLst>
-          </a:prstGeom>
-          <a:solidFill>
-            <a:srgbClr val="F8FAFC"/>
-          </a:solidFill>
-          <a:ln w="12700">
-            <a:solidFill>
-              <a:srgbClr val="E2E8F0"/>
-            </a:solidFill>
             <a:prstDash val="dash"/>
           </a:ln>
         </p:spPr>
       </p:sp>
       <p:sp>
         <p:nvSpPr>
-          <p:cNvPr id="39" name="Text 37"/>
+          <p:cNvPr id="36" name="Text 34"/>
           <p:cNvSpPr/>
           <p:nvPr/>
         </p:nvSpPr>
@@ -9974,7 +9750,7 @@
                 <a:ea typeface="Calibri" pitchFamily="34" charset="-122"/>
                 <a:cs typeface="Calibri" pitchFamily="34" charset="-120"/>
               </a:rPr>
-              <a:t>Word Labs  •  wordlabs.app  •  Prefix: 'sub-' = under, below, beneath</a:t>
+              <a:t>Word Labs  •  wordlabs.app  •  Prefix: 'sub-' = under, below, less than</a:t>
             </a:r>
             <a:endParaRPr lang="en-US" sz="800" dirty="0"/>
           </a:p>
@@ -10193,7 +9969,7 @@
         </p:nvSpPr>
         <p:spPr>
           <a:xfrm>
-            <a:off x="2221992" y="2258568"/>
+            <a:off x="2938272" y="2258568"/>
             <a:ext cx="1828800" cy="292608"/>
           </a:xfrm>
           <a:prstGeom prst="rect">
@@ -10227,7 +10003,7 @@
         </p:nvSpPr>
         <p:spPr>
           <a:xfrm>
-            <a:off x="2221992" y="2258568"/>
+            <a:off x="2938272" y="2258568"/>
             <a:ext cx="1828800" cy="292608"/>
           </a:xfrm>
           <a:prstGeom prst="rect">
@@ -10266,7 +10042,7 @@
         </p:nvSpPr>
         <p:spPr>
           <a:xfrm>
-            <a:off x="2221992" y="2569464"/>
+            <a:off x="2938272" y="2569464"/>
             <a:ext cx="1828800" cy="201168"/>
           </a:xfrm>
           <a:prstGeom prst="rect">
@@ -10305,7 +10081,7 @@
         </p:nvSpPr>
         <p:spPr>
           <a:xfrm>
-            <a:off x="4370832" y="2258568"/>
+            <a:off x="5803392" y="2258568"/>
             <a:ext cx="1828800" cy="292608"/>
           </a:xfrm>
           <a:prstGeom prst="rect">
@@ -10339,7 +10115,7 @@
         </p:nvSpPr>
         <p:spPr>
           <a:xfrm>
-            <a:off x="4370832" y="2258568"/>
+            <a:off x="5803392" y="2258568"/>
             <a:ext cx="1828800" cy="292608"/>
           </a:xfrm>
           <a:prstGeom prst="rect">
@@ -10364,7 +10140,7 @@
                 <a:ea typeface="Trebuchet MS" pitchFamily="34" charset="-122"/>
                 <a:cs typeface="Trebuchet MS" pitchFamily="34" charset="-120"/>
               </a:rPr>
-              <a:t>mar</a:t>
+              <a:t>marine</a:t>
             </a:r>
             <a:endParaRPr lang="en-US" sz="1300" dirty="0"/>
           </a:p>
@@ -10378,7 +10154,7 @@
         </p:nvSpPr>
         <p:spPr>
           <a:xfrm>
-            <a:off x="4370832" y="2569464"/>
+            <a:off x="5803392" y="2569464"/>
             <a:ext cx="1828800" cy="201168"/>
           </a:xfrm>
           <a:prstGeom prst="rect">
@@ -10403,7 +10179,7 @@
                 <a:ea typeface="Calibri" pitchFamily="34" charset="-122"/>
                 <a:cs typeface="Calibri" pitchFamily="34" charset="-120"/>
               </a:rPr>
-              <a:t>sea</a:t>
+              <a:t>of the sea</a:t>
             </a:r>
             <a:endParaRPr lang="en-US" sz="850" dirty="0"/>
           </a:p>
@@ -10417,30 +10193,23 @@
         </p:nvSpPr>
         <p:spPr>
           <a:xfrm>
-            <a:off x="6519672" y="2258568"/>
-            <a:ext cx="1828800" cy="292608"/>
+            <a:off x="365760" y="3273552"/>
+            <a:ext cx="1371600" cy="658368"/>
           </a:xfrm>
           <a:prstGeom prst="rect">
             <a:avLst>
-              <a:gd name="adj" fmla="val 25000"/>
+              <a:gd name="adj" fmla="val 8333"/>
             </a:avLst>
           </a:prstGeom>
           <a:solidFill>
-            <a:srgbClr val="FCE7F3"/>
-          </a:solidFill>
-          <a:ln w="19050">
-            <a:solidFill>
-              <a:srgbClr val="DB2777"/>
-            </a:solidFill>
-            <a:prstDash val="solid"/>
-          </a:ln>
-          <a:effectLst>
-            <a:outerShdw sx="100000" sy="100000" kx="0" ky="0" algn="bl" rotWithShape="0" blurRad="101600" dist="38100" dir="8100000">
-              <a:srgbClr val="000000">
-                <a:alpha val="12000"/>
-              </a:srgbClr>
-            </a:outerShdw>
-          </a:effectLst>
+            <a:srgbClr val="E2E8F0"/>
+          </a:solidFill>
+          <a:ln w="12700">
+            <a:solidFill>
+              <a:srgbClr val="E2E8F0"/>
+            </a:solidFill>
+            <a:prstDash val="solid"/>
+          </a:ln>
         </p:spPr>
       </p:sp>
       <p:sp>
@@ -10451,86 +10220,47 @@
         </p:nvSpPr>
         <p:spPr>
           <a:xfrm>
-            <a:off x="6519672" y="2258568"/>
-            <a:ext cx="1828800" cy="292608"/>
-          </a:xfrm>
-          <a:prstGeom prst="rect">
-            <a:avLst/>
-          </a:prstGeom>
-          <a:noFill/>
-          <a:ln/>
-        </p:spPr>
-        <p:txBody>
-          <a:bodyPr wrap="square" lIns="0" tIns="0" rIns="0" bIns="0" rtlCol="0" anchor="ctr"/>
-          <a:lstStyle/>
-          <a:p>
-            <a:pPr algn="ctr" indent="0" marL="0">
-              <a:buNone/>
-            </a:pPr>
-            <a:r>
-              <a:rPr lang="en-US" sz="1300" b="1" dirty="0">
-                <a:solidFill>
-                  <a:srgbClr val="9D174D"/>
+            <a:off x="365760" y="3273552"/>
+            <a:ext cx="1371600" cy="658368"/>
+          </a:xfrm>
+          <a:prstGeom prst="rect">
+            <a:avLst/>
+          </a:prstGeom>
+          <a:noFill/>
+          <a:ln/>
+        </p:spPr>
+        <p:txBody>
+          <a:bodyPr wrap="square" lIns="0" tIns="0" rIns="0" bIns="0" rtlCol="0" anchor="ctr"/>
+          <a:lstStyle/>
+          <a:p>
+            <a:pPr algn="ctr" indent="0" marL="0">
+              <a:buNone/>
+            </a:pPr>
+            <a:r>
+              <a:rPr lang="en-US" sz="1100" b="1" dirty="0">
+                <a:solidFill>
+                  <a:srgbClr val="475569"/>
                 </a:solidFill>
                 <a:latin typeface="Trebuchet MS" pitchFamily="34" charset="0"/>
                 <a:ea typeface="Trebuchet MS" pitchFamily="34" charset="-122"/>
                 <a:cs typeface="Trebuchet MS" pitchFamily="34" charset="-120"/>
               </a:rPr>
-              <a:t>ine</a:t>
-            </a:r>
-            <a:endParaRPr lang="en-US" sz="1300" dirty="0"/>
-          </a:p>
-        </p:txBody>
-      </p:sp>
-      <p:sp>
-        <p:nvSpPr>
-          <p:cNvPr id="24" name="Text 22"/>
-          <p:cNvSpPr/>
-          <p:nvPr/>
-        </p:nvSpPr>
-        <p:spPr>
-          <a:xfrm>
-            <a:off x="6519672" y="2569464"/>
-            <a:ext cx="1828800" cy="201168"/>
-          </a:xfrm>
-          <a:prstGeom prst="rect">
-            <a:avLst/>
-          </a:prstGeom>
-          <a:noFill/>
-          <a:ln/>
-        </p:spPr>
-        <p:txBody>
-          <a:bodyPr wrap="square" lIns="0" tIns="0" rIns="0" bIns="0" rtlCol="0" anchor="t"/>
-          <a:lstStyle/>
-          <a:p>
-            <a:pPr algn="ctr" indent="0" marL="0">
-              <a:buNone/>
-            </a:pPr>
-            <a:r>
-              <a:rPr lang="en-US" sz="850" dirty="0">
-                <a:solidFill>
-                  <a:srgbClr val="475569"/>
-                </a:solidFill>
-                <a:latin typeface="Calibri" pitchFamily="34" charset="0"/>
-                <a:ea typeface="Calibri" pitchFamily="34" charset="-122"/>
-                <a:cs typeface="Calibri" pitchFamily="34" charset="-120"/>
-              </a:rPr>
-              <a:t>relating to</a:t>
-            </a:r>
-            <a:endParaRPr lang="en-US" sz="850" dirty="0"/>
-          </a:p>
-        </p:txBody>
-      </p:sp>
-      <p:sp>
-        <p:nvSpPr>
-          <p:cNvPr id="25" name="Shape 23"/>
-          <p:cNvSpPr/>
-          <p:nvPr/>
-        </p:nvSpPr>
-        <p:spPr>
-          <a:xfrm>
-            <a:off x="365760" y="3273552"/>
-            <a:ext cx="1371600" cy="658368"/>
+              <a:t>Syllables</a:t>
+            </a:r>
+            <a:endParaRPr lang="en-US" sz="1100" dirty="0"/>
+          </a:p>
+        </p:txBody>
+      </p:sp>
+      <p:sp>
+        <p:nvSpPr>
+          <p:cNvPr id="24" name="Shape 22"/>
+          <p:cNvSpPr/>
+          <p:nvPr/>
+        </p:nvSpPr>
+        <p:spPr>
+          <a:xfrm>
+            <a:off x="1874520" y="3273552"/>
+            <a:ext cx="6903720" cy="658368"/>
           </a:xfrm>
           <a:prstGeom prst="rect">
             <a:avLst>
@@ -10538,11 +10268,38 @@
             </a:avLst>
           </a:prstGeom>
           <a:solidFill>
-            <a:srgbClr val="E2E8F0"/>
-          </a:solidFill>
-          <a:ln w="12700">
-            <a:solidFill>
-              <a:srgbClr val="E2E8F0"/>
+            <a:srgbClr val="CCFBF1"/>
+          </a:solidFill>
+          <a:ln w="12700">
+            <a:solidFill>
+              <a:srgbClr val="0D9488"/>
+            </a:solidFill>
+            <a:prstDash val="solid"/>
+          </a:ln>
+        </p:spPr>
+      </p:sp>
+      <p:sp>
+        <p:nvSpPr>
+          <p:cNvPr id="25" name="Shape 23"/>
+          <p:cNvSpPr/>
+          <p:nvPr/>
+        </p:nvSpPr>
+        <p:spPr>
+          <a:xfrm>
+            <a:off x="2313432" y="3364992"/>
+            <a:ext cx="1645920" cy="475488"/>
+          </a:xfrm>
+          <a:prstGeom prst="rect">
+            <a:avLst>
+              <a:gd name="adj" fmla="val 9615"/>
+            </a:avLst>
+          </a:prstGeom>
+          <a:solidFill>
+            <a:srgbClr val="FFFFFF"/>
+          </a:solidFill>
+          <a:ln w="12700">
+            <a:solidFill>
+              <a:srgbClr val="0D9488"/>
             </a:solidFill>
             <a:prstDash val="solid"/>
           </a:ln>
@@ -10556,63 +10313,75 @@
         </p:nvSpPr>
         <p:spPr>
           <a:xfrm>
-            <a:off x="365760" y="3273552"/>
-            <a:ext cx="1371600" cy="658368"/>
-          </a:xfrm>
-          <a:prstGeom prst="rect">
-            <a:avLst/>
-          </a:prstGeom>
-          <a:noFill/>
-          <a:ln/>
-        </p:spPr>
-        <p:txBody>
-          <a:bodyPr wrap="square" lIns="0" tIns="0" rIns="0" bIns="0" rtlCol="0" anchor="ctr"/>
-          <a:lstStyle/>
-          <a:p>
-            <a:pPr algn="ctr" indent="0" marL="0">
-              <a:buNone/>
-            </a:pPr>
-            <a:r>
-              <a:rPr lang="en-US" sz="1100" b="1" dirty="0">
-                <a:solidFill>
-                  <a:srgbClr val="475569"/>
+            <a:off x="2313432" y="3364992"/>
+            <a:ext cx="1645920" cy="475488"/>
+          </a:xfrm>
+          <a:prstGeom prst="rect">
+            <a:avLst/>
+          </a:prstGeom>
+          <a:noFill/>
+          <a:ln/>
+        </p:spPr>
+        <p:txBody>
+          <a:bodyPr wrap="square" lIns="0" tIns="0" rIns="0" bIns="0" rtlCol="0" anchor="ctr"/>
+          <a:lstStyle/>
+          <a:p>
+            <a:pPr algn="ctr" indent="0" marL="0">
+              <a:buNone/>
+            </a:pPr>
+            <a:r>
+              <a:rPr lang="en-US" sz="1400" b="1" dirty="0">
+                <a:solidFill>
+                  <a:srgbClr val="0D9488"/>
                 </a:solidFill>
                 <a:latin typeface="Trebuchet MS" pitchFamily="34" charset="0"/>
                 <a:ea typeface="Trebuchet MS" pitchFamily="34" charset="-122"/>
                 <a:cs typeface="Trebuchet MS" pitchFamily="34" charset="-120"/>
               </a:rPr>
-              <a:t>Syllables</a:t>
-            </a:r>
-            <a:endParaRPr lang="en-US" sz="1100" dirty="0"/>
-          </a:p>
-        </p:txBody>
-      </p:sp>
-      <p:sp>
-        <p:nvSpPr>
-          <p:cNvPr id="27" name="Shape 25"/>
-          <p:cNvSpPr/>
-          <p:nvPr/>
-        </p:nvSpPr>
-        <p:spPr>
-          <a:xfrm>
-            <a:off x="1874520" y="3273552"/>
-            <a:ext cx="6903720" cy="658368"/>
-          </a:xfrm>
-          <a:prstGeom prst="rect">
-            <a:avLst>
-              <a:gd name="adj" fmla="val 8333"/>
-            </a:avLst>
-          </a:prstGeom>
-          <a:solidFill>
-            <a:srgbClr val="CCFBF1"/>
-          </a:solidFill>
-          <a:ln w="12700">
-            <a:solidFill>
-              <a:srgbClr val="0D9488"/>
-            </a:solidFill>
-            <a:prstDash val="solid"/>
-          </a:ln>
-        </p:spPr>
+              <a:t>sub</a:t>
+            </a:r>
+            <a:endParaRPr lang="en-US" sz="1400" dirty="0"/>
+          </a:p>
+        </p:txBody>
+      </p:sp>
+      <p:sp>
+        <p:nvSpPr>
+          <p:cNvPr id="27" name="Text 25"/>
+          <p:cNvSpPr/>
+          <p:nvPr/>
+        </p:nvSpPr>
+        <p:spPr>
+          <a:xfrm>
+            <a:off x="3959352" y="3364992"/>
+            <a:ext cx="411480" cy="475488"/>
+          </a:xfrm>
+          <a:prstGeom prst="rect">
+            <a:avLst/>
+          </a:prstGeom>
+          <a:noFill/>
+          <a:ln/>
+        </p:spPr>
+        <p:txBody>
+          <a:bodyPr wrap="square" lIns="0" tIns="0" rIns="0" bIns="0" rtlCol="0" anchor="ctr"/>
+          <a:lstStyle/>
+          <a:p>
+            <a:pPr algn="ctr" indent="0" marL="0">
+              <a:buNone/>
+            </a:pPr>
+            <a:r>
+              <a:rPr lang="en-US" sz="1600" b="1" dirty="0">
+                <a:solidFill>
+                  <a:srgbClr val="0D9488"/>
+                </a:solidFill>
+                <a:latin typeface="Trebuchet MS" pitchFamily="34" charset="0"/>
+                <a:ea typeface="Trebuchet MS" pitchFamily="34" charset="-122"/>
+                <a:cs typeface="Trebuchet MS" pitchFamily="34" charset="-120"/>
+              </a:rPr>
+              <a:t>·</a:t>
+            </a:r>
+            <a:endParaRPr lang="en-US" sz="1600" dirty="0"/>
+          </a:p>
+        </p:txBody>
       </p:sp>
       <p:sp>
         <p:nvSpPr>
@@ -10622,7 +10391,7 @@
         </p:nvSpPr>
         <p:spPr>
           <a:xfrm>
-            <a:off x="2313432" y="3364992"/>
+            <a:off x="4370832" y="3364992"/>
             <a:ext cx="1645920" cy="475488"/>
           </a:xfrm>
           <a:prstGeom prst="rect">
@@ -10649,7 +10418,7 @@
         </p:nvSpPr>
         <p:spPr>
           <a:xfrm>
-            <a:off x="2313432" y="3364992"/>
+            <a:off x="4370832" y="3364992"/>
             <a:ext cx="1645920" cy="475488"/>
           </a:xfrm>
           <a:prstGeom prst="rect">
@@ -10674,7 +10443,7 @@
                 <a:ea typeface="Trebuchet MS" pitchFamily="34" charset="-122"/>
                 <a:cs typeface="Trebuchet MS" pitchFamily="34" charset="-120"/>
               </a:rPr>
-              <a:t>sub</a:t>
+              <a:t>ma</a:t>
             </a:r>
             <a:endParaRPr lang="en-US" sz="1400" dirty="0"/>
           </a:p>
@@ -10688,7 +10457,7 @@
         </p:nvSpPr>
         <p:spPr>
           <a:xfrm>
-            <a:off x="3959352" y="3364992"/>
+            <a:off x="6016752" y="3364992"/>
             <a:ext cx="411480" cy="475488"/>
           </a:xfrm>
           <a:prstGeom prst="rect">
@@ -10727,7 +10496,7 @@
         </p:nvSpPr>
         <p:spPr>
           <a:xfrm>
-            <a:off x="4370832" y="3364992"/>
+            <a:off x="6428232" y="3364992"/>
             <a:ext cx="1645920" cy="475488"/>
           </a:xfrm>
           <a:prstGeom prst="rect">
@@ -10754,7 +10523,7 @@
         </p:nvSpPr>
         <p:spPr>
           <a:xfrm>
-            <a:off x="4370832" y="3364992"/>
+            <a:off x="6428232" y="3364992"/>
             <a:ext cx="1645920" cy="475488"/>
           </a:xfrm>
           <a:prstGeom prst="rect">
@@ -10779,7 +10548,7 @@
                 <a:ea typeface="Trebuchet MS" pitchFamily="34" charset="-122"/>
                 <a:cs typeface="Trebuchet MS" pitchFamily="34" charset="-120"/>
               </a:rPr>
-              <a:t>ma</a:t>
+              <a:t>rine</a:t>
             </a:r>
             <a:endParaRPr lang="en-US" sz="1400" dirty="0"/>
           </a:p>
@@ -10787,211 +10556,238 @@
       </p:sp>
       <p:sp>
         <p:nvSpPr>
-          <p:cNvPr id="33" name="Text 31"/>
-          <p:cNvSpPr/>
-          <p:nvPr/>
-        </p:nvSpPr>
-        <p:spPr>
-          <a:xfrm>
-            <a:off x="6016752" y="3364992"/>
-            <a:ext cx="411480" cy="475488"/>
-          </a:xfrm>
-          <a:prstGeom prst="rect">
-            <a:avLst/>
-          </a:prstGeom>
-          <a:noFill/>
-          <a:ln/>
-        </p:spPr>
-        <p:txBody>
-          <a:bodyPr wrap="square" lIns="0" tIns="0" rIns="0" bIns="0" rtlCol="0" anchor="ctr"/>
-          <a:lstStyle/>
-          <a:p>
-            <a:pPr algn="ctr" indent="0" marL="0">
-              <a:buNone/>
-            </a:pPr>
-            <a:r>
-              <a:rPr lang="en-US" sz="1600" b="1" dirty="0">
-                <a:solidFill>
-                  <a:srgbClr val="0D9488"/>
+          <p:cNvPr id="33" name="Shape 31"/>
+          <p:cNvSpPr/>
+          <p:nvPr/>
+        </p:nvSpPr>
+        <p:spPr>
+          <a:xfrm>
+            <a:off x="365760" y="4096512"/>
+            <a:ext cx="1371600" cy="804672"/>
+          </a:xfrm>
+          <a:prstGeom prst="rect">
+            <a:avLst>
+              <a:gd name="adj" fmla="val 6818"/>
+            </a:avLst>
+          </a:prstGeom>
+          <a:solidFill>
+            <a:srgbClr val="E2E8F0"/>
+          </a:solidFill>
+          <a:ln w="12700">
+            <a:solidFill>
+              <a:srgbClr val="E2E8F0"/>
+            </a:solidFill>
+            <a:prstDash val="solid"/>
+          </a:ln>
+        </p:spPr>
+      </p:sp>
+      <p:sp>
+        <p:nvSpPr>
+          <p:cNvPr id="34" name="Text 32"/>
+          <p:cNvSpPr/>
+          <p:nvPr/>
+        </p:nvSpPr>
+        <p:spPr>
+          <a:xfrm>
+            <a:off x="365760" y="4096512"/>
+            <a:ext cx="1371600" cy="804672"/>
+          </a:xfrm>
+          <a:prstGeom prst="rect">
+            <a:avLst/>
+          </a:prstGeom>
+          <a:noFill/>
+          <a:ln/>
+        </p:spPr>
+        <p:txBody>
+          <a:bodyPr wrap="square" lIns="0" tIns="0" rIns="0" bIns="0" rtlCol="0" anchor="ctr"/>
+          <a:lstStyle/>
+          <a:p>
+            <a:pPr algn="ctr" indent="0" marL="0">
+              <a:buNone/>
+            </a:pPr>
+            <a:r>
+              <a:rPr lang="en-US" sz="1100" b="1" dirty="0">
+                <a:solidFill>
+                  <a:srgbClr val="475569"/>
                 </a:solidFill>
                 <a:latin typeface="Trebuchet MS" pitchFamily="34" charset="0"/>
                 <a:ea typeface="Trebuchet MS" pitchFamily="34" charset="-122"/>
                 <a:cs typeface="Trebuchet MS" pitchFamily="34" charset="-120"/>
               </a:rPr>
-              <a:t>·</a:t>
-            </a:r>
-            <a:endParaRPr lang="en-US" sz="1600" dirty="0"/>
-          </a:p>
-        </p:txBody>
-      </p:sp>
-      <p:sp>
-        <p:nvSpPr>
-          <p:cNvPr id="34" name="Shape 32"/>
-          <p:cNvSpPr/>
-          <p:nvPr/>
-        </p:nvSpPr>
-        <p:spPr>
-          <a:xfrm>
-            <a:off x="6428232" y="3364992"/>
-            <a:ext cx="1645920" cy="475488"/>
+              <a:t>Phonemes</a:t>
+            </a:r>
+            <a:endParaRPr lang="en-US" sz="1100" dirty="0"/>
+          </a:p>
+        </p:txBody>
+      </p:sp>
+      <p:sp>
+        <p:nvSpPr>
+          <p:cNvPr id="35" name="Shape 33"/>
+          <p:cNvSpPr/>
+          <p:nvPr/>
+        </p:nvSpPr>
+        <p:spPr>
+          <a:xfrm>
+            <a:off x="1874520" y="4096512"/>
+            <a:ext cx="6903720" cy="804672"/>
           </a:xfrm>
           <a:prstGeom prst="rect">
             <a:avLst>
-              <a:gd name="adj" fmla="val 9615"/>
+              <a:gd name="adj" fmla="val 6818"/>
             </a:avLst>
           </a:prstGeom>
           <a:solidFill>
+            <a:srgbClr val="FCE7F3"/>
+          </a:solidFill>
+          <a:ln w="12700">
+            <a:solidFill>
+              <a:srgbClr val="DB2777"/>
+            </a:solidFill>
+            <a:prstDash val="solid"/>
+          </a:ln>
+        </p:spPr>
+      </p:sp>
+      <p:sp>
+        <p:nvSpPr>
+          <p:cNvPr id="36" name="Shape 34"/>
+          <p:cNvSpPr/>
+          <p:nvPr/>
+        </p:nvSpPr>
+        <p:spPr>
+          <a:xfrm>
+            <a:off x="2023872" y="4169664"/>
+            <a:ext cx="685800" cy="384048"/>
+          </a:xfrm>
+          <a:prstGeom prst="rect">
+            <a:avLst>
+              <a:gd name="adj" fmla="val 9524"/>
+            </a:avLst>
+          </a:prstGeom>
+          <a:solidFill>
             <a:srgbClr val="FFFFFF"/>
           </a:solidFill>
           <a:ln w="12700">
             <a:solidFill>
-              <a:srgbClr val="0D9488"/>
-            </a:solidFill>
-            <a:prstDash val="solid"/>
-          </a:ln>
-        </p:spPr>
-      </p:sp>
-      <p:sp>
-        <p:nvSpPr>
-          <p:cNvPr id="35" name="Text 33"/>
-          <p:cNvSpPr/>
-          <p:nvPr/>
-        </p:nvSpPr>
-        <p:spPr>
-          <a:xfrm>
-            <a:off x="6428232" y="3364992"/>
-            <a:ext cx="1645920" cy="475488"/>
-          </a:xfrm>
-          <a:prstGeom prst="rect">
-            <a:avLst/>
-          </a:prstGeom>
-          <a:noFill/>
-          <a:ln/>
-        </p:spPr>
-        <p:txBody>
-          <a:bodyPr wrap="square" lIns="0" tIns="0" rIns="0" bIns="0" rtlCol="0" anchor="ctr"/>
-          <a:lstStyle/>
-          <a:p>
-            <a:pPr algn="ctr" indent="0" marL="0">
-              <a:buNone/>
-            </a:pPr>
-            <a:r>
-              <a:rPr lang="en-US" sz="1400" b="1" dirty="0">
-                <a:solidFill>
-                  <a:srgbClr val="0D9488"/>
+              <a:srgbClr val="DB2777"/>
+            </a:solidFill>
+            <a:prstDash val="solid"/>
+          </a:ln>
+        </p:spPr>
+      </p:sp>
+      <p:sp>
+        <p:nvSpPr>
+          <p:cNvPr id="37" name="Text 35"/>
+          <p:cNvSpPr/>
+          <p:nvPr/>
+        </p:nvSpPr>
+        <p:spPr>
+          <a:xfrm>
+            <a:off x="2023872" y="4169664"/>
+            <a:ext cx="685800" cy="384048"/>
+          </a:xfrm>
+          <a:prstGeom prst="rect">
+            <a:avLst/>
+          </a:prstGeom>
+          <a:noFill/>
+          <a:ln/>
+        </p:spPr>
+        <p:txBody>
+          <a:bodyPr wrap="square" lIns="0" tIns="0" rIns="0" bIns="0" rtlCol="0" anchor="ctr"/>
+          <a:lstStyle/>
+          <a:p>
+            <a:pPr algn="ctr" indent="0" marL="0">
+              <a:buNone/>
+            </a:pPr>
+            <a:r>
+              <a:rPr lang="en-US" sz="900" b="1" dirty="0">
+                <a:solidFill>
+                  <a:srgbClr val="9D174D"/>
                 </a:solidFill>
                 <a:latin typeface="Trebuchet MS" pitchFamily="34" charset="0"/>
                 <a:ea typeface="Trebuchet MS" pitchFamily="34" charset="-122"/>
                 <a:cs typeface="Trebuchet MS" pitchFamily="34" charset="-120"/>
               </a:rPr>
-              <a:t>rine</a:t>
-            </a:r>
-            <a:endParaRPr lang="en-US" sz="1400" dirty="0"/>
-          </a:p>
-        </p:txBody>
-      </p:sp>
-      <p:sp>
-        <p:nvSpPr>
-          <p:cNvPr id="36" name="Shape 34"/>
-          <p:cNvSpPr/>
-          <p:nvPr/>
-        </p:nvSpPr>
-        <p:spPr>
-          <a:xfrm>
-            <a:off x="365760" y="4096512"/>
-            <a:ext cx="1371600" cy="804672"/>
+              <a:t>s</a:t>
+            </a:r>
+            <a:endParaRPr lang="en-US" sz="900" dirty="0"/>
+          </a:p>
+        </p:txBody>
+      </p:sp>
+      <p:sp>
+        <p:nvSpPr>
+          <p:cNvPr id="38" name="Shape 36"/>
+          <p:cNvSpPr/>
+          <p:nvPr/>
+        </p:nvSpPr>
+        <p:spPr>
+          <a:xfrm>
+            <a:off x="2831592" y="4169664"/>
+            <a:ext cx="685800" cy="384048"/>
           </a:xfrm>
           <a:prstGeom prst="rect">
             <a:avLst>
-              <a:gd name="adj" fmla="val 6818"/>
+              <a:gd name="adj" fmla="val 9524"/>
             </a:avLst>
           </a:prstGeom>
           <a:solidFill>
-            <a:srgbClr val="E2E8F0"/>
-          </a:solidFill>
-          <a:ln w="12700">
-            <a:solidFill>
-              <a:srgbClr val="E2E8F0"/>
-            </a:solidFill>
-            <a:prstDash val="solid"/>
-          </a:ln>
-        </p:spPr>
-      </p:sp>
-      <p:sp>
-        <p:nvSpPr>
-          <p:cNvPr id="37" name="Text 35"/>
-          <p:cNvSpPr/>
-          <p:nvPr/>
-        </p:nvSpPr>
-        <p:spPr>
-          <a:xfrm>
-            <a:off x="365760" y="4096512"/>
-            <a:ext cx="1371600" cy="804672"/>
-          </a:xfrm>
-          <a:prstGeom prst="rect">
-            <a:avLst/>
-          </a:prstGeom>
-          <a:noFill/>
-          <a:ln/>
-        </p:spPr>
-        <p:txBody>
-          <a:bodyPr wrap="square" lIns="0" tIns="0" rIns="0" bIns="0" rtlCol="0" anchor="ctr"/>
-          <a:lstStyle/>
-          <a:p>
-            <a:pPr algn="ctr" indent="0" marL="0">
-              <a:buNone/>
-            </a:pPr>
-            <a:r>
-              <a:rPr lang="en-US" sz="1100" b="1" dirty="0">
-                <a:solidFill>
-                  <a:srgbClr val="475569"/>
+            <a:srgbClr val="FFFFFF"/>
+          </a:solidFill>
+          <a:ln w="12700">
+            <a:solidFill>
+              <a:srgbClr val="DB2777"/>
+            </a:solidFill>
+            <a:prstDash val="solid"/>
+          </a:ln>
+        </p:spPr>
+      </p:sp>
+      <p:sp>
+        <p:nvSpPr>
+          <p:cNvPr id="39" name="Text 37"/>
+          <p:cNvSpPr/>
+          <p:nvPr/>
+        </p:nvSpPr>
+        <p:spPr>
+          <a:xfrm>
+            <a:off x="2831592" y="4169664"/>
+            <a:ext cx="685800" cy="384048"/>
+          </a:xfrm>
+          <a:prstGeom prst="rect">
+            <a:avLst/>
+          </a:prstGeom>
+          <a:noFill/>
+          <a:ln/>
+        </p:spPr>
+        <p:txBody>
+          <a:bodyPr wrap="square" lIns="0" tIns="0" rIns="0" bIns="0" rtlCol="0" anchor="ctr"/>
+          <a:lstStyle/>
+          <a:p>
+            <a:pPr algn="ctr" indent="0" marL="0">
+              <a:buNone/>
+            </a:pPr>
+            <a:r>
+              <a:rPr lang="en-US" sz="900" b="1" dirty="0">
+                <a:solidFill>
+                  <a:srgbClr val="9D174D"/>
                 </a:solidFill>
                 <a:latin typeface="Trebuchet MS" pitchFamily="34" charset="0"/>
                 <a:ea typeface="Trebuchet MS" pitchFamily="34" charset="-122"/>
                 <a:cs typeface="Trebuchet MS" pitchFamily="34" charset="-120"/>
               </a:rPr>
-              <a:t>Phonemes</a:t>
-            </a:r>
-            <a:endParaRPr lang="en-US" sz="1100" dirty="0"/>
-          </a:p>
-        </p:txBody>
-      </p:sp>
-      <p:sp>
-        <p:nvSpPr>
-          <p:cNvPr id="38" name="Shape 36"/>
-          <p:cNvSpPr/>
-          <p:nvPr/>
-        </p:nvSpPr>
-        <p:spPr>
-          <a:xfrm>
-            <a:off x="1874520" y="4096512"/>
-            <a:ext cx="6903720" cy="804672"/>
-          </a:xfrm>
-          <a:prstGeom prst="rect">
-            <a:avLst>
-              <a:gd name="adj" fmla="val 6818"/>
-            </a:avLst>
-          </a:prstGeom>
-          <a:solidFill>
-            <a:srgbClr val="FCE7F3"/>
-          </a:solidFill>
-          <a:ln w="12700">
-            <a:solidFill>
-              <a:srgbClr val="DB2777"/>
-            </a:solidFill>
-            <a:prstDash val="solid"/>
-          </a:ln>
-        </p:spPr>
-      </p:sp>
-      <p:sp>
-        <p:nvSpPr>
-          <p:cNvPr id="39" name="Shape 37"/>
-          <p:cNvSpPr/>
-          <p:nvPr/>
-        </p:nvSpPr>
-        <p:spPr>
-          <a:xfrm>
-            <a:off x="2124837" y="4169664"/>
+              <a:t>u</a:t>
+            </a:r>
+            <a:endParaRPr lang="en-US" sz="900" dirty="0"/>
+          </a:p>
+        </p:txBody>
+      </p:sp>
+      <p:sp>
+        <p:nvSpPr>
+          <p:cNvPr id="40" name="Shape 38"/>
+          <p:cNvSpPr/>
+          <p:nvPr/>
+        </p:nvSpPr>
+        <p:spPr>
+          <a:xfrm>
+            <a:off x="3639312" y="4169664"/>
             <a:ext cx="685800" cy="384048"/>
           </a:xfrm>
           <a:prstGeom prst="rect">
@@ -11012,13 +10808,13 @@
       </p:sp>
       <p:sp>
         <p:nvSpPr>
-          <p:cNvPr id="40" name="Text 38"/>
-          <p:cNvSpPr/>
-          <p:nvPr/>
-        </p:nvSpPr>
-        <p:spPr>
-          <a:xfrm>
-            <a:off x="2124837" y="4169664"/>
+          <p:cNvPr id="41" name="Text 39"/>
+          <p:cNvSpPr/>
+          <p:nvPr/>
+        </p:nvSpPr>
+        <p:spPr>
+          <a:xfrm>
+            <a:off x="3639312" y="4169664"/>
             <a:ext cx="685800" cy="384048"/>
           </a:xfrm>
           <a:prstGeom prst="rect">
@@ -11043,7 +10839,7 @@
                 <a:ea typeface="Trebuchet MS" pitchFamily="34" charset="-122"/>
                 <a:cs typeface="Trebuchet MS" pitchFamily="34" charset="-120"/>
               </a:rPr>
-              <a:t>s</a:t>
+              <a:t>b</a:t>
             </a:r>
             <a:endParaRPr lang="en-US" sz="900" dirty="0"/>
           </a:p>
@@ -11051,13 +10847,13 @@
       </p:sp>
       <p:sp>
         <p:nvSpPr>
-          <p:cNvPr id="41" name="Shape 39"/>
-          <p:cNvSpPr/>
-          <p:nvPr/>
-        </p:nvSpPr>
-        <p:spPr>
-          <a:xfrm>
-            <a:off x="3033522" y="4169664"/>
+          <p:cNvPr id="42" name="Shape 40"/>
+          <p:cNvSpPr/>
+          <p:nvPr/>
+        </p:nvSpPr>
+        <p:spPr>
+          <a:xfrm>
+            <a:off x="4447032" y="4169664"/>
             <a:ext cx="685800" cy="384048"/>
           </a:xfrm>
           <a:prstGeom prst="rect">
@@ -11078,13 +10874,13 @@
       </p:sp>
       <p:sp>
         <p:nvSpPr>
-          <p:cNvPr id="42" name="Text 40"/>
-          <p:cNvSpPr/>
-          <p:nvPr/>
-        </p:nvSpPr>
-        <p:spPr>
-          <a:xfrm>
-            <a:off x="3033522" y="4169664"/>
+          <p:cNvPr id="43" name="Text 41"/>
+          <p:cNvSpPr/>
+          <p:nvPr/>
+        </p:nvSpPr>
+        <p:spPr>
+          <a:xfrm>
+            <a:off x="4447032" y="4169664"/>
             <a:ext cx="685800" cy="384048"/>
           </a:xfrm>
           <a:prstGeom prst="rect">
@@ -11109,7 +10905,7 @@
                 <a:ea typeface="Trebuchet MS" pitchFamily="34" charset="-122"/>
                 <a:cs typeface="Trebuchet MS" pitchFamily="34" charset="-120"/>
               </a:rPr>
-              <a:t>u</a:t>
+              <a:t>m</a:t>
             </a:r>
             <a:endParaRPr lang="en-US" sz="900" dirty="0"/>
           </a:p>
@@ -11117,13 +10913,13 @@
       </p:sp>
       <p:sp>
         <p:nvSpPr>
-          <p:cNvPr id="43" name="Shape 41"/>
-          <p:cNvSpPr/>
-          <p:nvPr/>
-        </p:nvSpPr>
-        <p:spPr>
-          <a:xfrm>
-            <a:off x="3942207" y="4169664"/>
+          <p:cNvPr id="44" name="Shape 42"/>
+          <p:cNvSpPr/>
+          <p:nvPr/>
+        </p:nvSpPr>
+        <p:spPr>
+          <a:xfrm>
+            <a:off x="5254752" y="4169664"/>
             <a:ext cx="685800" cy="384048"/>
           </a:xfrm>
           <a:prstGeom prst="rect">
@@ -11144,13 +10940,13 @@
       </p:sp>
       <p:sp>
         <p:nvSpPr>
-          <p:cNvPr id="44" name="Text 42"/>
-          <p:cNvSpPr/>
-          <p:nvPr/>
-        </p:nvSpPr>
-        <p:spPr>
-          <a:xfrm>
-            <a:off x="3942207" y="4169664"/>
+          <p:cNvPr id="45" name="Text 43"/>
+          <p:cNvSpPr/>
+          <p:nvPr/>
+        </p:nvSpPr>
+        <p:spPr>
+          <a:xfrm>
+            <a:off x="5254752" y="4169664"/>
             <a:ext cx="685800" cy="384048"/>
           </a:xfrm>
           <a:prstGeom prst="rect">
@@ -11175,7 +10971,7 @@
                 <a:ea typeface="Trebuchet MS" pitchFamily="34" charset="-122"/>
                 <a:cs typeface="Trebuchet MS" pitchFamily="34" charset="-120"/>
               </a:rPr>
-              <a:t>b</a:t>
+              <a:t>a</a:t>
             </a:r>
             <a:endParaRPr lang="en-US" sz="900" dirty="0"/>
           </a:p>
@@ -11183,13 +10979,13 @@
       </p:sp>
       <p:sp>
         <p:nvSpPr>
-          <p:cNvPr id="45" name="Shape 43"/>
-          <p:cNvSpPr/>
-          <p:nvPr/>
-        </p:nvSpPr>
-        <p:spPr>
-          <a:xfrm>
-            <a:off x="4850892" y="4169664"/>
+          <p:cNvPr id="46" name="Shape 44"/>
+          <p:cNvSpPr/>
+          <p:nvPr/>
+        </p:nvSpPr>
+        <p:spPr>
+          <a:xfrm>
+            <a:off x="6062472" y="4169664"/>
             <a:ext cx="685800" cy="384048"/>
           </a:xfrm>
           <a:prstGeom prst="rect">
@@ -11210,13 +11006,13 @@
       </p:sp>
       <p:sp>
         <p:nvSpPr>
-          <p:cNvPr id="46" name="Text 44"/>
-          <p:cNvSpPr/>
-          <p:nvPr/>
-        </p:nvSpPr>
-        <p:spPr>
-          <a:xfrm>
-            <a:off x="4850892" y="4169664"/>
+          <p:cNvPr id="47" name="Text 45"/>
+          <p:cNvSpPr/>
+          <p:nvPr/>
+        </p:nvSpPr>
+        <p:spPr>
+          <a:xfrm>
+            <a:off x="6062472" y="4169664"/>
             <a:ext cx="685800" cy="384048"/>
           </a:xfrm>
           <a:prstGeom prst="rect">
@@ -11241,7 +11037,7 @@
                 <a:ea typeface="Trebuchet MS" pitchFamily="34" charset="-122"/>
                 <a:cs typeface="Trebuchet MS" pitchFamily="34" charset="-120"/>
               </a:rPr>
-              <a:t>m</a:t>
+              <a:t>r</a:t>
             </a:r>
             <a:endParaRPr lang="en-US" sz="900" dirty="0"/>
           </a:p>
@@ -11249,13 +11045,13 @@
       </p:sp>
       <p:sp>
         <p:nvSpPr>
-          <p:cNvPr id="47" name="Shape 45"/>
-          <p:cNvSpPr/>
-          <p:nvPr/>
-        </p:nvSpPr>
-        <p:spPr>
-          <a:xfrm>
-            <a:off x="5759577" y="4169664"/>
+          <p:cNvPr id="48" name="Shape 46"/>
+          <p:cNvSpPr/>
+          <p:nvPr/>
+        </p:nvSpPr>
+        <p:spPr>
+          <a:xfrm>
+            <a:off x="6870192" y="4169664"/>
             <a:ext cx="685800" cy="384048"/>
           </a:xfrm>
           <a:prstGeom prst="rect">
@@ -11276,13 +11072,13 @@
       </p:sp>
       <p:sp>
         <p:nvSpPr>
-          <p:cNvPr id="48" name="Text 46"/>
-          <p:cNvSpPr/>
-          <p:nvPr/>
-        </p:nvSpPr>
-        <p:spPr>
-          <a:xfrm>
-            <a:off x="5759577" y="4169664"/>
+          <p:cNvPr id="49" name="Text 47"/>
+          <p:cNvSpPr/>
+          <p:nvPr/>
+        </p:nvSpPr>
+        <p:spPr>
+          <a:xfrm>
+            <a:off x="6870192" y="4169664"/>
             <a:ext cx="685800" cy="384048"/>
           </a:xfrm>
           <a:prstGeom prst="rect">
@@ -11307,7 +11103,7 @@
                 <a:ea typeface="Trebuchet MS" pitchFamily="34" charset="-122"/>
                 <a:cs typeface="Trebuchet MS" pitchFamily="34" charset="-120"/>
               </a:rPr>
-              <a:t>a</a:t>
+              <a:t>i</a:t>
             </a:r>
             <a:endParaRPr lang="en-US" sz="900" dirty="0"/>
           </a:p>
@@ -11315,13 +11111,13 @@
       </p:sp>
       <p:sp>
         <p:nvSpPr>
-          <p:cNvPr id="49" name="Shape 47"/>
-          <p:cNvSpPr/>
-          <p:nvPr/>
-        </p:nvSpPr>
-        <p:spPr>
-          <a:xfrm>
-            <a:off x="6668262" y="4169664"/>
+          <p:cNvPr id="50" name="Shape 48"/>
+          <p:cNvSpPr/>
+          <p:nvPr/>
+        </p:nvSpPr>
+        <p:spPr>
+          <a:xfrm>
+            <a:off x="7677912" y="4169664"/>
             <a:ext cx="685800" cy="384048"/>
           </a:xfrm>
           <a:prstGeom prst="rect">
@@ -11342,13 +11138,13 @@
       </p:sp>
       <p:sp>
         <p:nvSpPr>
-          <p:cNvPr id="50" name="Text 48"/>
-          <p:cNvSpPr/>
-          <p:nvPr/>
-        </p:nvSpPr>
-        <p:spPr>
-          <a:xfrm>
-            <a:off x="6668262" y="4169664"/>
+          <p:cNvPr id="51" name="Text 49"/>
+          <p:cNvSpPr/>
+          <p:nvPr/>
+        </p:nvSpPr>
+        <p:spPr>
+          <a:xfrm>
+            <a:off x="7677912" y="4169664"/>
             <a:ext cx="685800" cy="384048"/>
           </a:xfrm>
           <a:prstGeom prst="rect">
@@ -11373,7 +11169,7 @@
                 <a:ea typeface="Trebuchet MS" pitchFamily="34" charset="-122"/>
                 <a:cs typeface="Trebuchet MS" pitchFamily="34" charset="-120"/>
               </a:rPr>
-              <a:t>r</a:t>
+              <a:t>ne</a:t>
             </a:r>
             <a:endParaRPr lang="en-US" sz="900" dirty="0"/>
           </a:p>
@@ -11381,79 +11177,13 @@
       </p:sp>
       <p:sp>
         <p:nvSpPr>
-          <p:cNvPr id="51" name="Shape 49"/>
-          <p:cNvSpPr/>
-          <p:nvPr/>
-        </p:nvSpPr>
-        <p:spPr>
-          <a:xfrm>
-            <a:off x="7576947" y="4169664"/>
-            <a:ext cx="685800" cy="384048"/>
-          </a:xfrm>
-          <a:prstGeom prst="rect">
-            <a:avLst>
-              <a:gd name="adj" fmla="val 9524"/>
-            </a:avLst>
-          </a:prstGeom>
-          <a:solidFill>
-            <a:srgbClr val="FFFFFF"/>
-          </a:solidFill>
-          <a:ln w="12700">
-            <a:solidFill>
-              <a:srgbClr val="DB2777"/>
-            </a:solidFill>
-            <a:prstDash val="solid"/>
-          </a:ln>
-        </p:spPr>
-      </p:sp>
-      <p:sp>
-        <p:nvSpPr>
           <p:cNvPr id="52" name="Text 50"/>
           <p:cNvSpPr/>
           <p:nvPr/>
         </p:nvSpPr>
         <p:spPr>
           <a:xfrm>
-            <a:off x="7576947" y="4169664"/>
-            <a:ext cx="685800" cy="384048"/>
-          </a:xfrm>
-          <a:prstGeom prst="rect">
-            <a:avLst/>
-          </a:prstGeom>
-          <a:noFill/>
-          <a:ln/>
-        </p:spPr>
-        <p:txBody>
-          <a:bodyPr wrap="square" lIns="0" tIns="0" rIns="0" bIns="0" rtlCol="0" anchor="ctr"/>
-          <a:lstStyle/>
-          <a:p>
-            <a:pPr algn="ctr" indent="0" marL="0">
-              <a:buNone/>
-            </a:pPr>
-            <a:r>
-              <a:rPr lang="en-US" sz="900" b="1" dirty="0">
-                <a:solidFill>
-                  <a:srgbClr val="9D174D"/>
-                </a:solidFill>
-                <a:latin typeface="Trebuchet MS" pitchFamily="34" charset="0"/>
-                <a:ea typeface="Trebuchet MS" pitchFamily="34" charset="-122"/>
-                <a:cs typeface="Trebuchet MS" pitchFamily="34" charset="-120"/>
-              </a:rPr>
-              <a:t>ine</a:t>
-            </a:r>
-            <a:endParaRPr lang="en-US" sz="900" dirty="0"/>
-          </a:p>
-        </p:txBody>
-      </p:sp>
-      <p:sp>
-        <p:nvSpPr>
-          <p:cNvPr id="53" name="Text 51"/>
-          <p:cNvSpPr/>
-          <p:nvPr/>
-        </p:nvSpPr>
-        <p:spPr>
-          <a:xfrm>
-            <a:off x="7576947" y="4572000"/>
+            <a:off x="7677912" y="4572000"/>
             <a:ext cx="685800" cy="219456"/>
           </a:xfrm>
           <a:prstGeom prst="rect">
@@ -11770,7 +11500,7 @@
                 <a:ea typeface="Calibri" pitchFamily="34" charset="-122"/>
                 <a:cs typeface="Calibri" pitchFamily="34" charset="-120"/>
               </a:rPr>
-              <a:t>Word Labs  •  wordlabs.app  •  Prefix: 'sub-' = under, below, beneath</a:t>
+              <a:t>Word Labs  •  wordlabs.app  •  Prefix: 'sub-' = under, below, less than</a:t>
             </a:r>
             <a:endParaRPr lang="en-US" sz="800" dirty="0"/>
           </a:p>
@@ -12597,7 +12327,7 @@
                 <a:ea typeface="Calibri" pitchFamily="34" charset="-122"/>
                 <a:cs typeface="Calibri" pitchFamily="34" charset="-120"/>
               </a:rPr>
-              <a:t>Word Labs  •  wordlabs.app  •  Prefix: 'sub-' = under, below, beneath</a:t>
+              <a:t>Word Labs  •  wordlabs.app  •  Prefix: 'sub-' = under, below, less than</a:t>
             </a:r>
             <a:endParaRPr lang="en-US" sz="800" dirty="0"/>
           </a:p>
@@ -12816,7 +12546,7 @@
         </p:nvSpPr>
         <p:spPr>
           <a:xfrm>
-            <a:off x="2938272" y="2258568"/>
+            <a:off x="2221992" y="2258568"/>
             <a:ext cx="1828800" cy="292608"/>
           </a:xfrm>
           <a:prstGeom prst="rect">
@@ -12850,7 +12580,7 @@
         </p:nvSpPr>
         <p:spPr>
           <a:xfrm>
-            <a:off x="2938272" y="2258568"/>
+            <a:off x="2221992" y="2258568"/>
             <a:ext cx="1828800" cy="292608"/>
           </a:xfrm>
           <a:prstGeom prst="rect">
@@ -12889,7 +12619,7 @@
         </p:nvSpPr>
         <p:spPr>
           <a:xfrm>
-            <a:off x="2938272" y="2569464"/>
+            <a:off x="2221992" y="2569464"/>
             <a:ext cx="1828800" cy="201168"/>
           </a:xfrm>
           <a:prstGeom prst="rect">
@@ -12928,7 +12658,7 @@
         </p:nvSpPr>
         <p:spPr>
           <a:xfrm>
-            <a:off x="5803392" y="2258568"/>
+            <a:off x="4370832" y="2258568"/>
             <a:ext cx="1828800" cy="292608"/>
           </a:xfrm>
           <a:prstGeom prst="rect">
@@ -12962,7 +12692,7 @@
         </p:nvSpPr>
         <p:spPr>
           <a:xfrm>
-            <a:off x="5803392" y="2258568"/>
+            <a:off x="4370832" y="2258568"/>
             <a:ext cx="1828800" cy="292608"/>
           </a:xfrm>
           <a:prstGeom prst="rect">
@@ -13001,7 +12731,7 @@
         </p:nvSpPr>
         <p:spPr>
           <a:xfrm>
-            <a:off x="5803392" y="2569464"/>
+            <a:off x="4370832" y="2569464"/>
             <a:ext cx="1828800" cy="201168"/>
           </a:xfrm>
           <a:prstGeom prst="rect">
@@ -13026,7 +12756,7 @@
                 <a:ea typeface="Calibri" pitchFamily="34" charset="-122"/>
                 <a:cs typeface="Calibri" pitchFamily="34" charset="-120"/>
               </a:rPr>
-              <a:t>to plunge or dip</a:t>
+              <a:t>to sink or plunge</a:t>
             </a:r>
             <a:endParaRPr lang="en-US" sz="850" dirty="0"/>
           </a:p>
@@ -13035,6 +12765,118 @@
       <p:sp>
         <p:nvSpPr>
           <p:cNvPr id="22" name="Shape 20"/>
+          <p:cNvSpPr/>
+          <p:nvPr/>
+        </p:nvSpPr>
+        <p:spPr>
+          <a:xfrm>
+            <a:off x="6519672" y="2258568"/>
+            <a:ext cx="1828800" cy="292608"/>
+          </a:xfrm>
+          <a:prstGeom prst="rect">
+            <a:avLst>
+              <a:gd name="adj" fmla="val 25000"/>
+            </a:avLst>
+          </a:prstGeom>
+          <a:solidFill>
+            <a:srgbClr val="FCE7F3"/>
+          </a:solidFill>
+          <a:ln w="19050">
+            <a:solidFill>
+              <a:srgbClr val="DB2777"/>
+            </a:solidFill>
+            <a:prstDash val="solid"/>
+          </a:ln>
+          <a:effectLst>
+            <a:outerShdw sx="100000" sy="100000" kx="0" ky="0" algn="bl" rotWithShape="0" blurRad="101600" dist="38100" dir="8100000">
+              <a:srgbClr val="000000">
+                <a:alpha val="12000"/>
+              </a:srgbClr>
+            </a:outerShdw>
+          </a:effectLst>
+        </p:spPr>
+      </p:sp>
+      <p:sp>
+        <p:nvSpPr>
+          <p:cNvPr id="23" name="Text 21"/>
+          <p:cNvSpPr/>
+          <p:nvPr/>
+        </p:nvSpPr>
+        <p:spPr>
+          <a:xfrm>
+            <a:off x="6519672" y="2258568"/>
+            <a:ext cx="1828800" cy="292608"/>
+          </a:xfrm>
+          <a:prstGeom prst="rect">
+            <a:avLst/>
+          </a:prstGeom>
+          <a:noFill/>
+          <a:ln/>
+        </p:spPr>
+        <p:txBody>
+          <a:bodyPr wrap="square" lIns="0" tIns="0" rIns="0" bIns="0" rtlCol="0" anchor="ctr"/>
+          <a:lstStyle/>
+          <a:p>
+            <a:pPr algn="ctr" indent="0" marL="0">
+              <a:buNone/>
+            </a:pPr>
+            <a:r>
+              <a:rPr lang="en-US" sz="1300" b="1" dirty="0">
+                <a:solidFill>
+                  <a:srgbClr val="9D174D"/>
+                </a:solidFill>
+                <a:latin typeface="Trebuchet MS" pitchFamily="34" charset="0"/>
+                <a:ea typeface="Trebuchet MS" pitchFamily="34" charset="-122"/>
+                <a:cs typeface="Trebuchet MS" pitchFamily="34" charset="-120"/>
+              </a:rPr>
+              <a:t>ge</a:t>
+            </a:r>
+            <a:endParaRPr lang="en-US" sz="1300" dirty="0"/>
+          </a:p>
+        </p:txBody>
+      </p:sp>
+      <p:sp>
+        <p:nvSpPr>
+          <p:cNvPr id="24" name="Text 22"/>
+          <p:cNvSpPr/>
+          <p:nvPr/>
+        </p:nvSpPr>
+        <p:spPr>
+          <a:xfrm>
+            <a:off x="6519672" y="2569464"/>
+            <a:ext cx="1828800" cy="201168"/>
+          </a:xfrm>
+          <a:prstGeom prst="rect">
+            <a:avLst/>
+          </a:prstGeom>
+          <a:noFill/>
+          <a:ln/>
+        </p:spPr>
+        <p:txBody>
+          <a:bodyPr wrap="square" lIns="0" tIns="0" rIns="0" bIns="0" rtlCol="0" anchor="t"/>
+          <a:lstStyle/>
+          <a:p>
+            <a:pPr algn="ctr" indent="0" marL="0">
+              <a:buNone/>
+            </a:pPr>
+            <a:r>
+              <a:rPr lang="en-US" sz="850" dirty="0">
+                <a:solidFill>
+                  <a:srgbClr val="475569"/>
+                </a:solidFill>
+                <a:latin typeface="Calibri" pitchFamily="34" charset="0"/>
+                <a:ea typeface="Calibri" pitchFamily="34" charset="-122"/>
+                <a:cs typeface="Calibri" pitchFamily="34" charset="-120"/>
+              </a:rPr>
+              <a:t>verb ending</a:t>
+            </a:r>
+            <a:endParaRPr lang="en-US" sz="850" dirty="0"/>
+          </a:p>
+        </p:txBody>
+      </p:sp>
+      <p:sp>
+        <p:nvSpPr>
+          <p:cNvPr id="25" name="Shape 23"/>
           <p:cNvSpPr/>
           <p:nvPr/>
         </p:nvSpPr>
@@ -13061,7 +12903,7 @@
       </p:sp>
       <p:sp>
         <p:nvSpPr>
-          <p:cNvPr id="23" name="Text 21"/>
+          <p:cNvPr id="26" name="Text 24"/>
           <p:cNvSpPr/>
           <p:nvPr/>
         </p:nvSpPr>
@@ -13100,7 +12942,7 @@
       </p:sp>
       <p:sp>
         <p:nvSpPr>
-          <p:cNvPr id="24" name="Shape 22"/>
+          <p:cNvPr id="27" name="Shape 25"/>
           <p:cNvSpPr/>
           <p:nvPr/>
         </p:nvSpPr>
@@ -13127,7 +12969,7 @@
       </p:sp>
       <p:sp>
         <p:nvSpPr>
-          <p:cNvPr id="25" name="Text 23"/>
+          <p:cNvPr id="28" name="Text 26"/>
           <p:cNvSpPr/>
           <p:nvPr/>
         </p:nvSpPr>
@@ -13166,7 +13008,7 @@
       </p:sp>
       <p:sp>
         <p:nvSpPr>
-          <p:cNvPr id="26" name="Shape 24"/>
+          <p:cNvPr id="29" name="Shape 27"/>
           <p:cNvSpPr/>
           <p:nvPr/>
         </p:nvSpPr>
@@ -13193,7 +13035,7 @@
       </p:sp>
       <p:sp>
         <p:nvSpPr>
-          <p:cNvPr id="27" name="Text 25"/>
+          <p:cNvPr id="30" name="Text 28"/>
           <p:cNvSpPr/>
           <p:nvPr/>
         </p:nvSpPr>
@@ -13232,7 +13074,7 @@
       </p:sp>
       <p:sp>
         <p:nvSpPr>
-          <p:cNvPr id="28" name="Shape 26"/>
+          <p:cNvPr id="31" name="Shape 29"/>
           <p:cNvSpPr/>
           <p:nvPr/>
         </p:nvSpPr>
@@ -13259,7 +13101,7 @@
       </p:sp>
       <p:sp>
         <p:nvSpPr>
-          <p:cNvPr id="29" name="Text 27"/>
+          <p:cNvPr id="32" name="Text 30"/>
           <p:cNvSpPr/>
           <p:nvPr/>
         </p:nvSpPr>
@@ -13582,7 +13424,7 @@
                 <a:ea typeface="Calibri" pitchFamily="34" charset="-122"/>
                 <a:cs typeface="Calibri" pitchFamily="34" charset="-120"/>
               </a:rPr>
-              <a:t>Word Labs  •  wordlabs.app  •  Prefix: 'sub-' = under, below, beneath</a:t>
+              <a:t>Word Labs  •  wordlabs.app  •  Prefix: 'sub-' = under, below, less than</a:t>
             </a:r>
             <a:endParaRPr lang="en-US" sz="800" dirty="0"/>
           </a:p>
@@ -13801,7 +13643,7 @@
         </p:nvSpPr>
         <p:spPr>
           <a:xfrm>
-            <a:off x="2938272" y="2258568"/>
+            <a:off x="2221992" y="2258568"/>
             <a:ext cx="1828800" cy="292608"/>
           </a:xfrm>
           <a:prstGeom prst="rect">
@@ -13835,7 +13677,7 @@
         </p:nvSpPr>
         <p:spPr>
           <a:xfrm>
-            <a:off x="2938272" y="2258568"/>
+            <a:off x="2221992" y="2258568"/>
             <a:ext cx="1828800" cy="292608"/>
           </a:xfrm>
           <a:prstGeom prst="rect">
@@ -13874,7 +13716,7 @@
         </p:nvSpPr>
         <p:spPr>
           <a:xfrm>
-            <a:off x="2938272" y="2569464"/>
+            <a:off x="2221992" y="2569464"/>
             <a:ext cx="1828800" cy="201168"/>
           </a:xfrm>
           <a:prstGeom prst="rect">
@@ -13913,7 +13755,7 @@
         </p:nvSpPr>
         <p:spPr>
           <a:xfrm>
-            <a:off x="5803392" y="2258568"/>
+            <a:off x="4370832" y="2258568"/>
             <a:ext cx="1828800" cy="292608"/>
           </a:xfrm>
           <a:prstGeom prst="rect">
@@ -13947,7 +13789,7 @@
         </p:nvSpPr>
         <p:spPr>
           <a:xfrm>
-            <a:off x="5803392" y="2258568"/>
+            <a:off x="4370832" y="2258568"/>
             <a:ext cx="1828800" cy="292608"/>
           </a:xfrm>
           <a:prstGeom prst="rect">
@@ -13986,7 +13828,7 @@
         </p:nvSpPr>
         <p:spPr>
           <a:xfrm>
-            <a:off x="5803392" y="2569464"/>
+            <a:off x="4370832" y="2569464"/>
             <a:ext cx="1828800" cy="201168"/>
           </a:xfrm>
           <a:prstGeom prst="rect">
@@ -14011,7 +13853,7 @@
                 <a:ea typeface="Calibri" pitchFamily="34" charset="-122"/>
                 <a:cs typeface="Calibri" pitchFamily="34" charset="-120"/>
               </a:rPr>
-              <a:t>to plunge or dip</a:t>
+              <a:t>to sink or plunge</a:t>
             </a:r>
             <a:endParaRPr lang="en-US" sz="850" dirty="0"/>
           </a:p>
@@ -14020,6 +13862,118 @@
       <p:sp>
         <p:nvSpPr>
           <p:cNvPr id="22" name="Shape 20"/>
+          <p:cNvSpPr/>
+          <p:nvPr/>
+        </p:nvSpPr>
+        <p:spPr>
+          <a:xfrm>
+            <a:off x="6519672" y="2258568"/>
+            <a:ext cx="1828800" cy="292608"/>
+          </a:xfrm>
+          <a:prstGeom prst="rect">
+            <a:avLst>
+              <a:gd name="adj" fmla="val 25000"/>
+            </a:avLst>
+          </a:prstGeom>
+          <a:solidFill>
+            <a:srgbClr val="FCE7F3"/>
+          </a:solidFill>
+          <a:ln w="19050">
+            <a:solidFill>
+              <a:srgbClr val="DB2777"/>
+            </a:solidFill>
+            <a:prstDash val="solid"/>
+          </a:ln>
+          <a:effectLst>
+            <a:outerShdw sx="100000" sy="100000" kx="0" ky="0" algn="bl" rotWithShape="0" blurRad="101600" dist="38100" dir="8100000">
+              <a:srgbClr val="000000">
+                <a:alpha val="12000"/>
+              </a:srgbClr>
+            </a:outerShdw>
+          </a:effectLst>
+        </p:spPr>
+      </p:sp>
+      <p:sp>
+        <p:nvSpPr>
+          <p:cNvPr id="23" name="Text 21"/>
+          <p:cNvSpPr/>
+          <p:nvPr/>
+        </p:nvSpPr>
+        <p:spPr>
+          <a:xfrm>
+            <a:off x="6519672" y="2258568"/>
+            <a:ext cx="1828800" cy="292608"/>
+          </a:xfrm>
+          <a:prstGeom prst="rect">
+            <a:avLst/>
+          </a:prstGeom>
+          <a:noFill/>
+          <a:ln/>
+        </p:spPr>
+        <p:txBody>
+          <a:bodyPr wrap="square" lIns="0" tIns="0" rIns="0" bIns="0" rtlCol="0" anchor="ctr"/>
+          <a:lstStyle/>
+          <a:p>
+            <a:pPr algn="ctr" indent="0" marL="0">
+              <a:buNone/>
+            </a:pPr>
+            <a:r>
+              <a:rPr lang="en-US" sz="1300" b="1" dirty="0">
+                <a:solidFill>
+                  <a:srgbClr val="9D174D"/>
+                </a:solidFill>
+                <a:latin typeface="Trebuchet MS" pitchFamily="34" charset="0"/>
+                <a:ea typeface="Trebuchet MS" pitchFamily="34" charset="-122"/>
+                <a:cs typeface="Trebuchet MS" pitchFamily="34" charset="-120"/>
+              </a:rPr>
+              <a:t>ge</a:t>
+            </a:r>
+            <a:endParaRPr lang="en-US" sz="1300" dirty="0"/>
+          </a:p>
+        </p:txBody>
+      </p:sp>
+      <p:sp>
+        <p:nvSpPr>
+          <p:cNvPr id="24" name="Text 22"/>
+          <p:cNvSpPr/>
+          <p:nvPr/>
+        </p:nvSpPr>
+        <p:spPr>
+          <a:xfrm>
+            <a:off x="6519672" y="2569464"/>
+            <a:ext cx="1828800" cy="201168"/>
+          </a:xfrm>
+          <a:prstGeom prst="rect">
+            <a:avLst/>
+          </a:prstGeom>
+          <a:noFill/>
+          <a:ln/>
+        </p:spPr>
+        <p:txBody>
+          <a:bodyPr wrap="square" lIns="0" tIns="0" rIns="0" bIns="0" rtlCol="0" anchor="t"/>
+          <a:lstStyle/>
+          <a:p>
+            <a:pPr algn="ctr" indent="0" marL="0">
+              <a:buNone/>
+            </a:pPr>
+            <a:r>
+              <a:rPr lang="en-US" sz="850" dirty="0">
+                <a:solidFill>
+                  <a:srgbClr val="475569"/>
+                </a:solidFill>
+                <a:latin typeface="Calibri" pitchFamily="34" charset="0"/>
+                <a:ea typeface="Calibri" pitchFamily="34" charset="-122"/>
+                <a:cs typeface="Calibri" pitchFamily="34" charset="-120"/>
+              </a:rPr>
+              <a:t>verb ending</a:t>
+            </a:r>
+            <a:endParaRPr lang="en-US" sz="850" dirty="0"/>
+          </a:p>
+        </p:txBody>
+      </p:sp>
+      <p:sp>
+        <p:nvSpPr>
+          <p:cNvPr id="25" name="Shape 23"/>
           <p:cNvSpPr/>
           <p:nvPr/>
         </p:nvSpPr>
@@ -14046,7 +14000,7 @@
       </p:sp>
       <p:sp>
         <p:nvSpPr>
-          <p:cNvPr id="23" name="Text 21"/>
+          <p:cNvPr id="26" name="Text 24"/>
           <p:cNvSpPr/>
           <p:nvPr/>
         </p:nvSpPr>
@@ -14085,7 +14039,7 @@
       </p:sp>
       <p:sp>
         <p:nvSpPr>
-          <p:cNvPr id="24" name="Shape 22"/>
+          <p:cNvPr id="27" name="Shape 25"/>
           <p:cNvSpPr/>
           <p:nvPr/>
         </p:nvSpPr>
@@ -14112,7 +14066,7 @@
       </p:sp>
       <p:sp>
         <p:nvSpPr>
-          <p:cNvPr id="25" name="Shape 23"/>
+          <p:cNvPr id="28" name="Shape 26"/>
           <p:cNvSpPr/>
           <p:nvPr/>
         </p:nvSpPr>
@@ -14139,7 +14093,7 @@
       </p:sp>
       <p:sp>
         <p:nvSpPr>
-          <p:cNvPr id="26" name="Text 24"/>
+          <p:cNvPr id="29" name="Text 27"/>
           <p:cNvSpPr/>
           <p:nvPr/>
         </p:nvSpPr>
@@ -14178,7 +14132,7 @@
       </p:sp>
       <p:sp>
         <p:nvSpPr>
-          <p:cNvPr id="27" name="Text 25"/>
+          <p:cNvPr id="30" name="Text 28"/>
           <p:cNvSpPr/>
           <p:nvPr/>
         </p:nvSpPr>
@@ -14217,7 +14171,7 @@
       </p:sp>
       <p:sp>
         <p:nvSpPr>
-          <p:cNvPr id="28" name="Shape 26"/>
+          <p:cNvPr id="31" name="Shape 29"/>
           <p:cNvSpPr/>
           <p:nvPr/>
         </p:nvSpPr>
@@ -14244,7 +14198,7 @@
       </p:sp>
       <p:sp>
         <p:nvSpPr>
-          <p:cNvPr id="29" name="Text 27"/>
+          <p:cNvPr id="32" name="Text 30"/>
           <p:cNvSpPr/>
           <p:nvPr/>
         </p:nvSpPr>
@@ -14283,7 +14237,7 @@
       </p:sp>
       <p:sp>
         <p:nvSpPr>
-          <p:cNvPr id="30" name="Shape 28"/>
+          <p:cNvPr id="33" name="Shape 31"/>
           <p:cNvSpPr/>
           <p:nvPr/>
         </p:nvSpPr>
@@ -14310,7 +14264,7 @@
       </p:sp>
       <p:sp>
         <p:nvSpPr>
-          <p:cNvPr id="31" name="Text 29"/>
+          <p:cNvPr id="34" name="Text 32"/>
           <p:cNvSpPr/>
           <p:nvPr/>
         </p:nvSpPr>
@@ -14349,7 +14303,7 @@
       </p:sp>
       <p:sp>
         <p:nvSpPr>
-          <p:cNvPr id="32" name="Shape 30"/>
+          <p:cNvPr id="35" name="Shape 33"/>
           <p:cNvSpPr/>
           <p:nvPr/>
         </p:nvSpPr>
@@ -14376,7 +14330,7 @@
       </p:sp>
       <p:sp>
         <p:nvSpPr>
-          <p:cNvPr id="33" name="Text 31"/>
+          <p:cNvPr id="36" name="Text 34"/>
           <p:cNvSpPr/>
           <p:nvPr/>
         </p:nvSpPr>
@@ -14608,7 +14562,7 @@
                 <a:ea typeface="Calibri" pitchFamily="34" charset="-122"/>
                 <a:cs typeface="Calibri" pitchFamily="34" charset="-120"/>
               </a:rPr>
-              <a:t>Prefix 'sub-' — under, below, beneath</a:t>
+              <a:t>Prefix 'sub-' — under, below, less than</a:t>
             </a:r>
             <a:endParaRPr lang="en-US" sz="1600" dirty="0"/>
           </a:p>
@@ -14964,7 +14918,7 @@
                 <a:ea typeface="Calibri" pitchFamily="34" charset="-122"/>
                 <a:cs typeface="Calibri" pitchFamily="34" charset="-120"/>
               </a:rPr>
-              <a:t>Word Labs  •  wordlabs.app  •  Prefix: 'sub-' = under, below, beneath</a:t>
+              <a:t>Word Labs  •  wordlabs.app  •  Prefix: 'sub-' = under, below, less than</a:t>
             </a:r>
             <a:endParaRPr lang="en-US" sz="800" dirty="0"/>
           </a:p>
@@ -15183,7 +15137,7 @@
         </p:nvSpPr>
         <p:spPr>
           <a:xfrm>
-            <a:off x="2938272" y="2258568"/>
+            <a:off x="2221992" y="2258568"/>
             <a:ext cx="1828800" cy="292608"/>
           </a:xfrm>
           <a:prstGeom prst="rect">
@@ -15217,7 +15171,7 @@
         </p:nvSpPr>
         <p:spPr>
           <a:xfrm>
-            <a:off x="2938272" y="2258568"/>
+            <a:off x="2221992" y="2258568"/>
             <a:ext cx="1828800" cy="292608"/>
           </a:xfrm>
           <a:prstGeom prst="rect">
@@ -15256,7 +15210,7 @@
         </p:nvSpPr>
         <p:spPr>
           <a:xfrm>
-            <a:off x="2938272" y="2569464"/>
+            <a:off x="2221992" y="2569464"/>
             <a:ext cx="1828800" cy="201168"/>
           </a:xfrm>
           <a:prstGeom prst="rect">
@@ -15295,7 +15249,7 @@
         </p:nvSpPr>
         <p:spPr>
           <a:xfrm>
-            <a:off x="5803392" y="2258568"/>
+            <a:off x="4370832" y="2258568"/>
             <a:ext cx="1828800" cy="292608"/>
           </a:xfrm>
           <a:prstGeom prst="rect">
@@ -15329,7 +15283,7 @@
         </p:nvSpPr>
         <p:spPr>
           <a:xfrm>
-            <a:off x="5803392" y="2258568"/>
+            <a:off x="4370832" y="2258568"/>
             <a:ext cx="1828800" cy="292608"/>
           </a:xfrm>
           <a:prstGeom prst="rect">
@@ -15368,7 +15322,7 @@
         </p:nvSpPr>
         <p:spPr>
           <a:xfrm>
-            <a:off x="5803392" y="2569464"/>
+            <a:off x="4370832" y="2569464"/>
             <a:ext cx="1828800" cy="201168"/>
           </a:xfrm>
           <a:prstGeom prst="rect">
@@ -15393,7 +15347,7 @@
                 <a:ea typeface="Calibri" pitchFamily="34" charset="-122"/>
                 <a:cs typeface="Calibri" pitchFamily="34" charset="-120"/>
               </a:rPr>
-              <a:t>to plunge or dip</a:t>
+              <a:t>to sink or plunge</a:t>
             </a:r>
             <a:endParaRPr lang="en-US" sz="850" dirty="0"/>
           </a:p>
@@ -15402,6 +15356,118 @@
       <p:sp>
         <p:nvSpPr>
           <p:cNvPr id="22" name="Shape 20"/>
+          <p:cNvSpPr/>
+          <p:nvPr/>
+        </p:nvSpPr>
+        <p:spPr>
+          <a:xfrm>
+            <a:off x="6519672" y="2258568"/>
+            <a:ext cx="1828800" cy="292608"/>
+          </a:xfrm>
+          <a:prstGeom prst="rect">
+            <a:avLst>
+              <a:gd name="adj" fmla="val 25000"/>
+            </a:avLst>
+          </a:prstGeom>
+          <a:solidFill>
+            <a:srgbClr val="FCE7F3"/>
+          </a:solidFill>
+          <a:ln w="19050">
+            <a:solidFill>
+              <a:srgbClr val="DB2777"/>
+            </a:solidFill>
+            <a:prstDash val="solid"/>
+          </a:ln>
+          <a:effectLst>
+            <a:outerShdw sx="100000" sy="100000" kx="0" ky="0" algn="bl" rotWithShape="0" blurRad="101600" dist="38100" dir="8100000">
+              <a:srgbClr val="000000">
+                <a:alpha val="12000"/>
+              </a:srgbClr>
+            </a:outerShdw>
+          </a:effectLst>
+        </p:spPr>
+      </p:sp>
+      <p:sp>
+        <p:nvSpPr>
+          <p:cNvPr id="23" name="Text 21"/>
+          <p:cNvSpPr/>
+          <p:nvPr/>
+        </p:nvSpPr>
+        <p:spPr>
+          <a:xfrm>
+            <a:off x="6519672" y="2258568"/>
+            <a:ext cx="1828800" cy="292608"/>
+          </a:xfrm>
+          <a:prstGeom prst="rect">
+            <a:avLst/>
+          </a:prstGeom>
+          <a:noFill/>
+          <a:ln/>
+        </p:spPr>
+        <p:txBody>
+          <a:bodyPr wrap="square" lIns="0" tIns="0" rIns="0" bIns="0" rtlCol="0" anchor="ctr"/>
+          <a:lstStyle/>
+          <a:p>
+            <a:pPr algn="ctr" indent="0" marL="0">
+              <a:buNone/>
+            </a:pPr>
+            <a:r>
+              <a:rPr lang="en-US" sz="1300" b="1" dirty="0">
+                <a:solidFill>
+                  <a:srgbClr val="9D174D"/>
+                </a:solidFill>
+                <a:latin typeface="Trebuchet MS" pitchFamily="34" charset="0"/>
+                <a:ea typeface="Trebuchet MS" pitchFamily="34" charset="-122"/>
+                <a:cs typeface="Trebuchet MS" pitchFamily="34" charset="-120"/>
+              </a:rPr>
+              <a:t>ge</a:t>
+            </a:r>
+            <a:endParaRPr lang="en-US" sz="1300" dirty="0"/>
+          </a:p>
+        </p:txBody>
+      </p:sp>
+      <p:sp>
+        <p:nvSpPr>
+          <p:cNvPr id="24" name="Text 22"/>
+          <p:cNvSpPr/>
+          <p:nvPr/>
+        </p:nvSpPr>
+        <p:spPr>
+          <a:xfrm>
+            <a:off x="6519672" y="2569464"/>
+            <a:ext cx="1828800" cy="201168"/>
+          </a:xfrm>
+          <a:prstGeom prst="rect">
+            <a:avLst/>
+          </a:prstGeom>
+          <a:noFill/>
+          <a:ln/>
+        </p:spPr>
+        <p:txBody>
+          <a:bodyPr wrap="square" lIns="0" tIns="0" rIns="0" bIns="0" rtlCol="0" anchor="t"/>
+          <a:lstStyle/>
+          <a:p>
+            <a:pPr algn="ctr" indent="0" marL="0">
+              <a:buNone/>
+            </a:pPr>
+            <a:r>
+              <a:rPr lang="en-US" sz="850" dirty="0">
+                <a:solidFill>
+                  <a:srgbClr val="475569"/>
+                </a:solidFill>
+                <a:latin typeface="Calibri" pitchFamily="34" charset="0"/>
+                <a:ea typeface="Calibri" pitchFamily="34" charset="-122"/>
+                <a:cs typeface="Calibri" pitchFamily="34" charset="-120"/>
+              </a:rPr>
+              <a:t>verb ending</a:t>
+            </a:r>
+            <a:endParaRPr lang="en-US" sz="850" dirty="0"/>
+          </a:p>
+        </p:txBody>
+      </p:sp>
+      <p:sp>
+        <p:nvSpPr>
+          <p:cNvPr id="25" name="Shape 23"/>
           <p:cNvSpPr/>
           <p:nvPr/>
         </p:nvSpPr>
@@ -15428,7 +15494,7 @@
       </p:sp>
       <p:sp>
         <p:nvSpPr>
-          <p:cNvPr id="23" name="Text 21"/>
+          <p:cNvPr id="26" name="Text 24"/>
           <p:cNvSpPr/>
           <p:nvPr/>
         </p:nvSpPr>
@@ -15467,7 +15533,7 @@
       </p:sp>
       <p:sp>
         <p:nvSpPr>
-          <p:cNvPr id="24" name="Shape 22"/>
+          <p:cNvPr id="27" name="Shape 25"/>
           <p:cNvSpPr/>
           <p:nvPr/>
         </p:nvSpPr>
@@ -15494,7 +15560,7 @@
       </p:sp>
       <p:sp>
         <p:nvSpPr>
-          <p:cNvPr id="25" name="Shape 23"/>
+          <p:cNvPr id="28" name="Shape 26"/>
           <p:cNvSpPr/>
           <p:nvPr/>
         </p:nvSpPr>
@@ -15521,7 +15587,7 @@
       </p:sp>
       <p:sp>
         <p:nvSpPr>
-          <p:cNvPr id="26" name="Text 24"/>
+          <p:cNvPr id="29" name="Text 27"/>
           <p:cNvSpPr/>
           <p:nvPr/>
         </p:nvSpPr>
@@ -15560,7 +15626,7 @@
       </p:sp>
       <p:sp>
         <p:nvSpPr>
-          <p:cNvPr id="27" name="Text 25"/>
+          <p:cNvPr id="30" name="Text 28"/>
           <p:cNvSpPr/>
           <p:nvPr/>
         </p:nvSpPr>
@@ -15599,7 +15665,7 @@
       </p:sp>
       <p:sp>
         <p:nvSpPr>
-          <p:cNvPr id="28" name="Shape 26"/>
+          <p:cNvPr id="31" name="Shape 29"/>
           <p:cNvSpPr/>
           <p:nvPr/>
         </p:nvSpPr>
@@ -15626,7 +15692,7 @@
       </p:sp>
       <p:sp>
         <p:nvSpPr>
-          <p:cNvPr id="29" name="Text 27"/>
+          <p:cNvPr id="32" name="Text 30"/>
           <p:cNvSpPr/>
           <p:nvPr/>
         </p:nvSpPr>
@@ -15665,7 +15731,7 @@
       </p:sp>
       <p:sp>
         <p:nvSpPr>
-          <p:cNvPr id="30" name="Shape 28"/>
+          <p:cNvPr id="33" name="Shape 31"/>
           <p:cNvSpPr/>
           <p:nvPr/>
         </p:nvSpPr>
@@ -15692,7 +15758,7 @@
       </p:sp>
       <p:sp>
         <p:nvSpPr>
-          <p:cNvPr id="31" name="Text 29"/>
+          <p:cNvPr id="34" name="Text 32"/>
           <p:cNvSpPr/>
           <p:nvPr/>
         </p:nvSpPr>
@@ -15731,7 +15797,7 @@
       </p:sp>
       <p:sp>
         <p:nvSpPr>
-          <p:cNvPr id="32" name="Shape 30"/>
+          <p:cNvPr id="35" name="Shape 33"/>
           <p:cNvSpPr/>
           <p:nvPr/>
         </p:nvSpPr>
@@ -15758,7 +15824,7 @@
       </p:sp>
       <p:sp>
         <p:nvSpPr>
-          <p:cNvPr id="33" name="Shape 31"/>
+          <p:cNvPr id="36" name="Shape 34"/>
           <p:cNvSpPr/>
           <p:nvPr/>
         </p:nvSpPr>
@@ -15785,7 +15851,7 @@
       </p:sp>
       <p:sp>
         <p:nvSpPr>
-          <p:cNvPr id="34" name="Text 32"/>
+          <p:cNvPr id="37" name="Text 35"/>
           <p:cNvSpPr/>
           <p:nvPr/>
         </p:nvSpPr>
@@ -15824,7 +15890,7 @@
       </p:sp>
       <p:sp>
         <p:nvSpPr>
-          <p:cNvPr id="35" name="Shape 33"/>
+          <p:cNvPr id="38" name="Shape 36"/>
           <p:cNvSpPr/>
           <p:nvPr/>
         </p:nvSpPr>
@@ -15851,7 +15917,7 @@
       </p:sp>
       <p:sp>
         <p:nvSpPr>
-          <p:cNvPr id="36" name="Text 34"/>
+          <p:cNvPr id="39" name="Text 37"/>
           <p:cNvSpPr/>
           <p:nvPr/>
         </p:nvSpPr>
@@ -15890,7 +15956,7 @@
       </p:sp>
       <p:sp>
         <p:nvSpPr>
-          <p:cNvPr id="37" name="Shape 35"/>
+          <p:cNvPr id="40" name="Shape 38"/>
           <p:cNvSpPr/>
           <p:nvPr/>
         </p:nvSpPr>
@@ -15917,7 +15983,7 @@
       </p:sp>
       <p:sp>
         <p:nvSpPr>
-          <p:cNvPr id="38" name="Text 36"/>
+          <p:cNvPr id="41" name="Text 39"/>
           <p:cNvSpPr/>
           <p:nvPr/>
         </p:nvSpPr>
@@ -15956,7 +16022,7 @@
       </p:sp>
       <p:sp>
         <p:nvSpPr>
-          <p:cNvPr id="39" name="Shape 37"/>
+          <p:cNvPr id="42" name="Shape 40"/>
           <p:cNvSpPr/>
           <p:nvPr/>
         </p:nvSpPr>
@@ -15983,7 +16049,7 @@
       </p:sp>
       <p:sp>
         <p:nvSpPr>
-          <p:cNvPr id="40" name="Text 38"/>
+          <p:cNvPr id="43" name="Text 41"/>
           <p:cNvSpPr/>
           <p:nvPr/>
         </p:nvSpPr>
@@ -16022,7 +16088,7 @@
       </p:sp>
       <p:sp>
         <p:nvSpPr>
-          <p:cNvPr id="41" name="Shape 39"/>
+          <p:cNvPr id="44" name="Shape 42"/>
           <p:cNvSpPr/>
           <p:nvPr/>
         </p:nvSpPr>
@@ -16049,7 +16115,7 @@
       </p:sp>
       <p:sp>
         <p:nvSpPr>
-          <p:cNvPr id="42" name="Text 40"/>
+          <p:cNvPr id="45" name="Text 43"/>
           <p:cNvSpPr/>
           <p:nvPr/>
         </p:nvSpPr>
@@ -16088,7 +16154,7 @@
       </p:sp>
       <p:sp>
         <p:nvSpPr>
-          <p:cNvPr id="43" name="Shape 41"/>
+          <p:cNvPr id="46" name="Shape 44"/>
           <p:cNvSpPr/>
           <p:nvPr/>
         </p:nvSpPr>
@@ -16115,7 +16181,7 @@
       </p:sp>
       <p:sp>
         <p:nvSpPr>
-          <p:cNvPr id="44" name="Text 42"/>
+          <p:cNvPr id="47" name="Text 45"/>
           <p:cNvSpPr/>
           <p:nvPr/>
         </p:nvSpPr>
@@ -16154,7 +16220,7 @@
       </p:sp>
       <p:sp>
         <p:nvSpPr>
-          <p:cNvPr id="45" name="Text 43"/>
+          <p:cNvPr id="48" name="Text 46"/>
           <p:cNvSpPr/>
           <p:nvPr/>
         </p:nvSpPr>
@@ -16759,7 +16825,7 @@
                 <a:ea typeface="Calibri" pitchFamily="34" charset="-122"/>
                 <a:cs typeface="Calibri" pitchFamily="34" charset="-120"/>
               </a:rPr>
-              <a:t>Word Labs  •  wordlabs.app  •  Prefix: 'sub-' = under, below, beneath</a:t>
+              <a:t>Word Labs  •  wordlabs.app  •  Prefix: 'sub-' = under, below, less than</a:t>
             </a:r>
             <a:endParaRPr lang="en-US" sz="800" dirty="0"/>
           </a:p>
@@ -17399,7 +17465,7 @@
                 <a:ea typeface="Calibri" pitchFamily="34" charset="-122"/>
                 <a:cs typeface="Calibri" pitchFamily="34" charset="-120"/>
               </a:rPr>
-              <a:t>Word Labs  •  wordlabs.app  •  Prefix: 'sub-' = under, below, beneath</a:t>
+              <a:t>Word Labs  •  wordlabs.app  •  Prefix: 'sub-' = under, below, less than</a:t>
             </a:r>
             <a:endParaRPr lang="en-US" sz="800" dirty="0"/>
           </a:p>
@@ -17511,7 +17577,7 @@
                 <a:ea typeface="Calibri" pitchFamily="34" charset="-122"/>
                 <a:cs typeface="Calibri" pitchFamily="34" charset="-120"/>
               </a:rPr>
-              <a:t>After you </a:t>
+              <a:t>She used a </a:t>
             </a:r>
             <a:pPr algn="l" indent="0" marL="0">
               <a:buNone/>
@@ -17528,7 +17594,7 @@
                 <a:ea typeface="Calibri" pitchFamily="34" charset="-122"/>
                 <a:cs typeface="Calibri" pitchFamily="34" charset="-120"/>
               </a:rPr>
-              <a:t>subtract</a:t>
+              <a:t>substitute</a:t>
             </a:r>
             <a:pPr algn="l" indent="0" marL="0">
               <a:buNone/>
@@ -17542,7 +17608,7 @@
                 <a:ea typeface="Calibri" pitchFamily="34" charset="-122"/>
                 <a:cs typeface="Calibri" pitchFamily="34" charset="-120"/>
               </a:rPr>
-              <a:t> the cost, the </a:t>
+              <a:t> word in the </a:t>
             </a:r>
             <a:pPr algn="l" indent="0" marL="0">
               <a:buNone/>
@@ -17559,7 +17625,7 @@
                 <a:ea typeface="Calibri" pitchFamily="34" charset="-122"/>
                 <a:cs typeface="Calibri" pitchFamily="34" charset="-120"/>
               </a:rPr>
-              <a:t>suburb</a:t>
+              <a:t>subtitle</a:t>
             </a:r>
             <a:pPr algn="l" indent="0" marL="0">
               <a:buNone/>
@@ -17573,7 +17639,7 @@
                 <a:ea typeface="Calibri" pitchFamily="34" charset="-122"/>
                 <a:cs typeface="Calibri" pitchFamily="34" charset="-120"/>
               </a:rPr>
-              <a:t> market offers a </a:t>
+              <a:t>, and added a </a:t>
             </a:r>
             <a:pPr algn="l" indent="0" marL="0">
               <a:buNone/>
@@ -17590,7 +17656,7 @@
                 <a:ea typeface="Calibri" pitchFamily="34" charset="-122"/>
                 <a:cs typeface="Calibri" pitchFamily="34" charset="-120"/>
               </a:rPr>
-              <a:t>substitute</a:t>
+              <a:t>subheading</a:t>
             </a:r>
             <a:pPr algn="l" indent="0" marL="0">
               <a:buNone/>
@@ -17604,7 +17670,7 @@
                 <a:ea typeface="Calibri" pitchFamily="34" charset="-122"/>
                 <a:cs typeface="Calibri" pitchFamily="34" charset="-120"/>
               </a:rPr>
-              <a:t> for every item.</a:t>
+              <a:t> to make the report clearer.</a:t>
             </a:r>
             <a:endParaRPr lang="en-US" sz="1800" dirty="0"/>
           </a:p>
@@ -17759,7 +17825,7 @@
                 <a:ea typeface="Trebuchet MS" pitchFamily="34" charset="-122"/>
                 <a:cs typeface="Trebuchet MS" pitchFamily="34" charset="-120"/>
               </a:rPr>
-              <a:t>subtract</a:t>
+              <a:t>substitute</a:t>
             </a:r>
             <a:endParaRPr lang="en-US" sz="1400" dirty="0"/>
           </a:p>
@@ -17887,7 +17953,7 @@
                 <a:ea typeface="Trebuchet MS" pitchFamily="34" charset="-122"/>
                 <a:cs typeface="Trebuchet MS" pitchFamily="34" charset="-120"/>
               </a:rPr>
-              <a:t>suburb</a:t>
+              <a:t>subtitle</a:t>
             </a:r>
             <a:endParaRPr lang="en-US" sz="1400" dirty="0"/>
           </a:p>
@@ -18015,7 +18081,7 @@
                 <a:ea typeface="Trebuchet MS" pitchFamily="34" charset="-122"/>
                 <a:cs typeface="Trebuchet MS" pitchFamily="34" charset="-120"/>
               </a:rPr>
-              <a:t>substitute</a:t>
+              <a:t>subheading</a:t>
             </a:r>
             <a:endParaRPr lang="en-US" sz="1400" dirty="0"/>
           </a:p>
@@ -18346,7 +18412,7 @@
                 <a:ea typeface="Calibri" pitchFamily="34" charset="-122"/>
                 <a:cs typeface="Calibri" pitchFamily="34" charset="-120"/>
               </a:rPr>
-              <a:t>Word Labs  •  wordlabs.app  •  Prefix: 'sub-' = under, below, beneath</a:t>
+              <a:t>Word Labs  •  wordlabs.app  •  Prefix: 'sub-' = under, below, less than</a:t>
             </a:r>
             <a:endParaRPr lang="en-US" sz="800" dirty="0"/>
           </a:p>
@@ -18485,7 +18551,7 @@
                 <a:ea typeface="Trebuchet MS" pitchFamily="34" charset="-122"/>
                 <a:cs typeface="Trebuchet MS" pitchFamily="34" charset="-120"/>
               </a:rPr>
-              <a:t>subtract</a:t>
+              <a:t>substitute</a:t>
             </a:r>
             <a:endParaRPr lang="en-US" sz="2800" dirty="0"/>
           </a:p>
@@ -19173,7 +19239,7 @@
                 <a:ea typeface="Calibri" pitchFamily="34" charset="-122"/>
                 <a:cs typeface="Calibri" pitchFamily="34" charset="-120"/>
               </a:rPr>
-              <a:t>Word Labs  •  wordlabs.app  •  Prefix: 'sub-' = under, below, beneath</a:t>
+              <a:t>Word Labs  •  wordlabs.app  •  Prefix: 'sub-' = under, below, less than</a:t>
             </a:r>
             <a:endParaRPr lang="en-US" sz="800" dirty="0"/>
           </a:p>
@@ -19312,7 +19378,7 @@
                 <a:ea typeface="Trebuchet MS" pitchFamily="34" charset="-122"/>
                 <a:cs typeface="Trebuchet MS" pitchFamily="34" charset="-120"/>
               </a:rPr>
-              <a:t>subtract</a:t>
+              <a:t>substitute</a:t>
             </a:r>
             <a:endParaRPr lang="en-US" sz="2800" dirty="0"/>
           </a:p>
@@ -19392,7 +19458,7 @@
         </p:nvSpPr>
         <p:spPr>
           <a:xfrm>
-            <a:off x="2938272" y="2258568"/>
+            <a:off x="2221992" y="2258568"/>
             <a:ext cx="1828800" cy="292608"/>
           </a:xfrm>
           <a:prstGeom prst="rect">
@@ -19426,7 +19492,7 @@
         </p:nvSpPr>
         <p:spPr>
           <a:xfrm>
-            <a:off x="2938272" y="2258568"/>
+            <a:off x="2221992" y="2258568"/>
             <a:ext cx="1828800" cy="292608"/>
           </a:xfrm>
           <a:prstGeom prst="rect">
@@ -19465,7 +19531,7 @@
         </p:nvSpPr>
         <p:spPr>
           <a:xfrm>
-            <a:off x="2938272" y="2569464"/>
+            <a:off x="2221992" y="2569464"/>
             <a:ext cx="1828800" cy="201168"/>
           </a:xfrm>
           <a:prstGeom prst="rect">
@@ -19490,7 +19556,7 @@
                 <a:ea typeface="Calibri" pitchFamily="34" charset="-122"/>
                 <a:cs typeface="Calibri" pitchFamily="34" charset="-120"/>
               </a:rPr>
-              <a:t>under, below</a:t>
+              <a:t>under, in place of</a:t>
             </a:r>
             <a:endParaRPr lang="en-US" sz="850" dirty="0"/>
           </a:p>
@@ -19504,7 +19570,7 @@
         </p:nvSpPr>
         <p:spPr>
           <a:xfrm>
-            <a:off x="5803392" y="2258568"/>
+            <a:off x="4370832" y="2258568"/>
             <a:ext cx="1828800" cy="292608"/>
           </a:xfrm>
           <a:prstGeom prst="rect">
@@ -19538,7 +19604,7 @@
         </p:nvSpPr>
         <p:spPr>
           <a:xfrm>
-            <a:off x="5803392" y="2258568"/>
+            <a:off x="4370832" y="2258568"/>
             <a:ext cx="1828800" cy="292608"/>
           </a:xfrm>
           <a:prstGeom prst="rect">
@@ -19563,7 +19629,7 @@
                 <a:ea typeface="Trebuchet MS" pitchFamily="34" charset="-122"/>
                 <a:cs typeface="Trebuchet MS" pitchFamily="34" charset="-120"/>
               </a:rPr>
-              <a:t>tract</a:t>
+              <a:t>stitut</a:t>
             </a:r>
             <a:endParaRPr lang="en-US" sz="1300" dirty="0"/>
           </a:p>
@@ -19577,7 +19643,7 @@
         </p:nvSpPr>
         <p:spPr>
           <a:xfrm>
-            <a:off x="5803392" y="2569464"/>
+            <a:off x="4370832" y="2569464"/>
             <a:ext cx="1828800" cy="201168"/>
           </a:xfrm>
           <a:prstGeom prst="rect">
@@ -19602,7 +19668,7 @@
                 <a:ea typeface="Calibri" pitchFamily="34" charset="-122"/>
                 <a:cs typeface="Calibri" pitchFamily="34" charset="-120"/>
               </a:rPr>
-              <a:t>to pull or draw</a:t>
+              <a:t>to set up or place</a:t>
             </a:r>
             <a:endParaRPr lang="en-US" sz="850" dirty="0"/>
           </a:p>
@@ -19611,6 +19677,118 @@
       <p:sp>
         <p:nvSpPr>
           <p:cNvPr id="22" name="Shape 20"/>
+          <p:cNvSpPr/>
+          <p:nvPr/>
+        </p:nvSpPr>
+        <p:spPr>
+          <a:xfrm>
+            <a:off x="6519672" y="2258568"/>
+            <a:ext cx="1828800" cy="292608"/>
+          </a:xfrm>
+          <a:prstGeom prst="rect">
+            <a:avLst>
+              <a:gd name="adj" fmla="val 25000"/>
+            </a:avLst>
+          </a:prstGeom>
+          <a:solidFill>
+            <a:srgbClr val="FCE7F3"/>
+          </a:solidFill>
+          <a:ln w="19050">
+            <a:solidFill>
+              <a:srgbClr val="DB2777"/>
+            </a:solidFill>
+            <a:prstDash val="solid"/>
+          </a:ln>
+          <a:effectLst>
+            <a:outerShdw sx="100000" sy="100000" kx="0" ky="0" algn="bl" rotWithShape="0" blurRad="101600" dist="38100" dir="8100000">
+              <a:srgbClr val="000000">
+                <a:alpha val="12000"/>
+              </a:srgbClr>
+            </a:outerShdw>
+          </a:effectLst>
+        </p:spPr>
+      </p:sp>
+      <p:sp>
+        <p:nvSpPr>
+          <p:cNvPr id="23" name="Text 21"/>
+          <p:cNvSpPr/>
+          <p:nvPr/>
+        </p:nvSpPr>
+        <p:spPr>
+          <a:xfrm>
+            <a:off x="6519672" y="2258568"/>
+            <a:ext cx="1828800" cy="292608"/>
+          </a:xfrm>
+          <a:prstGeom prst="rect">
+            <a:avLst/>
+          </a:prstGeom>
+          <a:noFill/>
+          <a:ln/>
+        </p:spPr>
+        <p:txBody>
+          <a:bodyPr wrap="square" lIns="0" tIns="0" rIns="0" bIns="0" rtlCol="0" anchor="ctr"/>
+          <a:lstStyle/>
+          <a:p>
+            <a:pPr algn="ctr" indent="0" marL="0">
+              <a:buNone/>
+            </a:pPr>
+            <a:r>
+              <a:rPr lang="en-US" sz="1300" b="1" dirty="0">
+                <a:solidFill>
+                  <a:srgbClr val="9D174D"/>
+                </a:solidFill>
+                <a:latin typeface="Trebuchet MS" pitchFamily="34" charset="0"/>
+                <a:ea typeface="Trebuchet MS" pitchFamily="34" charset="-122"/>
+                <a:cs typeface="Trebuchet MS" pitchFamily="34" charset="-120"/>
+              </a:rPr>
+              <a:t>e</a:t>
+            </a:r>
+            <a:endParaRPr lang="en-US" sz="1300" dirty="0"/>
+          </a:p>
+        </p:txBody>
+      </p:sp>
+      <p:sp>
+        <p:nvSpPr>
+          <p:cNvPr id="24" name="Text 22"/>
+          <p:cNvSpPr/>
+          <p:nvPr/>
+        </p:nvSpPr>
+        <p:spPr>
+          <a:xfrm>
+            <a:off x="6519672" y="2569464"/>
+            <a:ext cx="1828800" cy="201168"/>
+          </a:xfrm>
+          <a:prstGeom prst="rect">
+            <a:avLst/>
+          </a:prstGeom>
+          <a:noFill/>
+          <a:ln/>
+        </p:spPr>
+        <p:txBody>
+          <a:bodyPr wrap="square" lIns="0" tIns="0" rIns="0" bIns="0" rtlCol="0" anchor="t"/>
+          <a:lstStyle/>
+          <a:p>
+            <a:pPr algn="ctr" indent="0" marL="0">
+              <a:buNone/>
+            </a:pPr>
+            <a:r>
+              <a:rPr lang="en-US" sz="850" dirty="0">
+                <a:solidFill>
+                  <a:srgbClr val="475569"/>
+                </a:solidFill>
+                <a:latin typeface="Calibri" pitchFamily="34" charset="0"/>
+                <a:ea typeface="Calibri" pitchFamily="34" charset="-122"/>
+                <a:cs typeface="Calibri" pitchFamily="34" charset="-120"/>
+              </a:rPr>
+              <a:t>verb ending</a:t>
+            </a:r>
+            <a:endParaRPr lang="en-US" sz="850" dirty="0"/>
+          </a:p>
+        </p:txBody>
+      </p:sp>
+      <p:sp>
+        <p:nvSpPr>
+          <p:cNvPr id="25" name="Shape 23"/>
           <p:cNvSpPr/>
           <p:nvPr/>
         </p:nvSpPr>
@@ -19637,7 +19815,7 @@
       </p:sp>
       <p:sp>
         <p:nvSpPr>
-          <p:cNvPr id="23" name="Text 21"/>
+          <p:cNvPr id="26" name="Text 24"/>
           <p:cNvSpPr/>
           <p:nvPr/>
         </p:nvSpPr>
@@ -19676,7 +19854,7 @@
       </p:sp>
       <p:sp>
         <p:nvSpPr>
-          <p:cNvPr id="24" name="Shape 22"/>
+          <p:cNvPr id="27" name="Shape 25"/>
           <p:cNvSpPr/>
           <p:nvPr/>
         </p:nvSpPr>
@@ -19703,7 +19881,7 @@
       </p:sp>
       <p:sp>
         <p:nvSpPr>
-          <p:cNvPr id="25" name="Text 23"/>
+          <p:cNvPr id="28" name="Text 26"/>
           <p:cNvSpPr/>
           <p:nvPr/>
         </p:nvSpPr>
@@ -19742,7 +19920,7 @@
       </p:sp>
       <p:sp>
         <p:nvSpPr>
-          <p:cNvPr id="26" name="Shape 24"/>
+          <p:cNvPr id="29" name="Shape 27"/>
           <p:cNvSpPr/>
           <p:nvPr/>
         </p:nvSpPr>
@@ -19769,7 +19947,7 @@
       </p:sp>
       <p:sp>
         <p:nvSpPr>
-          <p:cNvPr id="27" name="Text 25"/>
+          <p:cNvPr id="30" name="Text 28"/>
           <p:cNvSpPr/>
           <p:nvPr/>
         </p:nvSpPr>
@@ -19808,7 +19986,7 @@
       </p:sp>
       <p:sp>
         <p:nvSpPr>
-          <p:cNvPr id="28" name="Shape 26"/>
+          <p:cNvPr id="31" name="Shape 29"/>
           <p:cNvSpPr/>
           <p:nvPr/>
         </p:nvSpPr>
@@ -19835,7 +20013,7 @@
       </p:sp>
       <p:sp>
         <p:nvSpPr>
-          <p:cNvPr id="29" name="Text 27"/>
+          <p:cNvPr id="32" name="Text 30"/>
           <p:cNvSpPr/>
           <p:nvPr/>
         </p:nvSpPr>
@@ -20158,7 +20336,7 @@
                 <a:ea typeface="Calibri" pitchFamily="34" charset="-122"/>
                 <a:cs typeface="Calibri" pitchFamily="34" charset="-120"/>
               </a:rPr>
-              <a:t>Word Labs  •  wordlabs.app  •  Prefix: 'sub-' = under, below, beneath</a:t>
+              <a:t>Word Labs  •  wordlabs.app  •  Prefix: 'sub-' = under, below, less than</a:t>
             </a:r>
             <a:endParaRPr lang="en-US" sz="800" dirty="0"/>
           </a:p>
@@ -20297,7 +20475,7 @@
                 <a:ea typeface="Trebuchet MS" pitchFamily="34" charset="-122"/>
                 <a:cs typeface="Trebuchet MS" pitchFamily="34" charset="-120"/>
               </a:rPr>
-              <a:t>subtract</a:t>
+              <a:t>substitute</a:t>
             </a:r>
             <a:endParaRPr lang="en-US" sz="2800" dirty="0"/>
           </a:p>
@@ -20377,7 +20555,7 @@
         </p:nvSpPr>
         <p:spPr>
           <a:xfrm>
-            <a:off x="2938272" y="2258568"/>
+            <a:off x="2221992" y="2258568"/>
             <a:ext cx="1828800" cy="292608"/>
           </a:xfrm>
           <a:prstGeom prst="rect">
@@ -20411,7 +20589,7 @@
         </p:nvSpPr>
         <p:spPr>
           <a:xfrm>
-            <a:off x="2938272" y="2258568"/>
+            <a:off x="2221992" y="2258568"/>
             <a:ext cx="1828800" cy="292608"/>
           </a:xfrm>
           <a:prstGeom prst="rect">
@@ -20450,7 +20628,7 @@
         </p:nvSpPr>
         <p:spPr>
           <a:xfrm>
-            <a:off x="2938272" y="2569464"/>
+            <a:off x="2221992" y="2569464"/>
             <a:ext cx="1828800" cy="201168"/>
           </a:xfrm>
           <a:prstGeom prst="rect">
@@ -20475,7 +20653,7 @@
                 <a:ea typeface="Calibri" pitchFamily="34" charset="-122"/>
                 <a:cs typeface="Calibri" pitchFamily="34" charset="-120"/>
               </a:rPr>
-              <a:t>under, below</a:t>
+              <a:t>under, in place of</a:t>
             </a:r>
             <a:endParaRPr lang="en-US" sz="850" dirty="0"/>
           </a:p>
@@ -20489,7 +20667,7 @@
         </p:nvSpPr>
         <p:spPr>
           <a:xfrm>
-            <a:off x="5803392" y="2258568"/>
+            <a:off x="4370832" y="2258568"/>
             <a:ext cx="1828800" cy="292608"/>
           </a:xfrm>
           <a:prstGeom prst="rect">
@@ -20523,7 +20701,7 @@
         </p:nvSpPr>
         <p:spPr>
           <a:xfrm>
-            <a:off x="5803392" y="2258568"/>
+            <a:off x="4370832" y="2258568"/>
             <a:ext cx="1828800" cy="292608"/>
           </a:xfrm>
           <a:prstGeom prst="rect">
@@ -20548,7 +20726,7 @@
                 <a:ea typeface="Trebuchet MS" pitchFamily="34" charset="-122"/>
                 <a:cs typeface="Trebuchet MS" pitchFamily="34" charset="-120"/>
               </a:rPr>
-              <a:t>tract</a:t>
+              <a:t>stitut</a:t>
             </a:r>
             <a:endParaRPr lang="en-US" sz="1300" dirty="0"/>
           </a:p>
@@ -20562,7 +20740,7 @@
         </p:nvSpPr>
         <p:spPr>
           <a:xfrm>
-            <a:off x="5803392" y="2569464"/>
+            <a:off x="4370832" y="2569464"/>
             <a:ext cx="1828800" cy="201168"/>
           </a:xfrm>
           <a:prstGeom prst="rect">
@@ -20587,7 +20765,7 @@
                 <a:ea typeface="Calibri" pitchFamily="34" charset="-122"/>
                 <a:cs typeface="Calibri" pitchFamily="34" charset="-120"/>
               </a:rPr>
-              <a:t>to pull or draw</a:t>
+              <a:t>to set up or place</a:t>
             </a:r>
             <a:endParaRPr lang="en-US" sz="850" dirty="0"/>
           </a:p>
@@ -20596,6 +20774,118 @@
       <p:sp>
         <p:nvSpPr>
           <p:cNvPr id="22" name="Shape 20"/>
+          <p:cNvSpPr/>
+          <p:nvPr/>
+        </p:nvSpPr>
+        <p:spPr>
+          <a:xfrm>
+            <a:off x="6519672" y="2258568"/>
+            <a:ext cx="1828800" cy="292608"/>
+          </a:xfrm>
+          <a:prstGeom prst="rect">
+            <a:avLst>
+              <a:gd name="adj" fmla="val 25000"/>
+            </a:avLst>
+          </a:prstGeom>
+          <a:solidFill>
+            <a:srgbClr val="FCE7F3"/>
+          </a:solidFill>
+          <a:ln w="19050">
+            <a:solidFill>
+              <a:srgbClr val="DB2777"/>
+            </a:solidFill>
+            <a:prstDash val="solid"/>
+          </a:ln>
+          <a:effectLst>
+            <a:outerShdw sx="100000" sy="100000" kx="0" ky="0" algn="bl" rotWithShape="0" blurRad="101600" dist="38100" dir="8100000">
+              <a:srgbClr val="000000">
+                <a:alpha val="12000"/>
+              </a:srgbClr>
+            </a:outerShdw>
+          </a:effectLst>
+        </p:spPr>
+      </p:sp>
+      <p:sp>
+        <p:nvSpPr>
+          <p:cNvPr id="23" name="Text 21"/>
+          <p:cNvSpPr/>
+          <p:nvPr/>
+        </p:nvSpPr>
+        <p:spPr>
+          <a:xfrm>
+            <a:off x="6519672" y="2258568"/>
+            <a:ext cx="1828800" cy="292608"/>
+          </a:xfrm>
+          <a:prstGeom prst="rect">
+            <a:avLst/>
+          </a:prstGeom>
+          <a:noFill/>
+          <a:ln/>
+        </p:spPr>
+        <p:txBody>
+          <a:bodyPr wrap="square" lIns="0" tIns="0" rIns="0" bIns="0" rtlCol="0" anchor="ctr"/>
+          <a:lstStyle/>
+          <a:p>
+            <a:pPr algn="ctr" indent="0" marL="0">
+              <a:buNone/>
+            </a:pPr>
+            <a:r>
+              <a:rPr lang="en-US" sz="1300" b="1" dirty="0">
+                <a:solidFill>
+                  <a:srgbClr val="9D174D"/>
+                </a:solidFill>
+                <a:latin typeface="Trebuchet MS" pitchFamily="34" charset="0"/>
+                <a:ea typeface="Trebuchet MS" pitchFamily="34" charset="-122"/>
+                <a:cs typeface="Trebuchet MS" pitchFamily="34" charset="-120"/>
+              </a:rPr>
+              <a:t>e</a:t>
+            </a:r>
+            <a:endParaRPr lang="en-US" sz="1300" dirty="0"/>
+          </a:p>
+        </p:txBody>
+      </p:sp>
+      <p:sp>
+        <p:nvSpPr>
+          <p:cNvPr id="24" name="Text 22"/>
+          <p:cNvSpPr/>
+          <p:nvPr/>
+        </p:nvSpPr>
+        <p:spPr>
+          <a:xfrm>
+            <a:off x="6519672" y="2569464"/>
+            <a:ext cx="1828800" cy="201168"/>
+          </a:xfrm>
+          <a:prstGeom prst="rect">
+            <a:avLst/>
+          </a:prstGeom>
+          <a:noFill/>
+          <a:ln/>
+        </p:spPr>
+        <p:txBody>
+          <a:bodyPr wrap="square" lIns="0" tIns="0" rIns="0" bIns="0" rtlCol="0" anchor="t"/>
+          <a:lstStyle/>
+          <a:p>
+            <a:pPr algn="ctr" indent="0" marL="0">
+              <a:buNone/>
+            </a:pPr>
+            <a:r>
+              <a:rPr lang="en-US" sz="850" dirty="0">
+                <a:solidFill>
+                  <a:srgbClr val="475569"/>
+                </a:solidFill>
+                <a:latin typeface="Calibri" pitchFamily="34" charset="0"/>
+                <a:ea typeface="Calibri" pitchFamily="34" charset="-122"/>
+                <a:cs typeface="Calibri" pitchFamily="34" charset="-120"/>
+              </a:rPr>
+              <a:t>verb ending</a:t>
+            </a:r>
+            <a:endParaRPr lang="en-US" sz="850" dirty="0"/>
+          </a:p>
+        </p:txBody>
+      </p:sp>
+      <p:sp>
+        <p:nvSpPr>
+          <p:cNvPr id="25" name="Shape 23"/>
           <p:cNvSpPr/>
           <p:nvPr/>
         </p:nvSpPr>
@@ -20622,7 +20912,7 @@
       </p:sp>
       <p:sp>
         <p:nvSpPr>
-          <p:cNvPr id="23" name="Text 21"/>
+          <p:cNvPr id="26" name="Text 24"/>
           <p:cNvSpPr/>
           <p:nvPr/>
         </p:nvSpPr>
@@ -20661,7 +20951,7 @@
       </p:sp>
       <p:sp>
         <p:nvSpPr>
-          <p:cNvPr id="24" name="Shape 22"/>
+          <p:cNvPr id="27" name="Shape 25"/>
           <p:cNvSpPr/>
           <p:nvPr/>
         </p:nvSpPr>
@@ -20688,13 +20978,13 @@
       </p:sp>
       <p:sp>
         <p:nvSpPr>
-          <p:cNvPr id="25" name="Shape 23"/>
-          <p:cNvSpPr/>
-          <p:nvPr/>
-        </p:nvSpPr>
-        <p:spPr>
-          <a:xfrm>
-            <a:off x="2999232" y="3364992"/>
+          <p:cNvPr id="28" name="Shape 26"/>
+          <p:cNvSpPr/>
+          <p:nvPr/>
+        </p:nvSpPr>
+        <p:spPr>
+          <a:xfrm>
+            <a:off x="2313432" y="3364992"/>
             <a:ext cx="1645920" cy="475488"/>
           </a:xfrm>
           <a:prstGeom prst="rect">
@@ -20715,13 +21005,13 @@
       </p:sp>
       <p:sp>
         <p:nvSpPr>
-          <p:cNvPr id="26" name="Text 24"/>
-          <p:cNvSpPr/>
-          <p:nvPr/>
-        </p:nvSpPr>
-        <p:spPr>
-          <a:xfrm>
-            <a:off x="2999232" y="3364992"/>
+          <p:cNvPr id="29" name="Text 27"/>
+          <p:cNvSpPr/>
+          <p:nvPr/>
+        </p:nvSpPr>
+        <p:spPr>
+          <a:xfrm>
+            <a:off x="2313432" y="3364992"/>
             <a:ext cx="1645920" cy="475488"/>
           </a:xfrm>
           <a:prstGeom prst="rect">
@@ -20754,14 +21044,14 @@
       </p:sp>
       <p:sp>
         <p:nvSpPr>
-          <p:cNvPr id="27" name="Text 25"/>
-          <p:cNvSpPr/>
-          <p:nvPr/>
-        </p:nvSpPr>
-        <p:spPr>
-          <a:xfrm>
-            <a:off x="4645152" y="3364992"/>
-            <a:ext cx="1097280" cy="475488"/>
+          <p:cNvPr id="30" name="Text 28"/>
+          <p:cNvSpPr/>
+          <p:nvPr/>
+        </p:nvSpPr>
+        <p:spPr>
+          <a:xfrm>
+            <a:off x="3959352" y="3364992"/>
+            <a:ext cx="411480" cy="475488"/>
           </a:xfrm>
           <a:prstGeom prst="rect">
             <a:avLst/>
@@ -20793,13 +21083,13 @@
       </p:sp>
       <p:sp>
         <p:nvSpPr>
-          <p:cNvPr id="28" name="Shape 26"/>
-          <p:cNvSpPr/>
-          <p:nvPr/>
-        </p:nvSpPr>
-        <p:spPr>
-          <a:xfrm>
-            <a:off x="5742432" y="3364992"/>
+          <p:cNvPr id="31" name="Shape 29"/>
+          <p:cNvSpPr/>
+          <p:nvPr/>
+        </p:nvSpPr>
+        <p:spPr>
+          <a:xfrm>
+            <a:off x="4370832" y="3364992"/>
             <a:ext cx="1645920" cy="475488"/>
           </a:xfrm>
           <a:prstGeom prst="rect">
@@ -20820,13 +21110,13 @@
       </p:sp>
       <p:sp>
         <p:nvSpPr>
-          <p:cNvPr id="29" name="Text 27"/>
-          <p:cNvSpPr/>
-          <p:nvPr/>
-        </p:nvSpPr>
-        <p:spPr>
-          <a:xfrm>
-            <a:off x="5742432" y="3364992"/>
+          <p:cNvPr id="32" name="Text 30"/>
+          <p:cNvSpPr/>
+          <p:nvPr/>
+        </p:nvSpPr>
+        <p:spPr>
+          <a:xfrm>
+            <a:off x="4370832" y="3364992"/>
             <a:ext cx="1645920" cy="475488"/>
           </a:xfrm>
           <a:prstGeom prst="rect">
@@ -20851,7 +21141,7 @@
                 <a:ea typeface="Trebuchet MS" pitchFamily="34" charset="-122"/>
                 <a:cs typeface="Trebuchet MS" pitchFamily="34" charset="-120"/>
               </a:rPr>
-              <a:t>tract</a:t>
+              <a:t>sti</a:t>
             </a:r>
             <a:endParaRPr lang="en-US" sz="1400" dirty="0"/>
           </a:p>
@@ -20859,7 +21149,112 @@
       </p:sp>
       <p:sp>
         <p:nvSpPr>
-          <p:cNvPr id="30" name="Shape 28"/>
+          <p:cNvPr id="33" name="Text 31"/>
+          <p:cNvSpPr/>
+          <p:nvPr/>
+        </p:nvSpPr>
+        <p:spPr>
+          <a:xfrm>
+            <a:off x="6016752" y="3364992"/>
+            <a:ext cx="411480" cy="475488"/>
+          </a:xfrm>
+          <a:prstGeom prst="rect">
+            <a:avLst/>
+          </a:prstGeom>
+          <a:noFill/>
+          <a:ln/>
+        </p:spPr>
+        <p:txBody>
+          <a:bodyPr wrap="square" lIns="0" tIns="0" rIns="0" bIns="0" rtlCol="0" anchor="ctr"/>
+          <a:lstStyle/>
+          <a:p>
+            <a:pPr algn="ctr" indent="0" marL="0">
+              <a:buNone/>
+            </a:pPr>
+            <a:r>
+              <a:rPr lang="en-US" sz="1600" b="1" dirty="0">
+                <a:solidFill>
+                  <a:srgbClr val="0D9488"/>
+                </a:solidFill>
+                <a:latin typeface="Trebuchet MS" pitchFamily="34" charset="0"/>
+                <a:ea typeface="Trebuchet MS" pitchFamily="34" charset="-122"/>
+                <a:cs typeface="Trebuchet MS" pitchFamily="34" charset="-120"/>
+              </a:rPr>
+              <a:t>·</a:t>
+            </a:r>
+            <a:endParaRPr lang="en-US" sz="1600" dirty="0"/>
+          </a:p>
+        </p:txBody>
+      </p:sp>
+      <p:sp>
+        <p:nvSpPr>
+          <p:cNvPr id="34" name="Shape 32"/>
+          <p:cNvSpPr/>
+          <p:nvPr/>
+        </p:nvSpPr>
+        <p:spPr>
+          <a:xfrm>
+            <a:off x="6428232" y="3364992"/>
+            <a:ext cx="1645920" cy="475488"/>
+          </a:xfrm>
+          <a:prstGeom prst="rect">
+            <a:avLst>
+              <a:gd name="adj" fmla="val 9615"/>
+            </a:avLst>
+          </a:prstGeom>
+          <a:solidFill>
+            <a:srgbClr val="FFFFFF"/>
+          </a:solidFill>
+          <a:ln w="12700">
+            <a:solidFill>
+              <a:srgbClr val="0D9488"/>
+            </a:solidFill>
+            <a:prstDash val="solid"/>
+          </a:ln>
+        </p:spPr>
+      </p:sp>
+      <p:sp>
+        <p:nvSpPr>
+          <p:cNvPr id="35" name="Text 33"/>
+          <p:cNvSpPr/>
+          <p:nvPr/>
+        </p:nvSpPr>
+        <p:spPr>
+          <a:xfrm>
+            <a:off x="6428232" y="3364992"/>
+            <a:ext cx="1645920" cy="475488"/>
+          </a:xfrm>
+          <a:prstGeom prst="rect">
+            <a:avLst/>
+          </a:prstGeom>
+          <a:noFill/>
+          <a:ln/>
+        </p:spPr>
+        <p:txBody>
+          <a:bodyPr wrap="square" lIns="0" tIns="0" rIns="0" bIns="0" rtlCol="0" anchor="ctr"/>
+          <a:lstStyle/>
+          <a:p>
+            <a:pPr algn="ctr" indent="0" marL="0">
+              <a:buNone/>
+            </a:pPr>
+            <a:r>
+              <a:rPr lang="en-US" sz="1400" b="1" dirty="0">
+                <a:solidFill>
+                  <a:srgbClr val="0D9488"/>
+                </a:solidFill>
+                <a:latin typeface="Trebuchet MS" pitchFamily="34" charset="0"/>
+                <a:ea typeface="Trebuchet MS" pitchFamily="34" charset="-122"/>
+                <a:cs typeface="Trebuchet MS" pitchFamily="34" charset="-120"/>
+              </a:rPr>
+              <a:t>tute</a:t>
+            </a:r>
+            <a:endParaRPr lang="en-US" sz="1400" dirty="0"/>
+          </a:p>
+        </p:txBody>
+      </p:sp>
+      <p:sp>
+        <p:nvSpPr>
+          <p:cNvPr id="36" name="Shape 34"/>
           <p:cNvSpPr/>
           <p:nvPr/>
         </p:nvSpPr>
@@ -20886,7 +21281,7 @@
       </p:sp>
       <p:sp>
         <p:nvSpPr>
-          <p:cNvPr id="31" name="Text 29"/>
+          <p:cNvPr id="37" name="Text 35"/>
           <p:cNvSpPr/>
           <p:nvPr/>
         </p:nvSpPr>
@@ -20925,7 +21320,7 @@
       </p:sp>
       <p:sp>
         <p:nvSpPr>
-          <p:cNvPr id="32" name="Shape 30"/>
+          <p:cNvPr id="38" name="Shape 36"/>
           <p:cNvSpPr/>
           <p:nvPr/>
         </p:nvSpPr>
@@ -20952,7 +21347,7 @@
       </p:sp>
       <p:sp>
         <p:nvSpPr>
-          <p:cNvPr id="33" name="Text 31"/>
+          <p:cNvPr id="39" name="Text 37"/>
           <p:cNvSpPr/>
           <p:nvPr/>
         </p:nvSpPr>
@@ -21275,7 +21670,7 @@
                 <a:ea typeface="Calibri" pitchFamily="34" charset="-122"/>
                 <a:cs typeface="Calibri" pitchFamily="34" charset="-120"/>
               </a:rPr>
-              <a:t>Word Labs  •  wordlabs.app  •  Prefix: 'sub-' = under, below, beneath</a:t>
+              <a:t>Word Labs  •  wordlabs.app  •  Prefix: 'sub-' = under, below, less than</a:t>
             </a:r>
             <a:endParaRPr lang="en-US" sz="800" dirty="0"/>
           </a:p>
@@ -21414,7 +21809,7 @@
                 <a:ea typeface="Trebuchet MS" pitchFamily="34" charset="-122"/>
                 <a:cs typeface="Trebuchet MS" pitchFamily="34" charset="-120"/>
               </a:rPr>
-              <a:t>subtract</a:t>
+              <a:t>substitute</a:t>
             </a:r>
             <a:endParaRPr lang="en-US" sz="2800" dirty="0"/>
           </a:p>
@@ -21494,7 +21889,7 @@
         </p:nvSpPr>
         <p:spPr>
           <a:xfrm>
-            <a:off x="2938272" y="2258568"/>
+            <a:off x="2221992" y="2258568"/>
             <a:ext cx="1828800" cy="292608"/>
           </a:xfrm>
           <a:prstGeom prst="rect">
@@ -21528,7 +21923,7 @@
         </p:nvSpPr>
         <p:spPr>
           <a:xfrm>
-            <a:off x="2938272" y="2258568"/>
+            <a:off x="2221992" y="2258568"/>
             <a:ext cx="1828800" cy="292608"/>
           </a:xfrm>
           <a:prstGeom prst="rect">
@@ -21567,7 +21962,7 @@
         </p:nvSpPr>
         <p:spPr>
           <a:xfrm>
-            <a:off x="2938272" y="2569464"/>
+            <a:off x="2221992" y="2569464"/>
             <a:ext cx="1828800" cy="201168"/>
           </a:xfrm>
           <a:prstGeom prst="rect">
@@ -21592,7 +21987,7 @@
                 <a:ea typeface="Calibri" pitchFamily="34" charset="-122"/>
                 <a:cs typeface="Calibri" pitchFamily="34" charset="-120"/>
               </a:rPr>
-              <a:t>under, below</a:t>
+              <a:t>under, in place of</a:t>
             </a:r>
             <a:endParaRPr lang="en-US" sz="850" dirty="0"/>
           </a:p>
@@ -21606,7 +22001,7 @@
         </p:nvSpPr>
         <p:spPr>
           <a:xfrm>
-            <a:off x="5803392" y="2258568"/>
+            <a:off x="4370832" y="2258568"/>
             <a:ext cx="1828800" cy="292608"/>
           </a:xfrm>
           <a:prstGeom prst="rect">
@@ -21640,7 +22035,7 @@
         </p:nvSpPr>
         <p:spPr>
           <a:xfrm>
-            <a:off x="5803392" y="2258568"/>
+            <a:off x="4370832" y="2258568"/>
             <a:ext cx="1828800" cy="292608"/>
           </a:xfrm>
           <a:prstGeom prst="rect">
@@ -21665,7 +22060,7 @@
                 <a:ea typeface="Trebuchet MS" pitchFamily="34" charset="-122"/>
                 <a:cs typeface="Trebuchet MS" pitchFamily="34" charset="-120"/>
               </a:rPr>
-              <a:t>tract</a:t>
+              <a:t>stitut</a:t>
             </a:r>
             <a:endParaRPr lang="en-US" sz="1300" dirty="0"/>
           </a:p>
@@ -21679,7 +22074,7 @@
         </p:nvSpPr>
         <p:spPr>
           <a:xfrm>
-            <a:off x="5803392" y="2569464"/>
+            <a:off x="4370832" y="2569464"/>
             <a:ext cx="1828800" cy="201168"/>
           </a:xfrm>
           <a:prstGeom prst="rect">
@@ -21704,7 +22099,7 @@
                 <a:ea typeface="Calibri" pitchFamily="34" charset="-122"/>
                 <a:cs typeface="Calibri" pitchFamily="34" charset="-120"/>
               </a:rPr>
-              <a:t>to pull or draw</a:t>
+              <a:t>to set up or place</a:t>
             </a:r>
             <a:endParaRPr lang="en-US" sz="850" dirty="0"/>
           </a:p>
@@ -21713,6 +22108,118 @@
       <p:sp>
         <p:nvSpPr>
           <p:cNvPr id="22" name="Shape 20"/>
+          <p:cNvSpPr/>
+          <p:nvPr/>
+        </p:nvSpPr>
+        <p:spPr>
+          <a:xfrm>
+            <a:off x="6519672" y="2258568"/>
+            <a:ext cx="1828800" cy="292608"/>
+          </a:xfrm>
+          <a:prstGeom prst="rect">
+            <a:avLst>
+              <a:gd name="adj" fmla="val 25000"/>
+            </a:avLst>
+          </a:prstGeom>
+          <a:solidFill>
+            <a:srgbClr val="FCE7F3"/>
+          </a:solidFill>
+          <a:ln w="19050">
+            <a:solidFill>
+              <a:srgbClr val="DB2777"/>
+            </a:solidFill>
+            <a:prstDash val="solid"/>
+          </a:ln>
+          <a:effectLst>
+            <a:outerShdw sx="100000" sy="100000" kx="0" ky="0" algn="bl" rotWithShape="0" blurRad="101600" dist="38100" dir="8100000">
+              <a:srgbClr val="000000">
+                <a:alpha val="12000"/>
+              </a:srgbClr>
+            </a:outerShdw>
+          </a:effectLst>
+        </p:spPr>
+      </p:sp>
+      <p:sp>
+        <p:nvSpPr>
+          <p:cNvPr id="23" name="Text 21"/>
+          <p:cNvSpPr/>
+          <p:nvPr/>
+        </p:nvSpPr>
+        <p:spPr>
+          <a:xfrm>
+            <a:off x="6519672" y="2258568"/>
+            <a:ext cx="1828800" cy="292608"/>
+          </a:xfrm>
+          <a:prstGeom prst="rect">
+            <a:avLst/>
+          </a:prstGeom>
+          <a:noFill/>
+          <a:ln/>
+        </p:spPr>
+        <p:txBody>
+          <a:bodyPr wrap="square" lIns="0" tIns="0" rIns="0" bIns="0" rtlCol="0" anchor="ctr"/>
+          <a:lstStyle/>
+          <a:p>
+            <a:pPr algn="ctr" indent="0" marL="0">
+              <a:buNone/>
+            </a:pPr>
+            <a:r>
+              <a:rPr lang="en-US" sz="1300" b="1" dirty="0">
+                <a:solidFill>
+                  <a:srgbClr val="9D174D"/>
+                </a:solidFill>
+                <a:latin typeface="Trebuchet MS" pitchFamily="34" charset="0"/>
+                <a:ea typeface="Trebuchet MS" pitchFamily="34" charset="-122"/>
+                <a:cs typeface="Trebuchet MS" pitchFamily="34" charset="-120"/>
+              </a:rPr>
+              <a:t>e</a:t>
+            </a:r>
+            <a:endParaRPr lang="en-US" sz="1300" dirty="0"/>
+          </a:p>
+        </p:txBody>
+      </p:sp>
+      <p:sp>
+        <p:nvSpPr>
+          <p:cNvPr id="24" name="Text 22"/>
+          <p:cNvSpPr/>
+          <p:nvPr/>
+        </p:nvSpPr>
+        <p:spPr>
+          <a:xfrm>
+            <a:off x="6519672" y="2569464"/>
+            <a:ext cx="1828800" cy="201168"/>
+          </a:xfrm>
+          <a:prstGeom prst="rect">
+            <a:avLst/>
+          </a:prstGeom>
+          <a:noFill/>
+          <a:ln/>
+        </p:spPr>
+        <p:txBody>
+          <a:bodyPr wrap="square" lIns="0" tIns="0" rIns="0" bIns="0" rtlCol="0" anchor="t"/>
+          <a:lstStyle/>
+          <a:p>
+            <a:pPr algn="ctr" indent="0" marL="0">
+              <a:buNone/>
+            </a:pPr>
+            <a:r>
+              <a:rPr lang="en-US" sz="850" dirty="0">
+                <a:solidFill>
+                  <a:srgbClr val="475569"/>
+                </a:solidFill>
+                <a:latin typeface="Calibri" pitchFamily="34" charset="0"/>
+                <a:ea typeface="Calibri" pitchFamily="34" charset="-122"/>
+                <a:cs typeface="Calibri" pitchFamily="34" charset="-120"/>
+              </a:rPr>
+              <a:t>verb ending</a:t>
+            </a:r>
+            <a:endParaRPr lang="en-US" sz="850" dirty="0"/>
+          </a:p>
+        </p:txBody>
+      </p:sp>
+      <p:sp>
+        <p:nvSpPr>
+          <p:cNvPr id="25" name="Shape 23"/>
           <p:cNvSpPr/>
           <p:nvPr/>
         </p:nvSpPr>
@@ -21739,7 +22246,7 @@
       </p:sp>
       <p:sp>
         <p:nvSpPr>
-          <p:cNvPr id="23" name="Text 21"/>
+          <p:cNvPr id="26" name="Text 24"/>
           <p:cNvSpPr/>
           <p:nvPr/>
         </p:nvSpPr>
@@ -21778,7 +22285,7 @@
       </p:sp>
       <p:sp>
         <p:nvSpPr>
-          <p:cNvPr id="24" name="Shape 22"/>
+          <p:cNvPr id="27" name="Shape 25"/>
           <p:cNvSpPr/>
           <p:nvPr/>
         </p:nvSpPr>
@@ -21805,13 +22312,13 @@
       </p:sp>
       <p:sp>
         <p:nvSpPr>
-          <p:cNvPr id="25" name="Shape 23"/>
-          <p:cNvSpPr/>
-          <p:nvPr/>
-        </p:nvSpPr>
-        <p:spPr>
-          <a:xfrm>
-            <a:off x="2999232" y="3364992"/>
+          <p:cNvPr id="28" name="Shape 26"/>
+          <p:cNvSpPr/>
+          <p:nvPr/>
+        </p:nvSpPr>
+        <p:spPr>
+          <a:xfrm>
+            <a:off x="2313432" y="3364992"/>
             <a:ext cx="1645920" cy="475488"/>
           </a:xfrm>
           <a:prstGeom prst="rect">
@@ -21832,13 +22339,13 @@
       </p:sp>
       <p:sp>
         <p:nvSpPr>
-          <p:cNvPr id="26" name="Text 24"/>
-          <p:cNvSpPr/>
-          <p:nvPr/>
-        </p:nvSpPr>
-        <p:spPr>
-          <a:xfrm>
-            <a:off x="2999232" y="3364992"/>
+          <p:cNvPr id="29" name="Text 27"/>
+          <p:cNvSpPr/>
+          <p:nvPr/>
+        </p:nvSpPr>
+        <p:spPr>
+          <a:xfrm>
+            <a:off x="2313432" y="3364992"/>
             <a:ext cx="1645920" cy="475488"/>
           </a:xfrm>
           <a:prstGeom prst="rect">
@@ -21871,14 +22378,14 @@
       </p:sp>
       <p:sp>
         <p:nvSpPr>
-          <p:cNvPr id="27" name="Text 25"/>
-          <p:cNvSpPr/>
-          <p:nvPr/>
-        </p:nvSpPr>
-        <p:spPr>
-          <a:xfrm>
-            <a:off x="4645152" y="3364992"/>
-            <a:ext cx="1097280" cy="475488"/>
+          <p:cNvPr id="30" name="Text 28"/>
+          <p:cNvSpPr/>
+          <p:nvPr/>
+        </p:nvSpPr>
+        <p:spPr>
+          <a:xfrm>
+            <a:off x="3959352" y="3364992"/>
+            <a:ext cx="411480" cy="475488"/>
           </a:xfrm>
           <a:prstGeom prst="rect">
             <a:avLst/>
@@ -21910,13 +22417,13 @@
       </p:sp>
       <p:sp>
         <p:nvSpPr>
-          <p:cNvPr id="28" name="Shape 26"/>
-          <p:cNvSpPr/>
-          <p:nvPr/>
-        </p:nvSpPr>
-        <p:spPr>
-          <a:xfrm>
-            <a:off x="5742432" y="3364992"/>
+          <p:cNvPr id="31" name="Shape 29"/>
+          <p:cNvSpPr/>
+          <p:nvPr/>
+        </p:nvSpPr>
+        <p:spPr>
+          <a:xfrm>
+            <a:off x="4370832" y="3364992"/>
             <a:ext cx="1645920" cy="475488"/>
           </a:xfrm>
           <a:prstGeom prst="rect">
@@ -21937,13 +22444,13 @@
       </p:sp>
       <p:sp>
         <p:nvSpPr>
-          <p:cNvPr id="29" name="Text 27"/>
-          <p:cNvSpPr/>
-          <p:nvPr/>
-        </p:nvSpPr>
-        <p:spPr>
-          <a:xfrm>
-            <a:off x="5742432" y="3364992"/>
+          <p:cNvPr id="32" name="Text 30"/>
+          <p:cNvSpPr/>
+          <p:nvPr/>
+        </p:nvSpPr>
+        <p:spPr>
+          <a:xfrm>
+            <a:off x="4370832" y="3364992"/>
             <a:ext cx="1645920" cy="475488"/>
           </a:xfrm>
           <a:prstGeom prst="rect">
@@ -21968,7 +22475,7 @@
                 <a:ea typeface="Trebuchet MS" pitchFamily="34" charset="-122"/>
                 <a:cs typeface="Trebuchet MS" pitchFamily="34" charset="-120"/>
               </a:rPr>
-              <a:t>tract</a:t>
+              <a:t>sti</a:t>
             </a:r>
             <a:endParaRPr lang="en-US" sz="1400" dirty="0"/>
           </a:p>
@@ -21976,7 +22483,112 @@
       </p:sp>
       <p:sp>
         <p:nvSpPr>
-          <p:cNvPr id="30" name="Shape 28"/>
+          <p:cNvPr id="33" name="Text 31"/>
+          <p:cNvSpPr/>
+          <p:nvPr/>
+        </p:nvSpPr>
+        <p:spPr>
+          <a:xfrm>
+            <a:off x="6016752" y="3364992"/>
+            <a:ext cx="411480" cy="475488"/>
+          </a:xfrm>
+          <a:prstGeom prst="rect">
+            <a:avLst/>
+          </a:prstGeom>
+          <a:noFill/>
+          <a:ln/>
+        </p:spPr>
+        <p:txBody>
+          <a:bodyPr wrap="square" lIns="0" tIns="0" rIns="0" bIns="0" rtlCol="0" anchor="ctr"/>
+          <a:lstStyle/>
+          <a:p>
+            <a:pPr algn="ctr" indent="0" marL="0">
+              <a:buNone/>
+            </a:pPr>
+            <a:r>
+              <a:rPr lang="en-US" sz="1600" b="1" dirty="0">
+                <a:solidFill>
+                  <a:srgbClr val="0D9488"/>
+                </a:solidFill>
+                <a:latin typeface="Trebuchet MS" pitchFamily="34" charset="0"/>
+                <a:ea typeface="Trebuchet MS" pitchFamily="34" charset="-122"/>
+                <a:cs typeface="Trebuchet MS" pitchFamily="34" charset="-120"/>
+              </a:rPr>
+              <a:t>·</a:t>
+            </a:r>
+            <a:endParaRPr lang="en-US" sz="1600" dirty="0"/>
+          </a:p>
+        </p:txBody>
+      </p:sp>
+      <p:sp>
+        <p:nvSpPr>
+          <p:cNvPr id="34" name="Shape 32"/>
+          <p:cNvSpPr/>
+          <p:nvPr/>
+        </p:nvSpPr>
+        <p:spPr>
+          <a:xfrm>
+            <a:off x="6428232" y="3364992"/>
+            <a:ext cx="1645920" cy="475488"/>
+          </a:xfrm>
+          <a:prstGeom prst="rect">
+            <a:avLst>
+              <a:gd name="adj" fmla="val 9615"/>
+            </a:avLst>
+          </a:prstGeom>
+          <a:solidFill>
+            <a:srgbClr val="FFFFFF"/>
+          </a:solidFill>
+          <a:ln w="12700">
+            <a:solidFill>
+              <a:srgbClr val="0D9488"/>
+            </a:solidFill>
+            <a:prstDash val="solid"/>
+          </a:ln>
+        </p:spPr>
+      </p:sp>
+      <p:sp>
+        <p:nvSpPr>
+          <p:cNvPr id="35" name="Text 33"/>
+          <p:cNvSpPr/>
+          <p:nvPr/>
+        </p:nvSpPr>
+        <p:spPr>
+          <a:xfrm>
+            <a:off x="6428232" y="3364992"/>
+            <a:ext cx="1645920" cy="475488"/>
+          </a:xfrm>
+          <a:prstGeom prst="rect">
+            <a:avLst/>
+          </a:prstGeom>
+          <a:noFill/>
+          <a:ln/>
+        </p:spPr>
+        <p:txBody>
+          <a:bodyPr wrap="square" lIns="0" tIns="0" rIns="0" bIns="0" rtlCol="0" anchor="ctr"/>
+          <a:lstStyle/>
+          <a:p>
+            <a:pPr algn="ctr" indent="0" marL="0">
+              <a:buNone/>
+            </a:pPr>
+            <a:r>
+              <a:rPr lang="en-US" sz="1400" b="1" dirty="0">
+                <a:solidFill>
+                  <a:srgbClr val="0D9488"/>
+                </a:solidFill>
+                <a:latin typeface="Trebuchet MS" pitchFamily="34" charset="0"/>
+                <a:ea typeface="Trebuchet MS" pitchFamily="34" charset="-122"/>
+                <a:cs typeface="Trebuchet MS" pitchFamily="34" charset="-120"/>
+              </a:rPr>
+              <a:t>tute</a:t>
+            </a:r>
+            <a:endParaRPr lang="en-US" sz="1400" dirty="0"/>
+          </a:p>
+        </p:txBody>
+      </p:sp>
+      <p:sp>
+        <p:nvSpPr>
+          <p:cNvPr id="36" name="Shape 34"/>
           <p:cNvSpPr/>
           <p:nvPr/>
         </p:nvSpPr>
@@ -22003,7 +22615,7 @@
       </p:sp>
       <p:sp>
         <p:nvSpPr>
-          <p:cNvPr id="31" name="Text 29"/>
+          <p:cNvPr id="37" name="Text 35"/>
           <p:cNvSpPr/>
           <p:nvPr/>
         </p:nvSpPr>
@@ -22042,18 +22654,18 @@
       </p:sp>
       <p:sp>
         <p:nvSpPr>
-          <p:cNvPr id="32" name="Shape 30"/>
+          <p:cNvPr id="38" name="Shape 36"/>
           <p:cNvSpPr/>
           <p:nvPr/>
         </p:nvSpPr>
         <p:spPr>
           <a:xfrm>
             <a:off x="1874520" y="4096512"/>
-            <a:ext cx="6903720" cy="658368"/>
+            <a:ext cx="6903720" cy="804672"/>
           </a:xfrm>
           <a:prstGeom prst="rect">
             <a:avLst>
-              <a:gd name="adj" fmla="val 8333"/>
+              <a:gd name="adj" fmla="val 6818"/>
             </a:avLst>
           </a:prstGeom>
           <a:solidFill>
@@ -22069,18 +22681,18 @@
       </p:sp>
       <p:sp>
         <p:nvSpPr>
-          <p:cNvPr id="33" name="Shape 31"/>
-          <p:cNvSpPr/>
-          <p:nvPr/>
-        </p:nvSpPr>
-        <p:spPr>
-          <a:xfrm>
-            <a:off x="2023872" y="4169664"/>
-            <a:ext cx="685800" cy="475488"/>
+          <p:cNvPr id="39" name="Shape 37"/>
+          <p:cNvSpPr/>
+          <p:nvPr/>
+        </p:nvSpPr>
+        <p:spPr>
+          <a:xfrm>
+            <a:off x="1951330" y="4169664"/>
+            <a:ext cx="676656" cy="384048"/>
           </a:xfrm>
           <a:prstGeom prst="rect">
             <a:avLst>
-              <a:gd name="adj" fmla="val 7692"/>
+              <a:gd name="adj" fmla="val 9524"/>
             </a:avLst>
           </a:prstGeom>
           <a:solidFill>
@@ -22096,14 +22708,14 @@
       </p:sp>
       <p:sp>
         <p:nvSpPr>
-          <p:cNvPr id="34" name="Text 32"/>
-          <p:cNvSpPr/>
-          <p:nvPr/>
-        </p:nvSpPr>
-        <p:spPr>
-          <a:xfrm>
-            <a:off x="2023872" y="4169664"/>
-            <a:ext cx="685800" cy="475488"/>
+          <p:cNvPr id="40" name="Text 38"/>
+          <p:cNvSpPr/>
+          <p:nvPr/>
+        </p:nvSpPr>
+        <p:spPr>
+          <a:xfrm>
+            <a:off x="1951330" y="4169664"/>
+            <a:ext cx="676656" cy="384048"/>
           </a:xfrm>
           <a:prstGeom prst="rect">
             <a:avLst/>
@@ -22135,18 +22747,18 @@
       </p:sp>
       <p:sp>
         <p:nvSpPr>
-          <p:cNvPr id="35" name="Shape 33"/>
-          <p:cNvSpPr/>
-          <p:nvPr/>
-        </p:nvSpPr>
-        <p:spPr>
-          <a:xfrm>
-            <a:off x="2831592" y="4169664"/>
-            <a:ext cx="685800" cy="475488"/>
+          <p:cNvPr id="41" name="Shape 39"/>
+          <p:cNvSpPr/>
+          <p:nvPr/>
+        </p:nvSpPr>
+        <p:spPr>
+          <a:xfrm>
+            <a:off x="2677363" y="4169664"/>
+            <a:ext cx="676656" cy="384048"/>
           </a:xfrm>
           <a:prstGeom prst="rect">
             <a:avLst>
-              <a:gd name="adj" fmla="val 7692"/>
+              <a:gd name="adj" fmla="val 9524"/>
             </a:avLst>
           </a:prstGeom>
           <a:solidFill>
@@ -22162,14 +22774,14 @@
       </p:sp>
       <p:sp>
         <p:nvSpPr>
-          <p:cNvPr id="36" name="Text 34"/>
-          <p:cNvSpPr/>
-          <p:nvPr/>
-        </p:nvSpPr>
-        <p:spPr>
-          <a:xfrm>
-            <a:off x="2831592" y="4169664"/>
-            <a:ext cx="685800" cy="475488"/>
+          <p:cNvPr id="42" name="Text 40"/>
+          <p:cNvSpPr/>
+          <p:nvPr/>
+        </p:nvSpPr>
+        <p:spPr>
+          <a:xfrm>
+            <a:off x="2677363" y="4169664"/>
+            <a:ext cx="676656" cy="384048"/>
           </a:xfrm>
           <a:prstGeom prst="rect">
             <a:avLst/>
@@ -22201,18 +22813,18 @@
       </p:sp>
       <p:sp>
         <p:nvSpPr>
-          <p:cNvPr id="37" name="Shape 35"/>
-          <p:cNvSpPr/>
-          <p:nvPr/>
-        </p:nvSpPr>
-        <p:spPr>
-          <a:xfrm>
-            <a:off x="3639312" y="4169664"/>
-            <a:ext cx="685800" cy="475488"/>
+          <p:cNvPr id="43" name="Shape 41"/>
+          <p:cNvSpPr/>
+          <p:nvPr/>
+        </p:nvSpPr>
+        <p:spPr>
+          <a:xfrm>
+            <a:off x="3403397" y="4169664"/>
+            <a:ext cx="676656" cy="384048"/>
           </a:xfrm>
           <a:prstGeom prst="rect">
             <a:avLst>
-              <a:gd name="adj" fmla="val 7692"/>
+              <a:gd name="adj" fmla="val 9524"/>
             </a:avLst>
           </a:prstGeom>
           <a:solidFill>
@@ -22228,14 +22840,14 @@
       </p:sp>
       <p:sp>
         <p:nvSpPr>
-          <p:cNvPr id="38" name="Text 36"/>
-          <p:cNvSpPr/>
-          <p:nvPr/>
-        </p:nvSpPr>
-        <p:spPr>
-          <a:xfrm>
-            <a:off x="3639312" y="4169664"/>
-            <a:ext cx="685800" cy="475488"/>
+          <p:cNvPr id="44" name="Text 42"/>
+          <p:cNvSpPr/>
+          <p:nvPr/>
+        </p:nvSpPr>
+        <p:spPr>
+          <a:xfrm>
+            <a:off x="3403397" y="4169664"/>
+            <a:ext cx="676656" cy="384048"/>
           </a:xfrm>
           <a:prstGeom prst="rect">
             <a:avLst/>
@@ -22267,18 +22879,18 @@
       </p:sp>
       <p:sp>
         <p:nvSpPr>
-          <p:cNvPr id="39" name="Shape 37"/>
-          <p:cNvSpPr/>
-          <p:nvPr/>
-        </p:nvSpPr>
-        <p:spPr>
-          <a:xfrm>
-            <a:off x="4447032" y="4169664"/>
-            <a:ext cx="685800" cy="475488"/>
+          <p:cNvPr id="45" name="Shape 43"/>
+          <p:cNvSpPr/>
+          <p:nvPr/>
+        </p:nvSpPr>
+        <p:spPr>
+          <a:xfrm>
+            <a:off x="4129430" y="4169664"/>
+            <a:ext cx="676656" cy="384048"/>
           </a:xfrm>
           <a:prstGeom prst="rect">
             <a:avLst>
-              <a:gd name="adj" fmla="val 7692"/>
+              <a:gd name="adj" fmla="val 9524"/>
             </a:avLst>
           </a:prstGeom>
           <a:solidFill>
@@ -22294,14 +22906,14 @@
       </p:sp>
       <p:sp>
         <p:nvSpPr>
-          <p:cNvPr id="40" name="Text 38"/>
-          <p:cNvSpPr/>
-          <p:nvPr/>
-        </p:nvSpPr>
-        <p:spPr>
-          <a:xfrm>
-            <a:off x="4447032" y="4169664"/>
-            <a:ext cx="685800" cy="475488"/>
+          <p:cNvPr id="46" name="Text 44"/>
+          <p:cNvSpPr/>
+          <p:nvPr/>
+        </p:nvSpPr>
+        <p:spPr>
+          <a:xfrm>
+            <a:off x="4129430" y="4169664"/>
+            <a:ext cx="676656" cy="384048"/>
           </a:xfrm>
           <a:prstGeom prst="rect">
             <a:avLst/>
@@ -22325,7 +22937,7 @@
                 <a:ea typeface="Trebuchet MS" pitchFamily="34" charset="-122"/>
                 <a:cs typeface="Trebuchet MS" pitchFamily="34" charset="-120"/>
               </a:rPr>
-              <a:t>t</a:t>
+              <a:t>s</a:t>
             </a:r>
             <a:endParaRPr lang="en-US" sz="900" dirty="0"/>
           </a:p>
@@ -22333,18 +22945,18 @@
       </p:sp>
       <p:sp>
         <p:nvSpPr>
-          <p:cNvPr id="41" name="Shape 39"/>
-          <p:cNvSpPr/>
-          <p:nvPr/>
-        </p:nvSpPr>
-        <p:spPr>
-          <a:xfrm>
-            <a:off x="5254752" y="4169664"/>
-            <a:ext cx="685800" cy="475488"/>
+          <p:cNvPr id="47" name="Shape 45"/>
+          <p:cNvSpPr/>
+          <p:nvPr/>
+        </p:nvSpPr>
+        <p:spPr>
+          <a:xfrm>
+            <a:off x="4855464" y="4169664"/>
+            <a:ext cx="676656" cy="384048"/>
           </a:xfrm>
           <a:prstGeom prst="rect">
             <a:avLst>
-              <a:gd name="adj" fmla="val 7692"/>
+              <a:gd name="adj" fmla="val 9524"/>
             </a:avLst>
           </a:prstGeom>
           <a:solidFill>
@@ -22360,14 +22972,14 @@
       </p:sp>
       <p:sp>
         <p:nvSpPr>
-          <p:cNvPr id="42" name="Text 40"/>
-          <p:cNvSpPr/>
-          <p:nvPr/>
-        </p:nvSpPr>
-        <p:spPr>
-          <a:xfrm>
-            <a:off x="5254752" y="4169664"/>
-            <a:ext cx="685800" cy="475488"/>
+          <p:cNvPr id="48" name="Text 46"/>
+          <p:cNvSpPr/>
+          <p:nvPr/>
+        </p:nvSpPr>
+        <p:spPr>
+          <a:xfrm>
+            <a:off x="4855464" y="4169664"/>
+            <a:ext cx="676656" cy="384048"/>
           </a:xfrm>
           <a:prstGeom prst="rect">
             <a:avLst/>
@@ -22391,7 +23003,7 @@
                 <a:ea typeface="Trebuchet MS" pitchFamily="34" charset="-122"/>
                 <a:cs typeface="Trebuchet MS" pitchFamily="34" charset="-120"/>
               </a:rPr>
-              <a:t>r</a:t>
+              <a:t>t</a:t>
             </a:r>
             <a:endParaRPr lang="en-US" sz="900" dirty="0"/>
           </a:p>
@@ -22399,18 +23011,18 @@
       </p:sp>
       <p:sp>
         <p:nvSpPr>
-          <p:cNvPr id="43" name="Shape 41"/>
-          <p:cNvSpPr/>
-          <p:nvPr/>
-        </p:nvSpPr>
-        <p:spPr>
-          <a:xfrm>
-            <a:off x="6062472" y="4169664"/>
-            <a:ext cx="685800" cy="475488"/>
+          <p:cNvPr id="49" name="Shape 47"/>
+          <p:cNvSpPr/>
+          <p:nvPr/>
+        </p:nvSpPr>
+        <p:spPr>
+          <a:xfrm>
+            <a:off x="5581498" y="4169664"/>
+            <a:ext cx="676656" cy="384048"/>
           </a:xfrm>
           <a:prstGeom prst="rect">
             <a:avLst>
-              <a:gd name="adj" fmla="val 7692"/>
+              <a:gd name="adj" fmla="val 9524"/>
             </a:avLst>
           </a:prstGeom>
           <a:solidFill>
@@ -22426,14 +23038,14 @@
       </p:sp>
       <p:sp>
         <p:nvSpPr>
-          <p:cNvPr id="44" name="Text 42"/>
-          <p:cNvSpPr/>
-          <p:nvPr/>
-        </p:nvSpPr>
-        <p:spPr>
-          <a:xfrm>
-            <a:off x="6062472" y="4169664"/>
-            <a:ext cx="685800" cy="475488"/>
+          <p:cNvPr id="50" name="Text 48"/>
+          <p:cNvSpPr/>
+          <p:nvPr/>
+        </p:nvSpPr>
+        <p:spPr>
+          <a:xfrm>
+            <a:off x="5581498" y="4169664"/>
+            <a:ext cx="676656" cy="384048"/>
           </a:xfrm>
           <a:prstGeom prst="rect">
             <a:avLst/>
@@ -22457,7 +23069,7 @@
                 <a:ea typeface="Trebuchet MS" pitchFamily="34" charset="-122"/>
                 <a:cs typeface="Trebuchet MS" pitchFamily="34" charset="-120"/>
               </a:rPr>
-              <a:t>a</a:t>
+              <a:t>i</a:t>
             </a:r>
             <a:endParaRPr lang="en-US" sz="900" dirty="0"/>
           </a:p>
@@ -22465,18 +23077,18 @@
       </p:sp>
       <p:sp>
         <p:nvSpPr>
-          <p:cNvPr id="45" name="Shape 43"/>
-          <p:cNvSpPr/>
-          <p:nvPr/>
-        </p:nvSpPr>
-        <p:spPr>
-          <a:xfrm>
-            <a:off x="6870192" y="4169664"/>
-            <a:ext cx="685800" cy="475488"/>
+          <p:cNvPr id="51" name="Shape 49"/>
+          <p:cNvSpPr/>
+          <p:nvPr/>
+        </p:nvSpPr>
+        <p:spPr>
+          <a:xfrm>
+            <a:off x="6307531" y="4169664"/>
+            <a:ext cx="676656" cy="384048"/>
           </a:xfrm>
           <a:prstGeom prst="rect">
             <a:avLst>
-              <a:gd name="adj" fmla="val 7692"/>
+              <a:gd name="adj" fmla="val 9524"/>
             </a:avLst>
           </a:prstGeom>
           <a:solidFill>
@@ -22492,14 +23104,14 @@
       </p:sp>
       <p:sp>
         <p:nvSpPr>
-          <p:cNvPr id="46" name="Text 44"/>
-          <p:cNvSpPr/>
-          <p:nvPr/>
-        </p:nvSpPr>
-        <p:spPr>
-          <a:xfrm>
-            <a:off x="6870192" y="4169664"/>
-            <a:ext cx="685800" cy="475488"/>
+          <p:cNvPr id="52" name="Text 50"/>
+          <p:cNvSpPr/>
+          <p:nvPr/>
+        </p:nvSpPr>
+        <p:spPr>
+          <a:xfrm>
+            <a:off x="6307531" y="4169664"/>
+            <a:ext cx="676656" cy="384048"/>
           </a:xfrm>
           <a:prstGeom prst="rect">
             <a:avLst/>
@@ -22523,7 +23135,7 @@
                 <a:ea typeface="Trebuchet MS" pitchFamily="34" charset="-122"/>
                 <a:cs typeface="Trebuchet MS" pitchFamily="34" charset="-120"/>
               </a:rPr>
-              <a:t>c</a:t>
+              <a:t>t</a:t>
             </a:r>
             <a:endParaRPr lang="en-US" sz="900" dirty="0"/>
           </a:p>
@@ -22531,18 +23143,18 @@
       </p:sp>
       <p:sp>
         <p:nvSpPr>
-          <p:cNvPr id="47" name="Shape 45"/>
-          <p:cNvSpPr/>
-          <p:nvPr/>
-        </p:nvSpPr>
-        <p:spPr>
-          <a:xfrm>
-            <a:off x="7677912" y="4169664"/>
-            <a:ext cx="685800" cy="475488"/>
+          <p:cNvPr id="53" name="Shape 51"/>
+          <p:cNvSpPr/>
+          <p:nvPr/>
+        </p:nvSpPr>
+        <p:spPr>
+          <a:xfrm>
+            <a:off x="7033565" y="4169664"/>
+            <a:ext cx="676656" cy="384048"/>
           </a:xfrm>
           <a:prstGeom prst="rect">
             <a:avLst>
-              <a:gd name="adj" fmla="val 7692"/>
+              <a:gd name="adj" fmla="val 9524"/>
             </a:avLst>
           </a:prstGeom>
           <a:solidFill>
@@ -22558,14 +23170,14 @@
       </p:sp>
       <p:sp>
         <p:nvSpPr>
-          <p:cNvPr id="48" name="Text 46"/>
-          <p:cNvSpPr/>
-          <p:nvPr/>
-        </p:nvSpPr>
-        <p:spPr>
-          <a:xfrm>
-            <a:off x="7677912" y="4169664"/>
-            <a:ext cx="685800" cy="475488"/>
+          <p:cNvPr id="54" name="Text 52"/>
+          <p:cNvSpPr/>
+          <p:nvPr/>
+        </p:nvSpPr>
+        <p:spPr>
+          <a:xfrm>
+            <a:off x="7033565" y="4169664"/>
+            <a:ext cx="676656" cy="384048"/>
           </a:xfrm>
           <a:prstGeom prst="rect">
             <a:avLst/>
@@ -22589,9 +23201,114 @@
                 <a:ea typeface="Trebuchet MS" pitchFamily="34" charset="-122"/>
                 <a:cs typeface="Trebuchet MS" pitchFamily="34" charset="-120"/>
               </a:rPr>
-              <a:t>t</a:t>
+              <a:t>u</a:t>
             </a:r>
             <a:endParaRPr lang="en-US" sz="900" dirty="0"/>
+          </a:p>
+        </p:txBody>
+      </p:sp>
+      <p:sp>
+        <p:nvSpPr>
+          <p:cNvPr id="55" name="Shape 53"/>
+          <p:cNvSpPr/>
+          <p:nvPr/>
+        </p:nvSpPr>
+        <p:spPr>
+          <a:xfrm>
+            <a:off x="7759598" y="4169664"/>
+            <a:ext cx="676656" cy="384048"/>
+          </a:xfrm>
+          <a:prstGeom prst="rect">
+            <a:avLst>
+              <a:gd name="adj" fmla="val 9524"/>
+            </a:avLst>
+          </a:prstGeom>
+          <a:solidFill>
+            <a:srgbClr val="FFFFFF"/>
+          </a:solidFill>
+          <a:ln w="12700">
+            <a:solidFill>
+              <a:srgbClr val="DB2777"/>
+            </a:solidFill>
+            <a:prstDash val="solid"/>
+          </a:ln>
+        </p:spPr>
+      </p:sp>
+      <p:sp>
+        <p:nvSpPr>
+          <p:cNvPr id="56" name="Text 54"/>
+          <p:cNvSpPr/>
+          <p:nvPr/>
+        </p:nvSpPr>
+        <p:spPr>
+          <a:xfrm>
+            <a:off x="7759598" y="4169664"/>
+            <a:ext cx="676656" cy="384048"/>
+          </a:xfrm>
+          <a:prstGeom prst="rect">
+            <a:avLst/>
+          </a:prstGeom>
+          <a:noFill/>
+          <a:ln/>
+        </p:spPr>
+        <p:txBody>
+          <a:bodyPr wrap="square" lIns="0" tIns="0" rIns="0" bIns="0" rtlCol="0" anchor="ctr"/>
+          <a:lstStyle/>
+          <a:p>
+            <a:pPr algn="ctr" indent="0" marL="0">
+              <a:buNone/>
+            </a:pPr>
+            <a:r>
+              <a:rPr lang="en-US" sz="900" b="1" dirty="0">
+                <a:solidFill>
+                  <a:srgbClr val="9D174D"/>
+                </a:solidFill>
+                <a:latin typeface="Trebuchet MS" pitchFamily="34" charset="0"/>
+                <a:ea typeface="Trebuchet MS" pitchFamily="34" charset="-122"/>
+                <a:cs typeface="Trebuchet MS" pitchFamily="34" charset="-120"/>
+              </a:rPr>
+              <a:t>te</a:t>
+            </a:r>
+            <a:endParaRPr lang="en-US" sz="900" dirty="0"/>
+          </a:p>
+        </p:txBody>
+      </p:sp>
+      <p:sp>
+        <p:nvSpPr>
+          <p:cNvPr id="57" name="Text 55"/>
+          <p:cNvSpPr/>
+          <p:nvPr/>
+        </p:nvSpPr>
+        <p:spPr>
+          <a:xfrm>
+            <a:off x="7759598" y="4572000"/>
+            <a:ext cx="676656" cy="219456"/>
+          </a:xfrm>
+          <a:prstGeom prst="rect">
+            <a:avLst/>
+          </a:prstGeom>
+          <a:noFill/>
+          <a:ln/>
+        </p:spPr>
+        <p:txBody>
+          <a:bodyPr wrap="square" lIns="0" tIns="0" rIns="0" bIns="0" rtlCol="0" anchor="t"/>
+          <a:lstStyle/>
+          <a:p>
+            <a:pPr algn="ctr" indent="0" marL="0">
+              <a:buNone/>
+            </a:pPr>
+            <a:r>
+              <a:rPr lang="en-US" sz="750" i="1" dirty="0">
+                <a:solidFill>
+                  <a:srgbClr val="94A3B8"/>
+                </a:solidFill>
+                <a:latin typeface="Calibri" pitchFamily="34" charset="0"/>
+                <a:ea typeface="Calibri" pitchFamily="34" charset="-122"/>
+                <a:cs typeface="Calibri" pitchFamily="34" charset="-120"/>
+              </a:rPr>
+              <a:t>/t/</a:t>
+            </a:r>
+            <a:endParaRPr lang="en-US" sz="750" dirty="0"/>
           </a:p>
         </p:txBody>
       </p:sp>
@@ -22881,7 +23598,7 @@
                 <a:ea typeface="Calibri" pitchFamily="34" charset="-122"/>
                 <a:cs typeface="Calibri" pitchFamily="34" charset="-120"/>
               </a:rPr>
-              <a:t>Word Labs  •  wordlabs.app  •  Prefix: 'sub-' = under, below, beneath</a:t>
+              <a:t>Word Labs  •  wordlabs.app  •  Prefix: 'sub-' = under, below, less than</a:t>
             </a:r>
             <a:endParaRPr lang="en-US" sz="800" dirty="0"/>
           </a:p>
@@ -23020,7 +23737,7 @@
                 <a:ea typeface="Trebuchet MS" pitchFamily="34" charset="-122"/>
                 <a:cs typeface="Trebuchet MS" pitchFamily="34" charset="-120"/>
               </a:rPr>
-              <a:t>suburb</a:t>
+              <a:t>subtitle</a:t>
             </a:r>
             <a:endParaRPr lang="en-US" sz="2800" dirty="0"/>
           </a:p>
@@ -23708,7 +24425,7 @@
                 <a:ea typeface="Calibri" pitchFamily="34" charset="-122"/>
                 <a:cs typeface="Calibri" pitchFamily="34" charset="-120"/>
               </a:rPr>
-              <a:t>Word Labs  •  wordlabs.app  •  Prefix: 'sub-' = under, below, beneath</a:t>
+              <a:t>Word Labs  •  wordlabs.app  •  Prefix: 'sub-' = under, below, less than</a:t>
             </a:r>
             <a:endParaRPr lang="en-US" sz="800" dirty="0"/>
           </a:p>
@@ -23847,7 +24564,7 @@
                 <a:ea typeface="Trebuchet MS" pitchFamily="34" charset="-122"/>
                 <a:cs typeface="Trebuchet MS" pitchFamily="34" charset="-120"/>
               </a:rPr>
-              <a:t>suburb</a:t>
+              <a:t>subtitle</a:t>
             </a:r>
             <a:endParaRPr lang="en-US" sz="2800" dirty="0"/>
           </a:p>
@@ -24098,7 +24815,7 @@
                 <a:ea typeface="Trebuchet MS" pitchFamily="34" charset="-122"/>
                 <a:cs typeface="Trebuchet MS" pitchFamily="34" charset="-120"/>
               </a:rPr>
-              <a:t>urb</a:t>
+              <a:t>title</a:t>
             </a:r>
             <a:endParaRPr lang="en-US" sz="1300" dirty="0"/>
           </a:p>
@@ -24137,7 +24854,7 @@
                 <a:ea typeface="Calibri" pitchFamily="34" charset="-122"/>
                 <a:cs typeface="Calibri" pitchFamily="34" charset="-120"/>
               </a:rPr>
-              <a:t>city</a:t>
+              <a:t>a name or heading</a:t>
             </a:r>
             <a:endParaRPr lang="en-US" sz="850" dirty="0"/>
           </a:p>
@@ -24693,7 +25410,7 @@
                 <a:ea typeface="Calibri" pitchFamily="34" charset="-122"/>
                 <a:cs typeface="Calibri" pitchFamily="34" charset="-120"/>
               </a:rPr>
-              <a:t>Word Labs  •  wordlabs.app  •  Prefix: 'sub-' = under, below, beneath</a:t>
+              <a:t>Word Labs  •  wordlabs.app  •  Prefix: 'sub-' = under, below, less than</a:t>
             </a:r>
             <a:endParaRPr lang="en-US" sz="800" dirty="0"/>
           </a:p>
@@ -24766,7 +25483,7 @@
                 <a:ea typeface="Trebuchet MS" pitchFamily="34" charset="-122"/>
                 <a:cs typeface="Trebuchet MS" pitchFamily="34" charset="-120"/>
               </a:rPr>
-              <a:t>We are learning that the prefix 'sub-' means 'under, below, beneath'.</a:t>
+              <a:t>We are learning that the prefix 'sub-' means 'under, below, less than'.</a:t>
             </a:r>
             <a:endParaRPr lang="en-US" sz="2000" dirty="0"/>
           </a:p>
@@ -25412,7 +26129,7 @@
                 <a:ea typeface="Calibri" pitchFamily="34" charset="-122"/>
                 <a:cs typeface="Calibri" pitchFamily="34" charset="-120"/>
               </a:rPr>
-              <a:t>Word Labs  •  wordlabs.app  •  Prefix: 'sub-' = under, below, beneath</a:t>
+              <a:t>Word Labs  •  wordlabs.app  •  Prefix: 'sub-' = under, below, less than</a:t>
             </a:r>
             <a:endParaRPr lang="en-US" sz="800" dirty="0"/>
           </a:p>
@@ -25551,7 +26268,7 @@
                 <a:ea typeface="Trebuchet MS" pitchFamily="34" charset="-122"/>
                 <a:cs typeface="Trebuchet MS" pitchFamily="34" charset="-120"/>
               </a:rPr>
-              <a:t>suburb</a:t>
+              <a:t>subtitle</a:t>
             </a:r>
             <a:endParaRPr lang="en-US" sz="2800" dirty="0"/>
           </a:p>
@@ -25802,7 +26519,7 @@
                 <a:ea typeface="Trebuchet MS" pitchFamily="34" charset="-122"/>
                 <a:cs typeface="Trebuchet MS" pitchFamily="34" charset="-120"/>
               </a:rPr>
-              <a:t>urb</a:t>
+              <a:t>title</a:t>
             </a:r>
             <a:endParaRPr lang="en-US" sz="1300" dirty="0"/>
           </a:p>
@@ -25841,7 +26558,7 @@
                 <a:ea typeface="Calibri" pitchFamily="34" charset="-122"/>
                 <a:cs typeface="Calibri" pitchFamily="34" charset="-120"/>
               </a:rPr>
-              <a:t>city</a:t>
+              <a:t>a name or heading</a:t>
             </a:r>
             <a:endParaRPr lang="en-US" sz="850" dirty="0"/>
           </a:p>
@@ -25948,7 +26665,7 @@
         </p:nvSpPr>
         <p:spPr>
           <a:xfrm>
-            <a:off x="2999232" y="3364992"/>
+            <a:off x="2313432" y="3364992"/>
             <a:ext cx="1645920" cy="475488"/>
           </a:xfrm>
           <a:prstGeom prst="rect">
@@ -25975,7 +26692,7 @@
         </p:nvSpPr>
         <p:spPr>
           <a:xfrm>
-            <a:off x="2999232" y="3364992"/>
+            <a:off x="2313432" y="3364992"/>
             <a:ext cx="1645920" cy="475488"/>
           </a:xfrm>
           <a:prstGeom prst="rect">
@@ -26014,8 +26731,8 @@
         </p:nvSpPr>
         <p:spPr>
           <a:xfrm>
-            <a:off x="4645152" y="3364992"/>
-            <a:ext cx="1097280" cy="475488"/>
+            <a:off x="3959352" y="3364992"/>
+            <a:ext cx="411480" cy="475488"/>
           </a:xfrm>
           <a:prstGeom prst="rect">
             <a:avLst/>
@@ -26053,7 +26770,7 @@
         </p:nvSpPr>
         <p:spPr>
           <a:xfrm>
-            <a:off x="5742432" y="3364992"/>
+            <a:off x="4370832" y="3364992"/>
             <a:ext cx="1645920" cy="475488"/>
           </a:xfrm>
           <a:prstGeom prst="rect">
@@ -26080,7 +26797,7 @@
         </p:nvSpPr>
         <p:spPr>
           <a:xfrm>
-            <a:off x="5742432" y="3364992"/>
+            <a:off x="4370832" y="3364992"/>
             <a:ext cx="1645920" cy="475488"/>
           </a:xfrm>
           <a:prstGeom prst="rect">
@@ -26105,7 +26822,7 @@
                 <a:ea typeface="Trebuchet MS" pitchFamily="34" charset="-122"/>
                 <a:cs typeface="Trebuchet MS" pitchFamily="34" charset="-120"/>
               </a:rPr>
-              <a:t>urb</a:t>
+              <a:t>ti</a:t>
             </a:r>
             <a:endParaRPr lang="en-US" sz="1400" dirty="0"/>
           </a:p>
@@ -26113,7 +26830,112 @@
       </p:sp>
       <p:sp>
         <p:nvSpPr>
-          <p:cNvPr id="30" name="Shape 28"/>
+          <p:cNvPr id="30" name="Text 28"/>
+          <p:cNvSpPr/>
+          <p:nvPr/>
+        </p:nvSpPr>
+        <p:spPr>
+          <a:xfrm>
+            <a:off x="6016752" y="3364992"/>
+            <a:ext cx="411480" cy="475488"/>
+          </a:xfrm>
+          <a:prstGeom prst="rect">
+            <a:avLst/>
+          </a:prstGeom>
+          <a:noFill/>
+          <a:ln/>
+        </p:spPr>
+        <p:txBody>
+          <a:bodyPr wrap="square" lIns="0" tIns="0" rIns="0" bIns="0" rtlCol="0" anchor="ctr"/>
+          <a:lstStyle/>
+          <a:p>
+            <a:pPr algn="ctr" indent="0" marL="0">
+              <a:buNone/>
+            </a:pPr>
+            <a:r>
+              <a:rPr lang="en-US" sz="1600" b="1" dirty="0">
+                <a:solidFill>
+                  <a:srgbClr val="0D9488"/>
+                </a:solidFill>
+                <a:latin typeface="Trebuchet MS" pitchFamily="34" charset="0"/>
+                <a:ea typeface="Trebuchet MS" pitchFamily="34" charset="-122"/>
+                <a:cs typeface="Trebuchet MS" pitchFamily="34" charset="-120"/>
+              </a:rPr>
+              <a:t>·</a:t>
+            </a:r>
+            <a:endParaRPr lang="en-US" sz="1600" dirty="0"/>
+          </a:p>
+        </p:txBody>
+      </p:sp>
+      <p:sp>
+        <p:nvSpPr>
+          <p:cNvPr id="31" name="Shape 29"/>
+          <p:cNvSpPr/>
+          <p:nvPr/>
+        </p:nvSpPr>
+        <p:spPr>
+          <a:xfrm>
+            <a:off x="6428232" y="3364992"/>
+            <a:ext cx="1645920" cy="475488"/>
+          </a:xfrm>
+          <a:prstGeom prst="rect">
+            <a:avLst>
+              <a:gd name="adj" fmla="val 9615"/>
+            </a:avLst>
+          </a:prstGeom>
+          <a:solidFill>
+            <a:srgbClr val="FFFFFF"/>
+          </a:solidFill>
+          <a:ln w="12700">
+            <a:solidFill>
+              <a:srgbClr val="0D9488"/>
+            </a:solidFill>
+            <a:prstDash val="solid"/>
+          </a:ln>
+        </p:spPr>
+      </p:sp>
+      <p:sp>
+        <p:nvSpPr>
+          <p:cNvPr id="32" name="Text 30"/>
+          <p:cNvSpPr/>
+          <p:nvPr/>
+        </p:nvSpPr>
+        <p:spPr>
+          <a:xfrm>
+            <a:off x="6428232" y="3364992"/>
+            <a:ext cx="1645920" cy="475488"/>
+          </a:xfrm>
+          <a:prstGeom prst="rect">
+            <a:avLst/>
+          </a:prstGeom>
+          <a:noFill/>
+          <a:ln/>
+        </p:spPr>
+        <p:txBody>
+          <a:bodyPr wrap="square" lIns="0" tIns="0" rIns="0" bIns="0" rtlCol="0" anchor="ctr"/>
+          <a:lstStyle/>
+          <a:p>
+            <a:pPr algn="ctr" indent="0" marL="0">
+              <a:buNone/>
+            </a:pPr>
+            <a:r>
+              <a:rPr lang="en-US" sz="1400" b="1" dirty="0">
+                <a:solidFill>
+                  <a:srgbClr val="0D9488"/>
+                </a:solidFill>
+                <a:latin typeface="Trebuchet MS" pitchFamily="34" charset="0"/>
+                <a:ea typeface="Trebuchet MS" pitchFamily="34" charset="-122"/>
+                <a:cs typeface="Trebuchet MS" pitchFamily="34" charset="-120"/>
+              </a:rPr>
+              <a:t>tle</a:t>
+            </a:r>
+            <a:endParaRPr lang="en-US" sz="1400" dirty="0"/>
+          </a:p>
+        </p:txBody>
+      </p:sp>
+      <p:sp>
+        <p:nvSpPr>
+          <p:cNvPr id="33" name="Shape 31"/>
           <p:cNvSpPr/>
           <p:nvPr/>
         </p:nvSpPr>
@@ -26140,7 +26962,7 @@
       </p:sp>
       <p:sp>
         <p:nvSpPr>
-          <p:cNvPr id="31" name="Text 29"/>
+          <p:cNvPr id="34" name="Text 32"/>
           <p:cNvSpPr/>
           <p:nvPr/>
         </p:nvSpPr>
@@ -26179,7 +27001,7 @@
       </p:sp>
       <p:sp>
         <p:nvSpPr>
-          <p:cNvPr id="32" name="Shape 30"/>
+          <p:cNvPr id="35" name="Shape 33"/>
           <p:cNvSpPr/>
           <p:nvPr/>
         </p:nvSpPr>
@@ -26206,7 +27028,7 @@
       </p:sp>
       <p:sp>
         <p:nvSpPr>
-          <p:cNvPr id="33" name="Text 31"/>
+          <p:cNvPr id="36" name="Text 34"/>
           <p:cNvSpPr/>
           <p:nvPr/>
         </p:nvSpPr>
@@ -26529,7 +27351,7 @@
                 <a:ea typeface="Calibri" pitchFamily="34" charset="-122"/>
                 <a:cs typeface="Calibri" pitchFamily="34" charset="-120"/>
               </a:rPr>
-              <a:t>Word Labs  •  wordlabs.app  •  Prefix: 'sub-' = under, below, beneath</a:t>
+              <a:t>Word Labs  •  wordlabs.app  •  Prefix: 'sub-' = under, below, less than</a:t>
             </a:r>
             <a:endParaRPr lang="en-US" sz="800" dirty="0"/>
           </a:p>
@@ -26668,7 +27490,7 @@
                 <a:ea typeface="Trebuchet MS" pitchFamily="34" charset="-122"/>
                 <a:cs typeface="Trebuchet MS" pitchFamily="34" charset="-120"/>
               </a:rPr>
-              <a:t>suburb</a:t>
+              <a:t>subtitle</a:t>
             </a:r>
             <a:endParaRPr lang="en-US" sz="2800" dirty="0"/>
           </a:p>
@@ -26919,7 +27741,7 @@
                 <a:ea typeface="Trebuchet MS" pitchFamily="34" charset="-122"/>
                 <a:cs typeface="Trebuchet MS" pitchFamily="34" charset="-120"/>
               </a:rPr>
-              <a:t>urb</a:t>
+              <a:t>title</a:t>
             </a:r>
             <a:endParaRPr lang="en-US" sz="1300" dirty="0"/>
           </a:p>
@@ -26958,7 +27780,7 @@
                 <a:ea typeface="Calibri" pitchFamily="34" charset="-122"/>
                 <a:cs typeface="Calibri" pitchFamily="34" charset="-120"/>
               </a:rPr>
-              <a:t>city</a:t>
+              <a:t>a name or heading</a:t>
             </a:r>
             <a:endParaRPr lang="en-US" sz="850" dirty="0"/>
           </a:p>
@@ -27065,7 +27887,7 @@
         </p:nvSpPr>
         <p:spPr>
           <a:xfrm>
-            <a:off x="2999232" y="3364992"/>
+            <a:off x="2313432" y="3364992"/>
             <a:ext cx="1645920" cy="475488"/>
           </a:xfrm>
           <a:prstGeom prst="rect">
@@ -27092,7 +27914,7 @@
         </p:nvSpPr>
         <p:spPr>
           <a:xfrm>
-            <a:off x="2999232" y="3364992"/>
+            <a:off x="2313432" y="3364992"/>
             <a:ext cx="1645920" cy="475488"/>
           </a:xfrm>
           <a:prstGeom prst="rect">
@@ -27131,8 +27953,8 @@
         </p:nvSpPr>
         <p:spPr>
           <a:xfrm>
-            <a:off x="4645152" y="3364992"/>
-            <a:ext cx="1097280" cy="475488"/>
+            <a:off x="3959352" y="3364992"/>
+            <a:ext cx="411480" cy="475488"/>
           </a:xfrm>
           <a:prstGeom prst="rect">
             <a:avLst/>
@@ -27170,7 +27992,7 @@
         </p:nvSpPr>
         <p:spPr>
           <a:xfrm>
-            <a:off x="5742432" y="3364992"/>
+            <a:off x="4370832" y="3364992"/>
             <a:ext cx="1645920" cy="475488"/>
           </a:xfrm>
           <a:prstGeom prst="rect">
@@ -27197,7 +28019,7 @@
         </p:nvSpPr>
         <p:spPr>
           <a:xfrm>
-            <a:off x="5742432" y="3364992"/>
+            <a:off x="4370832" y="3364992"/>
             <a:ext cx="1645920" cy="475488"/>
           </a:xfrm>
           <a:prstGeom prst="rect">
@@ -27222,7 +28044,7 @@
                 <a:ea typeface="Trebuchet MS" pitchFamily="34" charset="-122"/>
                 <a:cs typeface="Trebuchet MS" pitchFamily="34" charset="-120"/>
               </a:rPr>
-              <a:t>urb</a:t>
+              <a:t>ti</a:t>
             </a:r>
             <a:endParaRPr lang="en-US" sz="1400" dirty="0"/>
           </a:p>
@@ -27230,7 +28052,112 @@
       </p:sp>
       <p:sp>
         <p:nvSpPr>
-          <p:cNvPr id="30" name="Shape 28"/>
+          <p:cNvPr id="30" name="Text 28"/>
+          <p:cNvSpPr/>
+          <p:nvPr/>
+        </p:nvSpPr>
+        <p:spPr>
+          <a:xfrm>
+            <a:off x="6016752" y="3364992"/>
+            <a:ext cx="411480" cy="475488"/>
+          </a:xfrm>
+          <a:prstGeom prst="rect">
+            <a:avLst/>
+          </a:prstGeom>
+          <a:noFill/>
+          <a:ln/>
+        </p:spPr>
+        <p:txBody>
+          <a:bodyPr wrap="square" lIns="0" tIns="0" rIns="0" bIns="0" rtlCol="0" anchor="ctr"/>
+          <a:lstStyle/>
+          <a:p>
+            <a:pPr algn="ctr" indent="0" marL="0">
+              <a:buNone/>
+            </a:pPr>
+            <a:r>
+              <a:rPr lang="en-US" sz="1600" b="1" dirty="0">
+                <a:solidFill>
+                  <a:srgbClr val="0D9488"/>
+                </a:solidFill>
+                <a:latin typeface="Trebuchet MS" pitchFamily="34" charset="0"/>
+                <a:ea typeface="Trebuchet MS" pitchFamily="34" charset="-122"/>
+                <a:cs typeface="Trebuchet MS" pitchFamily="34" charset="-120"/>
+              </a:rPr>
+              <a:t>·</a:t>
+            </a:r>
+            <a:endParaRPr lang="en-US" sz="1600" dirty="0"/>
+          </a:p>
+        </p:txBody>
+      </p:sp>
+      <p:sp>
+        <p:nvSpPr>
+          <p:cNvPr id="31" name="Shape 29"/>
+          <p:cNvSpPr/>
+          <p:nvPr/>
+        </p:nvSpPr>
+        <p:spPr>
+          <a:xfrm>
+            <a:off x="6428232" y="3364992"/>
+            <a:ext cx="1645920" cy="475488"/>
+          </a:xfrm>
+          <a:prstGeom prst="rect">
+            <a:avLst>
+              <a:gd name="adj" fmla="val 9615"/>
+            </a:avLst>
+          </a:prstGeom>
+          <a:solidFill>
+            <a:srgbClr val="FFFFFF"/>
+          </a:solidFill>
+          <a:ln w="12700">
+            <a:solidFill>
+              <a:srgbClr val="0D9488"/>
+            </a:solidFill>
+            <a:prstDash val="solid"/>
+          </a:ln>
+        </p:spPr>
+      </p:sp>
+      <p:sp>
+        <p:nvSpPr>
+          <p:cNvPr id="32" name="Text 30"/>
+          <p:cNvSpPr/>
+          <p:nvPr/>
+        </p:nvSpPr>
+        <p:spPr>
+          <a:xfrm>
+            <a:off x="6428232" y="3364992"/>
+            <a:ext cx="1645920" cy="475488"/>
+          </a:xfrm>
+          <a:prstGeom prst="rect">
+            <a:avLst/>
+          </a:prstGeom>
+          <a:noFill/>
+          <a:ln/>
+        </p:spPr>
+        <p:txBody>
+          <a:bodyPr wrap="square" lIns="0" tIns="0" rIns="0" bIns="0" rtlCol="0" anchor="ctr"/>
+          <a:lstStyle/>
+          <a:p>
+            <a:pPr algn="ctr" indent="0" marL="0">
+              <a:buNone/>
+            </a:pPr>
+            <a:r>
+              <a:rPr lang="en-US" sz="1400" b="1" dirty="0">
+                <a:solidFill>
+                  <a:srgbClr val="0D9488"/>
+                </a:solidFill>
+                <a:latin typeface="Trebuchet MS" pitchFamily="34" charset="0"/>
+                <a:ea typeface="Trebuchet MS" pitchFamily="34" charset="-122"/>
+                <a:cs typeface="Trebuchet MS" pitchFamily="34" charset="-120"/>
+              </a:rPr>
+              <a:t>tle</a:t>
+            </a:r>
+            <a:endParaRPr lang="en-US" sz="1400" dirty="0"/>
+          </a:p>
+        </p:txBody>
+      </p:sp>
+      <p:sp>
+        <p:nvSpPr>
+          <p:cNvPr id="33" name="Shape 31"/>
           <p:cNvSpPr/>
           <p:nvPr/>
         </p:nvSpPr>
@@ -27257,7 +28184,7 @@
       </p:sp>
       <p:sp>
         <p:nvSpPr>
-          <p:cNvPr id="31" name="Text 29"/>
+          <p:cNvPr id="34" name="Text 32"/>
           <p:cNvSpPr/>
           <p:nvPr/>
         </p:nvSpPr>
@@ -27296,18 +28223,18 @@
       </p:sp>
       <p:sp>
         <p:nvSpPr>
-          <p:cNvPr id="32" name="Shape 30"/>
+          <p:cNvPr id="35" name="Shape 33"/>
           <p:cNvSpPr/>
           <p:nvPr/>
         </p:nvSpPr>
         <p:spPr>
           <a:xfrm>
             <a:off x="1874520" y="4096512"/>
-            <a:ext cx="6903720" cy="658368"/>
+            <a:ext cx="6903720" cy="804672"/>
           </a:xfrm>
           <a:prstGeom prst="rect">
             <a:avLst>
-              <a:gd name="adj" fmla="val 8333"/>
+              <a:gd name="adj" fmla="val 6818"/>
             </a:avLst>
           </a:prstGeom>
           <a:solidFill>
@@ -27323,18 +28250,18 @@
       </p:sp>
       <p:sp>
         <p:nvSpPr>
-          <p:cNvPr id="33" name="Shape 31"/>
-          <p:cNvSpPr/>
-          <p:nvPr/>
-        </p:nvSpPr>
-        <p:spPr>
-          <a:xfrm>
-            <a:off x="2427732" y="4169664"/>
-            <a:ext cx="685800" cy="475488"/>
+          <p:cNvPr id="36" name="Shape 34"/>
+          <p:cNvSpPr/>
+          <p:nvPr/>
+        </p:nvSpPr>
+        <p:spPr>
+          <a:xfrm>
+            <a:off x="2124837" y="4169664"/>
+            <a:ext cx="685800" cy="384048"/>
           </a:xfrm>
           <a:prstGeom prst="rect">
             <a:avLst>
-              <a:gd name="adj" fmla="val 7692"/>
+              <a:gd name="adj" fmla="val 9524"/>
             </a:avLst>
           </a:prstGeom>
           <a:solidFill>
@@ -27350,14 +28277,14 @@
       </p:sp>
       <p:sp>
         <p:nvSpPr>
-          <p:cNvPr id="34" name="Text 32"/>
-          <p:cNvSpPr/>
-          <p:nvPr/>
-        </p:nvSpPr>
-        <p:spPr>
-          <a:xfrm>
-            <a:off x="2427732" y="4169664"/>
-            <a:ext cx="685800" cy="475488"/>
+          <p:cNvPr id="37" name="Text 35"/>
+          <p:cNvSpPr/>
+          <p:nvPr/>
+        </p:nvSpPr>
+        <p:spPr>
+          <a:xfrm>
+            <a:off x="2124837" y="4169664"/>
+            <a:ext cx="685800" cy="384048"/>
           </a:xfrm>
           <a:prstGeom prst="rect">
             <a:avLst/>
@@ -27389,18 +28316,18 @@
       </p:sp>
       <p:sp>
         <p:nvSpPr>
-          <p:cNvPr id="35" name="Shape 33"/>
-          <p:cNvSpPr/>
-          <p:nvPr/>
-        </p:nvSpPr>
-        <p:spPr>
-          <a:xfrm>
-            <a:off x="3639312" y="4169664"/>
-            <a:ext cx="685800" cy="475488"/>
+          <p:cNvPr id="38" name="Shape 36"/>
+          <p:cNvSpPr/>
+          <p:nvPr/>
+        </p:nvSpPr>
+        <p:spPr>
+          <a:xfrm>
+            <a:off x="3033522" y="4169664"/>
+            <a:ext cx="685800" cy="384048"/>
           </a:xfrm>
           <a:prstGeom prst="rect">
             <a:avLst>
-              <a:gd name="adj" fmla="val 7692"/>
+              <a:gd name="adj" fmla="val 9524"/>
             </a:avLst>
           </a:prstGeom>
           <a:solidFill>
@@ -27416,14 +28343,14 @@
       </p:sp>
       <p:sp>
         <p:nvSpPr>
-          <p:cNvPr id="36" name="Text 34"/>
-          <p:cNvSpPr/>
-          <p:nvPr/>
-        </p:nvSpPr>
-        <p:spPr>
-          <a:xfrm>
-            <a:off x="3639312" y="4169664"/>
-            <a:ext cx="685800" cy="475488"/>
+          <p:cNvPr id="39" name="Text 37"/>
+          <p:cNvSpPr/>
+          <p:nvPr/>
+        </p:nvSpPr>
+        <p:spPr>
+          <a:xfrm>
+            <a:off x="3033522" y="4169664"/>
+            <a:ext cx="685800" cy="384048"/>
           </a:xfrm>
           <a:prstGeom prst="rect">
             <a:avLst/>
@@ -27455,18 +28382,18 @@
       </p:sp>
       <p:sp>
         <p:nvSpPr>
-          <p:cNvPr id="37" name="Shape 35"/>
-          <p:cNvSpPr/>
-          <p:nvPr/>
-        </p:nvSpPr>
-        <p:spPr>
-          <a:xfrm>
-            <a:off x="4850892" y="4169664"/>
-            <a:ext cx="685800" cy="475488"/>
+          <p:cNvPr id="40" name="Shape 38"/>
+          <p:cNvSpPr/>
+          <p:nvPr/>
+        </p:nvSpPr>
+        <p:spPr>
+          <a:xfrm>
+            <a:off x="3942207" y="4169664"/>
+            <a:ext cx="685800" cy="384048"/>
           </a:xfrm>
           <a:prstGeom prst="rect">
             <a:avLst>
-              <a:gd name="adj" fmla="val 7692"/>
+              <a:gd name="adj" fmla="val 9524"/>
             </a:avLst>
           </a:prstGeom>
           <a:solidFill>
@@ -27482,14 +28409,14 @@
       </p:sp>
       <p:sp>
         <p:nvSpPr>
-          <p:cNvPr id="38" name="Text 36"/>
-          <p:cNvSpPr/>
-          <p:nvPr/>
-        </p:nvSpPr>
-        <p:spPr>
-          <a:xfrm>
-            <a:off x="4850892" y="4169664"/>
-            <a:ext cx="685800" cy="475488"/>
+          <p:cNvPr id="41" name="Text 39"/>
+          <p:cNvSpPr/>
+          <p:nvPr/>
+        </p:nvSpPr>
+        <p:spPr>
+          <a:xfrm>
+            <a:off x="3942207" y="4169664"/>
+            <a:ext cx="685800" cy="384048"/>
           </a:xfrm>
           <a:prstGeom prst="rect">
             <a:avLst/>
@@ -27521,18 +28448,18 @@
       </p:sp>
       <p:sp>
         <p:nvSpPr>
-          <p:cNvPr id="39" name="Shape 37"/>
-          <p:cNvSpPr/>
-          <p:nvPr/>
-        </p:nvSpPr>
-        <p:spPr>
-          <a:xfrm>
-            <a:off x="6062472" y="4169664"/>
-            <a:ext cx="685800" cy="475488"/>
+          <p:cNvPr id="42" name="Shape 40"/>
+          <p:cNvSpPr/>
+          <p:nvPr/>
+        </p:nvSpPr>
+        <p:spPr>
+          <a:xfrm>
+            <a:off x="4850892" y="4169664"/>
+            <a:ext cx="685800" cy="384048"/>
           </a:xfrm>
           <a:prstGeom prst="rect">
             <a:avLst>
-              <a:gd name="adj" fmla="val 7692"/>
+              <a:gd name="adj" fmla="val 9524"/>
             </a:avLst>
           </a:prstGeom>
           <a:solidFill>
@@ -27548,14 +28475,14 @@
       </p:sp>
       <p:sp>
         <p:nvSpPr>
-          <p:cNvPr id="40" name="Text 38"/>
-          <p:cNvSpPr/>
-          <p:nvPr/>
-        </p:nvSpPr>
-        <p:spPr>
-          <a:xfrm>
-            <a:off x="6062472" y="4169664"/>
-            <a:ext cx="685800" cy="475488"/>
+          <p:cNvPr id="43" name="Text 41"/>
+          <p:cNvSpPr/>
+          <p:nvPr/>
+        </p:nvSpPr>
+        <p:spPr>
+          <a:xfrm>
+            <a:off x="4850892" y="4169664"/>
+            <a:ext cx="685800" cy="384048"/>
           </a:xfrm>
           <a:prstGeom prst="rect">
             <a:avLst/>
@@ -27579,7 +28506,7 @@
                 <a:ea typeface="Trebuchet MS" pitchFamily="34" charset="-122"/>
                 <a:cs typeface="Trebuchet MS" pitchFamily="34" charset="-120"/>
               </a:rPr>
-              <a:t>ur</a:t>
+              <a:t>t</a:t>
             </a:r>
             <a:endParaRPr lang="en-US" sz="900" dirty="0"/>
           </a:p>
@@ -27587,18 +28514,18 @@
       </p:sp>
       <p:sp>
         <p:nvSpPr>
-          <p:cNvPr id="41" name="Shape 39"/>
-          <p:cNvSpPr/>
-          <p:nvPr/>
-        </p:nvSpPr>
-        <p:spPr>
-          <a:xfrm>
-            <a:off x="7274052" y="4169664"/>
-            <a:ext cx="685800" cy="475488"/>
+          <p:cNvPr id="44" name="Shape 42"/>
+          <p:cNvSpPr/>
+          <p:nvPr/>
+        </p:nvSpPr>
+        <p:spPr>
+          <a:xfrm>
+            <a:off x="5759577" y="4169664"/>
+            <a:ext cx="685800" cy="384048"/>
           </a:xfrm>
           <a:prstGeom prst="rect">
             <a:avLst>
-              <a:gd name="adj" fmla="val 7692"/>
+              <a:gd name="adj" fmla="val 9524"/>
             </a:avLst>
           </a:prstGeom>
           <a:solidFill>
@@ -27614,14 +28541,14 @@
       </p:sp>
       <p:sp>
         <p:nvSpPr>
-          <p:cNvPr id="42" name="Text 40"/>
-          <p:cNvSpPr/>
-          <p:nvPr/>
-        </p:nvSpPr>
-        <p:spPr>
-          <a:xfrm>
-            <a:off x="7274052" y="4169664"/>
-            <a:ext cx="685800" cy="475488"/>
+          <p:cNvPr id="45" name="Text 43"/>
+          <p:cNvSpPr/>
+          <p:nvPr/>
+        </p:nvSpPr>
+        <p:spPr>
+          <a:xfrm>
+            <a:off x="5759577" y="4169664"/>
+            <a:ext cx="685800" cy="384048"/>
           </a:xfrm>
           <a:prstGeom prst="rect">
             <a:avLst/>
@@ -27645,9 +28572,180 @@
                 <a:ea typeface="Trebuchet MS" pitchFamily="34" charset="-122"/>
                 <a:cs typeface="Trebuchet MS" pitchFamily="34" charset="-120"/>
               </a:rPr>
-              <a:t>b</a:t>
+              <a:t>i</a:t>
             </a:r>
             <a:endParaRPr lang="en-US" sz="900" dirty="0"/>
+          </a:p>
+        </p:txBody>
+      </p:sp>
+      <p:sp>
+        <p:nvSpPr>
+          <p:cNvPr id="46" name="Shape 44"/>
+          <p:cNvSpPr/>
+          <p:nvPr/>
+        </p:nvSpPr>
+        <p:spPr>
+          <a:xfrm>
+            <a:off x="6668262" y="4169664"/>
+            <a:ext cx="685800" cy="384048"/>
+          </a:xfrm>
+          <a:prstGeom prst="rect">
+            <a:avLst>
+              <a:gd name="adj" fmla="val 9524"/>
+            </a:avLst>
+          </a:prstGeom>
+          <a:solidFill>
+            <a:srgbClr val="FFFFFF"/>
+          </a:solidFill>
+          <a:ln w="12700">
+            <a:solidFill>
+              <a:srgbClr val="DB2777"/>
+            </a:solidFill>
+            <a:prstDash val="solid"/>
+          </a:ln>
+        </p:spPr>
+      </p:sp>
+      <p:sp>
+        <p:nvSpPr>
+          <p:cNvPr id="47" name="Text 45"/>
+          <p:cNvSpPr/>
+          <p:nvPr/>
+        </p:nvSpPr>
+        <p:spPr>
+          <a:xfrm>
+            <a:off x="6668262" y="4169664"/>
+            <a:ext cx="685800" cy="384048"/>
+          </a:xfrm>
+          <a:prstGeom prst="rect">
+            <a:avLst/>
+          </a:prstGeom>
+          <a:noFill/>
+          <a:ln/>
+        </p:spPr>
+        <p:txBody>
+          <a:bodyPr wrap="square" lIns="0" tIns="0" rIns="0" bIns="0" rtlCol="0" anchor="ctr"/>
+          <a:lstStyle/>
+          <a:p>
+            <a:pPr algn="ctr" indent="0" marL="0">
+              <a:buNone/>
+            </a:pPr>
+            <a:r>
+              <a:rPr lang="en-US" sz="900" b="1" dirty="0">
+                <a:solidFill>
+                  <a:srgbClr val="9D174D"/>
+                </a:solidFill>
+                <a:latin typeface="Trebuchet MS" pitchFamily="34" charset="0"/>
+                <a:ea typeface="Trebuchet MS" pitchFamily="34" charset="-122"/>
+                <a:cs typeface="Trebuchet MS" pitchFamily="34" charset="-120"/>
+              </a:rPr>
+              <a:t>t</a:t>
+            </a:r>
+            <a:endParaRPr lang="en-US" sz="900" dirty="0"/>
+          </a:p>
+        </p:txBody>
+      </p:sp>
+      <p:sp>
+        <p:nvSpPr>
+          <p:cNvPr id="48" name="Shape 46"/>
+          <p:cNvSpPr/>
+          <p:nvPr/>
+        </p:nvSpPr>
+        <p:spPr>
+          <a:xfrm>
+            <a:off x="7576947" y="4169664"/>
+            <a:ext cx="685800" cy="384048"/>
+          </a:xfrm>
+          <a:prstGeom prst="rect">
+            <a:avLst>
+              <a:gd name="adj" fmla="val 9524"/>
+            </a:avLst>
+          </a:prstGeom>
+          <a:solidFill>
+            <a:srgbClr val="FFFFFF"/>
+          </a:solidFill>
+          <a:ln w="12700">
+            <a:solidFill>
+              <a:srgbClr val="DB2777"/>
+            </a:solidFill>
+            <a:prstDash val="solid"/>
+          </a:ln>
+        </p:spPr>
+      </p:sp>
+      <p:sp>
+        <p:nvSpPr>
+          <p:cNvPr id="49" name="Text 47"/>
+          <p:cNvSpPr/>
+          <p:nvPr/>
+        </p:nvSpPr>
+        <p:spPr>
+          <a:xfrm>
+            <a:off x="7576947" y="4169664"/>
+            <a:ext cx="685800" cy="384048"/>
+          </a:xfrm>
+          <a:prstGeom prst="rect">
+            <a:avLst/>
+          </a:prstGeom>
+          <a:noFill/>
+          <a:ln/>
+        </p:spPr>
+        <p:txBody>
+          <a:bodyPr wrap="square" lIns="0" tIns="0" rIns="0" bIns="0" rtlCol="0" anchor="ctr"/>
+          <a:lstStyle/>
+          <a:p>
+            <a:pPr algn="ctr" indent="0" marL="0">
+              <a:buNone/>
+            </a:pPr>
+            <a:r>
+              <a:rPr lang="en-US" sz="900" b="1" dirty="0">
+                <a:solidFill>
+                  <a:srgbClr val="9D174D"/>
+                </a:solidFill>
+                <a:latin typeface="Trebuchet MS" pitchFamily="34" charset="0"/>
+                <a:ea typeface="Trebuchet MS" pitchFamily="34" charset="-122"/>
+                <a:cs typeface="Trebuchet MS" pitchFamily="34" charset="-120"/>
+              </a:rPr>
+              <a:t>le</a:t>
+            </a:r>
+            <a:endParaRPr lang="en-US" sz="900" dirty="0"/>
+          </a:p>
+        </p:txBody>
+      </p:sp>
+      <p:sp>
+        <p:nvSpPr>
+          <p:cNvPr id="50" name="Text 48"/>
+          <p:cNvSpPr/>
+          <p:nvPr/>
+        </p:nvSpPr>
+        <p:spPr>
+          <a:xfrm>
+            <a:off x="7576947" y="4572000"/>
+            <a:ext cx="685800" cy="219456"/>
+          </a:xfrm>
+          <a:prstGeom prst="rect">
+            <a:avLst/>
+          </a:prstGeom>
+          <a:noFill/>
+          <a:ln/>
+        </p:spPr>
+        <p:txBody>
+          <a:bodyPr wrap="square" lIns="0" tIns="0" rIns="0" bIns="0" rtlCol="0" anchor="t"/>
+          <a:lstStyle/>
+          <a:p>
+            <a:pPr algn="ctr" indent="0" marL="0">
+              <a:buNone/>
+            </a:pPr>
+            <a:r>
+              <a:rPr lang="en-US" sz="750" i="1" dirty="0">
+                <a:solidFill>
+                  <a:srgbClr val="94A3B8"/>
+                </a:solidFill>
+                <a:latin typeface="Calibri" pitchFamily="34" charset="0"/>
+                <a:ea typeface="Calibri" pitchFamily="34" charset="-122"/>
+                <a:cs typeface="Calibri" pitchFamily="34" charset="-120"/>
+              </a:rPr>
+              <a:t>/ul/</a:t>
+            </a:r>
+            <a:endParaRPr lang="en-US" sz="750" dirty="0"/>
           </a:p>
         </p:txBody>
       </p:sp>
@@ -27937,7 +29035,7 @@
                 <a:ea typeface="Calibri" pitchFamily="34" charset="-122"/>
                 <a:cs typeface="Calibri" pitchFamily="34" charset="-120"/>
               </a:rPr>
-              <a:t>Word Labs  •  wordlabs.app  •  Prefix: 'sub-' = under, below, beneath</a:t>
+              <a:t>Word Labs  •  wordlabs.app  •  Prefix: 'sub-' = under, below, less than</a:t>
             </a:r>
             <a:endParaRPr lang="en-US" sz="800" dirty="0"/>
           </a:p>
@@ -28076,7 +29174,7 @@
                 <a:ea typeface="Trebuchet MS" pitchFamily="34" charset="-122"/>
                 <a:cs typeface="Trebuchet MS" pitchFamily="34" charset="-120"/>
               </a:rPr>
-              <a:t>substitute</a:t>
+              <a:t>subheading</a:t>
             </a:r>
             <a:endParaRPr lang="en-US" sz="2800" dirty="0"/>
           </a:p>
@@ -28764,7 +29862,7 @@
                 <a:ea typeface="Calibri" pitchFamily="34" charset="-122"/>
                 <a:cs typeface="Calibri" pitchFamily="34" charset="-120"/>
               </a:rPr>
-              <a:t>Word Labs  •  wordlabs.app  •  Prefix: 'sub-' = under, below, beneath</a:t>
+              <a:t>Word Labs  •  wordlabs.app  •  Prefix: 'sub-' = under, below, less than</a:t>
             </a:r>
             <a:endParaRPr lang="en-US" sz="800" dirty="0"/>
           </a:p>
@@ -28903,7 +30001,7 @@
                 <a:ea typeface="Trebuchet MS" pitchFamily="34" charset="-122"/>
                 <a:cs typeface="Trebuchet MS" pitchFamily="34" charset="-120"/>
               </a:rPr>
-              <a:t>substitute</a:t>
+              <a:t>subheading</a:t>
             </a:r>
             <a:endParaRPr lang="en-US" sz="2800" dirty="0"/>
           </a:p>
@@ -29154,7 +30252,7 @@
                 <a:ea typeface="Trebuchet MS" pitchFamily="34" charset="-122"/>
                 <a:cs typeface="Trebuchet MS" pitchFamily="34" charset="-120"/>
               </a:rPr>
-              <a:t>stitut</a:t>
+              <a:t>head</a:t>
             </a:r>
             <a:endParaRPr lang="en-US" sz="1300" dirty="0"/>
           </a:p>
@@ -29193,7 +30291,7 @@
                 <a:ea typeface="Calibri" pitchFamily="34" charset="-122"/>
                 <a:cs typeface="Calibri" pitchFamily="34" charset="-120"/>
               </a:rPr>
-              <a:t>to set or place</a:t>
+              <a:t>top, leading part</a:t>
             </a:r>
             <a:endParaRPr lang="en-US" sz="850" dirty="0"/>
           </a:p>
@@ -29266,7 +30364,7 @@
                 <a:ea typeface="Trebuchet MS" pitchFamily="34" charset="-122"/>
                 <a:cs typeface="Trebuchet MS" pitchFamily="34" charset="-120"/>
               </a:rPr>
-              <a:t>e</a:t>
+              <a:t>ing</a:t>
             </a:r>
             <a:endParaRPr lang="en-US" sz="1300" dirty="0"/>
           </a:p>
@@ -29305,7 +30403,7 @@
                 <a:ea typeface="Calibri" pitchFamily="34" charset="-122"/>
                 <a:cs typeface="Calibri" pitchFamily="34" charset="-120"/>
               </a:rPr>
-              <a:t>noun/verb forming</a:t>
+              <a:t>ongoing action or state</a:t>
             </a:r>
             <a:endParaRPr lang="en-US" sz="850" dirty="0"/>
           </a:p>
@@ -29861,7 +30959,7 @@
                 <a:ea typeface="Calibri" pitchFamily="34" charset="-122"/>
                 <a:cs typeface="Calibri" pitchFamily="34" charset="-120"/>
               </a:rPr>
-              <a:t>Word Labs  •  wordlabs.app  •  Prefix: 'sub-' = under, below, beneath</a:t>
+              <a:t>Word Labs  •  wordlabs.app  •  Prefix: 'sub-' = under, below, less than</a:t>
             </a:r>
             <a:endParaRPr lang="en-US" sz="800" dirty="0"/>
           </a:p>
@@ -30000,7 +31098,7 @@
                 <a:ea typeface="Trebuchet MS" pitchFamily="34" charset="-122"/>
                 <a:cs typeface="Trebuchet MS" pitchFamily="34" charset="-120"/>
               </a:rPr>
-              <a:t>substitute</a:t>
+              <a:t>subheading</a:t>
             </a:r>
             <a:endParaRPr lang="en-US" sz="2800" dirty="0"/>
           </a:p>
@@ -30251,7 +31349,7 @@
                 <a:ea typeface="Trebuchet MS" pitchFamily="34" charset="-122"/>
                 <a:cs typeface="Trebuchet MS" pitchFamily="34" charset="-120"/>
               </a:rPr>
-              <a:t>stitut</a:t>
+              <a:t>head</a:t>
             </a:r>
             <a:endParaRPr lang="en-US" sz="1300" dirty="0"/>
           </a:p>
@@ -30290,7 +31388,7 @@
                 <a:ea typeface="Calibri" pitchFamily="34" charset="-122"/>
                 <a:cs typeface="Calibri" pitchFamily="34" charset="-120"/>
               </a:rPr>
-              <a:t>to set or place</a:t>
+              <a:t>top, leading part</a:t>
             </a:r>
             <a:endParaRPr lang="en-US" sz="850" dirty="0"/>
           </a:p>
@@ -30363,7 +31461,7 @@
                 <a:ea typeface="Trebuchet MS" pitchFamily="34" charset="-122"/>
                 <a:cs typeface="Trebuchet MS" pitchFamily="34" charset="-120"/>
               </a:rPr>
-              <a:t>e</a:t>
+              <a:t>ing</a:t>
             </a:r>
             <a:endParaRPr lang="en-US" sz="1300" dirty="0"/>
           </a:p>
@@ -30402,7 +31500,7 @@
                 <a:ea typeface="Calibri" pitchFamily="34" charset="-122"/>
                 <a:cs typeface="Calibri" pitchFamily="34" charset="-120"/>
               </a:rPr>
-              <a:t>noun/verb forming</a:t>
+              <a:t>ongoing action or state</a:t>
             </a:r>
             <a:endParaRPr lang="en-US" sz="850" dirty="0"/>
           </a:p>
@@ -30666,7 +31764,7 @@
                 <a:ea typeface="Trebuchet MS" pitchFamily="34" charset="-122"/>
                 <a:cs typeface="Trebuchet MS" pitchFamily="34" charset="-120"/>
               </a:rPr>
-              <a:t>sti</a:t>
+              <a:t>head</a:t>
             </a:r>
             <a:endParaRPr lang="en-US" sz="1400" dirty="0"/>
           </a:p>
@@ -30771,7 +31869,7 @@
                 <a:ea typeface="Trebuchet MS" pitchFamily="34" charset="-122"/>
                 <a:cs typeface="Trebuchet MS" pitchFamily="34" charset="-120"/>
               </a:rPr>
-              <a:t>tute</a:t>
+              <a:t>ing</a:t>
             </a:r>
             <a:endParaRPr lang="en-US" sz="1400" dirty="0"/>
           </a:p>
@@ -31195,7 +32293,7 @@
                 <a:ea typeface="Calibri" pitchFamily="34" charset="-122"/>
                 <a:cs typeface="Calibri" pitchFamily="34" charset="-120"/>
               </a:rPr>
-              <a:t>Word Labs  •  wordlabs.app  •  Prefix: 'sub-' = under, below, beneath</a:t>
+              <a:t>Word Labs  •  wordlabs.app  •  Prefix: 'sub-' = under, below, less than</a:t>
             </a:r>
             <a:endParaRPr lang="en-US" sz="800" dirty="0"/>
           </a:p>
@@ -31334,7 +32432,7 @@
                 <a:ea typeface="Trebuchet MS" pitchFamily="34" charset="-122"/>
                 <a:cs typeface="Trebuchet MS" pitchFamily="34" charset="-120"/>
               </a:rPr>
-              <a:t>substitute</a:t>
+              <a:t>subheading</a:t>
             </a:r>
             <a:endParaRPr lang="en-US" sz="2800" dirty="0"/>
           </a:p>
@@ -31585,7 +32683,7 @@
                 <a:ea typeface="Trebuchet MS" pitchFamily="34" charset="-122"/>
                 <a:cs typeface="Trebuchet MS" pitchFamily="34" charset="-120"/>
               </a:rPr>
-              <a:t>stitut</a:t>
+              <a:t>head</a:t>
             </a:r>
             <a:endParaRPr lang="en-US" sz="1300" dirty="0"/>
           </a:p>
@@ -31624,7 +32722,7 @@
                 <a:ea typeface="Calibri" pitchFamily="34" charset="-122"/>
                 <a:cs typeface="Calibri" pitchFamily="34" charset="-120"/>
               </a:rPr>
-              <a:t>to set or place</a:t>
+              <a:t>top, leading part</a:t>
             </a:r>
             <a:endParaRPr lang="en-US" sz="850" dirty="0"/>
           </a:p>
@@ -31697,7 +32795,7 @@
                 <a:ea typeface="Trebuchet MS" pitchFamily="34" charset="-122"/>
                 <a:cs typeface="Trebuchet MS" pitchFamily="34" charset="-120"/>
               </a:rPr>
-              <a:t>e</a:t>
+              <a:t>ing</a:t>
             </a:r>
             <a:endParaRPr lang="en-US" sz="1300" dirty="0"/>
           </a:p>
@@ -31736,7 +32834,7 @@
                 <a:ea typeface="Calibri" pitchFamily="34" charset="-122"/>
                 <a:cs typeface="Calibri" pitchFamily="34" charset="-120"/>
               </a:rPr>
-              <a:t>noun/verb forming</a:t>
+              <a:t>ongoing action or state</a:t>
             </a:r>
             <a:endParaRPr lang="en-US" sz="850" dirty="0"/>
           </a:p>
@@ -32000,7 +33098,7 @@
                 <a:ea typeface="Trebuchet MS" pitchFamily="34" charset="-122"/>
                 <a:cs typeface="Trebuchet MS" pitchFamily="34" charset="-120"/>
               </a:rPr>
-              <a:t>sti</a:t>
+              <a:t>head</a:t>
             </a:r>
             <a:endParaRPr lang="en-US" sz="1400" dirty="0"/>
           </a:p>
@@ -32105,7 +33203,7 @@
                 <a:ea typeface="Trebuchet MS" pitchFamily="34" charset="-122"/>
                 <a:cs typeface="Trebuchet MS" pitchFamily="34" charset="-120"/>
               </a:rPr>
-              <a:t>tute</a:t>
+              <a:t>ing</a:t>
             </a:r>
             <a:endParaRPr lang="en-US" sz="1400" dirty="0"/>
           </a:p>
@@ -32212,8 +33310,8 @@
         </p:nvSpPr>
         <p:spPr>
           <a:xfrm>
-            <a:off x="1951330" y="4169664"/>
-            <a:ext cx="676656" cy="384048"/>
+            <a:off x="2023872" y="4169664"/>
+            <a:ext cx="685800" cy="384048"/>
           </a:xfrm>
           <a:prstGeom prst="rect">
             <a:avLst>
@@ -32239,8 +33337,8 @@
         </p:nvSpPr>
         <p:spPr>
           <a:xfrm>
-            <a:off x="1951330" y="4169664"/>
-            <a:ext cx="676656" cy="384048"/>
+            <a:off x="2023872" y="4169664"/>
+            <a:ext cx="685800" cy="384048"/>
           </a:xfrm>
           <a:prstGeom prst="rect">
             <a:avLst/>
@@ -32278,8 +33376,8 @@
         </p:nvSpPr>
         <p:spPr>
           <a:xfrm>
-            <a:off x="2677363" y="4169664"/>
-            <a:ext cx="676656" cy="384048"/>
+            <a:off x="2831592" y="4169664"/>
+            <a:ext cx="685800" cy="384048"/>
           </a:xfrm>
           <a:prstGeom prst="rect">
             <a:avLst>
@@ -32305,8 +33403,8 @@
         </p:nvSpPr>
         <p:spPr>
           <a:xfrm>
-            <a:off x="2677363" y="4169664"/>
-            <a:ext cx="676656" cy="384048"/>
+            <a:off x="2831592" y="4169664"/>
+            <a:ext cx="685800" cy="384048"/>
           </a:xfrm>
           <a:prstGeom prst="rect">
             <a:avLst/>
@@ -32344,8 +33442,8 @@
         </p:nvSpPr>
         <p:spPr>
           <a:xfrm>
-            <a:off x="3403397" y="4169664"/>
-            <a:ext cx="676656" cy="384048"/>
+            <a:off x="3639312" y="4169664"/>
+            <a:ext cx="685800" cy="384048"/>
           </a:xfrm>
           <a:prstGeom prst="rect">
             <a:avLst>
@@ -32371,8 +33469,8 @@
         </p:nvSpPr>
         <p:spPr>
           <a:xfrm>
-            <a:off x="3403397" y="4169664"/>
-            <a:ext cx="676656" cy="384048"/>
+            <a:off x="3639312" y="4169664"/>
+            <a:ext cx="685800" cy="384048"/>
           </a:xfrm>
           <a:prstGeom prst="rect">
             <a:avLst/>
@@ -32410,8 +33508,8 @@
         </p:nvSpPr>
         <p:spPr>
           <a:xfrm>
-            <a:off x="4129430" y="4169664"/>
-            <a:ext cx="676656" cy="384048"/>
+            <a:off x="4447032" y="4169664"/>
+            <a:ext cx="685800" cy="384048"/>
           </a:xfrm>
           <a:prstGeom prst="rect">
             <a:avLst>
@@ -32437,8 +33535,8 @@
         </p:nvSpPr>
         <p:spPr>
           <a:xfrm>
-            <a:off x="4129430" y="4169664"/>
-            <a:ext cx="676656" cy="384048"/>
+            <a:off x="4447032" y="4169664"/>
+            <a:ext cx="685800" cy="384048"/>
           </a:xfrm>
           <a:prstGeom prst="rect">
             <a:avLst/>
@@ -32462,7 +33560,7 @@
                 <a:ea typeface="Trebuchet MS" pitchFamily="34" charset="-122"/>
                 <a:cs typeface="Trebuchet MS" pitchFamily="34" charset="-120"/>
               </a:rPr>
-              <a:t>s</a:t>
+              <a:t>h</a:t>
             </a:r>
             <a:endParaRPr lang="en-US" sz="900" dirty="0"/>
           </a:p>
@@ -32476,8 +33574,8 @@
         </p:nvSpPr>
         <p:spPr>
           <a:xfrm>
-            <a:off x="4855464" y="4169664"/>
-            <a:ext cx="676656" cy="384048"/>
+            <a:off x="5254752" y="4169664"/>
+            <a:ext cx="685800" cy="384048"/>
           </a:xfrm>
           <a:prstGeom prst="rect">
             <a:avLst>
@@ -32503,8 +33601,8 @@
         </p:nvSpPr>
         <p:spPr>
           <a:xfrm>
-            <a:off x="4855464" y="4169664"/>
-            <a:ext cx="676656" cy="384048"/>
+            <a:off x="5254752" y="4169664"/>
+            <a:ext cx="685800" cy="384048"/>
           </a:xfrm>
           <a:prstGeom prst="rect">
             <a:avLst/>
@@ -32528,7 +33626,7 @@
                 <a:ea typeface="Trebuchet MS" pitchFamily="34" charset="-122"/>
                 <a:cs typeface="Trebuchet MS" pitchFamily="34" charset="-120"/>
               </a:rPr>
-              <a:t>t</a:t>
+              <a:t>ea</a:t>
             </a:r>
             <a:endParaRPr lang="en-US" sz="900" dirty="0"/>
           </a:p>
@@ -32536,14 +33634,53 @@
       </p:sp>
       <p:sp>
         <p:nvSpPr>
-          <p:cNvPr id="49" name="Shape 47"/>
-          <p:cNvSpPr/>
-          <p:nvPr/>
-        </p:nvSpPr>
-        <p:spPr>
-          <a:xfrm>
-            <a:off x="5581498" y="4169664"/>
-            <a:ext cx="676656" cy="384048"/>
+          <p:cNvPr id="49" name="Text 47"/>
+          <p:cNvSpPr/>
+          <p:nvPr/>
+        </p:nvSpPr>
+        <p:spPr>
+          <a:xfrm>
+            <a:off x="5254752" y="4572000"/>
+            <a:ext cx="685800" cy="219456"/>
+          </a:xfrm>
+          <a:prstGeom prst="rect">
+            <a:avLst/>
+          </a:prstGeom>
+          <a:noFill/>
+          <a:ln/>
+        </p:spPr>
+        <p:txBody>
+          <a:bodyPr wrap="square" lIns="0" tIns="0" rIns="0" bIns="0" rtlCol="0" anchor="t"/>
+          <a:lstStyle/>
+          <a:p>
+            <a:pPr algn="ctr" indent="0" marL="0">
+              <a:buNone/>
+            </a:pPr>
+            <a:r>
+              <a:rPr lang="en-US" sz="750" i="1" dirty="0">
+                <a:solidFill>
+                  <a:srgbClr val="94A3B8"/>
+                </a:solidFill>
+                <a:latin typeface="Calibri" pitchFamily="34" charset="0"/>
+                <a:ea typeface="Calibri" pitchFamily="34" charset="-122"/>
+                <a:cs typeface="Calibri" pitchFamily="34" charset="-120"/>
+              </a:rPr>
+              <a:t>/e/</a:t>
+            </a:r>
+            <a:endParaRPr lang="en-US" sz="750" dirty="0"/>
+          </a:p>
+        </p:txBody>
+      </p:sp>
+      <p:sp>
+        <p:nvSpPr>
+          <p:cNvPr id="50" name="Shape 48"/>
+          <p:cNvSpPr/>
+          <p:nvPr/>
+        </p:nvSpPr>
+        <p:spPr>
+          <a:xfrm>
+            <a:off x="6062472" y="4169664"/>
+            <a:ext cx="685800" cy="384048"/>
           </a:xfrm>
           <a:prstGeom prst="rect">
             <a:avLst>
@@ -32563,14 +33700,14 @@
       </p:sp>
       <p:sp>
         <p:nvSpPr>
-          <p:cNvPr id="50" name="Text 48"/>
-          <p:cNvSpPr/>
-          <p:nvPr/>
-        </p:nvSpPr>
-        <p:spPr>
-          <a:xfrm>
-            <a:off x="5581498" y="4169664"/>
-            <a:ext cx="676656" cy="384048"/>
+          <p:cNvPr id="51" name="Text 49"/>
+          <p:cNvSpPr/>
+          <p:nvPr/>
+        </p:nvSpPr>
+        <p:spPr>
+          <a:xfrm>
+            <a:off x="6062472" y="4169664"/>
+            <a:ext cx="685800" cy="384048"/>
           </a:xfrm>
           <a:prstGeom prst="rect">
             <a:avLst/>
@@ -32594,7 +33731,7 @@
                 <a:ea typeface="Trebuchet MS" pitchFamily="34" charset="-122"/>
                 <a:cs typeface="Trebuchet MS" pitchFamily="34" charset="-120"/>
               </a:rPr>
-              <a:t>i</a:t>
+              <a:t>d</a:t>
             </a:r>
             <a:endParaRPr lang="en-US" sz="900" dirty="0"/>
           </a:p>
@@ -32602,14 +33739,14 @@
       </p:sp>
       <p:sp>
         <p:nvSpPr>
-          <p:cNvPr id="51" name="Shape 49"/>
-          <p:cNvSpPr/>
-          <p:nvPr/>
-        </p:nvSpPr>
-        <p:spPr>
-          <a:xfrm>
-            <a:off x="6307531" y="4169664"/>
-            <a:ext cx="676656" cy="384048"/>
+          <p:cNvPr id="52" name="Shape 50"/>
+          <p:cNvSpPr/>
+          <p:nvPr/>
+        </p:nvSpPr>
+        <p:spPr>
+          <a:xfrm>
+            <a:off x="6870192" y="4169664"/>
+            <a:ext cx="685800" cy="384048"/>
           </a:xfrm>
           <a:prstGeom prst="rect">
             <a:avLst>
@@ -32629,14 +33766,14 @@
       </p:sp>
       <p:sp>
         <p:nvSpPr>
-          <p:cNvPr id="52" name="Text 50"/>
-          <p:cNvSpPr/>
-          <p:nvPr/>
-        </p:nvSpPr>
-        <p:spPr>
-          <a:xfrm>
-            <a:off x="6307531" y="4169664"/>
-            <a:ext cx="676656" cy="384048"/>
+          <p:cNvPr id="53" name="Text 51"/>
+          <p:cNvSpPr/>
+          <p:nvPr/>
+        </p:nvSpPr>
+        <p:spPr>
+          <a:xfrm>
+            <a:off x="6870192" y="4169664"/>
+            <a:ext cx="685800" cy="384048"/>
           </a:xfrm>
           <a:prstGeom prst="rect">
             <a:avLst/>
@@ -32660,7 +33797,7 @@
                 <a:ea typeface="Trebuchet MS" pitchFamily="34" charset="-122"/>
                 <a:cs typeface="Trebuchet MS" pitchFamily="34" charset="-120"/>
               </a:rPr>
-              <a:t>t</a:t>
+              <a:t>i</a:t>
             </a:r>
             <a:endParaRPr lang="en-US" sz="900" dirty="0"/>
           </a:p>
@@ -32668,14 +33805,14 @@
       </p:sp>
       <p:sp>
         <p:nvSpPr>
-          <p:cNvPr id="53" name="Shape 51"/>
-          <p:cNvSpPr/>
-          <p:nvPr/>
-        </p:nvSpPr>
-        <p:spPr>
-          <a:xfrm>
-            <a:off x="7033565" y="4169664"/>
-            <a:ext cx="676656" cy="384048"/>
+          <p:cNvPr id="54" name="Shape 52"/>
+          <p:cNvSpPr/>
+          <p:nvPr/>
+        </p:nvSpPr>
+        <p:spPr>
+          <a:xfrm>
+            <a:off x="7677912" y="4169664"/>
+            <a:ext cx="685800" cy="384048"/>
           </a:xfrm>
           <a:prstGeom prst="rect">
             <a:avLst>
@@ -32695,14 +33832,14 @@
       </p:sp>
       <p:sp>
         <p:nvSpPr>
-          <p:cNvPr id="54" name="Text 52"/>
-          <p:cNvSpPr/>
-          <p:nvPr/>
-        </p:nvSpPr>
-        <p:spPr>
-          <a:xfrm>
-            <a:off x="7033565" y="4169664"/>
-            <a:ext cx="676656" cy="384048"/>
+          <p:cNvPr id="55" name="Text 53"/>
+          <p:cNvSpPr/>
+          <p:nvPr/>
+        </p:nvSpPr>
+        <p:spPr>
+          <a:xfrm>
+            <a:off x="7677912" y="4169664"/>
+            <a:ext cx="685800" cy="384048"/>
           </a:xfrm>
           <a:prstGeom prst="rect">
             <a:avLst/>
@@ -32726,114 +33863,9 @@
                 <a:ea typeface="Trebuchet MS" pitchFamily="34" charset="-122"/>
                 <a:cs typeface="Trebuchet MS" pitchFamily="34" charset="-120"/>
               </a:rPr>
-              <a:t>u</a:t>
+              <a:t>ng</a:t>
             </a:r>
             <a:endParaRPr lang="en-US" sz="900" dirty="0"/>
-          </a:p>
-        </p:txBody>
-      </p:sp>
-      <p:sp>
-        <p:nvSpPr>
-          <p:cNvPr id="55" name="Shape 53"/>
-          <p:cNvSpPr/>
-          <p:nvPr/>
-        </p:nvSpPr>
-        <p:spPr>
-          <a:xfrm>
-            <a:off x="7759598" y="4169664"/>
-            <a:ext cx="676656" cy="384048"/>
-          </a:xfrm>
-          <a:prstGeom prst="rect">
-            <a:avLst>
-              <a:gd name="adj" fmla="val 9524"/>
-            </a:avLst>
-          </a:prstGeom>
-          <a:solidFill>
-            <a:srgbClr val="FFFFFF"/>
-          </a:solidFill>
-          <a:ln w="12700">
-            <a:solidFill>
-              <a:srgbClr val="DB2777"/>
-            </a:solidFill>
-            <a:prstDash val="solid"/>
-          </a:ln>
-        </p:spPr>
-      </p:sp>
-      <p:sp>
-        <p:nvSpPr>
-          <p:cNvPr id="56" name="Text 54"/>
-          <p:cNvSpPr/>
-          <p:nvPr/>
-        </p:nvSpPr>
-        <p:spPr>
-          <a:xfrm>
-            <a:off x="7759598" y="4169664"/>
-            <a:ext cx="676656" cy="384048"/>
-          </a:xfrm>
-          <a:prstGeom prst="rect">
-            <a:avLst/>
-          </a:prstGeom>
-          <a:noFill/>
-          <a:ln/>
-        </p:spPr>
-        <p:txBody>
-          <a:bodyPr wrap="square" lIns="0" tIns="0" rIns="0" bIns="0" rtlCol="0" anchor="ctr"/>
-          <a:lstStyle/>
-          <a:p>
-            <a:pPr algn="ctr" indent="0" marL="0">
-              <a:buNone/>
-            </a:pPr>
-            <a:r>
-              <a:rPr lang="en-US" sz="900" b="1" dirty="0">
-                <a:solidFill>
-                  <a:srgbClr val="9D174D"/>
-                </a:solidFill>
-                <a:latin typeface="Trebuchet MS" pitchFamily="34" charset="0"/>
-                <a:ea typeface="Trebuchet MS" pitchFamily="34" charset="-122"/>
-                <a:cs typeface="Trebuchet MS" pitchFamily="34" charset="-120"/>
-              </a:rPr>
-              <a:t>te</a:t>
-            </a:r>
-            <a:endParaRPr lang="en-US" sz="900" dirty="0"/>
-          </a:p>
-        </p:txBody>
-      </p:sp>
-      <p:sp>
-        <p:nvSpPr>
-          <p:cNvPr id="57" name="Text 55"/>
-          <p:cNvSpPr/>
-          <p:nvPr/>
-        </p:nvSpPr>
-        <p:spPr>
-          <a:xfrm>
-            <a:off x="7759598" y="4572000"/>
-            <a:ext cx="676656" cy="219456"/>
-          </a:xfrm>
-          <a:prstGeom prst="rect">
-            <a:avLst/>
-          </a:prstGeom>
-          <a:noFill/>
-          <a:ln/>
-        </p:spPr>
-        <p:txBody>
-          <a:bodyPr wrap="square" lIns="0" tIns="0" rIns="0" bIns="0" rtlCol="0" anchor="t"/>
-          <a:lstStyle/>
-          <a:p>
-            <a:pPr algn="ctr" indent="0" marL="0">
-              <a:buNone/>
-            </a:pPr>
-            <a:r>
-              <a:rPr lang="en-US" sz="750" i="1" dirty="0">
-                <a:solidFill>
-                  <a:srgbClr val="94A3B8"/>
-                </a:solidFill>
-                <a:latin typeface="Calibri" pitchFamily="34" charset="0"/>
-                <a:ea typeface="Calibri" pitchFamily="34" charset="-122"/>
-                <a:cs typeface="Calibri" pitchFamily="34" charset="-120"/>
-              </a:rPr>
-              <a:t>/t/</a:t>
-            </a:r>
-            <a:endParaRPr lang="en-US" sz="750" dirty="0"/>
           </a:p>
         </p:txBody>
       </p:sp>
@@ -33123,7 +34155,7 @@
                 <a:ea typeface="Calibri" pitchFamily="34" charset="-122"/>
                 <a:cs typeface="Calibri" pitchFamily="34" charset="-120"/>
               </a:rPr>
-              <a:t>Word Labs  •  wordlabs.app  •  Prefix: 'sub-' = under, below, beneath</a:t>
+              <a:t>Word Labs  •  wordlabs.app  •  Prefix: 'sub-' = under, below, less than</a:t>
             </a:r>
             <a:endParaRPr lang="en-US" sz="800" dirty="0"/>
           </a:p>
@@ -34292,7 +35324,7 @@
                 <a:ea typeface="Calibri" pitchFamily="34" charset="-122"/>
                 <a:cs typeface="Calibri" pitchFamily="34" charset="-120"/>
               </a:rPr>
-              <a:t>Word Labs  •  wordlabs.app  •  Prefix: 'sub-' = under, below, beneath</a:t>
+              <a:t>Word Labs  •  wordlabs.app  •  Prefix: 'sub-' = under, below, less than</a:t>
             </a:r>
             <a:endParaRPr lang="en-US" sz="800" dirty="0"/>
           </a:p>
@@ -34657,7 +35689,7 @@
                 <a:ea typeface="Trebuchet MS" pitchFamily="34" charset="-122"/>
                 <a:cs typeface="Trebuchet MS" pitchFamily="34" charset="-120"/>
               </a:rPr>
-              <a:t>marine</a:t>
+              <a:t>merge</a:t>
             </a:r>
             <a:endParaRPr lang="en-US" sz="1300" dirty="0"/>
           </a:p>
@@ -34810,7 +35842,7 @@
                 <a:ea typeface="Trebuchet MS" pitchFamily="34" charset="-122"/>
                 <a:cs typeface="Trebuchet MS" pitchFamily="34" charset="-120"/>
               </a:rPr>
-              <a:t>way</a:t>
+              <a:t>marine</a:t>
             </a:r>
             <a:endParaRPr lang="en-US" sz="1300" dirty="0"/>
           </a:p>
@@ -34963,7 +35995,7 @@
                 <a:ea typeface="Trebuchet MS" pitchFamily="34" charset="-122"/>
                 <a:cs typeface="Trebuchet MS" pitchFamily="34" charset="-120"/>
               </a:rPr>
-              <a:t>merge</a:t>
+              <a:t>way</a:t>
             </a:r>
             <a:endParaRPr lang="en-US" sz="1300" dirty="0"/>
           </a:p>
@@ -35116,7 +36148,7 @@
                 <a:ea typeface="Trebuchet MS" pitchFamily="34" charset="-122"/>
                 <a:cs typeface="Trebuchet MS" pitchFamily="34" charset="-120"/>
               </a:rPr>
-              <a:t>tract</a:t>
+              <a:t>title</a:t>
             </a:r>
             <a:endParaRPr lang="en-US" sz="1300" dirty="0"/>
           </a:p>
@@ -35269,7 +36301,7 @@
                 <a:ea typeface="Trebuchet MS" pitchFamily="34" charset="-122"/>
                 <a:cs typeface="Trebuchet MS" pitchFamily="34" charset="-120"/>
               </a:rPr>
-              <a:t>ject</a:t>
+              <a:t>tract</a:t>
             </a:r>
             <a:endParaRPr lang="en-US" sz="1300" dirty="0"/>
           </a:p>
@@ -35504,7 +36536,7 @@
                 <a:ea typeface="Trebuchet MS" pitchFamily="34" charset="-122"/>
                 <a:cs typeface="Trebuchet MS" pitchFamily="34" charset="-120"/>
               </a:rPr>
-              <a:t>subtract</a:t>
+              <a:t>submerge</a:t>
             </a:r>
             <a:endParaRPr lang="en-US" sz="1200" dirty="0"/>
           </a:p>
@@ -35570,7 +36602,7 @@
                 <a:ea typeface="Trebuchet MS" pitchFamily="34" charset="-122"/>
                 <a:cs typeface="Trebuchet MS" pitchFamily="34" charset="-120"/>
               </a:rPr>
-              <a:t>subway</a:t>
+              <a:t>subtract</a:t>
             </a:r>
             <a:endParaRPr lang="en-US" sz="1200" dirty="0"/>
           </a:p>
@@ -35636,7 +36668,7 @@
                 <a:ea typeface="Trebuchet MS" pitchFamily="34" charset="-122"/>
                 <a:cs typeface="Trebuchet MS" pitchFamily="34" charset="-120"/>
               </a:rPr>
-              <a:t>submerge</a:t>
+              <a:t>subway</a:t>
             </a:r>
             <a:endParaRPr lang="en-US" sz="1200" dirty="0"/>
           </a:p>
@@ -35702,7 +36734,7 @@
                 <a:ea typeface="Trebuchet MS" pitchFamily="34" charset="-122"/>
                 <a:cs typeface="Trebuchet MS" pitchFamily="34" charset="-120"/>
               </a:rPr>
-              <a:t>subject</a:t>
+              <a:t>subtitle</a:t>
             </a:r>
             <a:endParaRPr lang="en-US" sz="1200" dirty="0"/>
           </a:p>
@@ -35768,7 +36800,7 @@
                 <a:ea typeface="Trebuchet MS" pitchFamily="34" charset="-122"/>
                 <a:cs typeface="Trebuchet MS" pitchFamily="34" charset="-120"/>
               </a:rPr>
-              <a:t>suburb</a:t>
+              <a:t>subdivide</a:t>
             </a:r>
             <a:endParaRPr lang="en-US" sz="1200" dirty="0"/>
           </a:p>
@@ -35834,7 +36866,7 @@
                 <a:ea typeface="Trebuchet MS" pitchFamily="34" charset="-122"/>
                 <a:cs typeface="Trebuchet MS" pitchFamily="34" charset="-120"/>
               </a:rPr>
-              <a:t>substitute</a:t>
+              <a:t>subheading</a:t>
             </a:r>
             <a:endParaRPr lang="en-US" sz="1200" dirty="0"/>
           </a:p>
@@ -35900,7 +36932,7 @@
                 <a:ea typeface="Trebuchet MS" pitchFamily="34" charset="-122"/>
                 <a:cs typeface="Trebuchet MS" pitchFamily="34" charset="-120"/>
               </a:rPr>
-              <a:t>subheading</a:t>
+              <a:t>substitute</a:t>
             </a:r>
             <a:endParaRPr lang="en-US" sz="1200" dirty="0"/>
           </a:p>
@@ -36192,7 +37224,7 @@
                 <a:ea typeface="Calibri" pitchFamily="34" charset="-122"/>
                 <a:cs typeface="Calibri" pitchFamily="34" charset="-120"/>
               </a:rPr>
-              <a:t>Word Labs  •  wordlabs.app  •  Prefix: 'sub-' = under, below, beneath</a:t>
+              <a:t>Word Labs  •  wordlabs.app  •  Prefix: 'sub-' = under, below, less than</a:t>
             </a:r>
             <a:endParaRPr lang="en-US" sz="800" dirty="0"/>
           </a:p>
@@ -36356,7 +37388,7 @@
                 <a:ea typeface="Calibri" pitchFamily="34" charset="-122"/>
                 <a:cs typeface="Calibri" pitchFamily="34" charset="-120"/>
               </a:rPr>
-              <a:t>A meaningful word part added to the beginning of a root to change its meaning. The prefix 'sub-' means 'under, below, beneath'.</a:t>
+              <a:t>A meaningful word part added to the beginning of a root to change its meaning. The prefix 'sub-' means 'under, below, less than'.</a:t>
             </a:r>
             <a:endParaRPr lang="en-US" sz="1350" dirty="0"/>
           </a:p>
@@ -36976,7 +38008,7 @@
                 <a:ea typeface="Calibri" pitchFamily="34" charset="-122"/>
                 <a:cs typeface="Calibri" pitchFamily="34" charset="-120"/>
               </a:rPr>
-              <a:t>Word Labs  •  wordlabs.app  •  Prefix: 'sub-' = under, below, beneath</a:t>
+              <a:t>Word Labs  •  wordlabs.app  •  Prefix: 'sub-' = under, below, less than</a:t>
             </a:r>
             <a:endParaRPr lang="en-US" sz="800" dirty="0"/>
           </a:p>
@@ -37088,7 +38120,7 @@
                 <a:ea typeface="Calibri" pitchFamily="34" charset="-122"/>
                 <a:cs typeface="Calibri" pitchFamily="34" charset="-120"/>
               </a:rPr>
-              <a:t>1.  The prefix 'sub-' means under or below.</a:t>
+              <a:t>1.  The prefix 'sub-' means above or over something.</a:t>
             </a:r>
             <a:endParaRPr lang="en-US" sz="1300" dirty="0"/>
           </a:p>
@@ -37111,11 +38143,11 @@
             </a:avLst>
           </a:prstGeom>
           <a:solidFill>
-            <a:srgbClr val="DCFCE7"/>
-          </a:solidFill>
-          <a:ln w="12700">
-            <a:solidFill>
-              <a:srgbClr val="16A34A"/>
+            <a:srgbClr val="FEE2E2"/>
+          </a:solidFill>
+          <a:ln w="12700">
+            <a:solidFill>
+              <a:srgbClr val="DC2626"/>
             </a:solidFill>
             <a:prstDash val="solid"/>
           </a:ln>
@@ -37148,13 +38180,13 @@
             <a:r>
               <a:rPr lang="en-US" sz="1100" b="1" dirty="0">
                 <a:solidFill>
-                  <a:srgbClr val="16A34A"/>
+                  <a:srgbClr val="DC2626"/>
                 </a:solidFill>
                 <a:latin typeface="Trebuchet MS" pitchFamily="34" charset="0"/>
                 <a:ea typeface="Trebuchet MS" pitchFamily="34" charset="-122"/>
                 <a:cs typeface="Trebuchet MS" pitchFamily="34" charset="-120"/>
               </a:rPr>
-              <a:t>TRUE</a:t>
+              <a:t>FALSE</a:t>
             </a:r>
             <a:endParaRPr lang="en-US" sz="1100" dirty="0"/>
           </a:p>
@@ -37227,7 +38259,7 @@
                 <a:ea typeface="Calibri" pitchFamily="34" charset="-122"/>
                 <a:cs typeface="Calibri" pitchFamily="34" charset="-120"/>
               </a:rPr>
-              <a:t>2.  The word 'submarine' means a vehicle that flies above the clouds.</a:t>
+              <a:t>2.  The prefix 'sub-' comes from Latin.</a:t>
             </a:r>
             <a:endParaRPr lang="en-US" sz="1300" dirty="0"/>
           </a:p>
@@ -37250,11 +38282,11 @@
             </a:avLst>
           </a:prstGeom>
           <a:solidFill>
-            <a:srgbClr val="FEE2E2"/>
-          </a:solidFill>
-          <a:ln w="12700">
-            <a:solidFill>
-              <a:srgbClr val="DC2626"/>
+            <a:srgbClr val="DCFCE7"/>
+          </a:solidFill>
+          <a:ln w="12700">
+            <a:solidFill>
+              <a:srgbClr val="16A34A"/>
             </a:solidFill>
             <a:prstDash val="solid"/>
           </a:ln>
@@ -37287,13 +38319,13 @@
             <a:r>
               <a:rPr lang="en-US" sz="1100" b="1" dirty="0">
                 <a:solidFill>
-                  <a:srgbClr val="DC2626"/>
+                  <a:srgbClr val="16A34A"/>
                 </a:solidFill>
                 <a:latin typeface="Trebuchet MS" pitchFamily="34" charset="0"/>
                 <a:ea typeface="Trebuchet MS" pitchFamily="34" charset="-122"/>
                 <a:cs typeface="Trebuchet MS" pitchFamily="34" charset="-120"/>
               </a:rPr>
-              <a:t>FALSE</a:t>
+              <a:t>TRUE</a:t>
             </a:r>
             <a:endParaRPr lang="en-US" sz="1100" dirty="0"/>
           </a:p>
@@ -37366,7 +38398,7 @@
                 <a:ea typeface="Calibri" pitchFamily="34" charset="-122"/>
                 <a:cs typeface="Calibri" pitchFamily="34" charset="-120"/>
               </a:rPr>
-              <a:t>3.  A subway is a path or railway that goes underground.</a:t>
+              <a:t>3.  The word 'submarine' means a ship that sails on top of the ocean.</a:t>
             </a:r>
             <a:endParaRPr lang="en-US" sz="1300" dirty="0"/>
           </a:p>
@@ -37389,11 +38421,11 @@
             </a:avLst>
           </a:prstGeom>
           <a:solidFill>
-            <a:srgbClr val="DCFCE7"/>
-          </a:solidFill>
-          <a:ln w="12700">
-            <a:solidFill>
-              <a:srgbClr val="16A34A"/>
+            <a:srgbClr val="FEE2E2"/>
+          </a:solidFill>
+          <a:ln w="12700">
+            <a:solidFill>
+              <a:srgbClr val="DC2626"/>
             </a:solidFill>
             <a:prstDash val="solid"/>
           </a:ln>
@@ -37426,13 +38458,13 @@
             <a:r>
               <a:rPr lang="en-US" sz="1100" b="1" dirty="0">
                 <a:solidFill>
-                  <a:srgbClr val="16A34A"/>
+                  <a:srgbClr val="DC2626"/>
                 </a:solidFill>
                 <a:latin typeface="Trebuchet MS" pitchFamily="34" charset="0"/>
                 <a:ea typeface="Trebuchet MS" pitchFamily="34" charset="-122"/>
                 <a:cs typeface="Trebuchet MS" pitchFamily="34" charset="-120"/>
               </a:rPr>
-              <a:t>TRUE</a:t>
+              <a:t>FALSE</a:t>
             </a:r>
             <a:endParaRPr lang="en-US" sz="1100" dirty="0"/>
           </a:p>
@@ -37505,7 +38537,7 @@
                 <a:ea typeface="Calibri" pitchFamily="34" charset="-122"/>
                 <a:cs typeface="Calibri" pitchFamily="34" charset="-120"/>
               </a:rPr>
-              <a:t>4.  The prefix 'sub-' comes from Latin.</a:t>
+              <a:t>4.  A subtitle appears below the main title.</a:t>
             </a:r>
             <a:endParaRPr lang="en-US" sz="1300" dirty="0"/>
           </a:p>
@@ -37644,7 +38676,7 @@
                 <a:ea typeface="Calibri" pitchFamily="34" charset="-122"/>
                 <a:cs typeface="Calibri" pitchFamily="34" charset="-120"/>
               </a:rPr>
-              <a:t>5.  The prefix 'sub-' means before or in front of.</a:t>
+              <a:t>5.  The prefix 'sub-' means under or below.</a:t>
             </a:r>
             <a:endParaRPr lang="en-US" sz="1300" dirty="0"/>
           </a:p>
@@ -37667,11 +38699,11 @@
             </a:avLst>
           </a:prstGeom>
           <a:solidFill>
-            <a:srgbClr val="FEE2E2"/>
-          </a:solidFill>
-          <a:ln w="12700">
-            <a:solidFill>
-              <a:srgbClr val="DC2626"/>
+            <a:srgbClr val="DCFCE7"/>
+          </a:solidFill>
+          <a:ln w="12700">
+            <a:solidFill>
+              <a:srgbClr val="16A34A"/>
             </a:solidFill>
             <a:prstDash val="solid"/>
           </a:ln>
@@ -37704,13 +38736,13 @@
             <a:r>
               <a:rPr lang="en-US" sz="1100" b="1" dirty="0">
                 <a:solidFill>
-                  <a:srgbClr val="DC2626"/>
+                  <a:srgbClr val="16A34A"/>
                 </a:solidFill>
                 <a:latin typeface="Trebuchet MS" pitchFamily="34" charset="0"/>
                 <a:ea typeface="Trebuchet MS" pitchFamily="34" charset="-122"/>
                 <a:cs typeface="Trebuchet MS" pitchFamily="34" charset="-120"/>
               </a:rPr>
-              <a:t>FALSE</a:t>
+              <a:t>TRUE</a:t>
             </a:r>
             <a:endParaRPr lang="en-US" sz="1100" dirty="0"/>
           </a:p>
@@ -38002,7 +39034,7 @@
                 <a:ea typeface="Calibri" pitchFamily="34" charset="-122"/>
                 <a:cs typeface="Calibri" pitchFamily="34" charset="-120"/>
               </a:rPr>
-              <a:t>Word Labs  •  wordlabs.app  •  Prefix: 'sub-' = under, below, beneath</a:t>
+              <a:t>Word Labs  •  wordlabs.app  •  Prefix: 'sub-' = under, below, less than</a:t>
             </a:r>
             <a:endParaRPr lang="en-US" sz="800" dirty="0"/>
           </a:p>
@@ -38139,7 +39171,7 @@
                 <a:ea typeface="Trebuchet MS" pitchFamily="34" charset="-122"/>
                 <a:cs typeface="Trebuchet MS" pitchFamily="34" charset="-120"/>
               </a:rPr>
-              <a:t>under, below, beneath</a:t>
+              <a:t>under, below, less than</a:t>
             </a:r>
             <a:endParaRPr lang="en-US" sz="2000" dirty="0"/>
           </a:p>
@@ -38349,7 +39381,7 @@
                 <a:ea typeface="Trebuchet MS" pitchFamily="34" charset="-122"/>
                 <a:cs typeface="Trebuchet MS" pitchFamily="34" charset="-120"/>
               </a:rPr>
-              <a:t>subtract</a:t>
+              <a:t>submerge</a:t>
             </a:r>
             <a:endParaRPr lang="en-US" sz="1300" dirty="0"/>
           </a:p>
@@ -38415,7 +39447,7 @@
                 <a:ea typeface="Trebuchet MS" pitchFamily="34" charset="-122"/>
                 <a:cs typeface="Trebuchet MS" pitchFamily="34" charset="-120"/>
               </a:rPr>
-              <a:t>subway</a:t>
+              <a:t>subtract</a:t>
             </a:r>
             <a:endParaRPr lang="en-US" sz="1300" dirty="0"/>
           </a:p>
@@ -38481,7 +39513,7 @@
                 <a:ea typeface="Trebuchet MS" pitchFamily="34" charset="-122"/>
                 <a:cs typeface="Trebuchet MS" pitchFamily="34" charset="-120"/>
               </a:rPr>
-              <a:t>submerge</a:t>
+              <a:t>subway</a:t>
             </a:r>
             <a:endParaRPr lang="en-US" sz="1300" dirty="0"/>
           </a:p>
@@ -38547,7 +39579,7 @@
                 <a:ea typeface="Trebuchet MS" pitchFamily="34" charset="-122"/>
                 <a:cs typeface="Trebuchet MS" pitchFamily="34" charset="-120"/>
               </a:rPr>
-              <a:t>subject</a:t>
+              <a:t>subtitle</a:t>
             </a:r>
             <a:endParaRPr lang="en-US" sz="1300" dirty="0"/>
           </a:p>
@@ -38613,7 +39645,7 @@
                 <a:ea typeface="Trebuchet MS" pitchFamily="34" charset="-122"/>
                 <a:cs typeface="Trebuchet MS" pitchFamily="34" charset="-120"/>
               </a:rPr>
-              <a:t>suburb</a:t>
+              <a:t>subdivide</a:t>
             </a:r>
             <a:endParaRPr lang="en-US" sz="1300" dirty="0"/>
           </a:p>
@@ -38679,7 +39711,7 @@
                 <a:ea typeface="Trebuchet MS" pitchFamily="34" charset="-122"/>
                 <a:cs typeface="Trebuchet MS" pitchFamily="34" charset="-120"/>
               </a:rPr>
-              <a:t>substitute</a:t>
+              <a:t>subheading</a:t>
             </a:r>
             <a:endParaRPr lang="en-US" sz="1300" dirty="0"/>
           </a:p>
@@ -38971,7 +40003,7 @@
                 <a:ea typeface="Calibri" pitchFamily="34" charset="-122"/>
                 <a:cs typeface="Calibri" pitchFamily="34" charset="-120"/>
               </a:rPr>
-              <a:t>Word Labs  •  wordlabs.app  •  Prefix: 'sub-' = under, below, beneath</a:t>
+              <a:t>Word Labs  •  wordlabs.app  •  Prefix: 'sub-' = under, below, less than</a:t>
             </a:r>
             <a:endParaRPr lang="en-US" sz="800" dirty="0"/>
           </a:p>
@@ -39336,7 +40368,7 @@
                 <a:ea typeface="Trebuchet MS" pitchFamily="34" charset="-122"/>
                 <a:cs typeface="Trebuchet MS" pitchFamily="34" charset="-120"/>
               </a:rPr>
-              <a:t>marine</a:t>
+              <a:t>merge</a:t>
             </a:r>
             <a:endParaRPr lang="en-US" sz="1300" dirty="0"/>
           </a:p>
@@ -39489,7 +40521,7 @@
                 <a:ea typeface="Trebuchet MS" pitchFamily="34" charset="-122"/>
                 <a:cs typeface="Trebuchet MS" pitchFamily="34" charset="-120"/>
               </a:rPr>
-              <a:t>way</a:t>
+              <a:t>marine</a:t>
             </a:r>
             <a:endParaRPr lang="en-US" sz="1300" dirty="0"/>
           </a:p>
@@ -39642,7 +40674,7 @@
                 <a:ea typeface="Trebuchet MS" pitchFamily="34" charset="-122"/>
                 <a:cs typeface="Trebuchet MS" pitchFamily="34" charset="-120"/>
               </a:rPr>
-              <a:t>merge</a:t>
+              <a:t>way</a:t>
             </a:r>
             <a:endParaRPr lang="en-US" sz="1300" dirty="0"/>
           </a:p>
@@ -39795,7 +40827,7 @@
                 <a:ea typeface="Trebuchet MS" pitchFamily="34" charset="-122"/>
                 <a:cs typeface="Trebuchet MS" pitchFamily="34" charset="-120"/>
               </a:rPr>
-              <a:t>tract</a:t>
+              <a:t>title</a:t>
             </a:r>
             <a:endParaRPr lang="en-US" sz="1300" dirty="0"/>
           </a:p>
@@ -39948,7 +40980,7 @@
                 <a:ea typeface="Trebuchet MS" pitchFamily="34" charset="-122"/>
                 <a:cs typeface="Trebuchet MS" pitchFamily="34" charset="-120"/>
               </a:rPr>
-              <a:t>ject</a:t>
+              <a:t>tract</a:t>
             </a:r>
             <a:endParaRPr lang="en-US" sz="1300" dirty="0"/>
           </a:p>
@@ -40178,7 +41210,7 @@
         <p:spPr>
           <a:xfrm>
             <a:off x="2834640" y="4178808"/>
-            <a:ext cx="1243584" cy="420624"/>
+            <a:ext cx="1097280" cy="420624"/>
           </a:xfrm>
           <a:prstGeom prst="rect">
             <a:avLst>
@@ -40212,7 +41244,7 @@
         <p:spPr>
           <a:xfrm>
             <a:off x="2834640" y="4178808"/>
-            <a:ext cx="1243584" cy="420624"/>
+            <a:ext cx="1097280" cy="420624"/>
           </a:xfrm>
           <a:prstGeom prst="rect">
             <a:avLst/>
@@ -40236,7 +41268,7 @@
                 <a:ea typeface="Trebuchet MS" pitchFamily="34" charset="-122"/>
                 <a:cs typeface="Trebuchet MS" pitchFamily="34" charset="-120"/>
               </a:rPr>
-              <a:t>marine</a:t>
+              <a:t>merge</a:t>
             </a:r>
             <a:endParaRPr lang="en-US" sz="1300" dirty="0"/>
           </a:p>
@@ -40250,7 +41282,7 @@
         </p:nvSpPr>
         <p:spPr>
           <a:xfrm>
-            <a:off x="4105656" y="4178808"/>
+            <a:off x="3959352" y="4178808"/>
             <a:ext cx="320040" cy="420624"/>
           </a:xfrm>
           <a:prstGeom prst="rect">
@@ -40289,7 +41321,7 @@
         </p:nvSpPr>
         <p:spPr>
           <a:xfrm>
-            <a:off x="4453128" y="4178808"/>
+            <a:off x="4306824" y="4178808"/>
             <a:ext cx="822960" cy="420624"/>
           </a:xfrm>
           <a:prstGeom prst="rect">
@@ -40323,7 +41355,7 @@
         </p:nvSpPr>
         <p:spPr>
           <a:xfrm>
-            <a:off x="4453128" y="4178808"/>
+            <a:off x="4306824" y="4178808"/>
             <a:ext cx="822960" cy="420624"/>
           </a:xfrm>
           <a:prstGeom prst="rect">
@@ -40362,7 +41394,7 @@
         </p:nvSpPr>
         <p:spPr>
           <a:xfrm>
-            <a:off x="5349240" y="4178808"/>
+            <a:off x="5202936" y="4178808"/>
             <a:ext cx="365760" cy="420624"/>
           </a:xfrm>
           <a:prstGeom prst="rect">
@@ -40401,7 +41433,7 @@
         </p:nvSpPr>
         <p:spPr>
           <a:xfrm>
-            <a:off x="5760720" y="4178808"/>
+            <a:off x="5614416" y="4178808"/>
             <a:ext cx="2194560" cy="420624"/>
           </a:xfrm>
           <a:prstGeom prst="rect">
@@ -40428,7 +41460,7 @@
         </p:nvSpPr>
         <p:spPr>
           <a:xfrm>
-            <a:off x="5760720" y="4178808"/>
+            <a:off x="5614416" y="4178808"/>
             <a:ext cx="2194560" cy="420624"/>
           </a:xfrm>
           <a:prstGeom prst="rect">
@@ -40745,7 +41777,7 @@
                 <a:ea typeface="Calibri" pitchFamily="34" charset="-122"/>
                 <a:cs typeface="Calibri" pitchFamily="34" charset="-120"/>
               </a:rPr>
-              <a:t>Word Labs  •  wordlabs.app  •  Prefix: 'sub-' = under, below, beneath</a:t>
+              <a:t>Word Labs  •  wordlabs.app  •  Prefix: 'sub-' = under, below, less than</a:t>
             </a:r>
             <a:endParaRPr lang="en-US" sz="800" dirty="0"/>
           </a:p>
@@ -40923,7 +41955,7 @@
                 <a:ea typeface="Calibri" pitchFamily="34" charset="-122"/>
                 <a:cs typeface="Calibri" pitchFamily="34" charset="-120"/>
               </a:rPr>
-              <a:t>Someone or something that takes the place of another person or thing.</a:t>
+              <a:t>A smaller title that appears below the main heading in a piece of writing.</a:t>
             </a:r>
             <a:endParaRPr lang="en-US" sz="1200" dirty="0"/>
           </a:p>
@@ -40996,7 +42028,7 @@
                 <a:ea typeface="Trebuchet MS" pitchFamily="34" charset="-122"/>
                 <a:cs typeface="Trebuchet MS" pitchFamily="34" charset="-120"/>
               </a:rPr>
-              <a:t>subtract</a:t>
+              <a:t>submerge</a:t>
             </a:r>
             <a:endParaRPr lang="en-US" sz="1200" dirty="0"/>
           </a:p>
@@ -41062,7 +42094,7 @@
                 <a:ea typeface="Calibri" pitchFamily="34" charset="-122"/>
                 <a:cs typeface="Calibri" pitchFamily="34" charset="-120"/>
               </a:rPr>
-              <a:t>A topic you study at school, or the person or thing being talked about.</a:t>
+              <a:t>Words shown at the bottom of a screen that display what people are saying.</a:t>
             </a:r>
             <a:endParaRPr lang="en-US" sz="1200" dirty="0"/>
           </a:p>
@@ -41135,7 +42167,7 @@
                 <a:ea typeface="Trebuchet MS" pitchFamily="34" charset="-122"/>
                 <a:cs typeface="Trebuchet MS" pitchFamily="34" charset="-120"/>
               </a:rPr>
-              <a:t>subway</a:t>
+              <a:t>subtract</a:t>
             </a:r>
             <a:endParaRPr lang="en-US" sz="1200" dirty="0"/>
           </a:p>
@@ -41201,7 +42233,7 @@
                 <a:ea typeface="Calibri" pitchFamily="34" charset="-122"/>
                 <a:cs typeface="Calibri" pitchFamily="34" charset="-120"/>
               </a:rPr>
-              <a:t>To go completely under water or another liquid.</a:t>
+              <a:t>An underground tunnel or train system that runs below the streets.</a:t>
             </a:r>
             <a:endParaRPr lang="en-US" sz="1200" dirty="0"/>
           </a:p>
@@ -41274,7 +42306,7 @@
                 <a:ea typeface="Trebuchet MS" pitchFamily="34" charset="-122"/>
                 <a:cs typeface="Trebuchet MS" pitchFamily="34" charset="-120"/>
               </a:rPr>
-              <a:t>submerge</a:t>
+              <a:t>subway</a:t>
             </a:r>
             <a:endParaRPr lang="en-US" sz="1200" dirty="0"/>
           </a:p>
@@ -41340,7 +42372,7 @@
                 <a:ea typeface="Calibri" pitchFamily="34" charset="-122"/>
                 <a:cs typeface="Calibri" pitchFamily="34" charset="-120"/>
               </a:rPr>
-              <a:t>An area of homes and streets on the outer edges of a city.</a:t>
+              <a:t>To divide something that has already been divided into even smaller parts.</a:t>
             </a:r>
             <a:endParaRPr lang="en-US" sz="1200" dirty="0"/>
           </a:p>
@@ -41413,7 +42445,7 @@
                 <a:ea typeface="Trebuchet MS" pitchFamily="34" charset="-122"/>
                 <a:cs typeface="Trebuchet MS" pitchFamily="34" charset="-120"/>
               </a:rPr>
-              <a:t>subject</a:t>
+              <a:t>subtitle</a:t>
             </a:r>
             <a:endParaRPr lang="en-US" sz="1200" dirty="0"/>
           </a:p>
@@ -41479,7 +42511,7 @@
                 <a:ea typeface="Calibri" pitchFamily="34" charset="-122"/>
                 <a:cs typeface="Calibri" pitchFamily="34" charset="-120"/>
               </a:rPr>
-              <a:t>An underground tunnel or railway that runs below the street.</a:t>
+              <a:t>To take one number away from another in maths.</a:t>
             </a:r>
             <a:endParaRPr lang="en-US" sz="1200" dirty="0"/>
           </a:p>
@@ -41552,7 +42584,7 @@
                 <a:ea typeface="Trebuchet MS" pitchFamily="34" charset="-122"/>
                 <a:cs typeface="Trebuchet MS" pitchFamily="34" charset="-120"/>
               </a:rPr>
-              <a:t>suburb</a:t>
+              <a:t>subdivide</a:t>
             </a:r>
             <a:endParaRPr lang="en-US" sz="1200" dirty="0"/>
           </a:p>
@@ -41618,7 +42650,7 @@
                 <a:ea typeface="Calibri" pitchFamily="34" charset="-122"/>
                 <a:cs typeface="Calibri" pitchFamily="34" charset="-120"/>
               </a:rPr>
-              <a:t>A vessel that travels underwater beneath the surface of the sea.</a:t>
+              <a:t>A vehicle that can travel underwater, often used by the navy.</a:t>
             </a:r>
             <a:endParaRPr lang="en-US" sz="1200" dirty="0"/>
           </a:p>
@@ -41691,7 +42723,7 @@
                 <a:ea typeface="Trebuchet MS" pitchFamily="34" charset="-122"/>
                 <a:cs typeface="Trebuchet MS" pitchFamily="34" charset="-120"/>
               </a:rPr>
-              <a:t>substitute</a:t>
+              <a:t>subheading</a:t>
             </a:r>
             <a:endParaRPr lang="en-US" sz="1200" dirty="0"/>
           </a:p>
@@ -41757,7 +42789,7 @@
                 <a:ea typeface="Calibri" pitchFamily="34" charset="-122"/>
                 <a:cs typeface="Calibri" pitchFamily="34" charset="-120"/>
               </a:rPr>
-              <a:t>To take away one number from another; to minus.</a:t>
+              <a:t>To go completely under water or another liquid.</a:t>
             </a:r>
             <a:endParaRPr lang="en-US" sz="1200" dirty="0"/>
           </a:p>
@@ -42049,7 +43081,7 @@
                 <a:ea typeface="Calibri" pitchFamily="34" charset="-122"/>
                 <a:cs typeface="Calibri" pitchFamily="34" charset="-120"/>
               </a:rPr>
-              <a:t>Word Labs  •  wordlabs.app  •  Prefix: 'sub-' = under, below, beneath</a:t>
+              <a:t>Word Labs  •  wordlabs.app  •  Prefix: 'sub-' = under, below, less than</a:t>
             </a:r>
             <a:endParaRPr lang="en-US" sz="800" dirty="0"/>
           </a:p>
@@ -42416,7 +43448,7 @@
                 <a:ea typeface="Calibri" pitchFamily="34" charset="-122"/>
                 <a:cs typeface="Calibri" pitchFamily="34" charset="-120"/>
               </a:rPr>
-              <a:t>We live in a quiet suburb on the edge of the city.</a:t>
+              <a:t>Our teacher asked us to subtract twelve from fifty in our heads.</a:t>
             </a:r>
             <a:endParaRPr lang="en-US" sz="1500" dirty="0"/>
           </a:p>
@@ -42580,7 +43612,7 @@
                 <a:ea typeface="Calibri" pitchFamily="34" charset="-122"/>
                 <a:cs typeface="Calibri" pitchFamily="34" charset="-120"/>
               </a:rPr>
-              <a:t>Remember to subtract the smaller number from the larger one.</a:t>
+              <a:t>The documentary had subtitles so we could read what was being said.</a:t>
             </a:r>
             <a:endParaRPr lang="en-US" sz="1500" dirty="0"/>
           </a:p>

--- a/output/wordlabs-sub-prefix-3day.pptx
+++ b/output/wordlabs-sub-prefix-3day.pptx
@@ -4240,7 +4240,7 @@
                 <a:ea typeface="Calibri" pitchFamily="34" charset="-122"/>
                 <a:cs typeface="Calibri" pitchFamily="34" charset="-120"/>
               </a:rPr>
-              <a:t>"under, below, less than"</a:t>
+              <a:t>"under; below"</a:t>
             </a:r>
             <a:endParaRPr lang="en-US" sz="2200" dirty="0"/>
           </a:p>
@@ -4279,7 +4279,7 @@
                 <a:ea typeface="Calibri" pitchFamily="34" charset="-122"/>
                 <a:cs typeface="Calibri" pitchFamily="34" charset="-120"/>
               </a:rPr>
-              <a:t>Origin: Latin: sub</a:t>
+              <a:t>Origin: Prefix</a:t>
             </a:r>
             <a:endParaRPr lang="en-US" sz="1300" dirty="0"/>
           </a:p>
@@ -5288,7 +5288,7 @@
                 <a:ea typeface="Calibri" pitchFamily="34" charset="-122"/>
                 <a:cs typeface="Calibri" pitchFamily="34" charset="-120"/>
               </a:rPr>
-              <a:t>Word Labs  •  wordlabs.app  •  Prefix: 'sub-' = under, below, less than</a:t>
+              <a:t>Word Labs  •  wordlabs.app  •  Prefix: 'sub-' = under; below</a:t>
             </a:r>
             <a:endParaRPr lang="en-US" sz="800" dirty="0"/>
           </a:p>
@@ -5622,7 +5622,7 @@
                 <a:ea typeface="Trebuchet MS" pitchFamily="34" charset="-122"/>
                 <a:cs typeface="Trebuchet MS" pitchFamily="34" charset="-120"/>
               </a:rPr>
-              <a:t>1</a:t>
+              <a:t>0</a:t>
             </a:r>
             <a:pPr algn="ctr" indent="0" marL="0">
               <a:buNone/>
@@ -5928,7 +5928,7 @@
                 <a:ea typeface="Calibri" pitchFamily="34" charset="-122"/>
                 <a:cs typeface="Calibri" pitchFamily="34" charset="-120"/>
               </a:rPr>
-              <a:t>Word Labs  •  wordlabs.app  •  Prefix: 'sub-' = under, below, less than</a:t>
+              <a:t>Word Labs  •  wordlabs.app  •  Prefix: 'sub-' = under; below</a:t>
             </a:r>
             <a:endParaRPr lang="en-US" sz="800" dirty="0"/>
           </a:p>
@@ -6040,7 +6040,7 @@
                 <a:ea typeface="Calibri" pitchFamily="34" charset="-122"/>
                 <a:cs typeface="Calibri" pitchFamily="34" charset="-120"/>
               </a:rPr>
-              <a:t>The </a:t>
+              <a:t>The factory is </a:t>
             </a:r>
             <a:pPr algn="l" indent="0" marL="0">
               <a:buNone/>
@@ -6057,7 +6057,7 @@
                 <a:ea typeface="Calibri" pitchFamily="34" charset="-122"/>
                 <a:cs typeface="Calibri" pitchFamily="34" charset="-120"/>
               </a:rPr>
-              <a:t>submarine</a:t>
+              <a:t>supplying</a:t>
             </a:r>
             <a:pPr algn="l" indent="0" marL="0">
               <a:buNone/>
@@ -6071,7 +6071,7 @@
                 <a:ea typeface="Calibri" pitchFamily="34" charset="-122"/>
                 <a:cs typeface="Calibri" pitchFamily="34" charset="-120"/>
               </a:rPr>
-              <a:t> had to </a:t>
+              <a:t> new parts to garages this month. The </a:t>
             </a:r>
             <a:pPr algn="l" indent="0" marL="0">
               <a:buNone/>
@@ -6088,7 +6088,7 @@
                 <a:ea typeface="Calibri" pitchFamily="34" charset="-122"/>
                 <a:cs typeface="Calibri" pitchFamily="34" charset="-120"/>
               </a:rPr>
-              <a:t>submerge</a:t>
+              <a:t>successful</a:t>
             </a:r>
             <a:pPr algn="l" indent="0" marL="0">
               <a:buNone/>
@@ -6102,7 +6102,7 @@
                 <a:ea typeface="Calibri" pitchFamily="34" charset="-122"/>
                 <a:cs typeface="Calibri" pitchFamily="34" charset="-120"/>
               </a:rPr>
-              <a:t> quickly to avoid the storm.</a:t>
+              <a:t> team lifted the trophy.</a:t>
             </a:r>
             <a:endParaRPr lang="en-US" sz="1800" dirty="0"/>
           </a:p>
@@ -6257,7 +6257,7 @@
                 <a:ea typeface="Trebuchet MS" pitchFamily="34" charset="-122"/>
                 <a:cs typeface="Trebuchet MS" pitchFamily="34" charset="-120"/>
               </a:rPr>
-              <a:t>submarine</a:t>
+              <a:t>supplying</a:t>
             </a:r>
             <a:endParaRPr lang="en-US" sz="1400" dirty="0"/>
           </a:p>
@@ -6385,7 +6385,7 @@
                 <a:ea typeface="Trebuchet MS" pitchFamily="34" charset="-122"/>
                 <a:cs typeface="Trebuchet MS" pitchFamily="34" charset="-120"/>
               </a:rPr>
-              <a:t>submerge</a:t>
+              <a:t>successful</a:t>
             </a:r>
             <a:endParaRPr lang="en-US" sz="1400" dirty="0"/>
           </a:p>
@@ -6716,7 +6716,7 @@
                 <a:ea typeface="Calibri" pitchFamily="34" charset="-122"/>
                 <a:cs typeface="Calibri" pitchFamily="34" charset="-120"/>
               </a:rPr>
-              <a:t>Word Labs  •  wordlabs.app  •  Prefix: 'sub-' = under, below, less than</a:t>
+              <a:t>Word Labs  •  wordlabs.app  •  Prefix: 'sub-' = under; below</a:t>
             </a:r>
             <a:endParaRPr lang="en-US" sz="800" dirty="0"/>
           </a:p>
@@ -6855,7 +6855,7 @@
                 <a:ea typeface="Trebuchet MS" pitchFamily="34" charset="-122"/>
                 <a:cs typeface="Trebuchet MS" pitchFamily="34" charset="-120"/>
               </a:rPr>
-              <a:t>submarine</a:t>
+              <a:t>supplying</a:t>
             </a:r>
             <a:endParaRPr lang="en-US" sz="2800" dirty="0"/>
           </a:p>
@@ -7543,7 +7543,7 @@
                 <a:ea typeface="Calibri" pitchFamily="34" charset="-122"/>
                 <a:cs typeface="Calibri" pitchFamily="34" charset="-120"/>
               </a:rPr>
-              <a:t>Word Labs  •  wordlabs.app  •  Prefix: 'sub-' = under, below, less than</a:t>
+              <a:t>Word Labs  •  wordlabs.app  •  Prefix: 'sub-' = under; below</a:t>
             </a:r>
             <a:endParaRPr lang="en-US" sz="800" dirty="0"/>
           </a:p>
@@ -7682,7 +7682,7 @@
                 <a:ea typeface="Trebuchet MS" pitchFamily="34" charset="-122"/>
                 <a:cs typeface="Trebuchet MS" pitchFamily="34" charset="-120"/>
               </a:rPr>
-              <a:t>submarine</a:t>
+              <a:t>supplying</a:t>
             </a:r>
             <a:endParaRPr lang="en-US" sz="2800" dirty="0"/>
           </a:p>
@@ -7762,7 +7762,7 @@
         </p:nvSpPr>
         <p:spPr>
           <a:xfrm>
-            <a:off x="2938272" y="2258568"/>
+            <a:off x="2221992" y="2258568"/>
             <a:ext cx="1828800" cy="292608"/>
           </a:xfrm>
           <a:prstGeom prst="rect">
@@ -7796,7 +7796,7 @@
         </p:nvSpPr>
         <p:spPr>
           <a:xfrm>
-            <a:off x="2938272" y="2258568"/>
+            <a:off x="2221992" y="2258568"/>
             <a:ext cx="1828800" cy="292608"/>
           </a:xfrm>
           <a:prstGeom prst="rect">
@@ -7835,7 +7835,7 @@
         </p:nvSpPr>
         <p:spPr>
           <a:xfrm>
-            <a:off x="2938272" y="2569464"/>
+            <a:off x="2221992" y="2569464"/>
             <a:ext cx="1828800" cy="201168"/>
           </a:xfrm>
           <a:prstGeom prst="rect">
@@ -7860,7 +7860,7 @@
                 <a:ea typeface="Calibri" pitchFamily="34" charset="-122"/>
                 <a:cs typeface="Calibri" pitchFamily="34" charset="-120"/>
               </a:rPr>
-              <a:t>under, below</a:t>
+              <a:t>under; below</a:t>
             </a:r>
             <a:endParaRPr lang="en-US" sz="850" dirty="0"/>
           </a:p>
@@ -7874,7 +7874,7 @@
         </p:nvSpPr>
         <p:spPr>
           <a:xfrm>
-            <a:off x="5803392" y="2258568"/>
+            <a:off x="4370832" y="2258568"/>
             <a:ext cx="1828800" cy="292608"/>
           </a:xfrm>
           <a:prstGeom prst="rect">
@@ -7908,7 +7908,7 @@
         </p:nvSpPr>
         <p:spPr>
           <a:xfrm>
-            <a:off x="5803392" y="2258568"/>
+            <a:off x="4370832" y="2258568"/>
             <a:ext cx="1828800" cy="292608"/>
           </a:xfrm>
           <a:prstGeom prst="rect">
@@ -7933,7 +7933,7 @@
                 <a:ea typeface="Trebuchet MS" pitchFamily="34" charset="-122"/>
                 <a:cs typeface="Trebuchet MS" pitchFamily="34" charset="-120"/>
               </a:rPr>
-              <a:t>marine</a:t>
+              <a:t>ply</a:t>
             </a:r>
             <a:endParaRPr lang="en-US" sz="1300" dirty="0"/>
           </a:p>
@@ -7947,7 +7947,7 @@
         </p:nvSpPr>
         <p:spPr>
           <a:xfrm>
-            <a:off x="5803392" y="2569464"/>
+            <a:off x="4370832" y="2569464"/>
             <a:ext cx="1828800" cy="201168"/>
           </a:xfrm>
           <a:prstGeom prst="rect">
@@ -7972,7 +7972,7 @@
                 <a:ea typeface="Calibri" pitchFamily="34" charset="-122"/>
                 <a:cs typeface="Calibri" pitchFamily="34" charset="-120"/>
               </a:rPr>
-              <a:t>of the sea</a:t>
+              <a:t>fold; bend</a:t>
             </a:r>
             <a:endParaRPr lang="en-US" sz="850" dirty="0"/>
           </a:p>
@@ -7981,6 +7981,118 @@
       <p:sp>
         <p:nvSpPr>
           <p:cNvPr id="22" name="Shape 20"/>
+          <p:cNvSpPr/>
+          <p:nvPr/>
+        </p:nvSpPr>
+        <p:spPr>
+          <a:xfrm>
+            <a:off x="6519672" y="2258568"/>
+            <a:ext cx="1828800" cy="292608"/>
+          </a:xfrm>
+          <a:prstGeom prst="rect">
+            <a:avLst>
+              <a:gd name="adj" fmla="val 25000"/>
+            </a:avLst>
+          </a:prstGeom>
+          <a:solidFill>
+            <a:srgbClr val="FCE7F3"/>
+          </a:solidFill>
+          <a:ln w="19050">
+            <a:solidFill>
+              <a:srgbClr val="DB2777"/>
+            </a:solidFill>
+            <a:prstDash val="solid"/>
+          </a:ln>
+          <a:effectLst>
+            <a:outerShdw sx="100000" sy="100000" kx="0" ky="0" algn="bl" rotWithShape="0" blurRad="101600" dist="38100" dir="8100000">
+              <a:srgbClr val="000000">
+                <a:alpha val="12000"/>
+              </a:srgbClr>
+            </a:outerShdw>
+          </a:effectLst>
+        </p:spPr>
+      </p:sp>
+      <p:sp>
+        <p:nvSpPr>
+          <p:cNvPr id="23" name="Text 21"/>
+          <p:cNvSpPr/>
+          <p:nvPr/>
+        </p:nvSpPr>
+        <p:spPr>
+          <a:xfrm>
+            <a:off x="6519672" y="2258568"/>
+            <a:ext cx="1828800" cy="292608"/>
+          </a:xfrm>
+          <a:prstGeom prst="rect">
+            <a:avLst/>
+          </a:prstGeom>
+          <a:noFill/>
+          <a:ln/>
+        </p:spPr>
+        <p:txBody>
+          <a:bodyPr wrap="square" lIns="0" tIns="0" rIns="0" bIns="0" rtlCol="0" anchor="ctr"/>
+          <a:lstStyle/>
+          <a:p>
+            <a:pPr algn="ctr" indent="0" marL="0">
+              <a:buNone/>
+            </a:pPr>
+            <a:r>
+              <a:rPr lang="en-US" sz="1300" b="1" dirty="0">
+                <a:solidFill>
+                  <a:srgbClr val="9D174D"/>
+                </a:solidFill>
+                <a:latin typeface="Trebuchet MS" pitchFamily="34" charset="0"/>
+                <a:ea typeface="Trebuchet MS" pitchFamily="34" charset="-122"/>
+                <a:cs typeface="Trebuchet MS" pitchFamily="34" charset="-120"/>
+              </a:rPr>
+              <a:t>ing</a:t>
+            </a:r>
+            <a:endParaRPr lang="en-US" sz="1300" dirty="0"/>
+          </a:p>
+        </p:txBody>
+      </p:sp>
+      <p:sp>
+        <p:nvSpPr>
+          <p:cNvPr id="24" name="Text 22"/>
+          <p:cNvSpPr/>
+          <p:nvPr/>
+        </p:nvSpPr>
+        <p:spPr>
+          <a:xfrm>
+            <a:off x="6519672" y="2569464"/>
+            <a:ext cx="1828800" cy="201168"/>
+          </a:xfrm>
+          <a:prstGeom prst="rect">
+            <a:avLst/>
+          </a:prstGeom>
+          <a:noFill/>
+          <a:ln/>
+        </p:spPr>
+        <p:txBody>
+          <a:bodyPr wrap="square" lIns="0" tIns="0" rIns="0" bIns="0" rtlCol="0" anchor="t"/>
+          <a:lstStyle/>
+          <a:p>
+            <a:pPr algn="ctr" indent="0" marL="0">
+              <a:buNone/>
+            </a:pPr>
+            <a:r>
+              <a:rPr lang="en-US" sz="850" dirty="0">
+                <a:solidFill>
+                  <a:srgbClr val="475569"/>
+                </a:solidFill>
+                <a:latin typeface="Calibri" pitchFamily="34" charset="0"/>
+                <a:ea typeface="Calibri" pitchFamily="34" charset="-122"/>
+                <a:cs typeface="Calibri" pitchFamily="34" charset="-120"/>
+              </a:rPr>
+              <a:t>happening now</a:t>
+            </a:r>
+            <a:endParaRPr lang="en-US" sz="850" dirty="0"/>
+          </a:p>
+        </p:txBody>
+      </p:sp>
+      <p:sp>
+        <p:nvSpPr>
+          <p:cNvPr id="25" name="Shape 23"/>
           <p:cNvSpPr/>
           <p:nvPr/>
         </p:nvSpPr>
@@ -8007,7 +8119,7 @@
       </p:sp>
       <p:sp>
         <p:nvSpPr>
-          <p:cNvPr id="23" name="Text 21"/>
+          <p:cNvPr id="26" name="Text 24"/>
           <p:cNvSpPr/>
           <p:nvPr/>
         </p:nvSpPr>
@@ -8046,7 +8158,7 @@
       </p:sp>
       <p:sp>
         <p:nvSpPr>
-          <p:cNvPr id="24" name="Shape 22"/>
+          <p:cNvPr id="27" name="Shape 25"/>
           <p:cNvSpPr/>
           <p:nvPr/>
         </p:nvSpPr>
@@ -8073,7 +8185,7 @@
       </p:sp>
       <p:sp>
         <p:nvSpPr>
-          <p:cNvPr id="25" name="Text 23"/>
+          <p:cNvPr id="28" name="Text 26"/>
           <p:cNvSpPr/>
           <p:nvPr/>
         </p:nvSpPr>
@@ -8112,7 +8224,7 @@
       </p:sp>
       <p:sp>
         <p:nvSpPr>
-          <p:cNvPr id="26" name="Shape 24"/>
+          <p:cNvPr id="29" name="Shape 27"/>
           <p:cNvSpPr/>
           <p:nvPr/>
         </p:nvSpPr>
@@ -8139,7 +8251,7 @@
       </p:sp>
       <p:sp>
         <p:nvSpPr>
-          <p:cNvPr id="27" name="Text 25"/>
+          <p:cNvPr id="30" name="Text 28"/>
           <p:cNvSpPr/>
           <p:nvPr/>
         </p:nvSpPr>
@@ -8178,7 +8290,7 @@
       </p:sp>
       <p:sp>
         <p:nvSpPr>
-          <p:cNvPr id="28" name="Shape 26"/>
+          <p:cNvPr id="31" name="Shape 29"/>
           <p:cNvSpPr/>
           <p:nvPr/>
         </p:nvSpPr>
@@ -8205,7 +8317,7 @@
       </p:sp>
       <p:sp>
         <p:nvSpPr>
-          <p:cNvPr id="29" name="Text 27"/>
+          <p:cNvPr id="32" name="Text 30"/>
           <p:cNvSpPr/>
           <p:nvPr/>
         </p:nvSpPr>
@@ -8528,7 +8640,7 @@
                 <a:ea typeface="Calibri" pitchFamily="34" charset="-122"/>
                 <a:cs typeface="Calibri" pitchFamily="34" charset="-120"/>
               </a:rPr>
-              <a:t>Word Labs  •  wordlabs.app  •  Prefix: 'sub-' = under, below, less than</a:t>
+              <a:t>Word Labs  •  wordlabs.app  •  Prefix: 'sub-' = under; below</a:t>
             </a:r>
             <a:endParaRPr lang="en-US" sz="800" dirty="0"/>
           </a:p>
@@ -8667,7 +8779,7 @@
                 <a:ea typeface="Trebuchet MS" pitchFamily="34" charset="-122"/>
                 <a:cs typeface="Trebuchet MS" pitchFamily="34" charset="-120"/>
               </a:rPr>
-              <a:t>submarine</a:t>
+              <a:t>supplying</a:t>
             </a:r>
             <a:endParaRPr lang="en-US" sz="2800" dirty="0"/>
           </a:p>
@@ -8747,7 +8859,7 @@
         </p:nvSpPr>
         <p:spPr>
           <a:xfrm>
-            <a:off x="2938272" y="2258568"/>
+            <a:off x="2221992" y="2258568"/>
             <a:ext cx="1828800" cy="292608"/>
           </a:xfrm>
           <a:prstGeom prst="rect">
@@ -8781,7 +8893,7 @@
         </p:nvSpPr>
         <p:spPr>
           <a:xfrm>
-            <a:off x="2938272" y="2258568"/>
+            <a:off x="2221992" y="2258568"/>
             <a:ext cx="1828800" cy="292608"/>
           </a:xfrm>
           <a:prstGeom prst="rect">
@@ -8820,7 +8932,7 @@
         </p:nvSpPr>
         <p:spPr>
           <a:xfrm>
-            <a:off x="2938272" y="2569464"/>
+            <a:off x="2221992" y="2569464"/>
             <a:ext cx="1828800" cy="201168"/>
           </a:xfrm>
           <a:prstGeom prst="rect">
@@ -8845,7 +8957,7 @@
                 <a:ea typeface="Calibri" pitchFamily="34" charset="-122"/>
                 <a:cs typeface="Calibri" pitchFamily="34" charset="-120"/>
               </a:rPr>
-              <a:t>under, below</a:t>
+              <a:t>under; below</a:t>
             </a:r>
             <a:endParaRPr lang="en-US" sz="850" dirty="0"/>
           </a:p>
@@ -8859,7 +8971,7 @@
         </p:nvSpPr>
         <p:spPr>
           <a:xfrm>
-            <a:off x="5803392" y="2258568"/>
+            <a:off x="4370832" y="2258568"/>
             <a:ext cx="1828800" cy="292608"/>
           </a:xfrm>
           <a:prstGeom prst="rect">
@@ -8893,7 +9005,7 @@
         </p:nvSpPr>
         <p:spPr>
           <a:xfrm>
-            <a:off x="5803392" y="2258568"/>
+            <a:off x="4370832" y="2258568"/>
             <a:ext cx="1828800" cy="292608"/>
           </a:xfrm>
           <a:prstGeom prst="rect">
@@ -8918,7 +9030,7 @@
                 <a:ea typeface="Trebuchet MS" pitchFamily="34" charset="-122"/>
                 <a:cs typeface="Trebuchet MS" pitchFamily="34" charset="-120"/>
               </a:rPr>
-              <a:t>marine</a:t>
+              <a:t>ply</a:t>
             </a:r>
             <a:endParaRPr lang="en-US" sz="1300" dirty="0"/>
           </a:p>
@@ -8932,7 +9044,7 @@
         </p:nvSpPr>
         <p:spPr>
           <a:xfrm>
-            <a:off x="5803392" y="2569464"/>
+            <a:off x="4370832" y="2569464"/>
             <a:ext cx="1828800" cy="201168"/>
           </a:xfrm>
           <a:prstGeom prst="rect">
@@ -8957,7 +9069,7 @@
                 <a:ea typeface="Calibri" pitchFamily="34" charset="-122"/>
                 <a:cs typeface="Calibri" pitchFamily="34" charset="-120"/>
               </a:rPr>
-              <a:t>of the sea</a:t>
+              <a:t>fold; bend</a:t>
             </a:r>
             <a:endParaRPr lang="en-US" sz="850" dirty="0"/>
           </a:p>
@@ -8966,6 +9078,118 @@
       <p:sp>
         <p:nvSpPr>
           <p:cNvPr id="22" name="Shape 20"/>
+          <p:cNvSpPr/>
+          <p:nvPr/>
+        </p:nvSpPr>
+        <p:spPr>
+          <a:xfrm>
+            <a:off x="6519672" y="2258568"/>
+            <a:ext cx="1828800" cy="292608"/>
+          </a:xfrm>
+          <a:prstGeom prst="rect">
+            <a:avLst>
+              <a:gd name="adj" fmla="val 25000"/>
+            </a:avLst>
+          </a:prstGeom>
+          <a:solidFill>
+            <a:srgbClr val="FCE7F3"/>
+          </a:solidFill>
+          <a:ln w="19050">
+            <a:solidFill>
+              <a:srgbClr val="DB2777"/>
+            </a:solidFill>
+            <a:prstDash val="solid"/>
+          </a:ln>
+          <a:effectLst>
+            <a:outerShdw sx="100000" sy="100000" kx="0" ky="0" algn="bl" rotWithShape="0" blurRad="101600" dist="38100" dir="8100000">
+              <a:srgbClr val="000000">
+                <a:alpha val="12000"/>
+              </a:srgbClr>
+            </a:outerShdw>
+          </a:effectLst>
+        </p:spPr>
+      </p:sp>
+      <p:sp>
+        <p:nvSpPr>
+          <p:cNvPr id="23" name="Text 21"/>
+          <p:cNvSpPr/>
+          <p:nvPr/>
+        </p:nvSpPr>
+        <p:spPr>
+          <a:xfrm>
+            <a:off x="6519672" y="2258568"/>
+            <a:ext cx="1828800" cy="292608"/>
+          </a:xfrm>
+          <a:prstGeom prst="rect">
+            <a:avLst/>
+          </a:prstGeom>
+          <a:noFill/>
+          <a:ln/>
+        </p:spPr>
+        <p:txBody>
+          <a:bodyPr wrap="square" lIns="0" tIns="0" rIns="0" bIns="0" rtlCol="0" anchor="ctr"/>
+          <a:lstStyle/>
+          <a:p>
+            <a:pPr algn="ctr" indent="0" marL="0">
+              <a:buNone/>
+            </a:pPr>
+            <a:r>
+              <a:rPr lang="en-US" sz="1300" b="1" dirty="0">
+                <a:solidFill>
+                  <a:srgbClr val="9D174D"/>
+                </a:solidFill>
+                <a:latin typeface="Trebuchet MS" pitchFamily="34" charset="0"/>
+                <a:ea typeface="Trebuchet MS" pitchFamily="34" charset="-122"/>
+                <a:cs typeface="Trebuchet MS" pitchFamily="34" charset="-120"/>
+              </a:rPr>
+              <a:t>ing</a:t>
+            </a:r>
+            <a:endParaRPr lang="en-US" sz="1300" dirty="0"/>
+          </a:p>
+        </p:txBody>
+      </p:sp>
+      <p:sp>
+        <p:nvSpPr>
+          <p:cNvPr id="24" name="Text 22"/>
+          <p:cNvSpPr/>
+          <p:nvPr/>
+        </p:nvSpPr>
+        <p:spPr>
+          <a:xfrm>
+            <a:off x="6519672" y="2569464"/>
+            <a:ext cx="1828800" cy="201168"/>
+          </a:xfrm>
+          <a:prstGeom prst="rect">
+            <a:avLst/>
+          </a:prstGeom>
+          <a:noFill/>
+          <a:ln/>
+        </p:spPr>
+        <p:txBody>
+          <a:bodyPr wrap="square" lIns="0" tIns="0" rIns="0" bIns="0" rtlCol="0" anchor="t"/>
+          <a:lstStyle/>
+          <a:p>
+            <a:pPr algn="ctr" indent="0" marL="0">
+              <a:buNone/>
+            </a:pPr>
+            <a:r>
+              <a:rPr lang="en-US" sz="850" dirty="0">
+                <a:solidFill>
+                  <a:srgbClr val="475569"/>
+                </a:solidFill>
+                <a:latin typeface="Calibri" pitchFamily="34" charset="0"/>
+                <a:ea typeface="Calibri" pitchFamily="34" charset="-122"/>
+                <a:cs typeface="Calibri" pitchFamily="34" charset="-120"/>
+              </a:rPr>
+              <a:t>happening now</a:t>
+            </a:r>
+            <a:endParaRPr lang="en-US" sz="850" dirty="0"/>
+          </a:p>
+        </p:txBody>
+      </p:sp>
+      <p:sp>
+        <p:nvSpPr>
+          <p:cNvPr id="25" name="Shape 23"/>
           <p:cNvSpPr/>
           <p:nvPr/>
         </p:nvSpPr>
@@ -8992,7 +9216,7 @@
       </p:sp>
       <p:sp>
         <p:nvSpPr>
-          <p:cNvPr id="23" name="Text 21"/>
+          <p:cNvPr id="26" name="Text 24"/>
           <p:cNvSpPr/>
           <p:nvPr/>
         </p:nvSpPr>
@@ -9031,7 +9255,7 @@
       </p:sp>
       <p:sp>
         <p:nvSpPr>
-          <p:cNvPr id="24" name="Shape 22"/>
+          <p:cNvPr id="27" name="Shape 25"/>
           <p:cNvSpPr/>
           <p:nvPr/>
         </p:nvSpPr>
@@ -9058,7 +9282,7 @@
       </p:sp>
       <p:sp>
         <p:nvSpPr>
-          <p:cNvPr id="25" name="Shape 23"/>
+          <p:cNvPr id="28" name="Shape 26"/>
           <p:cNvSpPr/>
           <p:nvPr/>
         </p:nvSpPr>
@@ -9085,7 +9309,7 @@
       </p:sp>
       <p:sp>
         <p:nvSpPr>
-          <p:cNvPr id="26" name="Text 24"/>
+          <p:cNvPr id="29" name="Text 27"/>
           <p:cNvSpPr/>
           <p:nvPr/>
         </p:nvSpPr>
@@ -9116,7 +9340,7 @@
                 <a:ea typeface="Trebuchet MS" pitchFamily="34" charset="-122"/>
                 <a:cs typeface="Trebuchet MS" pitchFamily="34" charset="-120"/>
               </a:rPr>
-              <a:t>sub</a:t>
+              <a:t>sup</a:t>
             </a:r>
             <a:endParaRPr lang="en-US" sz="1400" dirty="0"/>
           </a:p>
@@ -9124,7 +9348,7 @@
       </p:sp>
       <p:sp>
         <p:nvSpPr>
-          <p:cNvPr id="27" name="Text 25"/>
+          <p:cNvPr id="30" name="Text 28"/>
           <p:cNvSpPr/>
           <p:nvPr/>
         </p:nvSpPr>
@@ -9163,7 +9387,7 @@
       </p:sp>
       <p:sp>
         <p:nvSpPr>
-          <p:cNvPr id="28" name="Shape 26"/>
+          <p:cNvPr id="31" name="Shape 29"/>
           <p:cNvSpPr/>
           <p:nvPr/>
         </p:nvSpPr>
@@ -9190,7 +9414,7 @@
       </p:sp>
       <p:sp>
         <p:nvSpPr>
-          <p:cNvPr id="29" name="Text 27"/>
+          <p:cNvPr id="32" name="Text 30"/>
           <p:cNvSpPr/>
           <p:nvPr/>
         </p:nvSpPr>
@@ -9221,7 +9445,7 @@
                 <a:ea typeface="Trebuchet MS" pitchFamily="34" charset="-122"/>
                 <a:cs typeface="Trebuchet MS" pitchFamily="34" charset="-120"/>
               </a:rPr>
-              <a:t>ma</a:t>
+              <a:t>ply</a:t>
             </a:r>
             <a:endParaRPr lang="en-US" sz="1400" dirty="0"/>
           </a:p>
@@ -9229,7 +9453,7 @@
       </p:sp>
       <p:sp>
         <p:nvSpPr>
-          <p:cNvPr id="30" name="Text 28"/>
+          <p:cNvPr id="33" name="Text 31"/>
           <p:cNvSpPr/>
           <p:nvPr/>
         </p:nvSpPr>
@@ -9268,7 +9492,7 @@
       </p:sp>
       <p:sp>
         <p:nvSpPr>
-          <p:cNvPr id="31" name="Shape 29"/>
+          <p:cNvPr id="34" name="Shape 32"/>
           <p:cNvSpPr/>
           <p:nvPr/>
         </p:nvSpPr>
@@ -9295,7 +9519,7 @@
       </p:sp>
       <p:sp>
         <p:nvSpPr>
-          <p:cNvPr id="32" name="Text 30"/>
+          <p:cNvPr id="35" name="Text 33"/>
           <p:cNvSpPr/>
           <p:nvPr/>
         </p:nvSpPr>
@@ -9326,7 +9550,7 @@
                 <a:ea typeface="Trebuchet MS" pitchFamily="34" charset="-122"/>
                 <a:cs typeface="Trebuchet MS" pitchFamily="34" charset="-120"/>
               </a:rPr>
-              <a:t>rine</a:t>
+              <a:t>ing</a:t>
             </a:r>
             <a:endParaRPr lang="en-US" sz="1400" dirty="0"/>
           </a:p>
@@ -9334,7 +9558,7 @@
       </p:sp>
       <p:sp>
         <p:nvSpPr>
-          <p:cNvPr id="33" name="Shape 31"/>
+          <p:cNvPr id="36" name="Shape 34"/>
           <p:cNvSpPr/>
           <p:nvPr/>
         </p:nvSpPr>
@@ -9361,7 +9585,7 @@
       </p:sp>
       <p:sp>
         <p:nvSpPr>
-          <p:cNvPr id="34" name="Text 32"/>
+          <p:cNvPr id="37" name="Text 35"/>
           <p:cNvSpPr/>
           <p:nvPr/>
         </p:nvSpPr>
@@ -9400,7 +9624,7 @@
       </p:sp>
       <p:sp>
         <p:nvSpPr>
-          <p:cNvPr id="35" name="Shape 33"/>
+          <p:cNvPr id="38" name="Shape 36"/>
           <p:cNvSpPr/>
           <p:nvPr/>
         </p:nvSpPr>
@@ -9427,7 +9651,7 @@
       </p:sp>
       <p:sp>
         <p:nvSpPr>
-          <p:cNvPr id="36" name="Text 34"/>
+          <p:cNvPr id="39" name="Text 37"/>
           <p:cNvSpPr/>
           <p:nvPr/>
         </p:nvSpPr>
@@ -9750,7 +9974,7 @@
                 <a:ea typeface="Calibri" pitchFamily="34" charset="-122"/>
                 <a:cs typeface="Calibri" pitchFamily="34" charset="-120"/>
               </a:rPr>
-              <a:t>Word Labs  •  wordlabs.app  •  Prefix: 'sub-' = under, below, less than</a:t>
+              <a:t>Word Labs  •  wordlabs.app  •  Prefix: 'sub-' = under; below</a:t>
             </a:r>
             <a:endParaRPr lang="en-US" sz="800" dirty="0"/>
           </a:p>
@@ -9889,7 +10113,7 @@
                 <a:ea typeface="Trebuchet MS" pitchFamily="34" charset="-122"/>
                 <a:cs typeface="Trebuchet MS" pitchFamily="34" charset="-120"/>
               </a:rPr>
-              <a:t>submarine</a:t>
+              <a:t>supplying</a:t>
             </a:r>
             <a:endParaRPr lang="en-US" sz="2800" dirty="0"/>
           </a:p>
@@ -9969,7 +10193,7 @@
         </p:nvSpPr>
         <p:spPr>
           <a:xfrm>
-            <a:off x="2938272" y="2258568"/>
+            <a:off x="2221992" y="2258568"/>
             <a:ext cx="1828800" cy="292608"/>
           </a:xfrm>
           <a:prstGeom prst="rect">
@@ -10003,7 +10227,7 @@
         </p:nvSpPr>
         <p:spPr>
           <a:xfrm>
-            <a:off x="2938272" y="2258568"/>
+            <a:off x="2221992" y="2258568"/>
             <a:ext cx="1828800" cy="292608"/>
           </a:xfrm>
           <a:prstGeom prst="rect">
@@ -10042,7 +10266,7 @@
         </p:nvSpPr>
         <p:spPr>
           <a:xfrm>
-            <a:off x="2938272" y="2569464"/>
+            <a:off x="2221992" y="2569464"/>
             <a:ext cx="1828800" cy="201168"/>
           </a:xfrm>
           <a:prstGeom prst="rect">
@@ -10067,7 +10291,7 @@
                 <a:ea typeface="Calibri" pitchFamily="34" charset="-122"/>
                 <a:cs typeface="Calibri" pitchFamily="34" charset="-120"/>
               </a:rPr>
-              <a:t>under, below</a:t>
+              <a:t>under; below</a:t>
             </a:r>
             <a:endParaRPr lang="en-US" sz="850" dirty="0"/>
           </a:p>
@@ -10081,7 +10305,7 @@
         </p:nvSpPr>
         <p:spPr>
           <a:xfrm>
-            <a:off x="5803392" y="2258568"/>
+            <a:off x="4370832" y="2258568"/>
             <a:ext cx="1828800" cy="292608"/>
           </a:xfrm>
           <a:prstGeom prst="rect">
@@ -10115,7 +10339,7 @@
         </p:nvSpPr>
         <p:spPr>
           <a:xfrm>
-            <a:off x="5803392" y="2258568"/>
+            <a:off x="4370832" y="2258568"/>
             <a:ext cx="1828800" cy="292608"/>
           </a:xfrm>
           <a:prstGeom prst="rect">
@@ -10140,7 +10364,7 @@
                 <a:ea typeface="Trebuchet MS" pitchFamily="34" charset="-122"/>
                 <a:cs typeface="Trebuchet MS" pitchFamily="34" charset="-120"/>
               </a:rPr>
-              <a:t>marine</a:t>
+              <a:t>ply</a:t>
             </a:r>
             <a:endParaRPr lang="en-US" sz="1300" dirty="0"/>
           </a:p>
@@ -10154,7 +10378,7 @@
         </p:nvSpPr>
         <p:spPr>
           <a:xfrm>
-            <a:off x="5803392" y="2569464"/>
+            <a:off x="4370832" y="2569464"/>
             <a:ext cx="1828800" cy="201168"/>
           </a:xfrm>
           <a:prstGeom prst="rect">
@@ -10179,7 +10403,7 @@
                 <a:ea typeface="Calibri" pitchFamily="34" charset="-122"/>
                 <a:cs typeface="Calibri" pitchFamily="34" charset="-120"/>
               </a:rPr>
-              <a:t>of the sea</a:t>
+              <a:t>fold; bend</a:t>
             </a:r>
             <a:endParaRPr lang="en-US" sz="850" dirty="0"/>
           </a:p>
@@ -10188,6 +10412,118 @@
       <p:sp>
         <p:nvSpPr>
           <p:cNvPr id="22" name="Shape 20"/>
+          <p:cNvSpPr/>
+          <p:nvPr/>
+        </p:nvSpPr>
+        <p:spPr>
+          <a:xfrm>
+            <a:off x="6519672" y="2258568"/>
+            <a:ext cx="1828800" cy="292608"/>
+          </a:xfrm>
+          <a:prstGeom prst="rect">
+            <a:avLst>
+              <a:gd name="adj" fmla="val 25000"/>
+            </a:avLst>
+          </a:prstGeom>
+          <a:solidFill>
+            <a:srgbClr val="FCE7F3"/>
+          </a:solidFill>
+          <a:ln w="19050">
+            <a:solidFill>
+              <a:srgbClr val="DB2777"/>
+            </a:solidFill>
+            <a:prstDash val="solid"/>
+          </a:ln>
+          <a:effectLst>
+            <a:outerShdw sx="100000" sy="100000" kx="0" ky="0" algn="bl" rotWithShape="0" blurRad="101600" dist="38100" dir="8100000">
+              <a:srgbClr val="000000">
+                <a:alpha val="12000"/>
+              </a:srgbClr>
+            </a:outerShdw>
+          </a:effectLst>
+        </p:spPr>
+      </p:sp>
+      <p:sp>
+        <p:nvSpPr>
+          <p:cNvPr id="23" name="Text 21"/>
+          <p:cNvSpPr/>
+          <p:nvPr/>
+        </p:nvSpPr>
+        <p:spPr>
+          <a:xfrm>
+            <a:off x="6519672" y="2258568"/>
+            <a:ext cx="1828800" cy="292608"/>
+          </a:xfrm>
+          <a:prstGeom prst="rect">
+            <a:avLst/>
+          </a:prstGeom>
+          <a:noFill/>
+          <a:ln/>
+        </p:spPr>
+        <p:txBody>
+          <a:bodyPr wrap="square" lIns="0" tIns="0" rIns="0" bIns="0" rtlCol="0" anchor="ctr"/>
+          <a:lstStyle/>
+          <a:p>
+            <a:pPr algn="ctr" indent="0" marL="0">
+              <a:buNone/>
+            </a:pPr>
+            <a:r>
+              <a:rPr lang="en-US" sz="1300" b="1" dirty="0">
+                <a:solidFill>
+                  <a:srgbClr val="9D174D"/>
+                </a:solidFill>
+                <a:latin typeface="Trebuchet MS" pitchFamily="34" charset="0"/>
+                <a:ea typeface="Trebuchet MS" pitchFamily="34" charset="-122"/>
+                <a:cs typeface="Trebuchet MS" pitchFamily="34" charset="-120"/>
+              </a:rPr>
+              <a:t>ing</a:t>
+            </a:r>
+            <a:endParaRPr lang="en-US" sz="1300" dirty="0"/>
+          </a:p>
+        </p:txBody>
+      </p:sp>
+      <p:sp>
+        <p:nvSpPr>
+          <p:cNvPr id="24" name="Text 22"/>
+          <p:cNvSpPr/>
+          <p:nvPr/>
+        </p:nvSpPr>
+        <p:spPr>
+          <a:xfrm>
+            <a:off x="6519672" y="2569464"/>
+            <a:ext cx="1828800" cy="201168"/>
+          </a:xfrm>
+          <a:prstGeom prst="rect">
+            <a:avLst/>
+          </a:prstGeom>
+          <a:noFill/>
+          <a:ln/>
+        </p:spPr>
+        <p:txBody>
+          <a:bodyPr wrap="square" lIns="0" tIns="0" rIns="0" bIns="0" rtlCol="0" anchor="t"/>
+          <a:lstStyle/>
+          <a:p>
+            <a:pPr algn="ctr" indent="0" marL="0">
+              <a:buNone/>
+            </a:pPr>
+            <a:r>
+              <a:rPr lang="en-US" sz="850" dirty="0">
+                <a:solidFill>
+                  <a:srgbClr val="475569"/>
+                </a:solidFill>
+                <a:latin typeface="Calibri" pitchFamily="34" charset="0"/>
+                <a:ea typeface="Calibri" pitchFamily="34" charset="-122"/>
+                <a:cs typeface="Calibri" pitchFamily="34" charset="-120"/>
+              </a:rPr>
+              <a:t>happening now</a:t>
+            </a:r>
+            <a:endParaRPr lang="en-US" sz="850" dirty="0"/>
+          </a:p>
+        </p:txBody>
+      </p:sp>
+      <p:sp>
+        <p:nvSpPr>
+          <p:cNvPr id="25" name="Shape 23"/>
           <p:cNvSpPr/>
           <p:nvPr/>
         </p:nvSpPr>
@@ -10214,7 +10550,7 @@
       </p:sp>
       <p:sp>
         <p:nvSpPr>
-          <p:cNvPr id="23" name="Text 21"/>
+          <p:cNvPr id="26" name="Text 24"/>
           <p:cNvSpPr/>
           <p:nvPr/>
         </p:nvSpPr>
@@ -10253,7 +10589,7 @@
       </p:sp>
       <p:sp>
         <p:nvSpPr>
-          <p:cNvPr id="24" name="Shape 22"/>
+          <p:cNvPr id="27" name="Shape 25"/>
           <p:cNvSpPr/>
           <p:nvPr/>
         </p:nvSpPr>
@@ -10280,7 +10616,7 @@
       </p:sp>
       <p:sp>
         <p:nvSpPr>
-          <p:cNvPr id="25" name="Shape 23"/>
+          <p:cNvPr id="28" name="Shape 26"/>
           <p:cNvSpPr/>
           <p:nvPr/>
         </p:nvSpPr>
@@ -10307,7 +10643,7 @@
       </p:sp>
       <p:sp>
         <p:nvSpPr>
-          <p:cNvPr id="26" name="Text 24"/>
+          <p:cNvPr id="29" name="Text 27"/>
           <p:cNvSpPr/>
           <p:nvPr/>
         </p:nvSpPr>
@@ -10338,7 +10674,7 @@
                 <a:ea typeface="Trebuchet MS" pitchFamily="34" charset="-122"/>
                 <a:cs typeface="Trebuchet MS" pitchFamily="34" charset="-120"/>
               </a:rPr>
-              <a:t>sub</a:t>
+              <a:t>sup</a:t>
             </a:r>
             <a:endParaRPr lang="en-US" sz="1400" dirty="0"/>
           </a:p>
@@ -10346,7 +10682,7 @@
       </p:sp>
       <p:sp>
         <p:nvSpPr>
-          <p:cNvPr id="27" name="Text 25"/>
+          <p:cNvPr id="30" name="Text 28"/>
           <p:cNvSpPr/>
           <p:nvPr/>
         </p:nvSpPr>
@@ -10385,7 +10721,7 @@
       </p:sp>
       <p:sp>
         <p:nvSpPr>
-          <p:cNvPr id="28" name="Shape 26"/>
+          <p:cNvPr id="31" name="Shape 29"/>
           <p:cNvSpPr/>
           <p:nvPr/>
         </p:nvSpPr>
@@ -10412,7 +10748,7 @@
       </p:sp>
       <p:sp>
         <p:nvSpPr>
-          <p:cNvPr id="29" name="Text 27"/>
+          <p:cNvPr id="32" name="Text 30"/>
           <p:cNvSpPr/>
           <p:nvPr/>
         </p:nvSpPr>
@@ -10443,7 +10779,7 @@
                 <a:ea typeface="Trebuchet MS" pitchFamily="34" charset="-122"/>
                 <a:cs typeface="Trebuchet MS" pitchFamily="34" charset="-120"/>
               </a:rPr>
-              <a:t>ma</a:t>
+              <a:t>ply</a:t>
             </a:r>
             <a:endParaRPr lang="en-US" sz="1400" dirty="0"/>
           </a:p>
@@ -10451,7 +10787,7 @@
       </p:sp>
       <p:sp>
         <p:nvSpPr>
-          <p:cNvPr id="30" name="Text 28"/>
+          <p:cNvPr id="33" name="Text 31"/>
           <p:cNvSpPr/>
           <p:nvPr/>
         </p:nvSpPr>
@@ -10490,7 +10826,7 @@
       </p:sp>
       <p:sp>
         <p:nvSpPr>
-          <p:cNvPr id="31" name="Shape 29"/>
+          <p:cNvPr id="34" name="Shape 32"/>
           <p:cNvSpPr/>
           <p:nvPr/>
         </p:nvSpPr>
@@ -10517,7 +10853,7 @@
       </p:sp>
       <p:sp>
         <p:nvSpPr>
-          <p:cNvPr id="32" name="Text 30"/>
+          <p:cNvPr id="35" name="Text 33"/>
           <p:cNvSpPr/>
           <p:nvPr/>
         </p:nvSpPr>
@@ -10548,7 +10884,7 @@
                 <a:ea typeface="Trebuchet MS" pitchFamily="34" charset="-122"/>
                 <a:cs typeface="Trebuchet MS" pitchFamily="34" charset="-120"/>
               </a:rPr>
-              <a:t>rine</a:t>
+              <a:t>ing</a:t>
             </a:r>
             <a:endParaRPr lang="en-US" sz="1400" dirty="0"/>
           </a:p>
@@ -10556,7 +10892,7 @@
       </p:sp>
       <p:sp>
         <p:nvSpPr>
-          <p:cNvPr id="33" name="Shape 31"/>
+          <p:cNvPr id="36" name="Shape 34"/>
           <p:cNvSpPr/>
           <p:nvPr/>
         </p:nvSpPr>
@@ -10583,7 +10919,7 @@
       </p:sp>
       <p:sp>
         <p:nvSpPr>
-          <p:cNvPr id="34" name="Text 32"/>
+          <p:cNvPr id="37" name="Text 35"/>
           <p:cNvSpPr/>
           <p:nvPr/>
         </p:nvSpPr>
@@ -10622,18 +10958,18 @@
       </p:sp>
       <p:sp>
         <p:nvSpPr>
-          <p:cNvPr id="35" name="Shape 33"/>
+          <p:cNvPr id="38" name="Shape 36"/>
           <p:cNvSpPr/>
           <p:nvPr/>
         </p:nvSpPr>
         <p:spPr>
           <a:xfrm>
             <a:off x="1874520" y="4096512"/>
-            <a:ext cx="6903720" cy="804672"/>
+            <a:ext cx="6903720" cy="658368"/>
           </a:xfrm>
           <a:prstGeom prst="rect">
             <a:avLst>
-              <a:gd name="adj" fmla="val 6818"/>
+              <a:gd name="adj" fmla="val 8333"/>
             </a:avLst>
           </a:prstGeom>
           <a:solidFill>
@@ -10649,18 +10985,18 @@
       </p:sp>
       <p:sp>
         <p:nvSpPr>
-          <p:cNvPr id="36" name="Shape 34"/>
+          <p:cNvPr id="39" name="Shape 37"/>
           <p:cNvSpPr/>
           <p:nvPr/>
         </p:nvSpPr>
         <p:spPr>
           <a:xfrm>
             <a:off x="2023872" y="4169664"/>
-            <a:ext cx="685800" cy="384048"/>
+            <a:ext cx="685800" cy="475488"/>
           </a:xfrm>
           <a:prstGeom prst="rect">
             <a:avLst>
-              <a:gd name="adj" fmla="val 9524"/>
+              <a:gd name="adj" fmla="val 7692"/>
             </a:avLst>
           </a:prstGeom>
           <a:solidFill>
@@ -10676,14 +11012,14 @@
       </p:sp>
       <p:sp>
         <p:nvSpPr>
-          <p:cNvPr id="37" name="Text 35"/>
+          <p:cNvPr id="40" name="Text 38"/>
           <p:cNvSpPr/>
           <p:nvPr/>
         </p:nvSpPr>
         <p:spPr>
           <a:xfrm>
             <a:off x="2023872" y="4169664"/>
-            <a:ext cx="685800" cy="384048"/>
+            <a:ext cx="685800" cy="475488"/>
           </a:xfrm>
           <a:prstGeom prst="rect">
             <a:avLst/>
@@ -10715,18 +11051,18 @@
       </p:sp>
       <p:sp>
         <p:nvSpPr>
-          <p:cNvPr id="38" name="Shape 36"/>
+          <p:cNvPr id="41" name="Shape 39"/>
           <p:cNvSpPr/>
           <p:nvPr/>
         </p:nvSpPr>
         <p:spPr>
           <a:xfrm>
             <a:off x="2831592" y="4169664"/>
-            <a:ext cx="685800" cy="384048"/>
+            <a:ext cx="685800" cy="475488"/>
           </a:xfrm>
           <a:prstGeom prst="rect">
             <a:avLst>
-              <a:gd name="adj" fmla="val 9524"/>
+              <a:gd name="adj" fmla="val 7692"/>
             </a:avLst>
           </a:prstGeom>
           <a:solidFill>
@@ -10742,14 +11078,14 @@
       </p:sp>
       <p:sp>
         <p:nvSpPr>
-          <p:cNvPr id="39" name="Text 37"/>
+          <p:cNvPr id="42" name="Text 40"/>
           <p:cNvSpPr/>
           <p:nvPr/>
         </p:nvSpPr>
         <p:spPr>
           <a:xfrm>
             <a:off x="2831592" y="4169664"/>
-            <a:ext cx="685800" cy="384048"/>
+            <a:ext cx="685800" cy="475488"/>
           </a:xfrm>
           <a:prstGeom prst="rect">
             <a:avLst/>
@@ -10781,18 +11117,18 @@
       </p:sp>
       <p:sp>
         <p:nvSpPr>
-          <p:cNvPr id="40" name="Shape 38"/>
+          <p:cNvPr id="43" name="Shape 41"/>
           <p:cNvSpPr/>
           <p:nvPr/>
         </p:nvSpPr>
         <p:spPr>
           <a:xfrm>
             <a:off x="3639312" y="4169664"/>
-            <a:ext cx="685800" cy="384048"/>
+            <a:ext cx="685800" cy="475488"/>
           </a:xfrm>
           <a:prstGeom prst="rect">
             <a:avLst>
-              <a:gd name="adj" fmla="val 9524"/>
+              <a:gd name="adj" fmla="val 7692"/>
             </a:avLst>
           </a:prstGeom>
           <a:solidFill>
@@ -10808,14 +11144,14 @@
       </p:sp>
       <p:sp>
         <p:nvSpPr>
-          <p:cNvPr id="41" name="Text 39"/>
+          <p:cNvPr id="44" name="Text 42"/>
           <p:cNvSpPr/>
           <p:nvPr/>
         </p:nvSpPr>
         <p:spPr>
           <a:xfrm>
             <a:off x="3639312" y="4169664"/>
-            <a:ext cx="685800" cy="384048"/>
+            <a:ext cx="685800" cy="475488"/>
           </a:xfrm>
           <a:prstGeom prst="rect">
             <a:avLst/>
@@ -10839,7 +11175,7 @@
                 <a:ea typeface="Trebuchet MS" pitchFamily="34" charset="-122"/>
                 <a:cs typeface="Trebuchet MS" pitchFamily="34" charset="-120"/>
               </a:rPr>
-              <a:t>b</a:t>
+              <a:t>p</a:t>
             </a:r>
             <a:endParaRPr lang="en-US" sz="900" dirty="0"/>
           </a:p>
@@ -10847,18 +11183,18 @@
       </p:sp>
       <p:sp>
         <p:nvSpPr>
-          <p:cNvPr id="42" name="Shape 40"/>
+          <p:cNvPr id="45" name="Shape 43"/>
           <p:cNvSpPr/>
           <p:nvPr/>
         </p:nvSpPr>
         <p:spPr>
           <a:xfrm>
             <a:off x="4447032" y="4169664"/>
-            <a:ext cx="685800" cy="384048"/>
+            <a:ext cx="685800" cy="475488"/>
           </a:xfrm>
           <a:prstGeom prst="rect">
             <a:avLst>
-              <a:gd name="adj" fmla="val 9524"/>
+              <a:gd name="adj" fmla="val 7692"/>
             </a:avLst>
           </a:prstGeom>
           <a:solidFill>
@@ -10874,14 +11210,14 @@
       </p:sp>
       <p:sp>
         <p:nvSpPr>
-          <p:cNvPr id="43" name="Text 41"/>
+          <p:cNvPr id="46" name="Text 44"/>
           <p:cNvSpPr/>
           <p:nvPr/>
         </p:nvSpPr>
         <p:spPr>
           <a:xfrm>
             <a:off x="4447032" y="4169664"/>
-            <a:ext cx="685800" cy="384048"/>
+            <a:ext cx="685800" cy="475488"/>
           </a:xfrm>
           <a:prstGeom prst="rect">
             <a:avLst/>
@@ -10905,7 +11241,7 @@
                 <a:ea typeface="Trebuchet MS" pitchFamily="34" charset="-122"/>
                 <a:cs typeface="Trebuchet MS" pitchFamily="34" charset="-120"/>
               </a:rPr>
-              <a:t>m</a:t>
+              <a:t>p</a:t>
             </a:r>
             <a:endParaRPr lang="en-US" sz="900" dirty="0"/>
           </a:p>
@@ -10913,18 +11249,18 @@
       </p:sp>
       <p:sp>
         <p:nvSpPr>
-          <p:cNvPr id="44" name="Shape 42"/>
+          <p:cNvPr id="47" name="Shape 45"/>
           <p:cNvSpPr/>
           <p:nvPr/>
         </p:nvSpPr>
         <p:spPr>
           <a:xfrm>
             <a:off x="5254752" y="4169664"/>
-            <a:ext cx="685800" cy="384048"/>
+            <a:ext cx="685800" cy="475488"/>
           </a:xfrm>
           <a:prstGeom prst="rect">
             <a:avLst>
-              <a:gd name="adj" fmla="val 9524"/>
+              <a:gd name="adj" fmla="val 7692"/>
             </a:avLst>
           </a:prstGeom>
           <a:solidFill>
@@ -10940,14 +11276,14 @@
       </p:sp>
       <p:sp>
         <p:nvSpPr>
-          <p:cNvPr id="45" name="Text 43"/>
+          <p:cNvPr id="48" name="Text 46"/>
           <p:cNvSpPr/>
           <p:nvPr/>
         </p:nvSpPr>
         <p:spPr>
           <a:xfrm>
             <a:off x="5254752" y="4169664"/>
-            <a:ext cx="685800" cy="384048"/>
+            <a:ext cx="685800" cy="475488"/>
           </a:xfrm>
           <a:prstGeom prst="rect">
             <a:avLst/>
@@ -10971,7 +11307,7 @@
                 <a:ea typeface="Trebuchet MS" pitchFamily="34" charset="-122"/>
                 <a:cs typeface="Trebuchet MS" pitchFamily="34" charset="-120"/>
               </a:rPr>
-              <a:t>a</a:t>
+              <a:t>l</a:t>
             </a:r>
             <a:endParaRPr lang="en-US" sz="900" dirty="0"/>
           </a:p>
@@ -10979,18 +11315,18 @@
       </p:sp>
       <p:sp>
         <p:nvSpPr>
-          <p:cNvPr id="46" name="Shape 44"/>
+          <p:cNvPr id="49" name="Shape 47"/>
           <p:cNvSpPr/>
           <p:nvPr/>
         </p:nvSpPr>
         <p:spPr>
           <a:xfrm>
             <a:off x="6062472" y="4169664"/>
-            <a:ext cx="685800" cy="384048"/>
+            <a:ext cx="685800" cy="475488"/>
           </a:xfrm>
           <a:prstGeom prst="rect">
             <a:avLst>
-              <a:gd name="adj" fmla="val 9524"/>
+              <a:gd name="adj" fmla="val 7692"/>
             </a:avLst>
           </a:prstGeom>
           <a:solidFill>
@@ -11006,14 +11342,14 @@
       </p:sp>
       <p:sp>
         <p:nvSpPr>
-          <p:cNvPr id="47" name="Text 45"/>
+          <p:cNvPr id="50" name="Text 48"/>
           <p:cNvSpPr/>
           <p:nvPr/>
         </p:nvSpPr>
         <p:spPr>
           <a:xfrm>
             <a:off x="6062472" y="4169664"/>
-            <a:ext cx="685800" cy="384048"/>
+            <a:ext cx="685800" cy="475488"/>
           </a:xfrm>
           <a:prstGeom prst="rect">
             <a:avLst/>
@@ -11037,7 +11373,7 @@
                 <a:ea typeface="Trebuchet MS" pitchFamily="34" charset="-122"/>
                 <a:cs typeface="Trebuchet MS" pitchFamily="34" charset="-120"/>
               </a:rPr>
-              <a:t>r</a:t>
+              <a:t>y</a:t>
             </a:r>
             <a:endParaRPr lang="en-US" sz="900" dirty="0"/>
           </a:p>
@@ -11045,18 +11381,18 @@
       </p:sp>
       <p:sp>
         <p:nvSpPr>
-          <p:cNvPr id="48" name="Shape 46"/>
+          <p:cNvPr id="51" name="Shape 49"/>
           <p:cNvSpPr/>
           <p:nvPr/>
         </p:nvSpPr>
         <p:spPr>
           <a:xfrm>
             <a:off x="6870192" y="4169664"/>
-            <a:ext cx="685800" cy="384048"/>
+            <a:ext cx="685800" cy="475488"/>
           </a:xfrm>
           <a:prstGeom prst="rect">
             <a:avLst>
-              <a:gd name="adj" fmla="val 9524"/>
+              <a:gd name="adj" fmla="val 7692"/>
             </a:avLst>
           </a:prstGeom>
           <a:solidFill>
@@ -11072,14 +11408,14 @@
       </p:sp>
       <p:sp>
         <p:nvSpPr>
-          <p:cNvPr id="49" name="Text 47"/>
+          <p:cNvPr id="52" name="Text 50"/>
           <p:cNvSpPr/>
           <p:nvPr/>
         </p:nvSpPr>
         <p:spPr>
           <a:xfrm>
             <a:off x="6870192" y="4169664"/>
-            <a:ext cx="685800" cy="384048"/>
+            <a:ext cx="685800" cy="475488"/>
           </a:xfrm>
           <a:prstGeom prst="rect">
             <a:avLst/>
@@ -11111,18 +11447,18 @@
       </p:sp>
       <p:sp>
         <p:nvSpPr>
-          <p:cNvPr id="50" name="Shape 48"/>
+          <p:cNvPr id="53" name="Shape 51"/>
           <p:cNvSpPr/>
           <p:nvPr/>
         </p:nvSpPr>
         <p:spPr>
           <a:xfrm>
             <a:off x="7677912" y="4169664"/>
-            <a:ext cx="685800" cy="384048"/>
+            <a:ext cx="685800" cy="475488"/>
           </a:xfrm>
           <a:prstGeom prst="rect">
             <a:avLst>
-              <a:gd name="adj" fmla="val 9524"/>
+              <a:gd name="adj" fmla="val 7692"/>
             </a:avLst>
           </a:prstGeom>
           <a:solidFill>
@@ -11138,14 +11474,14 @@
       </p:sp>
       <p:sp>
         <p:nvSpPr>
-          <p:cNvPr id="51" name="Text 49"/>
+          <p:cNvPr id="54" name="Text 52"/>
           <p:cNvSpPr/>
           <p:nvPr/>
         </p:nvSpPr>
         <p:spPr>
           <a:xfrm>
             <a:off x="7677912" y="4169664"/>
-            <a:ext cx="685800" cy="384048"/>
+            <a:ext cx="685800" cy="475488"/>
           </a:xfrm>
           <a:prstGeom prst="rect">
             <a:avLst/>
@@ -11169,48 +11505,9 @@
                 <a:ea typeface="Trebuchet MS" pitchFamily="34" charset="-122"/>
                 <a:cs typeface="Trebuchet MS" pitchFamily="34" charset="-120"/>
               </a:rPr>
-              <a:t>ne</a:t>
+              <a:t>ng</a:t>
             </a:r>
             <a:endParaRPr lang="en-US" sz="900" dirty="0"/>
-          </a:p>
-        </p:txBody>
-      </p:sp>
-      <p:sp>
-        <p:nvSpPr>
-          <p:cNvPr id="52" name="Text 50"/>
-          <p:cNvSpPr/>
-          <p:nvPr/>
-        </p:nvSpPr>
-        <p:spPr>
-          <a:xfrm>
-            <a:off x="7677912" y="4572000"/>
-            <a:ext cx="685800" cy="219456"/>
-          </a:xfrm>
-          <a:prstGeom prst="rect">
-            <a:avLst/>
-          </a:prstGeom>
-          <a:noFill/>
-          <a:ln/>
-        </p:spPr>
-        <p:txBody>
-          <a:bodyPr wrap="square" lIns="0" tIns="0" rIns="0" bIns="0" rtlCol="0" anchor="t"/>
-          <a:lstStyle/>
-          <a:p>
-            <a:pPr algn="ctr" indent="0" marL="0">
-              <a:buNone/>
-            </a:pPr>
-            <a:r>
-              <a:rPr lang="en-US" sz="750" i="1" dirty="0">
-                <a:solidFill>
-                  <a:srgbClr val="94A3B8"/>
-                </a:solidFill>
-                <a:latin typeface="Calibri" pitchFamily="34" charset="0"/>
-                <a:ea typeface="Calibri" pitchFamily="34" charset="-122"/>
-                <a:cs typeface="Calibri" pitchFamily="34" charset="-120"/>
-              </a:rPr>
-              <a:t>/een/</a:t>
-            </a:r>
-            <a:endParaRPr lang="en-US" sz="750" dirty="0"/>
           </a:p>
         </p:txBody>
       </p:sp>
@@ -11500,7 +11797,7 @@
                 <a:ea typeface="Calibri" pitchFamily="34" charset="-122"/>
                 <a:cs typeface="Calibri" pitchFamily="34" charset="-120"/>
               </a:rPr>
-              <a:t>Word Labs  •  wordlabs.app  •  Prefix: 'sub-' = under, below, less than</a:t>
+              <a:t>Word Labs  •  wordlabs.app  •  Prefix: 'sub-' = under; below</a:t>
             </a:r>
             <a:endParaRPr lang="en-US" sz="800" dirty="0"/>
           </a:p>
@@ -11639,7 +11936,7 @@
                 <a:ea typeface="Trebuchet MS" pitchFamily="34" charset="-122"/>
                 <a:cs typeface="Trebuchet MS" pitchFamily="34" charset="-120"/>
               </a:rPr>
-              <a:t>submerge</a:t>
+              <a:t>successful</a:t>
             </a:r>
             <a:endParaRPr lang="en-US" sz="2800" dirty="0"/>
           </a:p>
@@ -12327,7 +12624,7 @@
                 <a:ea typeface="Calibri" pitchFamily="34" charset="-122"/>
                 <a:cs typeface="Calibri" pitchFamily="34" charset="-120"/>
               </a:rPr>
-              <a:t>Word Labs  •  wordlabs.app  •  Prefix: 'sub-' = under, below, less than</a:t>
+              <a:t>Word Labs  •  wordlabs.app  •  Prefix: 'sub-' = under; below</a:t>
             </a:r>
             <a:endParaRPr lang="en-US" sz="800" dirty="0"/>
           </a:p>
@@ -12466,7 +12763,7 @@
                 <a:ea typeface="Trebuchet MS" pitchFamily="34" charset="-122"/>
                 <a:cs typeface="Trebuchet MS" pitchFamily="34" charset="-120"/>
               </a:rPr>
-              <a:t>submerge</a:t>
+              <a:t>successful</a:t>
             </a:r>
             <a:endParaRPr lang="en-US" sz="2800" dirty="0"/>
           </a:p>
@@ -12644,7 +12941,7 @@
                 <a:ea typeface="Calibri" pitchFamily="34" charset="-122"/>
                 <a:cs typeface="Calibri" pitchFamily="34" charset="-120"/>
               </a:rPr>
-              <a:t>under, below</a:t>
+              <a:t>under; below</a:t>
             </a:r>
             <a:endParaRPr lang="en-US" sz="850" dirty="0"/>
           </a:p>
@@ -12717,7 +13014,7 @@
                 <a:ea typeface="Trebuchet MS" pitchFamily="34" charset="-122"/>
                 <a:cs typeface="Trebuchet MS" pitchFamily="34" charset="-120"/>
               </a:rPr>
-              <a:t>merge</a:t>
+              <a:t>cess</a:t>
             </a:r>
             <a:endParaRPr lang="en-US" sz="1300" dirty="0"/>
           </a:p>
@@ -12756,7 +13053,7 @@
                 <a:ea typeface="Calibri" pitchFamily="34" charset="-122"/>
                 <a:cs typeface="Calibri" pitchFamily="34" charset="-120"/>
               </a:rPr>
-              <a:t>to sink or plunge</a:t>
+              <a:t>go; yield; give way</a:t>
             </a:r>
             <a:endParaRPr lang="en-US" sz="850" dirty="0"/>
           </a:p>
@@ -12829,7 +13126,7 @@
                 <a:ea typeface="Trebuchet MS" pitchFamily="34" charset="-122"/>
                 <a:cs typeface="Trebuchet MS" pitchFamily="34" charset="-120"/>
               </a:rPr>
-              <a:t>ge</a:t>
+              <a:t>ful</a:t>
             </a:r>
             <a:endParaRPr lang="en-US" sz="1300" dirty="0"/>
           </a:p>
@@ -12868,7 +13165,7 @@
                 <a:ea typeface="Calibri" pitchFamily="34" charset="-122"/>
                 <a:cs typeface="Calibri" pitchFamily="34" charset="-120"/>
               </a:rPr>
-              <a:t>verb ending</a:t>
+              <a:t>full of</a:t>
             </a:r>
             <a:endParaRPr lang="en-US" sz="850" dirty="0"/>
           </a:p>
@@ -13424,7 +13721,7 @@
                 <a:ea typeface="Calibri" pitchFamily="34" charset="-122"/>
                 <a:cs typeface="Calibri" pitchFamily="34" charset="-120"/>
               </a:rPr>
-              <a:t>Word Labs  •  wordlabs.app  •  Prefix: 'sub-' = under, below, less than</a:t>
+              <a:t>Word Labs  •  wordlabs.app  •  Prefix: 'sub-' = under; below</a:t>
             </a:r>
             <a:endParaRPr lang="en-US" sz="800" dirty="0"/>
           </a:p>
@@ -13563,7 +13860,7 @@
                 <a:ea typeface="Trebuchet MS" pitchFamily="34" charset="-122"/>
                 <a:cs typeface="Trebuchet MS" pitchFamily="34" charset="-120"/>
               </a:rPr>
-              <a:t>submerge</a:t>
+              <a:t>successful</a:t>
             </a:r>
             <a:endParaRPr lang="en-US" sz="2800" dirty="0"/>
           </a:p>
@@ -13741,7 +14038,7 @@
                 <a:ea typeface="Calibri" pitchFamily="34" charset="-122"/>
                 <a:cs typeface="Calibri" pitchFamily="34" charset="-120"/>
               </a:rPr>
-              <a:t>under, below</a:t>
+              <a:t>under; below</a:t>
             </a:r>
             <a:endParaRPr lang="en-US" sz="850" dirty="0"/>
           </a:p>
@@ -13814,7 +14111,7 @@
                 <a:ea typeface="Trebuchet MS" pitchFamily="34" charset="-122"/>
                 <a:cs typeface="Trebuchet MS" pitchFamily="34" charset="-120"/>
               </a:rPr>
-              <a:t>merge</a:t>
+              <a:t>cess</a:t>
             </a:r>
             <a:endParaRPr lang="en-US" sz="1300" dirty="0"/>
           </a:p>
@@ -13853,7 +14150,7 @@
                 <a:ea typeface="Calibri" pitchFamily="34" charset="-122"/>
                 <a:cs typeface="Calibri" pitchFamily="34" charset="-120"/>
               </a:rPr>
-              <a:t>to sink or plunge</a:t>
+              <a:t>go; yield; give way</a:t>
             </a:r>
             <a:endParaRPr lang="en-US" sz="850" dirty="0"/>
           </a:p>
@@ -13926,7 +14223,7 @@
                 <a:ea typeface="Trebuchet MS" pitchFamily="34" charset="-122"/>
                 <a:cs typeface="Trebuchet MS" pitchFamily="34" charset="-120"/>
               </a:rPr>
-              <a:t>ge</a:t>
+              <a:t>ful</a:t>
             </a:r>
             <a:endParaRPr lang="en-US" sz="1300" dirty="0"/>
           </a:p>
@@ -13965,7 +14262,7 @@
                 <a:ea typeface="Calibri" pitchFamily="34" charset="-122"/>
                 <a:cs typeface="Calibri" pitchFamily="34" charset="-120"/>
               </a:rPr>
-              <a:t>verb ending</a:t>
+              <a:t>full of</a:t>
             </a:r>
             <a:endParaRPr lang="en-US" sz="850" dirty="0"/>
           </a:p>
@@ -14072,7 +14369,7 @@
         </p:nvSpPr>
         <p:spPr>
           <a:xfrm>
-            <a:off x="2999232" y="3364992"/>
+            <a:off x="2313432" y="3364992"/>
             <a:ext cx="1645920" cy="475488"/>
           </a:xfrm>
           <a:prstGeom prst="rect">
@@ -14099,7 +14396,7 @@
         </p:nvSpPr>
         <p:spPr>
           <a:xfrm>
-            <a:off x="2999232" y="3364992"/>
+            <a:off x="2313432" y="3364992"/>
             <a:ext cx="1645920" cy="475488"/>
           </a:xfrm>
           <a:prstGeom prst="rect">
@@ -14124,7 +14421,7 @@
                 <a:ea typeface="Trebuchet MS" pitchFamily="34" charset="-122"/>
                 <a:cs typeface="Trebuchet MS" pitchFamily="34" charset="-120"/>
               </a:rPr>
-              <a:t>sub</a:t>
+              <a:t>suc</a:t>
             </a:r>
             <a:endParaRPr lang="en-US" sz="1400" dirty="0"/>
           </a:p>
@@ -14138,8 +14435,8 @@
         </p:nvSpPr>
         <p:spPr>
           <a:xfrm>
-            <a:off x="4645152" y="3364992"/>
-            <a:ext cx="1097280" cy="475488"/>
+            <a:off x="3959352" y="3364992"/>
+            <a:ext cx="411480" cy="475488"/>
           </a:xfrm>
           <a:prstGeom prst="rect">
             <a:avLst/>
@@ -14177,7 +14474,7 @@
         </p:nvSpPr>
         <p:spPr>
           <a:xfrm>
-            <a:off x="5742432" y="3364992"/>
+            <a:off x="4370832" y="3364992"/>
             <a:ext cx="1645920" cy="475488"/>
           </a:xfrm>
           <a:prstGeom prst="rect">
@@ -14204,7 +14501,7 @@
         </p:nvSpPr>
         <p:spPr>
           <a:xfrm>
-            <a:off x="5742432" y="3364992"/>
+            <a:off x="4370832" y="3364992"/>
             <a:ext cx="1645920" cy="475488"/>
           </a:xfrm>
           <a:prstGeom prst="rect">
@@ -14229,7 +14526,7 @@
                 <a:ea typeface="Trebuchet MS" pitchFamily="34" charset="-122"/>
                 <a:cs typeface="Trebuchet MS" pitchFamily="34" charset="-120"/>
               </a:rPr>
-              <a:t>merge</a:t>
+              <a:t>cess</a:t>
             </a:r>
             <a:endParaRPr lang="en-US" sz="1400" dirty="0"/>
           </a:p>
@@ -14237,7 +14534,112 @@
       </p:sp>
       <p:sp>
         <p:nvSpPr>
-          <p:cNvPr id="33" name="Shape 31"/>
+          <p:cNvPr id="33" name="Text 31"/>
+          <p:cNvSpPr/>
+          <p:nvPr/>
+        </p:nvSpPr>
+        <p:spPr>
+          <a:xfrm>
+            <a:off x="6016752" y="3364992"/>
+            <a:ext cx="411480" cy="475488"/>
+          </a:xfrm>
+          <a:prstGeom prst="rect">
+            <a:avLst/>
+          </a:prstGeom>
+          <a:noFill/>
+          <a:ln/>
+        </p:spPr>
+        <p:txBody>
+          <a:bodyPr wrap="square" lIns="0" tIns="0" rIns="0" bIns="0" rtlCol="0" anchor="ctr"/>
+          <a:lstStyle/>
+          <a:p>
+            <a:pPr algn="ctr" indent="0" marL="0">
+              <a:buNone/>
+            </a:pPr>
+            <a:r>
+              <a:rPr lang="en-US" sz="1600" b="1" dirty="0">
+                <a:solidFill>
+                  <a:srgbClr val="0D9488"/>
+                </a:solidFill>
+                <a:latin typeface="Trebuchet MS" pitchFamily="34" charset="0"/>
+                <a:ea typeface="Trebuchet MS" pitchFamily="34" charset="-122"/>
+                <a:cs typeface="Trebuchet MS" pitchFamily="34" charset="-120"/>
+              </a:rPr>
+              <a:t>·</a:t>
+            </a:r>
+            <a:endParaRPr lang="en-US" sz="1600" dirty="0"/>
+          </a:p>
+        </p:txBody>
+      </p:sp>
+      <p:sp>
+        <p:nvSpPr>
+          <p:cNvPr id="34" name="Shape 32"/>
+          <p:cNvSpPr/>
+          <p:nvPr/>
+        </p:nvSpPr>
+        <p:spPr>
+          <a:xfrm>
+            <a:off x="6428232" y="3364992"/>
+            <a:ext cx="1645920" cy="475488"/>
+          </a:xfrm>
+          <a:prstGeom prst="rect">
+            <a:avLst>
+              <a:gd name="adj" fmla="val 9615"/>
+            </a:avLst>
+          </a:prstGeom>
+          <a:solidFill>
+            <a:srgbClr val="FFFFFF"/>
+          </a:solidFill>
+          <a:ln w="12700">
+            <a:solidFill>
+              <a:srgbClr val="0D9488"/>
+            </a:solidFill>
+            <a:prstDash val="solid"/>
+          </a:ln>
+        </p:spPr>
+      </p:sp>
+      <p:sp>
+        <p:nvSpPr>
+          <p:cNvPr id="35" name="Text 33"/>
+          <p:cNvSpPr/>
+          <p:nvPr/>
+        </p:nvSpPr>
+        <p:spPr>
+          <a:xfrm>
+            <a:off x="6428232" y="3364992"/>
+            <a:ext cx="1645920" cy="475488"/>
+          </a:xfrm>
+          <a:prstGeom prst="rect">
+            <a:avLst/>
+          </a:prstGeom>
+          <a:noFill/>
+          <a:ln/>
+        </p:spPr>
+        <p:txBody>
+          <a:bodyPr wrap="square" lIns="0" tIns="0" rIns="0" bIns="0" rtlCol="0" anchor="ctr"/>
+          <a:lstStyle/>
+          <a:p>
+            <a:pPr algn="ctr" indent="0" marL="0">
+              <a:buNone/>
+            </a:pPr>
+            <a:r>
+              <a:rPr lang="en-US" sz="1400" b="1" dirty="0">
+                <a:solidFill>
+                  <a:srgbClr val="0D9488"/>
+                </a:solidFill>
+                <a:latin typeface="Trebuchet MS" pitchFamily="34" charset="0"/>
+                <a:ea typeface="Trebuchet MS" pitchFamily="34" charset="-122"/>
+                <a:cs typeface="Trebuchet MS" pitchFamily="34" charset="-120"/>
+              </a:rPr>
+              <a:t>ful</a:t>
+            </a:r>
+            <a:endParaRPr lang="en-US" sz="1400" dirty="0"/>
+          </a:p>
+        </p:txBody>
+      </p:sp>
+      <p:sp>
+        <p:nvSpPr>
+          <p:cNvPr id="36" name="Shape 34"/>
           <p:cNvSpPr/>
           <p:nvPr/>
         </p:nvSpPr>
@@ -14264,7 +14666,7 @@
       </p:sp>
       <p:sp>
         <p:nvSpPr>
-          <p:cNvPr id="34" name="Text 32"/>
+          <p:cNvPr id="37" name="Text 35"/>
           <p:cNvSpPr/>
           <p:nvPr/>
         </p:nvSpPr>
@@ -14303,7 +14705,7 @@
       </p:sp>
       <p:sp>
         <p:nvSpPr>
-          <p:cNvPr id="35" name="Shape 33"/>
+          <p:cNvPr id="38" name="Shape 36"/>
           <p:cNvSpPr/>
           <p:nvPr/>
         </p:nvSpPr>
@@ -14330,7 +14732,7 @@
       </p:sp>
       <p:sp>
         <p:nvSpPr>
-          <p:cNvPr id="36" name="Text 34"/>
+          <p:cNvPr id="39" name="Text 37"/>
           <p:cNvSpPr/>
           <p:nvPr/>
         </p:nvSpPr>
@@ -14562,7 +14964,7 @@
                 <a:ea typeface="Calibri" pitchFamily="34" charset="-122"/>
                 <a:cs typeface="Calibri" pitchFamily="34" charset="-120"/>
               </a:rPr>
-              <a:t>Prefix 'sub-' — under, below, less than</a:t>
+              <a:t>Prefix 'sub-' — under; below</a:t>
             </a:r>
             <a:endParaRPr lang="en-US" sz="1600" dirty="0"/>
           </a:p>
@@ -14918,7 +15320,7 @@
                 <a:ea typeface="Calibri" pitchFamily="34" charset="-122"/>
                 <a:cs typeface="Calibri" pitchFamily="34" charset="-120"/>
               </a:rPr>
-              <a:t>Word Labs  •  wordlabs.app  •  Prefix: 'sub-' = under, below, less than</a:t>
+              <a:t>Word Labs  •  wordlabs.app  •  Prefix: 'sub-' = under; below</a:t>
             </a:r>
             <a:endParaRPr lang="en-US" sz="800" dirty="0"/>
           </a:p>
@@ -15057,7 +15459,7 @@
                 <a:ea typeface="Trebuchet MS" pitchFamily="34" charset="-122"/>
                 <a:cs typeface="Trebuchet MS" pitchFamily="34" charset="-120"/>
               </a:rPr>
-              <a:t>submerge</a:t>
+              <a:t>successful</a:t>
             </a:r>
             <a:endParaRPr lang="en-US" sz="2800" dirty="0"/>
           </a:p>
@@ -15235,7 +15637,7 @@
                 <a:ea typeface="Calibri" pitchFamily="34" charset="-122"/>
                 <a:cs typeface="Calibri" pitchFamily="34" charset="-120"/>
               </a:rPr>
-              <a:t>under, below</a:t>
+              <a:t>under; below</a:t>
             </a:r>
             <a:endParaRPr lang="en-US" sz="850" dirty="0"/>
           </a:p>
@@ -15308,7 +15710,7 @@
                 <a:ea typeface="Trebuchet MS" pitchFamily="34" charset="-122"/>
                 <a:cs typeface="Trebuchet MS" pitchFamily="34" charset="-120"/>
               </a:rPr>
-              <a:t>merge</a:t>
+              <a:t>cess</a:t>
             </a:r>
             <a:endParaRPr lang="en-US" sz="1300" dirty="0"/>
           </a:p>
@@ -15347,7 +15749,7 @@
                 <a:ea typeface="Calibri" pitchFamily="34" charset="-122"/>
                 <a:cs typeface="Calibri" pitchFamily="34" charset="-120"/>
               </a:rPr>
-              <a:t>to sink or plunge</a:t>
+              <a:t>go; yield; give way</a:t>
             </a:r>
             <a:endParaRPr lang="en-US" sz="850" dirty="0"/>
           </a:p>
@@ -15420,7 +15822,7 @@
                 <a:ea typeface="Trebuchet MS" pitchFamily="34" charset="-122"/>
                 <a:cs typeface="Trebuchet MS" pitchFamily="34" charset="-120"/>
               </a:rPr>
-              <a:t>ge</a:t>
+              <a:t>ful</a:t>
             </a:r>
             <a:endParaRPr lang="en-US" sz="1300" dirty="0"/>
           </a:p>
@@ -15459,7 +15861,7 @@
                 <a:ea typeface="Calibri" pitchFamily="34" charset="-122"/>
                 <a:cs typeface="Calibri" pitchFamily="34" charset="-120"/>
               </a:rPr>
-              <a:t>verb ending</a:t>
+              <a:t>full of</a:t>
             </a:r>
             <a:endParaRPr lang="en-US" sz="850" dirty="0"/>
           </a:p>
@@ -15566,7 +15968,7 @@
         </p:nvSpPr>
         <p:spPr>
           <a:xfrm>
-            <a:off x="2999232" y="3364992"/>
+            <a:off x="2313432" y="3364992"/>
             <a:ext cx="1645920" cy="475488"/>
           </a:xfrm>
           <a:prstGeom prst="rect">
@@ -15593,7 +15995,7 @@
         </p:nvSpPr>
         <p:spPr>
           <a:xfrm>
-            <a:off x="2999232" y="3364992"/>
+            <a:off x="2313432" y="3364992"/>
             <a:ext cx="1645920" cy="475488"/>
           </a:xfrm>
           <a:prstGeom prst="rect">
@@ -15618,7 +16020,7 @@
                 <a:ea typeface="Trebuchet MS" pitchFamily="34" charset="-122"/>
                 <a:cs typeface="Trebuchet MS" pitchFamily="34" charset="-120"/>
               </a:rPr>
-              <a:t>sub</a:t>
+              <a:t>suc</a:t>
             </a:r>
             <a:endParaRPr lang="en-US" sz="1400" dirty="0"/>
           </a:p>
@@ -15632,8 +16034,8 @@
         </p:nvSpPr>
         <p:spPr>
           <a:xfrm>
-            <a:off x="4645152" y="3364992"/>
-            <a:ext cx="1097280" cy="475488"/>
+            <a:off x="3959352" y="3364992"/>
+            <a:ext cx="411480" cy="475488"/>
           </a:xfrm>
           <a:prstGeom prst="rect">
             <a:avLst/>
@@ -15671,7 +16073,7 @@
         </p:nvSpPr>
         <p:spPr>
           <a:xfrm>
-            <a:off x="5742432" y="3364992"/>
+            <a:off x="4370832" y="3364992"/>
             <a:ext cx="1645920" cy="475488"/>
           </a:xfrm>
           <a:prstGeom prst="rect">
@@ -15698,7 +16100,7 @@
         </p:nvSpPr>
         <p:spPr>
           <a:xfrm>
-            <a:off x="5742432" y="3364992"/>
+            <a:off x="4370832" y="3364992"/>
             <a:ext cx="1645920" cy="475488"/>
           </a:xfrm>
           <a:prstGeom prst="rect">
@@ -15723,7 +16125,7 @@
                 <a:ea typeface="Trebuchet MS" pitchFamily="34" charset="-122"/>
                 <a:cs typeface="Trebuchet MS" pitchFamily="34" charset="-120"/>
               </a:rPr>
-              <a:t>merge</a:t>
+              <a:t>cess</a:t>
             </a:r>
             <a:endParaRPr lang="en-US" sz="1400" dirty="0"/>
           </a:p>
@@ -15731,7 +16133,112 @@
       </p:sp>
       <p:sp>
         <p:nvSpPr>
-          <p:cNvPr id="33" name="Shape 31"/>
+          <p:cNvPr id="33" name="Text 31"/>
+          <p:cNvSpPr/>
+          <p:nvPr/>
+        </p:nvSpPr>
+        <p:spPr>
+          <a:xfrm>
+            <a:off x="6016752" y="3364992"/>
+            <a:ext cx="411480" cy="475488"/>
+          </a:xfrm>
+          <a:prstGeom prst="rect">
+            <a:avLst/>
+          </a:prstGeom>
+          <a:noFill/>
+          <a:ln/>
+        </p:spPr>
+        <p:txBody>
+          <a:bodyPr wrap="square" lIns="0" tIns="0" rIns="0" bIns="0" rtlCol="0" anchor="ctr"/>
+          <a:lstStyle/>
+          <a:p>
+            <a:pPr algn="ctr" indent="0" marL="0">
+              <a:buNone/>
+            </a:pPr>
+            <a:r>
+              <a:rPr lang="en-US" sz="1600" b="1" dirty="0">
+                <a:solidFill>
+                  <a:srgbClr val="0D9488"/>
+                </a:solidFill>
+                <a:latin typeface="Trebuchet MS" pitchFamily="34" charset="0"/>
+                <a:ea typeface="Trebuchet MS" pitchFamily="34" charset="-122"/>
+                <a:cs typeface="Trebuchet MS" pitchFamily="34" charset="-120"/>
+              </a:rPr>
+              <a:t>·</a:t>
+            </a:r>
+            <a:endParaRPr lang="en-US" sz="1600" dirty="0"/>
+          </a:p>
+        </p:txBody>
+      </p:sp>
+      <p:sp>
+        <p:nvSpPr>
+          <p:cNvPr id="34" name="Shape 32"/>
+          <p:cNvSpPr/>
+          <p:nvPr/>
+        </p:nvSpPr>
+        <p:spPr>
+          <a:xfrm>
+            <a:off x="6428232" y="3364992"/>
+            <a:ext cx="1645920" cy="475488"/>
+          </a:xfrm>
+          <a:prstGeom prst="rect">
+            <a:avLst>
+              <a:gd name="adj" fmla="val 9615"/>
+            </a:avLst>
+          </a:prstGeom>
+          <a:solidFill>
+            <a:srgbClr val="FFFFFF"/>
+          </a:solidFill>
+          <a:ln w="12700">
+            <a:solidFill>
+              <a:srgbClr val="0D9488"/>
+            </a:solidFill>
+            <a:prstDash val="solid"/>
+          </a:ln>
+        </p:spPr>
+      </p:sp>
+      <p:sp>
+        <p:nvSpPr>
+          <p:cNvPr id="35" name="Text 33"/>
+          <p:cNvSpPr/>
+          <p:nvPr/>
+        </p:nvSpPr>
+        <p:spPr>
+          <a:xfrm>
+            <a:off x="6428232" y="3364992"/>
+            <a:ext cx="1645920" cy="475488"/>
+          </a:xfrm>
+          <a:prstGeom prst="rect">
+            <a:avLst/>
+          </a:prstGeom>
+          <a:noFill/>
+          <a:ln/>
+        </p:spPr>
+        <p:txBody>
+          <a:bodyPr wrap="square" lIns="0" tIns="0" rIns="0" bIns="0" rtlCol="0" anchor="ctr"/>
+          <a:lstStyle/>
+          <a:p>
+            <a:pPr algn="ctr" indent="0" marL="0">
+              <a:buNone/>
+            </a:pPr>
+            <a:r>
+              <a:rPr lang="en-US" sz="1400" b="1" dirty="0">
+                <a:solidFill>
+                  <a:srgbClr val="0D9488"/>
+                </a:solidFill>
+                <a:latin typeface="Trebuchet MS" pitchFamily="34" charset="0"/>
+                <a:ea typeface="Trebuchet MS" pitchFamily="34" charset="-122"/>
+                <a:cs typeface="Trebuchet MS" pitchFamily="34" charset="-120"/>
+              </a:rPr>
+              <a:t>ful</a:t>
+            </a:r>
+            <a:endParaRPr lang="en-US" sz="1400" dirty="0"/>
+          </a:p>
+        </p:txBody>
+      </p:sp>
+      <p:sp>
+        <p:nvSpPr>
+          <p:cNvPr id="36" name="Shape 34"/>
           <p:cNvSpPr/>
           <p:nvPr/>
         </p:nvSpPr>
@@ -15758,7 +16265,7 @@
       </p:sp>
       <p:sp>
         <p:nvSpPr>
-          <p:cNvPr id="34" name="Text 32"/>
+          <p:cNvPr id="37" name="Text 35"/>
           <p:cNvSpPr/>
           <p:nvPr/>
         </p:nvSpPr>
@@ -15797,18 +16304,18 @@
       </p:sp>
       <p:sp>
         <p:nvSpPr>
-          <p:cNvPr id="35" name="Shape 33"/>
+          <p:cNvPr id="38" name="Shape 36"/>
           <p:cNvSpPr/>
           <p:nvPr/>
         </p:nvSpPr>
         <p:spPr>
           <a:xfrm>
             <a:off x="1874520" y="4096512"/>
-            <a:ext cx="6903720" cy="804672"/>
+            <a:ext cx="6903720" cy="658368"/>
           </a:xfrm>
           <a:prstGeom prst="rect">
             <a:avLst>
-              <a:gd name="adj" fmla="val 6818"/>
+              <a:gd name="adj" fmla="val 8333"/>
             </a:avLst>
           </a:prstGeom>
           <a:solidFill>
@@ -15824,18 +16331,18 @@
       </p:sp>
       <p:sp>
         <p:nvSpPr>
-          <p:cNvPr id="36" name="Shape 34"/>
-          <p:cNvSpPr/>
-          <p:nvPr/>
-        </p:nvSpPr>
-        <p:spPr>
-          <a:xfrm>
-            <a:off x="2254649" y="4169664"/>
-            <a:ext cx="685800" cy="384048"/>
+          <p:cNvPr id="39" name="Shape 37"/>
+          <p:cNvSpPr/>
+          <p:nvPr/>
+        </p:nvSpPr>
+        <p:spPr>
+          <a:xfrm>
+            <a:off x="1951828" y="4169664"/>
+            <a:ext cx="603504" cy="475488"/>
           </a:xfrm>
           <a:prstGeom prst="rect">
             <a:avLst>
-              <a:gd name="adj" fmla="val 9524"/>
+              <a:gd name="adj" fmla="val 7692"/>
             </a:avLst>
           </a:prstGeom>
           <a:solidFill>
@@ -15851,14 +16358,14 @@
       </p:sp>
       <p:sp>
         <p:nvSpPr>
-          <p:cNvPr id="37" name="Text 35"/>
-          <p:cNvSpPr/>
-          <p:nvPr/>
-        </p:nvSpPr>
-        <p:spPr>
-          <a:xfrm>
-            <a:off x="2254649" y="4169664"/>
-            <a:ext cx="685800" cy="384048"/>
+          <p:cNvPr id="40" name="Text 38"/>
+          <p:cNvSpPr/>
+          <p:nvPr/>
+        </p:nvSpPr>
+        <p:spPr>
+          <a:xfrm>
+            <a:off x="1951828" y="4169664"/>
+            <a:ext cx="603504" cy="475488"/>
           </a:xfrm>
           <a:prstGeom prst="rect">
             <a:avLst/>
@@ -15890,18 +16397,18 @@
       </p:sp>
       <p:sp>
         <p:nvSpPr>
-          <p:cNvPr id="38" name="Shape 36"/>
-          <p:cNvSpPr/>
-          <p:nvPr/>
-        </p:nvSpPr>
-        <p:spPr>
-          <a:xfrm>
-            <a:off x="3293146" y="4169664"/>
-            <a:ext cx="685800" cy="384048"/>
+          <p:cNvPr id="41" name="Shape 39"/>
+          <p:cNvSpPr/>
+          <p:nvPr/>
+        </p:nvSpPr>
+        <p:spPr>
+          <a:xfrm>
+            <a:off x="2605209" y="4169664"/>
+            <a:ext cx="603504" cy="475488"/>
           </a:xfrm>
           <a:prstGeom prst="rect">
             <a:avLst>
-              <a:gd name="adj" fmla="val 9524"/>
+              <a:gd name="adj" fmla="val 7692"/>
             </a:avLst>
           </a:prstGeom>
           <a:solidFill>
@@ -15917,14 +16424,14 @@
       </p:sp>
       <p:sp>
         <p:nvSpPr>
-          <p:cNvPr id="39" name="Text 37"/>
-          <p:cNvSpPr/>
-          <p:nvPr/>
-        </p:nvSpPr>
-        <p:spPr>
-          <a:xfrm>
-            <a:off x="3293146" y="4169664"/>
-            <a:ext cx="685800" cy="384048"/>
+          <p:cNvPr id="42" name="Text 40"/>
+          <p:cNvSpPr/>
+          <p:nvPr/>
+        </p:nvSpPr>
+        <p:spPr>
+          <a:xfrm>
+            <a:off x="2605209" y="4169664"/>
+            <a:ext cx="603504" cy="475488"/>
           </a:xfrm>
           <a:prstGeom prst="rect">
             <a:avLst/>
@@ -15956,18 +16463,18 @@
       </p:sp>
       <p:sp>
         <p:nvSpPr>
-          <p:cNvPr id="40" name="Shape 38"/>
-          <p:cNvSpPr/>
-          <p:nvPr/>
-        </p:nvSpPr>
-        <p:spPr>
-          <a:xfrm>
-            <a:off x="4331643" y="4169664"/>
-            <a:ext cx="685800" cy="384048"/>
+          <p:cNvPr id="43" name="Shape 41"/>
+          <p:cNvSpPr/>
+          <p:nvPr/>
+        </p:nvSpPr>
+        <p:spPr>
+          <a:xfrm>
+            <a:off x="3258589" y="4169664"/>
+            <a:ext cx="603504" cy="475488"/>
           </a:xfrm>
           <a:prstGeom prst="rect">
             <a:avLst>
-              <a:gd name="adj" fmla="val 9524"/>
+              <a:gd name="adj" fmla="val 7692"/>
             </a:avLst>
           </a:prstGeom>
           <a:solidFill>
@@ -15983,14 +16490,14 @@
       </p:sp>
       <p:sp>
         <p:nvSpPr>
-          <p:cNvPr id="41" name="Text 39"/>
-          <p:cNvSpPr/>
-          <p:nvPr/>
-        </p:nvSpPr>
-        <p:spPr>
-          <a:xfrm>
-            <a:off x="4331643" y="4169664"/>
-            <a:ext cx="685800" cy="384048"/>
+          <p:cNvPr id="44" name="Text 42"/>
+          <p:cNvSpPr/>
+          <p:nvPr/>
+        </p:nvSpPr>
+        <p:spPr>
+          <a:xfrm>
+            <a:off x="3258589" y="4169664"/>
+            <a:ext cx="603504" cy="475488"/>
           </a:xfrm>
           <a:prstGeom prst="rect">
             <a:avLst/>
@@ -16014,7 +16521,7 @@
                 <a:ea typeface="Trebuchet MS" pitchFamily="34" charset="-122"/>
                 <a:cs typeface="Trebuchet MS" pitchFamily="34" charset="-120"/>
               </a:rPr>
-              <a:t>b</a:t>
+              <a:t>c</a:t>
             </a:r>
             <a:endParaRPr lang="en-US" sz="900" dirty="0"/>
           </a:p>
@@ -16022,18 +16529,18 @@
       </p:sp>
       <p:sp>
         <p:nvSpPr>
-          <p:cNvPr id="42" name="Shape 40"/>
-          <p:cNvSpPr/>
-          <p:nvPr/>
-        </p:nvSpPr>
-        <p:spPr>
-          <a:xfrm>
-            <a:off x="5370141" y="4169664"/>
-            <a:ext cx="685800" cy="384048"/>
+          <p:cNvPr id="45" name="Shape 43"/>
+          <p:cNvSpPr/>
+          <p:nvPr/>
+        </p:nvSpPr>
+        <p:spPr>
+          <a:xfrm>
+            <a:off x="3911969" y="4169664"/>
+            <a:ext cx="603504" cy="475488"/>
           </a:xfrm>
           <a:prstGeom prst="rect">
             <a:avLst>
-              <a:gd name="adj" fmla="val 9524"/>
+              <a:gd name="adj" fmla="val 7692"/>
             </a:avLst>
           </a:prstGeom>
           <a:solidFill>
@@ -16049,14 +16556,14 @@
       </p:sp>
       <p:sp>
         <p:nvSpPr>
-          <p:cNvPr id="43" name="Text 41"/>
-          <p:cNvSpPr/>
-          <p:nvPr/>
-        </p:nvSpPr>
-        <p:spPr>
-          <a:xfrm>
-            <a:off x="5370141" y="4169664"/>
-            <a:ext cx="685800" cy="384048"/>
+          <p:cNvPr id="46" name="Text 44"/>
+          <p:cNvSpPr/>
+          <p:nvPr/>
+        </p:nvSpPr>
+        <p:spPr>
+          <a:xfrm>
+            <a:off x="3911969" y="4169664"/>
+            <a:ext cx="603504" cy="475488"/>
           </a:xfrm>
           <a:prstGeom prst="rect">
             <a:avLst/>
@@ -16080,7 +16587,7 @@
                 <a:ea typeface="Trebuchet MS" pitchFamily="34" charset="-122"/>
                 <a:cs typeface="Trebuchet MS" pitchFamily="34" charset="-120"/>
               </a:rPr>
-              <a:t>m</a:t>
+              <a:t>c</a:t>
             </a:r>
             <a:endParaRPr lang="en-US" sz="900" dirty="0"/>
           </a:p>
@@ -16088,18 +16595,18 @@
       </p:sp>
       <p:sp>
         <p:nvSpPr>
-          <p:cNvPr id="44" name="Shape 42"/>
-          <p:cNvSpPr/>
-          <p:nvPr/>
-        </p:nvSpPr>
-        <p:spPr>
-          <a:xfrm>
-            <a:off x="6408638" y="4169664"/>
-            <a:ext cx="685800" cy="384048"/>
+          <p:cNvPr id="47" name="Shape 45"/>
+          <p:cNvSpPr/>
+          <p:nvPr/>
+        </p:nvSpPr>
+        <p:spPr>
+          <a:xfrm>
+            <a:off x="4565350" y="4169664"/>
+            <a:ext cx="603504" cy="475488"/>
           </a:xfrm>
           <a:prstGeom prst="rect">
             <a:avLst>
-              <a:gd name="adj" fmla="val 9524"/>
+              <a:gd name="adj" fmla="val 7692"/>
             </a:avLst>
           </a:prstGeom>
           <a:solidFill>
@@ -16115,14 +16622,14 @@
       </p:sp>
       <p:sp>
         <p:nvSpPr>
-          <p:cNvPr id="45" name="Text 43"/>
-          <p:cNvSpPr/>
-          <p:nvPr/>
-        </p:nvSpPr>
-        <p:spPr>
-          <a:xfrm>
-            <a:off x="6408638" y="4169664"/>
-            <a:ext cx="685800" cy="384048"/>
+          <p:cNvPr id="48" name="Text 46"/>
+          <p:cNvSpPr/>
+          <p:nvPr/>
+        </p:nvSpPr>
+        <p:spPr>
+          <a:xfrm>
+            <a:off x="4565350" y="4169664"/>
+            <a:ext cx="603504" cy="475488"/>
           </a:xfrm>
           <a:prstGeom prst="rect">
             <a:avLst/>
@@ -16146,7 +16653,7 @@
                 <a:ea typeface="Trebuchet MS" pitchFamily="34" charset="-122"/>
                 <a:cs typeface="Trebuchet MS" pitchFamily="34" charset="-120"/>
               </a:rPr>
-              <a:t>er</a:t>
+              <a:t>e</a:t>
             </a:r>
             <a:endParaRPr lang="en-US" sz="900" dirty="0"/>
           </a:p>
@@ -16154,18 +16661,18 @@
       </p:sp>
       <p:sp>
         <p:nvSpPr>
-          <p:cNvPr id="46" name="Shape 44"/>
-          <p:cNvSpPr/>
-          <p:nvPr/>
-        </p:nvSpPr>
-        <p:spPr>
-          <a:xfrm>
-            <a:off x="7447135" y="4169664"/>
-            <a:ext cx="685800" cy="384048"/>
+          <p:cNvPr id="49" name="Shape 47"/>
+          <p:cNvSpPr/>
+          <p:nvPr/>
+        </p:nvSpPr>
+        <p:spPr>
+          <a:xfrm>
+            <a:off x="5218730" y="4169664"/>
+            <a:ext cx="603504" cy="475488"/>
           </a:xfrm>
           <a:prstGeom prst="rect">
             <a:avLst>
-              <a:gd name="adj" fmla="val 9524"/>
+              <a:gd name="adj" fmla="val 7692"/>
             </a:avLst>
           </a:prstGeom>
           <a:solidFill>
@@ -16181,14 +16688,14 @@
       </p:sp>
       <p:sp>
         <p:nvSpPr>
-          <p:cNvPr id="47" name="Text 45"/>
-          <p:cNvSpPr/>
-          <p:nvPr/>
-        </p:nvSpPr>
-        <p:spPr>
-          <a:xfrm>
-            <a:off x="7447135" y="4169664"/>
-            <a:ext cx="685800" cy="384048"/>
+          <p:cNvPr id="50" name="Text 48"/>
+          <p:cNvSpPr/>
+          <p:nvPr/>
+        </p:nvSpPr>
+        <p:spPr>
+          <a:xfrm>
+            <a:off x="5218730" y="4169664"/>
+            <a:ext cx="603504" cy="475488"/>
           </a:xfrm>
           <a:prstGeom prst="rect">
             <a:avLst/>
@@ -16212,7 +16719,7 @@
                 <a:ea typeface="Trebuchet MS" pitchFamily="34" charset="-122"/>
                 <a:cs typeface="Trebuchet MS" pitchFamily="34" charset="-120"/>
               </a:rPr>
-              <a:t>ge</a:t>
+              <a:t>s</a:t>
             </a:r>
             <a:endParaRPr lang="en-US" sz="900" dirty="0"/>
           </a:p>
@@ -16220,40 +16727,265 @@
       </p:sp>
       <p:sp>
         <p:nvSpPr>
-          <p:cNvPr id="48" name="Text 46"/>
-          <p:cNvSpPr/>
-          <p:nvPr/>
-        </p:nvSpPr>
-        <p:spPr>
-          <a:xfrm>
-            <a:off x="7447135" y="4572000"/>
-            <a:ext cx="685800" cy="219456"/>
-          </a:xfrm>
-          <a:prstGeom prst="rect">
-            <a:avLst/>
-          </a:prstGeom>
-          <a:noFill/>
-          <a:ln/>
-        </p:spPr>
-        <p:txBody>
-          <a:bodyPr wrap="square" lIns="0" tIns="0" rIns="0" bIns="0" rtlCol="0" anchor="t"/>
-          <a:lstStyle/>
-          <a:p>
-            <a:pPr algn="ctr" indent="0" marL="0">
-              <a:buNone/>
-            </a:pPr>
-            <a:r>
-              <a:rPr lang="en-US" sz="750" i="1" dirty="0">
-                <a:solidFill>
-                  <a:srgbClr val="94A3B8"/>
-                </a:solidFill>
-                <a:latin typeface="Calibri" pitchFamily="34" charset="0"/>
-                <a:ea typeface="Calibri" pitchFamily="34" charset="-122"/>
-                <a:cs typeface="Calibri" pitchFamily="34" charset="-120"/>
-              </a:rPr>
-              <a:t>/j/</a:t>
-            </a:r>
-            <a:endParaRPr lang="en-US" sz="750" dirty="0"/>
+          <p:cNvPr id="51" name="Shape 49"/>
+          <p:cNvSpPr/>
+          <p:nvPr/>
+        </p:nvSpPr>
+        <p:spPr>
+          <a:xfrm>
+            <a:off x="5872111" y="4169664"/>
+            <a:ext cx="603504" cy="475488"/>
+          </a:xfrm>
+          <a:prstGeom prst="rect">
+            <a:avLst>
+              <a:gd name="adj" fmla="val 7692"/>
+            </a:avLst>
+          </a:prstGeom>
+          <a:solidFill>
+            <a:srgbClr val="FFFFFF"/>
+          </a:solidFill>
+          <a:ln w="12700">
+            <a:solidFill>
+              <a:srgbClr val="DB2777"/>
+            </a:solidFill>
+            <a:prstDash val="solid"/>
+          </a:ln>
+        </p:spPr>
+      </p:sp>
+      <p:sp>
+        <p:nvSpPr>
+          <p:cNvPr id="52" name="Text 50"/>
+          <p:cNvSpPr/>
+          <p:nvPr/>
+        </p:nvSpPr>
+        <p:spPr>
+          <a:xfrm>
+            <a:off x="5872111" y="4169664"/>
+            <a:ext cx="603504" cy="475488"/>
+          </a:xfrm>
+          <a:prstGeom prst="rect">
+            <a:avLst/>
+          </a:prstGeom>
+          <a:noFill/>
+          <a:ln/>
+        </p:spPr>
+        <p:txBody>
+          <a:bodyPr wrap="square" lIns="0" tIns="0" rIns="0" bIns="0" rtlCol="0" anchor="ctr"/>
+          <a:lstStyle/>
+          <a:p>
+            <a:pPr algn="ctr" indent="0" marL="0">
+              <a:buNone/>
+            </a:pPr>
+            <a:r>
+              <a:rPr lang="en-US" sz="900" b="1" dirty="0">
+                <a:solidFill>
+                  <a:srgbClr val="9D174D"/>
+                </a:solidFill>
+                <a:latin typeface="Trebuchet MS" pitchFamily="34" charset="0"/>
+                <a:ea typeface="Trebuchet MS" pitchFamily="34" charset="-122"/>
+                <a:cs typeface="Trebuchet MS" pitchFamily="34" charset="-120"/>
+              </a:rPr>
+              <a:t>s</a:t>
+            </a:r>
+            <a:endParaRPr lang="en-US" sz="900" dirty="0"/>
+          </a:p>
+        </p:txBody>
+      </p:sp>
+      <p:sp>
+        <p:nvSpPr>
+          <p:cNvPr id="53" name="Shape 51"/>
+          <p:cNvSpPr/>
+          <p:nvPr/>
+        </p:nvSpPr>
+        <p:spPr>
+          <a:xfrm>
+            <a:off x="6525491" y="4169664"/>
+            <a:ext cx="603504" cy="475488"/>
+          </a:xfrm>
+          <a:prstGeom prst="rect">
+            <a:avLst>
+              <a:gd name="adj" fmla="val 7692"/>
+            </a:avLst>
+          </a:prstGeom>
+          <a:solidFill>
+            <a:srgbClr val="FFFFFF"/>
+          </a:solidFill>
+          <a:ln w="12700">
+            <a:solidFill>
+              <a:srgbClr val="DB2777"/>
+            </a:solidFill>
+            <a:prstDash val="solid"/>
+          </a:ln>
+        </p:spPr>
+      </p:sp>
+      <p:sp>
+        <p:nvSpPr>
+          <p:cNvPr id="54" name="Text 52"/>
+          <p:cNvSpPr/>
+          <p:nvPr/>
+        </p:nvSpPr>
+        <p:spPr>
+          <a:xfrm>
+            <a:off x="6525491" y="4169664"/>
+            <a:ext cx="603504" cy="475488"/>
+          </a:xfrm>
+          <a:prstGeom prst="rect">
+            <a:avLst/>
+          </a:prstGeom>
+          <a:noFill/>
+          <a:ln/>
+        </p:spPr>
+        <p:txBody>
+          <a:bodyPr wrap="square" lIns="0" tIns="0" rIns="0" bIns="0" rtlCol="0" anchor="ctr"/>
+          <a:lstStyle/>
+          <a:p>
+            <a:pPr algn="ctr" indent="0" marL="0">
+              <a:buNone/>
+            </a:pPr>
+            <a:r>
+              <a:rPr lang="en-US" sz="900" b="1" dirty="0">
+                <a:solidFill>
+                  <a:srgbClr val="9D174D"/>
+                </a:solidFill>
+                <a:latin typeface="Trebuchet MS" pitchFamily="34" charset="0"/>
+                <a:ea typeface="Trebuchet MS" pitchFamily="34" charset="-122"/>
+                <a:cs typeface="Trebuchet MS" pitchFamily="34" charset="-120"/>
+              </a:rPr>
+              <a:t>f</a:t>
+            </a:r>
+            <a:endParaRPr lang="en-US" sz="900" dirty="0"/>
+          </a:p>
+        </p:txBody>
+      </p:sp>
+      <p:sp>
+        <p:nvSpPr>
+          <p:cNvPr id="55" name="Shape 53"/>
+          <p:cNvSpPr/>
+          <p:nvPr/>
+        </p:nvSpPr>
+        <p:spPr>
+          <a:xfrm>
+            <a:off x="7178871" y="4169664"/>
+            <a:ext cx="603504" cy="475488"/>
+          </a:xfrm>
+          <a:prstGeom prst="rect">
+            <a:avLst>
+              <a:gd name="adj" fmla="val 7692"/>
+            </a:avLst>
+          </a:prstGeom>
+          <a:solidFill>
+            <a:srgbClr val="FFFFFF"/>
+          </a:solidFill>
+          <a:ln w="12700">
+            <a:solidFill>
+              <a:srgbClr val="DB2777"/>
+            </a:solidFill>
+            <a:prstDash val="solid"/>
+          </a:ln>
+        </p:spPr>
+      </p:sp>
+      <p:sp>
+        <p:nvSpPr>
+          <p:cNvPr id="56" name="Text 54"/>
+          <p:cNvSpPr/>
+          <p:nvPr/>
+        </p:nvSpPr>
+        <p:spPr>
+          <a:xfrm>
+            <a:off x="7178871" y="4169664"/>
+            <a:ext cx="603504" cy="475488"/>
+          </a:xfrm>
+          <a:prstGeom prst="rect">
+            <a:avLst/>
+          </a:prstGeom>
+          <a:noFill/>
+          <a:ln/>
+        </p:spPr>
+        <p:txBody>
+          <a:bodyPr wrap="square" lIns="0" tIns="0" rIns="0" bIns="0" rtlCol="0" anchor="ctr"/>
+          <a:lstStyle/>
+          <a:p>
+            <a:pPr algn="ctr" indent="0" marL="0">
+              <a:buNone/>
+            </a:pPr>
+            <a:r>
+              <a:rPr lang="en-US" sz="900" b="1" dirty="0">
+                <a:solidFill>
+                  <a:srgbClr val="9D174D"/>
+                </a:solidFill>
+                <a:latin typeface="Trebuchet MS" pitchFamily="34" charset="0"/>
+                <a:ea typeface="Trebuchet MS" pitchFamily="34" charset="-122"/>
+                <a:cs typeface="Trebuchet MS" pitchFamily="34" charset="-120"/>
+              </a:rPr>
+              <a:t>u</a:t>
+            </a:r>
+            <a:endParaRPr lang="en-US" sz="900" dirty="0"/>
+          </a:p>
+        </p:txBody>
+      </p:sp>
+      <p:sp>
+        <p:nvSpPr>
+          <p:cNvPr id="57" name="Shape 55"/>
+          <p:cNvSpPr/>
+          <p:nvPr/>
+        </p:nvSpPr>
+        <p:spPr>
+          <a:xfrm>
+            <a:off x="7832252" y="4169664"/>
+            <a:ext cx="603504" cy="475488"/>
+          </a:xfrm>
+          <a:prstGeom prst="rect">
+            <a:avLst>
+              <a:gd name="adj" fmla="val 7692"/>
+            </a:avLst>
+          </a:prstGeom>
+          <a:solidFill>
+            <a:srgbClr val="FFFFFF"/>
+          </a:solidFill>
+          <a:ln w="12700">
+            <a:solidFill>
+              <a:srgbClr val="DB2777"/>
+            </a:solidFill>
+            <a:prstDash val="solid"/>
+          </a:ln>
+        </p:spPr>
+      </p:sp>
+      <p:sp>
+        <p:nvSpPr>
+          <p:cNvPr id="58" name="Text 56"/>
+          <p:cNvSpPr/>
+          <p:nvPr/>
+        </p:nvSpPr>
+        <p:spPr>
+          <a:xfrm>
+            <a:off x="7832252" y="4169664"/>
+            <a:ext cx="603504" cy="475488"/>
+          </a:xfrm>
+          <a:prstGeom prst="rect">
+            <a:avLst/>
+          </a:prstGeom>
+          <a:noFill/>
+          <a:ln/>
+        </p:spPr>
+        <p:txBody>
+          <a:bodyPr wrap="square" lIns="0" tIns="0" rIns="0" bIns="0" rtlCol="0" anchor="ctr"/>
+          <a:lstStyle/>
+          <a:p>
+            <a:pPr algn="ctr" indent="0" marL="0">
+              <a:buNone/>
+            </a:pPr>
+            <a:r>
+              <a:rPr lang="en-US" sz="900" b="1" dirty="0">
+                <a:solidFill>
+                  <a:srgbClr val="9D174D"/>
+                </a:solidFill>
+                <a:latin typeface="Trebuchet MS" pitchFamily="34" charset="0"/>
+                <a:ea typeface="Trebuchet MS" pitchFamily="34" charset="-122"/>
+                <a:cs typeface="Trebuchet MS" pitchFamily="34" charset="-120"/>
+              </a:rPr>
+              <a:t>l</a:t>
+            </a:r>
+            <a:endParaRPr lang="en-US" sz="900" dirty="0"/>
           </a:p>
         </p:txBody>
       </p:sp>
@@ -16825,7 +17557,7 @@
                 <a:ea typeface="Calibri" pitchFamily="34" charset="-122"/>
                 <a:cs typeface="Calibri" pitchFamily="34" charset="-120"/>
               </a:rPr>
-              <a:t>Word Labs  •  wordlabs.app  •  Prefix: 'sub-' = under, below, less than</a:t>
+              <a:t>Word Labs  •  wordlabs.app  •  Prefix: 'sub-' = under; below</a:t>
             </a:r>
             <a:endParaRPr lang="en-US" sz="800" dirty="0"/>
           </a:p>
@@ -17159,7 +17891,7 @@
                 <a:ea typeface="Trebuchet MS" pitchFamily="34" charset="-122"/>
                 <a:cs typeface="Trebuchet MS" pitchFamily="34" charset="-120"/>
               </a:rPr>
-              <a:t>2</a:t>
+              <a:t>0</a:t>
             </a:r>
             <a:pPr algn="ctr" indent="0" marL="0">
               <a:buNone/>
@@ -17173,7 +17905,7 @@
                 <a:ea typeface="Trebuchet MS" pitchFamily="34" charset="-122"/>
                 <a:cs typeface="Trebuchet MS" pitchFamily="34" charset="-120"/>
               </a:rPr>
-              <a:t>  punctuation marks</a:t>
+              <a:t>  punctuation mark</a:t>
             </a:r>
             <a:endParaRPr lang="en-US" sz="2800" dirty="0"/>
           </a:p>
@@ -17465,7 +18197,7 @@
                 <a:ea typeface="Calibri" pitchFamily="34" charset="-122"/>
                 <a:cs typeface="Calibri" pitchFamily="34" charset="-120"/>
               </a:rPr>
-              <a:t>Word Labs  •  wordlabs.app  •  Prefix: 'sub-' = under, below, less than</a:t>
+              <a:t>Word Labs  •  wordlabs.app  •  Prefix: 'sub-' = under; below</a:t>
             </a:r>
             <a:endParaRPr lang="en-US" sz="800" dirty="0"/>
           </a:p>
@@ -17577,7 +18309,7 @@
                 <a:ea typeface="Calibri" pitchFamily="34" charset="-122"/>
                 <a:cs typeface="Calibri" pitchFamily="34" charset="-120"/>
               </a:rPr>
-              <a:t>She used a </a:t>
+              <a:t>There was a </a:t>
             </a:r>
             <a:pPr algn="l" indent="0" marL="0">
               <a:buNone/>
@@ -17594,7 +18326,7 @@
                 <a:ea typeface="Calibri" pitchFamily="34" charset="-122"/>
                 <a:cs typeface="Calibri" pitchFamily="34" charset="-120"/>
               </a:rPr>
-              <a:t>substitute</a:t>
+              <a:t>succession</a:t>
             </a:r>
             <a:pPr algn="l" indent="0" marL="0">
               <a:buNone/>
@@ -17608,7 +18340,7 @@
                 <a:ea typeface="Calibri" pitchFamily="34" charset="-122"/>
                 <a:cs typeface="Calibri" pitchFamily="34" charset="-120"/>
               </a:rPr>
-              <a:t> word in the </a:t>
+              <a:t> of storms throughout the week. The team won five </a:t>
             </a:r>
             <a:pPr algn="l" indent="0" marL="0">
               <a:buNone/>
@@ -17625,7 +18357,7 @@
                 <a:ea typeface="Calibri" pitchFamily="34" charset="-122"/>
                 <a:cs typeface="Calibri" pitchFamily="34" charset="-120"/>
               </a:rPr>
-              <a:t>subtitle</a:t>
+              <a:t>successive</a:t>
             </a:r>
             <a:pPr algn="l" indent="0" marL="0">
               <a:buNone/>
@@ -17639,7 +18371,7 @@
                 <a:ea typeface="Calibri" pitchFamily="34" charset="-122"/>
                 <a:cs typeface="Calibri" pitchFamily="34" charset="-120"/>
               </a:rPr>
-              <a:t>, and added a </a:t>
+              <a:t> matches. She </a:t>
             </a:r>
             <a:pPr algn="l" indent="0" marL="0">
               <a:buNone/>
@@ -17656,7 +18388,7 @@
                 <a:ea typeface="Calibri" pitchFamily="34" charset="-122"/>
                 <a:cs typeface="Calibri" pitchFamily="34" charset="-120"/>
               </a:rPr>
-              <a:t>subheading</a:t>
+              <a:t>successfully</a:t>
             </a:r>
             <a:pPr algn="l" indent="0" marL="0">
               <a:buNone/>
@@ -17670,7 +18402,7 @@
                 <a:ea typeface="Calibri" pitchFamily="34" charset="-122"/>
                 <a:cs typeface="Calibri" pitchFamily="34" charset="-120"/>
               </a:rPr>
-              <a:t> to make the report clearer.</a:t>
+              <a:t> completed the marathon.</a:t>
             </a:r>
             <a:endParaRPr lang="en-US" sz="1800" dirty="0"/>
           </a:p>
@@ -17825,7 +18557,7 @@
                 <a:ea typeface="Trebuchet MS" pitchFamily="34" charset="-122"/>
                 <a:cs typeface="Trebuchet MS" pitchFamily="34" charset="-120"/>
               </a:rPr>
-              <a:t>substitute</a:t>
+              <a:t>succession</a:t>
             </a:r>
             <a:endParaRPr lang="en-US" sz="1400" dirty="0"/>
           </a:p>
@@ -17953,7 +18685,7 @@
                 <a:ea typeface="Trebuchet MS" pitchFamily="34" charset="-122"/>
                 <a:cs typeface="Trebuchet MS" pitchFamily="34" charset="-120"/>
               </a:rPr>
-              <a:t>subtitle</a:t>
+              <a:t>successive</a:t>
             </a:r>
             <a:endParaRPr lang="en-US" sz="1400" dirty="0"/>
           </a:p>
@@ -18081,7 +18813,7 @@
                 <a:ea typeface="Trebuchet MS" pitchFamily="34" charset="-122"/>
                 <a:cs typeface="Trebuchet MS" pitchFamily="34" charset="-120"/>
               </a:rPr>
-              <a:t>subheading</a:t>
+              <a:t>successfully</a:t>
             </a:r>
             <a:endParaRPr lang="en-US" sz="1400" dirty="0"/>
           </a:p>
@@ -18412,7 +19144,7 @@
                 <a:ea typeface="Calibri" pitchFamily="34" charset="-122"/>
                 <a:cs typeface="Calibri" pitchFamily="34" charset="-120"/>
               </a:rPr>
-              <a:t>Word Labs  •  wordlabs.app  •  Prefix: 'sub-' = under, below, less than</a:t>
+              <a:t>Word Labs  •  wordlabs.app  •  Prefix: 'sub-' = under; below</a:t>
             </a:r>
             <a:endParaRPr lang="en-US" sz="800" dirty="0"/>
           </a:p>
@@ -18551,7 +19283,7 @@
                 <a:ea typeface="Trebuchet MS" pitchFamily="34" charset="-122"/>
                 <a:cs typeface="Trebuchet MS" pitchFamily="34" charset="-120"/>
               </a:rPr>
-              <a:t>substitute</a:t>
+              <a:t>succession</a:t>
             </a:r>
             <a:endParaRPr lang="en-US" sz="2800" dirty="0"/>
           </a:p>
@@ -19239,7 +19971,7 @@
                 <a:ea typeface="Calibri" pitchFamily="34" charset="-122"/>
                 <a:cs typeface="Calibri" pitchFamily="34" charset="-120"/>
               </a:rPr>
-              <a:t>Word Labs  •  wordlabs.app  •  Prefix: 'sub-' = under, below, less than</a:t>
+              <a:t>Word Labs  •  wordlabs.app  •  Prefix: 'sub-' = under; below</a:t>
             </a:r>
             <a:endParaRPr lang="en-US" sz="800" dirty="0"/>
           </a:p>
@@ -19378,7 +20110,7 @@
                 <a:ea typeface="Trebuchet MS" pitchFamily="34" charset="-122"/>
                 <a:cs typeface="Trebuchet MS" pitchFamily="34" charset="-120"/>
               </a:rPr>
-              <a:t>substitute</a:t>
+              <a:t>succession</a:t>
             </a:r>
             <a:endParaRPr lang="en-US" sz="2800" dirty="0"/>
           </a:p>
@@ -19556,7 +20288,7 @@
                 <a:ea typeface="Calibri" pitchFamily="34" charset="-122"/>
                 <a:cs typeface="Calibri" pitchFamily="34" charset="-120"/>
               </a:rPr>
-              <a:t>under, in place of</a:t>
+              <a:t>under; below</a:t>
             </a:r>
             <a:endParaRPr lang="en-US" sz="850" dirty="0"/>
           </a:p>
@@ -19629,7 +20361,7 @@
                 <a:ea typeface="Trebuchet MS" pitchFamily="34" charset="-122"/>
                 <a:cs typeface="Trebuchet MS" pitchFamily="34" charset="-120"/>
               </a:rPr>
-              <a:t>stitut</a:t>
+              <a:t>cess</a:t>
             </a:r>
             <a:endParaRPr lang="en-US" sz="1300" dirty="0"/>
           </a:p>
@@ -19668,7 +20400,7 @@
                 <a:ea typeface="Calibri" pitchFamily="34" charset="-122"/>
                 <a:cs typeface="Calibri" pitchFamily="34" charset="-120"/>
               </a:rPr>
-              <a:t>to set up or place</a:t>
+              <a:t>go; yield; give way</a:t>
             </a:r>
             <a:endParaRPr lang="en-US" sz="850" dirty="0"/>
           </a:p>
@@ -19741,7 +20473,7 @@
                 <a:ea typeface="Trebuchet MS" pitchFamily="34" charset="-122"/>
                 <a:cs typeface="Trebuchet MS" pitchFamily="34" charset="-120"/>
               </a:rPr>
-              <a:t>e</a:t>
+              <a:t>ion</a:t>
             </a:r>
             <a:endParaRPr lang="en-US" sz="1300" dirty="0"/>
           </a:p>
@@ -19780,7 +20512,7 @@
                 <a:ea typeface="Calibri" pitchFamily="34" charset="-122"/>
                 <a:cs typeface="Calibri" pitchFamily="34" charset="-120"/>
               </a:rPr>
-              <a:t>verb ending</a:t>
+              <a:t>act or result of</a:t>
             </a:r>
             <a:endParaRPr lang="en-US" sz="850" dirty="0"/>
           </a:p>
@@ -20336,7 +21068,7 @@
                 <a:ea typeface="Calibri" pitchFamily="34" charset="-122"/>
                 <a:cs typeface="Calibri" pitchFamily="34" charset="-120"/>
               </a:rPr>
-              <a:t>Word Labs  •  wordlabs.app  •  Prefix: 'sub-' = under, below, less than</a:t>
+              <a:t>Word Labs  •  wordlabs.app  •  Prefix: 'sub-' = under; below</a:t>
             </a:r>
             <a:endParaRPr lang="en-US" sz="800" dirty="0"/>
           </a:p>
@@ -20475,7 +21207,7 @@
                 <a:ea typeface="Trebuchet MS" pitchFamily="34" charset="-122"/>
                 <a:cs typeface="Trebuchet MS" pitchFamily="34" charset="-120"/>
               </a:rPr>
-              <a:t>substitute</a:t>
+              <a:t>succession</a:t>
             </a:r>
             <a:endParaRPr lang="en-US" sz="2800" dirty="0"/>
           </a:p>
@@ -20653,7 +21385,7 @@
                 <a:ea typeface="Calibri" pitchFamily="34" charset="-122"/>
                 <a:cs typeface="Calibri" pitchFamily="34" charset="-120"/>
               </a:rPr>
-              <a:t>under, in place of</a:t>
+              <a:t>under; below</a:t>
             </a:r>
             <a:endParaRPr lang="en-US" sz="850" dirty="0"/>
           </a:p>
@@ -20726,7 +21458,7 @@
                 <a:ea typeface="Trebuchet MS" pitchFamily="34" charset="-122"/>
                 <a:cs typeface="Trebuchet MS" pitchFamily="34" charset="-120"/>
               </a:rPr>
-              <a:t>stitut</a:t>
+              <a:t>cess</a:t>
             </a:r>
             <a:endParaRPr lang="en-US" sz="1300" dirty="0"/>
           </a:p>
@@ -20765,7 +21497,7 @@
                 <a:ea typeface="Calibri" pitchFamily="34" charset="-122"/>
                 <a:cs typeface="Calibri" pitchFamily="34" charset="-120"/>
               </a:rPr>
-              <a:t>to set up or place</a:t>
+              <a:t>go; yield; give way</a:t>
             </a:r>
             <a:endParaRPr lang="en-US" sz="850" dirty="0"/>
           </a:p>
@@ -20838,7 +21570,7 @@
                 <a:ea typeface="Trebuchet MS" pitchFamily="34" charset="-122"/>
                 <a:cs typeface="Trebuchet MS" pitchFamily="34" charset="-120"/>
               </a:rPr>
-              <a:t>e</a:t>
+              <a:t>ion</a:t>
             </a:r>
             <a:endParaRPr lang="en-US" sz="1300" dirty="0"/>
           </a:p>
@@ -20877,7 +21609,7 @@
                 <a:ea typeface="Calibri" pitchFamily="34" charset="-122"/>
                 <a:cs typeface="Calibri" pitchFamily="34" charset="-120"/>
               </a:rPr>
-              <a:t>verb ending</a:t>
+              <a:t>act or result of</a:t>
             </a:r>
             <a:endParaRPr lang="en-US" sz="850" dirty="0"/>
           </a:p>
@@ -21036,7 +21768,7 @@
                 <a:ea typeface="Trebuchet MS" pitchFamily="34" charset="-122"/>
                 <a:cs typeface="Trebuchet MS" pitchFamily="34" charset="-120"/>
               </a:rPr>
-              <a:t>sub</a:t>
+              <a:t>suc</a:t>
             </a:r>
             <a:endParaRPr lang="en-US" sz="1400" dirty="0"/>
           </a:p>
@@ -21141,7 +21873,7 @@
                 <a:ea typeface="Trebuchet MS" pitchFamily="34" charset="-122"/>
                 <a:cs typeface="Trebuchet MS" pitchFamily="34" charset="-120"/>
               </a:rPr>
-              <a:t>sti</a:t>
+              <a:t>ces</a:t>
             </a:r>
             <a:endParaRPr lang="en-US" sz="1400" dirty="0"/>
           </a:p>
@@ -21246,7 +21978,7 @@
                 <a:ea typeface="Trebuchet MS" pitchFamily="34" charset="-122"/>
                 <a:cs typeface="Trebuchet MS" pitchFamily="34" charset="-120"/>
               </a:rPr>
-              <a:t>tute</a:t>
+              <a:t>sion</a:t>
             </a:r>
             <a:endParaRPr lang="en-US" sz="1400" dirty="0"/>
           </a:p>
@@ -21670,7 +22402,7 @@
                 <a:ea typeface="Calibri" pitchFamily="34" charset="-122"/>
                 <a:cs typeface="Calibri" pitchFamily="34" charset="-120"/>
               </a:rPr>
-              <a:t>Word Labs  •  wordlabs.app  •  Prefix: 'sub-' = under, below, less than</a:t>
+              <a:t>Word Labs  •  wordlabs.app  •  Prefix: 'sub-' = under; below</a:t>
             </a:r>
             <a:endParaRPr lang="en-US" sz="800" dirty="0"/>
           </a:p>
@@ -21809,7 +22541,7 @@
                 <a:ea typeface="Trebuchet MS" pitchFamily="34" charset="-122"/>
                 <a:cs typeface="Trebuchet MS" pitchFamily="34" charset="-120"/>
               </a:rPr>
-              <a:t>substitute</a:t>
+              <a:t>succession</a:t>
             </a:r>
             <a:endParaRPr lang="en-US" sz="2800" dirty="0"/>
           </a:p>
@@ -21987,7 +22719,7 @@
                 <a:ea typeface="Calibri" pitchFamily="34" charset="-122"/>
                 <a:cs typeface="Calibri" pitchFamily="34" charset="-120"/>
               </a:rPr>
-              <a:t>under, in place of</a:t>
+              <a:t>under; below</a:t>
             </a:r>
             <a:endParaRPr lang="en-US" sz="850" dirty="0"/>
           </a:p>
@@ -22060,7 +22792,7 @@
                 <a:ea typeface="Trebuchet MS" pitchFamily="34" charset="-122"/>
                 <a:cs typeface="Trebuchet MS" pitchFamily="34" charset="-120"/>
               </a:rPr>
-              <a:t>stitut</a:t>
+              <a:t>cess</a:t>
             </a:r>
             <a:endParaRPr lang="en-US" sz="1300" dirty="0"/>
           </a:p>
@@ -22099,7 +22831,7 @@
                 <a:ea typeface="Calibri" pitchFamily="34" charset="-122"/>
                 <a:cs typeface="Calibri" pitchFamily="34" charset="-120"/>
               </a:rPr>
-              <a:t>to set up or place</a:t>
+              <a:t>go; yield; give way</a:t>
             </a:r>
             <a:endParaRPr lang="en-US" sz="850" dirty="0"/>
           </a:p>
@@ -22172,7 +22904,7 @@
                 <a:ea typeface="Trebuchet MS" pitchFamily="34" charset="-122"/>
                 <a:cs typeface="Trebuchet MS" pitchFamily="34" charset="-120"/>
               </a:rPr>
-              <a:t>e</a:t>
+              <a:t>ion</a:t>
             </a:r>
             <a:endParaRPr lang="en-US" sz="1300" dirty="0"/>
           </a:p>
@@ -22211,7 +22943,7 @@
                 <a:ea typeface="Calibri" pitchFamily="34" charset="-122"/>
                 <a:cs typeface="Calibri" pitchFamily="34" charset="-120"/>
               </a:rPr>
-              <a:t>verb ending</a:t>
+              <a:t>act or result of</a:t>
             </a:r>
             <a:endParaRPr lang="en-US" sz="850" dirty="0"/>
           </a:p>
@@ -22370,7 +23102,7 @@
                 <a:ea typeface="Trebuchet MS" pitchFamily="34" charset="-122"/>
                 <a:cs typeface="Trebuchet MS" pitchFamily="34" charset="-120"/>
               </a:rPr>
-              <a:t>sub</a:t>
+              <a:t>suc</a:t>
             </a:r>
             <a:endParaRPr lang="en-US" sz="1400" dirty="0"/>
           </a:p>
@@ -22475,7 +23207,7 @@
                 <a:ea typeface="Trebuchet MS" pitchFamily="34" charset="-122"/>
                 <a:cs typeface="Trebuchet MS" pitchFamily="34" charset="-120"/>
               </a:rPr>
-              <a:t>sti</a:t>
+              <a:t>ces</a:t>
             </a:r>
             <a:endParaRPr lang="en-US" sz="1400" dirty="0"/>
           </a:p>
@@ -22580,7 +23312,7 @@
                 <a:ea typeface="Trebuchet MS" pitchFamily="34" charset="-122"/>
                 <a:cs typeface="Trebuchet MS" pitchFamily="34" charset="-120"/>
               </a:rPr>
-              <a:t>tute</a:t>
+              <a:t>sion</a:t>
             </a:r>
             <a:endParaRPr lang="en-US" sz="1400" dirty="0"/>
           </a:p>
@@ -22661,11 +23393,11 @@
         <p:spPr>
           <a:xfrm>
             <a:off x="1874520" y="4096512"/>
-            <a:ext cx="6903720" cy="804672"/>
+            <a:ext cx="6903720" cy="658368"/>
           </a:xfrm>
           <a:prstGeom prst="rect">
             <a:avLst>
-              <a:gd name="adj" fmla="val 6818"/>
+              <a:gd name="adj" fmla="val 8333"/>
             </a:avLst>
           </a:prstGeom>
           <a:solidFill>
@@ -22687,12 +23419,12 @@
         </p:nvSpPr>
         <p:spPr>
           <a:xfrm>
-            <a:off x="1951330" y="4169664"/>
-            <a:ext cx="676656" cy="384048"/>
+            <a:off x="2023872" y="4169664"/>
+            <a:ext cx="685800" cy="475488"/>
           </a:xfrm>
           <a:prstGeom prst="rect">
             <a:avLst>
-              <a:gd name="adj" fmla="val 9524"/>
+              <a:gd name="adj" fmla="val 7692"/>
             </a:avLst>
           </a:prstGeom>
           <a:solidFill>
@@ -22714,8 +23446,8 @@
         </p:nvSpPr>
         <p:spPr>
           <a:xfrm>
-            <a:off x="1951330" y="4169664"/>
-            <a:ext cx="676656" cy="384048"/>
+            <a:off x="2023872" y="4169664"/>
+            <a:ext cx="685800" cy="475488"/>
           </a:xfrm>
           <a:prstGeom prst="rect">
             <a:avLst/>
@@ -22753,12 +23485,12 @@
         </p:nvSpPr>
         <p:spPr>
           <a:xfrm>
-            <a:off x="2677363" y="4169664"/>
-            <a:ext cx="676656" cy="384048"/>
+            <a:off x="2831592" y="4169664"/>
+            <a:ext cx="685800" cy="475488"/>
           </a:xfrm>
           <a:prstGeom prst="rect">
             <a:avLst>
-              <a:gd name="adj" fmla="val 9524"/>
+              <a:gd name="adj" fmla="val 7692"/>
             </a:avLst>
           </a:prstGeom>
           <a:solidFill>
@@ -22780,8 +23512,8 @@
         </p:nvSpPr>
         <p:spPr>
           <a:xfrm>
-            <a:off x="2677363" y="4169664"/>
-            <a:ext cx="676656" cy="384048"/>
+            <a:off x="2831592" y="4169664"/>
+            <a:ext cx="685800" cy="475488"/>
           </a:xfrm>
           <a:prstGeom prst="rect">
             <a:avLst/>
@@ -22819,12 +23551,12 @@
         </p:nvSpPr>
         <p:spPr>
           <a:xfrm>
-            <a:off x="3403397" y="4169664"/>
-            <a:ext cx="676656" cy="384048"/>
+            <a:off x="3639312" y="4169664"/>
+            <a:ext cx="685800" cy="475488"/>
           </a:xfrm>
           <a:prstGeom prst="rect">
             <a:avLst>
-              <a:gd name="adj" fmla="val 9524"/>
+              <a:gd name="adj" fmla="val 7692"/>
             </a:avLst>
           </a:prstGeom>
           <a:solidFill>
@@ -22846,8 +23578,8 @@
         </p:nvSpPr>
         <p:spPr>
           <a:xfrm>
-            <a:off x="3403397" y="4169664"/>
-            <a:ext cx="676656" cy="384048"/>
+            <a:off x="3639312" y="4169664"/>
+            <a:ext cx="685800" cy="475488"/>
           </a:xfrm>
           <a:prstGeom prst="rect">
             <a:avLst/>
@@ -22871,7 +23603,7 @@
                 <a:ea typeface="Trebuchet MS" pitchFamily="34" charset="-122"/>
                 <a:cs typeface="Trebuchet MS" pitchFamily="34" charset="-120"/>
               </a:rPr>
-              <a:t>b</a:t>
+              <a:t>c</a:t>
             </a:r>
             <a:endParaRPr lang="en-US" sz="900" dirty="0"/>
           </a:p>
@@ -22885,12 +23617,12 @@
         </p:nvSpPr>
         <p:spPr>
           <a:xfrm>
-            <a:off x="4129430" y="4169664"/>
-            <a:ext cx="676656" cy="384048"/>
+            <a:off x="4447032" y="4169664"/>
+            <a:ext cx="685800" cy="475488"/>
           </a:xfrm>
           <a:prstGeom prst="rect">
             <a:avLst>
-              <a:gd name="adj" fmla="val 9524"/>
+              <a:gd name="adj" fmla="val 7692"/>
             </a:avLst>
           </a:prstGeom>
           <a:solidFill>
@@ -22912,8 +23644,8 @@
         </p:nvSpPr>
         <p:spPr>
           <a:xfrm>
-            <a:off x="4129430" y="4169664"/>
-            <a:ext cx="676656" cy="384048"/>
+            <a:off x="4447032" y="4169664"/>
+            <a:ext cx="685800" cy="475488"/>
           </a:xfrm>
           <a:prstGeom prst="rect">
             <a:avLst/>
@@ -22937,7 +23669,7 @@
                 <a:ea typeface="Trebuchet MS" pitchFamily="34" charset="-122"/>
                 <a:cs typeface="Trebuchet MS" pitchFamily="34" charset="-120"/>
               </a:rPr>
-              <a:t>s</a:t>
+              <a:t>c</a:t>
             </a:r>
             <a:endParaRPr lang="en-US" sz="900" dirty="0"/>
           </a:p>
@@ -22951,12 +23683,12 @@
         </p:nvSpPr>
         <p:spPr>
           <a:xfrm>
-            <a:off x="4855464" y="4169664"/>
-            <a:ext cx="676656" cy="384048"/>
+            <a:off x="5254752" y="4169664"/>
+            <a:ext cx="685800" cy="475488"/>
           </a:xfrm>
           <a:prstGeom prst="rect">
             <a:avLst>
-              <a:gd name="adj" fmla="val 9524"/>
+              <a:gd name="adj" fmla="val 7692"/>
             </a:avLst>
           </a:prstGeom>
           <a:solidFill>
@@ -22978,8 +23710,8 @@
         </p:nvSpPr>
         <p:spPr>
           <a:xfrm>
-            <a:off x="4855464" y="4169664"/>
-            <a:ext cx="676656" cy="384048"/>
+            <a:off x="5254752" y="4169664"/>
+            <a:ext cx="685800" cy="475488"/>
           </a:xfrm>
           <a:prstGeom prst="rect">
             <a:avLst/>
@@ -23003,7 +23735,7 @@
                 <a:ea typeface="Trebuchet MS" pitchFamily="34" charset="-122"/>
                 <a:cs typeface="Trebuchet MS" pitchFamily="34" charset="-120"/>
               </a:rPr>
-              <a:t>t</a:t>
+              <a:t>e</a:t>
             </a:r>
             <a:endParaRPr lang="en-US" sz="900" dirty="0"/>
           </a:p>
@@ -23017,12 +23749,12 @@
         </p:nvSpPr>
         <p:spPr>
           <a:xfrm>
-            <a:off x="5581498" y="4169664"/>
-            <a:ext cx="676656" cy="384048"/>
+            <a:off x="6062472" y="4169664"/>
+            <a:ext cx="685800" cy="475488"/>
           </a:xfrm>
           <a:prstGeom prst="rect">
             <a:avLst>
-              <a:gd name="adj" fmla="val 9524"/>
+              <a:gd name="adj" fmla="val 7692"/>
             </a:avLst>
           </a:prstGeom>
           <a:solidFill>
@@ -23044,8 +23776,8 @@
         </p:nvSpPr>
         <p:spPr>
           <a:xfrm>
-            <a:off x="5581498" y="4169664"/>
-            <a:ext cx="676656" cy="384048"/>
+            <a:off x="6062472" y="4169664"/>
+            <a:ext cx="685800" cy="475488"/>
           </a:xfrm>
           <a:prstGeom prst="rect">
             <a:avLst/>
@@ -23069,7 +23801,7 @@
                 <a:ea typeface="Trebuchet MS" pitchFamily="34" charset="-122"/>
                 <a:cs typeface="Trebuchet MS" pitchFamily="34" charset="-120"/>
               </a:rPr>
-              <a:t>i</a:t>
+              <a:t>ssi</a:t>
             </a:r>
             <a:endParaRPr lang="en-US" sz="900" dirty="0"/>
           </a:p>
@@ -23083,12 +23815,12 @@
         </p:nvSpPr>
         <p:spPr>
           <a:xfrm>
-            <a:off x="6307531" y="4169664"/>
-            <a:ext cx="676656" cy="384048"/>
+            <a:off x="6870192" y="4169664"/>
+            <a:ext cx="685800" cy="475488"/>
           </a:xfrm>
           <a:prstGeom prst="rect">
             <a:avLst>
-              <a:gd name="adj" fmla="val 9524"/>
+              <a:gd name="adj" fmla="val 7692"/>
             </a:avLst>
           </a:prstGeom>
           <a:solidFill>
@@ -23110,8 +23842,8 @@
         </p:nvSpPr>
         <p:spPr>
           <a:xfrm>
-            <a:off x="6307531" y="4169664"/>
-            <a:ext cx="676656" cy="384048"/>
+            <a:off x="6870192" y="4169664"/>
+            <a:ext cx="685800" cy="475488"/>
           </a:xfrm>
           <a:prstGeom prst="rect">
             <a:avLst/>
@@ -23135,7 +23867,7 @@
                 <a:ea typeface="Trebuchet MS" pitchFamily="34" charset="-122"/>
                 <a:cs typeface="Trebuchet MS" pitchFamily="34" charset="-120"/>
               </a:rPr>
-              <a:t>t</a:t>
+              <a:t>o</a:t>
             </a:r>
             <a:endParaRPr lang="en-US" sz="900" dirty="0"/>
           </a:p>
@@ -23149,12 +23881,12 @@
         </p:nvSpPr>
         <p:spPr>
           <a:xfrm>
-            <a:off x="7033565" y="4169664"/>
-            <a:ext cx="676656" cy="384048"/>
+            <a:off x="7677912" y="4169664"/>
+            <a:ext cx="685800" cy="475488"/>
           </a:xfrm>
           <a:prstGeom prst="rect">
             <a:avLst>
-              <a:gd name="adj" fmla="val 9524"/>
+              <a:gd name="adj" fmla="val 7692"/>
             </a:avLst>
           </a:prstGeom>
           <a:solidFill>
@@ -23176,8 +23908,8 @@
         </p:nvSpPr>
         <p:spPr>
           <a:xfrm>
-            <a:off x="7033565" y="4169664"/>
-            <a:ext cx="676656" cy="384048"/>
+            <a:off x="7677912" y="4169664"/>
+            <a:ext cx="685800" cy="475488"/>
           </a:xfrm>
           <a:prstGeom prst="rect">
             <a:avLst/>
@@ -23201,114 +23933,9 @@
                 <a:ea typeface="Trebuchet MS" pitchFamily="34" charset="-122"/>
                 <a:cs typeface="Trebuchet MS" pitchFamily="34" charset="-120"/>
               </a:rPr>
-              <a:t>u</a:t>
+              <a:t>n</a:t>
             </a:r>
             <a:endParaRPr lang="en-US" sz="900" dirty="0"/>
-          </a:p>
-        </p:txBody>
-      </p:sp>
-      <p:sp>
-        <p:nvSpPr>
-          <p:cNvPr id="55" name="Shape 53"/>
-          <p:cNvSpPr/>
-          <p:nvPr/>
-        </p:nvSpPr>
-        <p:spPr>
-          <a:xfrm>
-            <a:off x="7759598" y="4169664"/>
-            <a:ext cx="676656" cy="384048"/>
-          </a:xfrm>
-          <a:prstGeom prst="rect">
-            <a:avLst>
-              <a:gd name="adj" fmla="val 9524"/>
-            </a:avLst>
-          </a:prstGeom>
-          <a:solidFill>
-            <a:srgbClr val="FFFFFF"/>
-          </a:solidFill>
-          <a:ln w="12700">
-            <a:solidFill>
-              <a:srgbClr val="DB2777"/>
-            </a:solidFill>
-            <a:prstDash val="solid"/>
-          </a:ln>
-        </p:spPr>
-      </p:sp>
-      <p:sp>
-        <p:nvSpPr>
-          <p:cNvPr id="56" name="Text 54"/>
-          <p:cNvSpPr/>
-          <p:nvPr/>
-        </p:nvSpPr>
-        <p:spPr>
-          <a:xfrm>
-            <a:off x="7759598" y="4169664"/>
-            <a:ext cx="676656" cy="384048"/>
-          </a:xfrm>
-          <a:prstGeom prst="rect">
-            <a:avLst/>
-          </a:prstGeom>
-          <a:noFill/>
-          <a:ln/>
-        </p:spPr>
-        <p:txBody>
-          <a:bodyPr wrap="square" lIns="0" tIns="0" rIns="0" bIns="0" rtlCol="0" anchor="ctr"/>
-          <a:lstStyle/>
-          <a:p>
-            <a:pPr algn="ctr" indent="0" marL="0">
-              <a:buNone/>
-            </a:pPr>
-            <a:r>
-              <a:rPr lang="en-US" sz="900" b="1" dirty="0">
-                <a:solidFill>
-                  <a:srgbClr val="9D174D"/>
-                </a:solidFill>
-                <a:latin typeface="Trebuchet MS" pitchFamily="34" charset="0"/>
-                <a:ea typeface="Trebuchet MS" pitchFamily="34" charset="-122"/>
-                <a:cs typeface="Trebuchet MS" pitchFamily="34" charset="-120"/>
-              </a:rPr>
-              <a:t>te</a:t>
-            </a:r>
-            <a:endParaRPr lang="en-US" sz="900" dirty="0"/>
-          </a:p>
-        </p:txBody>
-      </p:sp>
-      <p:sp>
-        <p:nvSpPr>
-          <p:cNvPr id="57" name="Text 55"/>
-          <p:cNvSpPr/>
-          <p:nvPr/>
-        </p:nvSpPr>
-        <p:spPr>
-          <a:xfrm>
-            <a:off x="7759598" y="4572000"/>
-            <a:ext cx="676656" cy="219456"/>
-          </a:xfrm>
-          <a:prstGeom prst="rect">
-            <a:avLst/>
-          </a:prstGeom>
-          <a:noFill/>
-          <a:ln/>
-        </p:spPr>
-        <p:txBody>
-          <a:bodyPr wrap="square" lIns="0" tIns="0" rIns="0" bIns="0" rtlCol="0" anchor="t"/>
-          <a:lstStyle/>
-          <a:p>
-            <a:pPr algn="ctr" indent="0" marL="0">
-              <a:buNone/>
-            </a:pPr>
-            <a:r>
-              <a:rPr lang="en-US" sz="750" i="1" dirty="0">
-                <a:solidFill>
-                  <a:srgbClr val="94A3B8"/>
-                </a:solidFill>
-                <a:latin typeface="Calibri" pitchFamily="34" charset="0"/>
-                <a:ea typeface="Calibri" pitchFamily="34" charset="-122"/>
-                <a:cs typeface="Calibri" pitchFamily="34" charset="-120"/>
-              </a:rPr>
-              <a:t>/t/</a:t>
-            </a:r>
-            <a:endParaRPr lang="en-US" sz="750" dirty="0"/>
           </a:p>
         </p:txBody>
       </p:sp>
@@ -23598,7 +24225,7 @@
                 <a:ea typeface="Calibri" pitchFamily="34" charset="-122"/>
                 <a:cs typeface="Calibri" pitchFamily="34" charset="-120"/>
               </a:rPr>
-              <a:t>Word Labs  •  wordlabs.app  •  Prefix: 'sub-' = under, below, less than</a:t>
+              <a:t>Word Labs  •  wordlabs.app  •  Prefix: 'sub-' = under; below</a:t>
             </a:r>
             <a:endParaRPr lang="en-US" sz="800" dirty="0"/>
           </a:p>
@@ -23737,7 +24364,7 @@
                 <a:ea typeface="Trebuchet MS" pitchFamily="34" charset="-122"/>
                 <a:cs typeface="Trebuchet MS" pitchFamily="34" charset="-120"/>
               </a:rPr>
-              <a:t>subtitle</a:t>
+              <a:t>successive</a:t>
             </a:r>
             <a:endParaRPr lang="en-US" sz="2800" dirty="0"/>
           </a:p>
@@ -24425,7 +25052,7 @@
                 <a:ea typeface="Calibri" pitchFamily="34" charset="-122"/>
                 <a:cs typeface="Calibri" pitchFamily="34" charset="-120"/>
               </a:rPr>
-              <a:t>Word Labs  •  wordlabs.app  •  Prefix: 'sub-' = under, below, less than</a:t>
+              <a:t>Word Labs  •  wordlabs.app  •  Prefix: 'sub-' = under; below</a:t>
             </a:r>
             <a:endParaRPr lang="en-US" sz="800" dirty="0"/>
           </a:p>
@@ -24564,7 +25191,7 @@
                 <a:ea typeface="Trebuchet MS" pitchFamily="34" charset="-122"/>
                 <a:cs typeface="Trebuchet MS" pitchFamily="34" charset="-120"/>
               </a:rPr>
-              <a:t>subtitle</a:t>
+              <a:t>successive</a:t>
             </a:r>
             <a:endParaRPr lang="en-US" sz="2800" dirty="0"/>
           </a:p>
@@ -24644,7 +25271,7 @@
         </p:nvSpPr>
         <p:spPr>
           <a:xfrm>
-            <a:off x="2938272" y="2258568"/>
+            <a:off x="2221992" y="2258568"/>
             <a:ext cx="1828800" cy="292608"/>
           </a:xfrm>
           <a:prstGeom prst="rect">
@@ -24678,7 +25305,7 @@
         </p:nvSpPr>
         <p:spPr>
           <a:xfrm>
-            <a:off x="2938272" y="2258568"/>
+            <a:off x="2221992" y="2258568"/>
             <a:ext cx="1828800" cy="292608"/>
           </a:xfrm>
           <a:prstGeom prst="rect">
@@ -24717,7 +25344,7 @@
         </p:nvSpPr>
         <p:spPr>
           <a:xfrm>
-            <a:off x="2938272" y="2569464"/>
+            <a:off x="2221992" y="2569464"/>
             <a:ext cx="1828800" cy="201168"/>
           </a:xfrm>
           <a:prstGeom prst="rect">
@@ -24742,7 +25369,7 @@
                 <a:ea typeface="Calibri" pitchFamily="34" charset="-122"/>
                 <a:cs typeface="Calibri" pitchFamily="34" charset="-120"/>
               </a:rPr>
-              <a:t>under, below</a:t>
+              <a:t>under; below</a:t>
             </a:r>
             <a:endParaRPr lang="en-US" sz="850" dirty="0"/>
           </a:p>
@@ -24756,7 +25383,7 @@
         </p:nvSpPr>
         <p:spPr>
           <a:xfrm>
-            <a:off x="5803392" y="2258568"/>
+            <a:off x="4370832" y="2258568"/>
             <a:ext cx="1828800" cy="292608"/>
           </a:xfrm>
           <a:prstGeom prst="rect">
@@ -24790,7 +25417,7 @@
         </p:nvSpPr>
         <p:spPr>
           <a:xfrm>
-            <a:off x="5803392" y="2258568"/>
+            <a:off x="4370832" y="2258568"/>
             <a:ext cx="1828800" cy="292608"/>
           </a:xfrm>
           <a:prstGeom prst="rect">
@@ -24815,7 +25442,7 @@
                 <a:ea typeface="Trebuchet MS" pitchFamily="34" charset="-122"/>
                 <a:cs typeface="Trebuchet MS" pitchFamily="34" charset="-120"/>
               </a:rPr>
-              <a:t>title</a:t>
+              <a:t>cess</a:t>
             </a:r>
             <a:endParaRPr lang="en-US" sz="1300" dirty="0"/>
           </a:p>
@@ -24829,7 +25456,7 @@
         </p:nvSpPr>
         <p:spPr>
           <a:xfrm>
-            <a:off x="5803392" y="2569464"/>
+            <a:off x="4370832" y="2569464"/>
             <a:ext cx="1828800" cy="201168"/>
           </a:xfrm>
           <a:prstGeom prst="rect">
@@ -24854,7 +25481,7 @@
                 <a:ea typeface="Calibri" pitchFamily="34" charset="-122"/>
                 <a:cs typeface="Calibri" pitchFamily="34" charset="-120"/>
               </a:rPr>
-              <a:t>a name or heading</a:t>
+              <a:t>go; yield; give way</a:t>
             </a:r>
             <a:endParaRPr lang="en-US" sz="850" dirty="0"/>
           </a:p>
@@ -24863,6 +25490,118 @@
       <p:sp>
         <p:nvSpPr>
           <p:cNvPr id="22" name="Shape 20"/>
+          <p:cNvSpPr/>
+          <p:nvPr/>
+        </p:nvSpPr>
+        <p:spPr>
+          <a:xfrm>
+            <a:off x="6519672" y="2258568"/>
+            <a:ext cx="1828800" cy="292608"/>
+          </a:xfrm>
+          <a:prstGeom prst="rect">
+            <a:avLst>
+              <a:gd name="adj" fmla="val 25000"/>
+            </a:avLst>
+          </a:prstGeom>
+          <a:solidFill>
+            <a:srgbClr val="FCE7F3"/>
+          </a:solidFill>
+          <a:ln w="19050">
+            <a:solidFill>
+              <a:srgbClr val="DB2777"/>
+            </a:solidFill>
+            <a:prstDash val="solid"/>
+          </a:ln>
+          <a:effectLst>
+            <a:outerShdw sx="100000" sy="100000" kx="0" ky="0" algn="bl" rotWithShape="0" blurRad="101600" dist="38100" dir="8100000">
+              <a:srgbClr val="000000">
+                <a:alpha val="12000"/>
+              </a:srgbClr>
+            </a:outerShdw>
+          </a:effectLst>
+        </p:spPr>
+      </p:sp>
+      <p:sp>
+        <p:nvSpPr>
+          <p:cNvPr id="23" name="Text 21"/>
+          <p:cNvSpPr/>
+          <p:nvPr/>
+        </p:nvSpPr>
+        <p:spPr>
+          <a:xfrm>
+            <a:off x="6519672" y="2258568"/>
+            <a:ext cx="1828800" cy="292608"/>
+          </a:xfrm>
+          <a:prstGeom prst="rect">
+            <a:avLst/>
+          </a:prstGeom>
+          <a:noFill/>
+          <a:ln/>
+        </p:spPr>
+        <p:txBody>
+          <a:bodyPr wrap="square" lIns="0" tIns="0" rIns="0" bIns="0" rtlCol="0" anchor="ctr"/>
+          <a:lstStyle/>
+          <a:p>
+            <a:pPr algn="ctr" indent="0" marL="0">
+              <a:buNone/>
+            </a:pPr>
+            <a:r>
+              <a:rPr lang="en-US" sz="1300" b="1" dirty="0">
+                <a:solidFill>
+                  <a:srgbClr val="9D174D"/>
+                </a:solidFill>
+                <a:latin typeface="Trebuchet MS" pitchFamily="34" charset="0"/>
+                <a:ea typeface="Trebuchet MS" pitchFamily="34" charset="-122"/>
+                <a:cs typeface="Trebuchet MS" pitchFamily="34" charset="-120"/>
+              </a:rPr>
+              <a:t>ive</a:t>
+            </a:r>
+            <a:endParaRPr lang="en-US" sz="1300" dirty="0"/>
+          </a:p>
+        </p:txBody>
+      </p:sp>
+      <p:sp>
+        <p:nvSpPr>
+          <p:cNvPr id="24" name="Text 22"/>
+          <p:cNvSpPr/>
+          <p:nvPr/>
+        </p:nvSpPr>
+        <p:spPr>
+          <a:xfrm>
+            <a:off x="6519672" y="2569464"/>
+            <a:ext cx="1828800" cy="201168"/>
+          </a:xfrm>
+          <a:prstGeom prst="rect">
+            <a:avLst/>
+          </a:prstGeom>
+          <a:noFill/>
+          <a:ln/>
+        </p:spPr>
+        <p:txBody>
+          <a:bodyPr wrap="square" lIns="0" tIns="0" rIns="0" bIns="0" rtlCol="0" anchor="t"/>
+          <a:lstStyle/>
+          <a:p>
+            <a:pPr algn="ctr" indent="0" marL="0">
+              <a:buNone/>
+            </a:pPr>
+            <a:r>
+              <a:rPr lang="en-US" sz="850" dirty="0">
+                <a:solidFill>
+                  <a:srgbClr val="475569"/>
+                </a:solidFill>
+                <a:latin typeface="Calibri" pitchFamily="34" charset="0"/>
+                <a:ea typeface="Calibri" pitchFamily="34" charset="-122"/>
+                <a:cs typeface="Calibri" pitchFamily="34" charset="-120"/>
+              </a:rPr>
+              <a:t>having quality of</a:t>
+            </a:r>
+            <a:endParaRPr lang="en-US" sz="850" dirty="0"/>
+          </a:p>
+        </p:txBody>
+      </p:sp>
+      <p:sp>
+        <p:nvSpPr>
+          <p:cNvPr id="25" name="Shape 23"/>
           <p:cNvSpPr/>
           <p:nvPr/>
         </p:nvSpPr>
@@ -24889,7 +25628,7 @@
       </p:sp>
       <p:sp>
         <p:nvSpPr>
-          <p:cNvPr id="23" name="Text 21"/>
+          <p:cNvPr id="26" name="Text 24"/>
           <p:cNvSpPr/>
           <p:nvPr/>
         </p:nvSpPr>
@@ -24928,7 +25667,7 @@
       </p:sp>
       <p:sp>
         <p:nvSpPr>
-          <p:cNvPr id="24" name="Shape 22"/>
+          <p:cNvPr id="27" name="Shape 25"/>
           <p:cNvSpPr/>
           <p:nvPr/>
         </p:nvSpPr>
@@ -24955,7 +25694,7 @@
       </p:sp>
       <p:sp>
         <p:nvSpPr>
-          <p:cNvPr id="25" name="Text 23"/>
+          <p:cNvPr id="28" name="Text 26"/>
           <p:cNvSpPr/>
           <p:nvPr/>
         </p:nvSpPr>
@@ -24994,7 +25733,7 @@
       </p:sp>
       <p:sp>
         <p:nvSpPr>
-          <p:cNvPr id="26" name="Shape 24"/>
+          <p:cNvPr id="29" name="Shape 27"/>
           <p:cNvSpPr/>
           <p:nvPr/>
         </p:nvSpPr>
@@ -25021,7 +25760,7 @@
       </p:sp>
       <p:sp>
         <p:nvSpPr>
-          <p:cNvPr id="27" name="Text 25"/>
+          <p:cNvPr id="30" name="Text 28"/>
           <p:cNvSpPr/>
           <p:nvPr/>
         </p:nvSpPr>
@@ -25060,7 +25799,7 @@
       </p:sp>
       <p:sp>
         <p:nvSpPr>
-          <p:cNvPr id="28" name="Shape 26"/>
+          <p:cNvPr id="31" name="Shape 29"/>
           <p:cNvSpPr/>
           <p:nvPr/>
         </p:nvSpPr>
@@ -25087,7 +25826,7 @@
       </p:sp>
       <p:sp>
         <p:nvSpPr>
-          <p:cNvPr id="29" name="Text 27"/>
+          <p:cNvPr id="32" name="Text 30"/>
           <p:cNvSpPr/>
           <p:nvPr/>
         </p:nvSpPr>
@@ -25410,7 +26149,7 @@
                 <a:ea typeface="Calibri" pitchFamily="34" charset="-122"/>
                 <a:cs typeface="Calibri" pitchFamily="34" charset="-120"/>
               </a:rPr>
-              <a:t>Word Labs  •  wordlabs.app  •  Prefix: 'sub-' = under, below, less than</a:t>
+              <a:t>Word Labs  •  wordlabs.app  •  Prefix: 'sub-' = under; below</a:t>
             </a:r>
             <a:endParaRPr lang="en-US" sz="800" dirty="0"/>
           </a:p>
@@ -25483,7 +26222,7 @@
                 <a:ea typeface="Trebuchet MS" pitchFamily="34" charset="-122"/>
                 <a:cs typeface="Trebuchet MS" pitchFamily="34" charset="-120"/>
               </a:rPr>
-              <a:t>We are learning that the prefix 'sub-' means 'under, below, less than'.</a:t>
+              <a:t>We are learning that the prefix 'sub-' means 'under; below'.</a:t>
             </a:r>
             <a:endParaRPr lang="en-US" sz="2000" dirty="0"/>
           </a:p>
@@ -26129,7 +26868,7 @@
                 <a:ea typeface="Calibri" pitchFamily="34" charset="-122"/>
                 <a:cs typeface="Calibri" pitchFamily="34" charset="-120"/>
               </a:rPr>
-              <a:t>Word Labs  •  wordlabs.app  •  Prefix: 'sub-' = under, below, less than</a:t>
+              <a:t>Word Labs  •  wordlabs.app  •  Prefix: 'sub-' = under; below</a:t>
             </a:r>
             <a:endParaRPr lang="en-US" sz="800" dirty="0"/>
           </a:p>
@@ -26268,7 +27007,7 @@
                 <a:ea typeface="Trebuchet MS" pitchFamily="34" charset="-122"/>
                 <a:cs typeface="Trebuchet MS" pitchFamily="34" charset="-120"/>
               </a:rPr>
-              <a:t>subtitle</a:t>
+              <a:t>successive</a:t>
             </a:r>
             <a:endParaRPr lang="en-US" sz="2800" dirty="0"/>
           </a:p>
@@ -26348,7 +27087,7 @@
         </p:nvSpPr>
         <p:spPr>
           <a:xfrm>
-            <a:off x="2938272" y="2258568"/>
+            <a:off x="2221992" y="2258568"/>
             <a:ext cx="1828800" cy="292608"/>
           </a:xfrm>
           <a:prstGeom prst="rect">
@@ -26382,7 +27121,7 @@
         </p:nvSpPr>
         <p:spPr>
           <a:xfrm>
-            <a:off x="2938272" y="2258568"/>
+            <a:off x="2221992" y="2258568"/>
             <a:ext cx="1828800" cy="292608"/>
           </a:xfrm>
           <a:prstGeom prst="rect">
@@ -26421,7 +27160,7 @@
         </p:nvSpPr>
         <p:spPr>
           <a:xfrm>
-            <a:off x="2938272" y="2569464"/>
+            <a:off x="2221992" y="2569464"/>
             <a:ext cx="1828800" cy="201168"/>
           </a:xfrm>
           <a:prstGeom prst="rect">
@@ -26446,7 +27185,7 @@
                 <a:ea typeface="Calibri" pitchFamily="34" charset="-122"/>
                 <a:cs typeface="Calibri" pitchFamily="34" charset="-120"/>
               </a:rPr>
-              <a:t>under, below</a:t>
+              <a:t>under; below</a:t>
             </a:r>
             <a:endParaRPr lang="en-US" sz="850" dirty="0"/>
           </a:p>
@@ -26460,7 +27199,7 @@
         </p:nvSpPr>
         <p:spPr>
           <a:xfrm>
-            <a:off x="5803392" y="2258568"/>
+            <a:off x="4370832" y="2258568"/>
             <a:ext cx="1828800" cy="292608"/>
           </a:xfrm>
           <a:prstGeom prst="rect">
@@ -26494,7 +27233,7 @@
         </p:nvSpPr>
         <p:spPr>
           <a:xfrm>
-            <a:off x="5803392" y="2258568"/>
+            <a:off x="4370832" y="2258568"/>
             <a:ext cx="1828800" cy="292608"/>
           </a:xfrm>
           <a:prstGeom prst="rect">
@@ -26519,7 +27258,7 @@
                 <a:ea typeface="Trebuchet MS" pitchFamily="34" charset="-122"/>
                 <a:cs typeface="Trebuchet MS" pitchFamily="34" charset="-120"/>
               </a:rPr>
-              <a:t>title</a:t>
+              <a:t>cess</a:t>
             </a:r>
             <a:endParaRPr lang="en-US" sz="1300" dirty="0"/>
           </a:p>
@@ -26533,7 +27272,7 @@
         </p:nvSpPr>
         <p:spPr>
           <a:xfrm>
-            <a:off x="5803392" y="2569464"/>
+            <a:off x="4370832" y="2569464"/>
             <a:ext cx="1828800" cy="201168"/>
           </a:xfrm>
           <a:prstGeom prst="rect">
@@ -26558,7 +27297,7 @@
                 <a:ea typeface="Calibri" pitchFamily="34" charset="-122"/>
                 <a:cs typeface="Calibri" pitchFamily="34" charset="-120"/>
               </a:rPr>
-              <a:t>a name or heading</a:t>
+              <a:t>go; yield; give way</a:t>
             </a:r>
             <a:endParaRPr lang="en-US" sz="850" dirty="0"/>
           </a:p>
@@ -26567,6 +27306,118 @@
       <p:sp>
         <p:nvSpPr>
           <p:cNvPr id="22" name="Shape 20"/>
+          <p:cNvSpPr/>
+          <p:nvPr/>
+        </p:nvSpPr>
+        <p:spPr>
+          <a:xfrm>
+            <a:off x="6519672" y="2258568"/>
+            <a:ext cx="1828800" cy="292608"/>
+          </a:xfrm>
+          <a:prstGeom prst="rect">
+            <a:avLst>
+              <a:gd name="adj" fmla="val 25000"/>
+            </a:avLst>
+          </a:prstGeom>
+          <a:solidFill>
+            <a:srgbClr val="FCE7F3"/>
+          </a:solidFill>
+          <a:ln w="19050">
+            <a:solidFill>
+              <a:srgbClr val="DB2777"/>
+            </a:solidFill>
+            <a:prstDash val="solid"/>
+          </a:ln>
+          <a:effectLst>
+            <a:outerShdw sx="100000" sy="100000" kx="0" ky="0" algn="bl" rotWithShape="0" blurRad="101600" dist="38100" dir="8100000">
+              <a:srgbClr val="000000">
+                <a:alpha val="12000"/>
+              </a:srgbClr>
+            </a:outerShdw>
+          </a:effectLst>
+        </p:spPr>
+      </p:sp>
+      <p:sp>
+        <p:nvSpPr>
+          <p:cNvPr id="23" name="Text 21"/>
+          <p:cNvSpPr/>
+          <p:nvPr/>
+        </p:nvSpPr>
+        <p:spPr>
+          <a:xfrm>
+            <a:off x="6519672" y="2258568"/>
+            <a:ext cx="1828800" cy="292608"/>
+          </a:xfrm>
+          <a:prstGeom prst="rect">
+            <a:avLst/>
+          </a:prstGeom>
+          <a:noFill/>
+          <a:ln/>
+        </p:spPr>
+        <p:txBody>
+          <a:bodyPr wrap="square" lIns="0" tIns="0" rIns="0" bIns="0" rtlCol="0" anchor="ctr"/>
+          <a:lstStyle/>
+          <a:p>
+            <a:pPr algn="ctr" indent="0" marL="0">
+              <a:buNone/>
+            </a:pPr>
+            <a:r>
+              <a:rPr lang="en-US" sz="1300" b="1" dirty="0">
+                <a:solidFill>
+                  <a:srgbClr val="9D174D"/>
+                </a:solidFill>
+                <a:latin typeface="Trebuchet MS" pitchFamily="34" charset="0"/>
+                <a:ea typeface="Trebuchet MS" pitchFamily="34" charset="-122"/>
+                <a:cs typeface="Trebuchet MS" pitchFamily="34" charset="-120"/>
+              </a:rPr>
+              <a:t>ive</a:t>
+            </a:r>
+            <a:endParaRPr lang="en-US" sz="1300" dirty="0"/>
+          </a:p>
+        </p:txBody>
+      </p:sp>
+      <p:sp>
+        <p:nvSpPr>
+          <p:cNvPr id="24" name="Text 22"/>
+          <p:cNvSpPr/>
+          <p:nvPr/>
+        </p:nvSpPr>
+        <p:spPr>
+          <a:xfrm>
+            <a:off x="6519672" y="2569464"/>
+            <a:ext cx="1828800" cy="201168"/>
+          </a:xfrm>
+          <a:prstGeom prst="rect">
+            <a:avLst/>
+          </a:prstGeom>
+          <a:noFill/>
+          <a:ln/>
+        </p:spPr>
+        <p:txBody>
+          <a:bodyPr wrap="square" lIns="0" tIns="0" rIns="0" bIns="0" rtlCol="0" anchor="t"/>
+          <a:lstStyle/>
+          <a:p>
+            <a:pPr algn="ctr" indent="0" marL="0">
+              <a:buNone/>
+            </a:pPr>
+            <a:r>
+              <a:rPr lang="en-US" sz="850" dirty="0">
+                <a:solidFill>
+                  <a:srgbClr val="475569"/>
+                </a:solidFill>
+                <a:latin typeface="Calibri" pitchFamily="34" charset="0"/>
+                <a:ea typeface="Calibri" pitchFamily="34" charset="-122"/>
+                <a:cs typeface="Calibri" pitchFamily="34" charset="-120"/>
+              </a:rPr>
+              <a:t>having quality of</a:t>
+            </a:r>
+            <a:endParaRPr lang="en-US" sz="850" dirty="0"/>
+          </a:p>
+        </p:txBody>
+      </p:sp>
+      <p:sp>
+        <p:nvSpPr>
+          <p:cNvPr id="25" name="Shape 23"/>
           <p:cNvSpPr/>
           <p:nvPr/>
         </p:nvSpPr>
@@ -26593,7 +27444,7 @@
       </p:sp>
       <p:sp>
         <p:nvSpPr>
-          <p:cNvPr id="23" name="Text 21"/>
+          <p:cNvPr id="26" name="Text 24"/>
           <p:cNvSpPr/>
           <p:nvPr/>
         </p:nvSpPr>
@@ -26632,7 +27483,7 @@
       </p:sp>
       <p:sp>
         <p:nvSpPr>
-          <p:cNvPr id="24" name="Shape 22"/>
+          <p:cNvPr id="27" name="Shape 25"/>
           <p:cNvSpPr/>
           <p:nvPr/>
         </p:nvSpPr>
@@ -26659,7 +27510,7 @@
       </p:sp>
       <p:sp>
         <p:nvSpPr>
-          <p:cNvPr id="25" name="Shape 23"/>
+          <p:cNvPr id="28" name="Shape 26"/>
           <p:cNvSpPr/>
           <p:nvPr/>
         </p:nvSpPr>
@@ -26686,7 +27537,7 @@
       </p:sp>
       <p:sp>
         <p:nvSpPr>
-          <p:cNvPr id="26" name="Text 24"/>
+          <p:cNvPr id="29" name="Text 27"/>
           <p:cNvSpPr/>
           <p:nvPr/>
         </p:nvSpPr>
@@ -26717,7 +27568,7 @@
                 <a:ea typeface="Trebuchet MS" pitchFamily="34" charset="-122"/>
                 <a:cs typeface="Trebuchet MS" pitchFamily="34" charset="-120"/>
               </a:rPr>
-              <a:t>sub</a:t>
+              <a:t>suc</a:t>
             </a:r>
             <a:endParaRPr lang="en-US" sz="1400" dirty="0"/>
           </a:p>
@@ -26725,7 +27576,7 @@
       </p:sp>
       <p:sp>
         <p:nvSpPr>
-          <p:cNvPr id="27" name="Text 25"/>
+          <p:cNvPr id="30" name="Text 28"/>
           <p:cNvSpPr/>
           <p:nvPr/>
         </p:nvSpPr>
@@ -26764,7 +27615,7 @@
       </p:sp>
       <p:sp>
         <p:nvSpPr>
-          <p:cNvPr id="28" name="Shape 26"/>
+          <p:cNvPr id="31" name="Shape 29"/>
           <p:cNvSpPr/>
           <p:nvPr/>
         </p:nvSpPr>
@@ -26791,7 +27642,7 @@
       </p:sp>
       <p:sp>
         <p:nvSpPr>
-          <p:cNvPr id="29" name="Text 27"/>
+          <p:cNvPr id="32" name="Text 30"/>
           <p:cNvSpPr/>
           <p:nvPr/>
         </p:nvSpPr>
@@ -26822,7 +27673,7 @@
                 <a:ea typeface="Trebuchet MS" pitchFamily="34" charset="-122"/>
                 <a:cs typeface="Trebuchet MS" pitchFamily="34" charset="-120"/>
               </a:rPr>
-              <a:t>ti</a:t>
+              <a:t>ces</a:t>
             </a:r>
             <a:endParaRPr lang="en-US" sz="1400" dirty="0"/>
           </a:p>
@@ -26830,7 +27681,7 @@
       </p:sp>
       <p:sp>
         <p:nvSpPr>
-          <p:cNvPr id="30" name="Text 28"/>
+          <p:cNvPr id="33" name="Text 31"/>
           <p:cNvSpPr/>
           <p:nvPr/>
         </p:nvSpPr>
@@ -26869,7 +27720,7 @@
       </p:sp>
       <p:sp>
         <p:nvSpPr>
-          <p:cNvPr id="31" name="Shape 29"/>
+          <p:cNvPr id="34" name="Shape 32"/>
           <p:cNvSpPr/>
           <p:nvPr/>
         </p:nvSpPr>
@@ -26896,7 +27747,7 @@
       </p:sp>
       <p:sp>
         <p:nvSpPr>
-          <p:cNvPr id="32" name="Text 30"/>
+          <p:cNvPr id="35" name="Text 33"/>
           <p:cNvSpPr/>
           <p:nvPr/>
         </p:nvSpPr>
@@ -26927,7 +27778,7 @@
                 <a:ea typeface="Trebuchet MS" pitchFamily="34" charset="-122"/>
                 <a:cs typeface="Trebuchet MS" pitchFamily="34" charset="-120"/>
               </a:rPr>
-              <a:t>tle</a:t>
+              <a:t>sive</a:t>
             </a:r>
             <a:endParaRPr lang="en-US" sz="1400" dirty="0"/>
           </a:p>
@@ -26935,7 +27786,7 @@
       </p:sp>
       <p:sp>
         <p:nvSpPr>
-          <p:cNvPr id="33" name="Shape 31"/>
+          <p:cNvPr id="36" name="Shape 34"/>
           <p:cNvSpPr/>
           <p:nvPr/>
         </p:nvSpPr>
@@ -26962,7 +27813,7 @@
       </p:sp>
       <p:sp>
         <p:nvSpPr>
-          <p:cNvPr id="34" name="Text 32"/>
+          <p:cNvPr id="37" name="Text 35"/>
           <p:cNvSpPr/>
           <p:nvPr/>
         </p:nvSpPr>
@@ -27001,7 +27852,7 @@
       </p:sp>
       <p:sp>
         <p:nvSpPr>
-          <p:cNvPr id="35" name="Shape 33"/>
+          <p:cNvPr id="38" name="Shape 36"/>
           <p:cNvSpPr/>
           <p:nvPr/>
         </p:nvSpPr>
@@ -27028,7 +27879,7 @@
       </p:sp>
       <p:sp>
         <p:nvSpPr>
-          <p:cNvPr id="36" name="Text 34"/>
+          <p:cNvPr id="39" name="Text 37"/>
           <p:cNvSpPr/>
           <p:nvPr/>
         </p:nvSpPr>
@@ -27351,7 +28202,7 @@
                 <a:ea typeface="Calibri" pitchFamily="34" charset="-122"/>
                 <a:cs typeface="Calibri" pitchFamily="34" charset="-120"/>
               </a:rPr>
-              <a:t>Word Labs  •  wordlabs.app  •  Prefix: 'sub-' = under, below, less than</a:t>
+              <a:t>Word Labs  •  wordlabs.app  •  Prefix: 'sub-' = under; below</a:t>
             </a:r>
             <a:endParaRPr lang="en-US" sz="800" dirty="0"/>
           </a:p>
@@ -27490,7 +28341,7 @@
                 <a:ea typeface="Trebuchet MS" pitchFamily="34" charset="-122"/>
                 <a:cs typeface="Trebuchet MS" pitchFamily="34" charset="-120"/>
               </a:rPr>
-              <a:t>subtitle</a:t>
+              <a:t>successive</a:t>
             </a:r>
             <a:endParaRPr lang="en-US" sz="2800" dirty="0"/>
           </a:p>
@@ -27570,7 +28421,7 @@
         </p:nvSpPr>
         <p:spPr>
           <a:xfrm>
-            <a:off x="2938272" y="2258568"/>
+            <a:off x="2221992" y="2258568"/>
             <a:ext cx="1828800" cy="292608"/>
           </a:xfrm>
           <a:prstGeom prst="rect">
@@ -27604,7 +28455,7 @@
         </p:nvSpPr>
         <p:spPr>
           <a:xfrm>
-            <a:off x="2938272" y="2258568"/>
+            <a:off x="2221992" y="2258568"/>
             <a:ext cx="1828800" cy="292608"/>
           </a:xfrm>
           <a:prstGeom prst="rect">
@@ -27643,7 +28494,7 @@
         </p:nvSpPr>
         <p:spPr>
           <a:xfrm>
-            <a:off x="2938272" y="2569464"/>
+            <a:off x="2221992" y="2569464"/>
             <a:ext cx="1828800" cy="201168"/>
           </a:xfrm>
           <a:prstGeom prst="rect">
@@ -27668,7 +28519,7 @@
                 <a:ea typeface="Calibri" pitchFamily="34" charset="-122"/>
                 <a:cs typeface="Calibri" pitchFamily="34" charset="-120"/>
               </a:rPr>
-              <a:t>under, below</a:t>
+              <a:t>under; below</a:t>
             </a:r>
             <a:endParaRPr lang="en-US" sz="850" dirty="0"/>
           </a:p>
@@ -27682,7 +28533,7 @@
         </p:nvSpPr>
         <p:spPr>
           <a:xfrm>
-            <a:off x="5803392" y="2258568"/>
+            <a:off x="4370832" y="2258568"/>
             <a:ext cx="1828800" cy="292608"/>
           </a:xfrm>
           <a:prstGeom prst="rect">
@@ -27716,7 +28567,7 @@
         </p:nvSpPr>
         <p:spPr>
           <a:xfrm>
-            <a:off x="5803392" y="2258568"/>
+            <a:off x="4370832" y="2258568"/>
             <a:ext cx="1828800" cy="292608"/>
           </a:xfrm>
           <a:prstGeom prst="rect">
@@ -27741,7 +28592,7 @@
                 <a:ea typeface="Trebuchet MS" pitchFamily="34" charset="-122"/>
                 <a:cs typeface="Trebuchet MS" pitchFamily="34" charset="-120"/>
               </a:rPr>
-              <a:t>title</a:t>
+              <a:t>cess</a:t>
             </a:r>
             <a:endParaRPr lang="en-US" sz="1300" dirty="0"/>
           </a:p>
@@ -27755,7 +28606,7 @@
         </p:nvSpPr>
         <p:spPr>
           <a:xfrm>
-            <a:off x="5803392" y="2569464"/>
+            <a:off x="4370832" y="2569464"/>
             <a:ext cx="1828800" cy="201168"/>
           </a:xfrm>
           <a:prstGeom prst="rect">
@@ -27780,7 +28631,7 @@
                 <a:ea typeface="Calibri" pitchFamily="34" charset="-122"/>
                 <a:cs typeface="Calibri" pitchFamily="34" charset="-120"/>
               </a:rPr>
-              <a:t>a name or heading</a:t>
+              <a:t>go; yield; give way</a:t>
             </a:r>
             <a:endParaRPr lang="en-US" sz="850" dirty="0"/>
           </a:p>
@@ -27789,6 +28640,118 @@
       <p:sp>
         <p:nvSpPr>
           <p:cNvPr id="22" name="Shape 20"/>
+          <p:cNvSpPr/>
+          <p:nvPr/>
+        </p:nvSpPr>
+        <p:spPr>
+          <a:xfrm>
+            <a:off x="6519672" y="2258568"/>
+            <a:ext cx="1828800" cy="292608"/>
+          </a:xfrm>
+          <a:prstGeom prst="rect">
+            <a:avLst>
+              <a:gd name="adj" fmla="val 25000"/>
+            </a:avLst>
+          </a:prstGeom>
+          <a:solidFill>
+            <a:srgbClr val="FCE7F3"/>
+          </a:solidFill>
+          <a:ln w="19050">
+            <a:solidFill>
+              <a:srgbClr val="DB2777"/>
+            </a:solidFill>
+            <a:prstDash val="solid"/>
+          </a:ln>
+          <a:effectLst>
+            <a:outerShdw sx="100000" sy="100000" kx="0" ky="0" algn="bl" rotWithShape="0" blurRad="101600" dist="38100" dir="8100000">
+              <a:srgbClr val="000000">
+                <a:alpha val="12000"/>
+              </a:srgbClr>
+            </a:outerShdw>
+          </a:effectLst>
+        </p:spPr>
+      </p:sp>
+      <p:sp>
+        <p:nvSpPr>
+          <p:cNvPr id="23" name="Text 21"/>
+          <p:cNvSpPr/>
+          <p:nvPr/>
+        </p:nvSpPr>
+        <p:spPr>
+          <a:xfrm>
+            <a:off x="6519672" y="2258568"/>
+            <a:ext cx="1828800" cy="292608"/>
+          </a:xfrm>
+          <a:prstGeom prst="rect">
+            <a:avLst/>
+          </a:prstGeom>
+          <a:noFill/>
+          <a:ln/>
+        </p:spPr>
+        <p:txBody>
+          <a:bodyPr wrap="square" lIns="0" tIns="0" rIns="0" bIns="0" rtlCol="0" anchor="ctr"/>
+          <a:lstStyle/>
+          <a:p>
+            <a:pPr algn="ctr" indent="0" marL="0">
+              <a:buNone/>
+            </a:pPr>
+            <a:r>
+              <a:rPr lang="en-US" sz="1300" b="1" dirty="0">
+                <a:solidFill>
+                  <a:srgbClr val="9D174D"/>
+                </a:solidFill>
+                <a:latin typeface="Trebuchet MS" pitchFamily="34" charset="0"/>
+                <a:ea typeface="Trebuchet MS" pitchFamily="34" charset="-122"/>
+                <a:cs typeface="Trebuchet MS" pitchFamily="34" charset="-120"/>
+              </a:rPr>
+              <a:t>ive</a:t>
+            </a:r>
+            <a:endParaRPr lang="en-US" sz="1300" dirty="0"/>
+          </a:p>
+        </p:txBody>
+      </p:sp>
+      <p:sp>
+        <p:nvSpPr>
+          <p:cNvPr id="24" name="Text 22"/>
+          <p:cNvSpPr/>
+          <p:nvPr/>
+        </p:nvSpPr>
+        <p:spPr>
+          <a:xfrm>
+            <a:off x="6519672" y="2569464"/>
+            <a:ext cx="1828800" cy="201168"/>
+          </a:xfrm>
+          <a:prstGeom prst="rect">
+            <a:avLst/>
+          </a:prstGeom>
+          <a:noFill/>
+          <a:ln/>
+        </p:spPr>
+        <p:txBody>
+          <a:bodyPr wrap="square" lIns="0" tIns="0" rIns="0" bIns="0" rtlCol="0" anchor="t"/>
+          <a:lstStyle/>
+          <a:p>
+            <a:pPr algn="ctr" indent="0" marL="0">
+              <a:buNone/>
+            </a:pPr>
+            <a:r>
+              <a:rPr lang="en-US" sz="850" dirty="0">
+                <a:solidFill>
+                  <a:srgbClr val="475569"/>
+                </a:solidFill>
+                <a:latin typeface="Calibri" pitchFamily="34" charset="0"/>
+                <a:ea typeface="Calibri" pitchFamily="34" charset="-122"/>
+                <a:cs typeface="Calibri" pitchFamily="34" charset="-120"/>
+              </a:rPr>
+              <a:t>having quality of</a:t>
+            </a:r>
+            <a:endParaRPr lang="en-US" sz="850" dirty="0"/>
+          </a:p>
+        </p:txBody>
+      </p:sp>
+      <p:sp>
+        <p:nvSpPr>
+          <p:cNvPr id="25" name="Shape 23"/>
           <p:cNvSpPr/>
           <p:nvPr/>
         </p:nvSpPr>
@@ -27815,7 +28778,7 @@
       </p:sp>
       <p:sp>
         <p:nvSpPr>
-          <p:cNvPr id="23" name="Text 21"/>
+          <p:cNvPr id="26" name="Text 24"/>
           <p:cNvSpPr/>
           <p:nvPr/>
         </p:nvSpPr>
@@ -27854,7 +28817,7 @@
       </p:sp>
       <p:sp>
         <p:nvSpPr>
-          <p:cNvPr id="24" name="Shape 22"/>
+          <p:cNvPr id="27" name="Shape 25"/>
           <p:cNvSpPr/>
           <p:nvPr/>
         </p:nvSpPr>
@@ -27881,7 +28844,7 @@
       </p:sp>
       <p:sp>
         <p:nvSpPr>
-          <p:cNvPr id="25" name="Shape 23"/>
+          <p:cNvPr id="28" name="Shape 26"/>
           <p:cNvSpPr/>
           <p:nvPr/>
         </p:nvSpPr>
@@ -27908,7 +28871,7 @@
       </p:sp>
       <p:sp>
         <p:nvSpPr>
-          <p:cNvPr id="26" name="Text 24"/>
+          <p:cNvPr id="29" name="Text 27"/>
           <p:cNvSpPr/>
           <p:nvPr/>
         </p:nvSpPr>
@@ -27939,7 +28902,7 @@
                 <a:ea typeface="Trebuchet MS" pitchFamily="34" charset="-122"/>
                 <a:cs typeface="Trebuchet MS" pitchFamily="34" charset="-120"/>
               </a:rPr>
-              <a:t>sub</a:t>
+              <a:t>suc</a:t>
             </a:r>
             <a:endParaRPr lang="en-US" sz="1400" dirty="0"/>
           </a:p>
@@ -27947,7 +28910,7 @@
       </p:sp>
       <p:sp>
         <p:nvSpPr>
-          <p:cNvPr id="27" name="Text 25"/>
+          <p:cNvPr id="30" name="Text 28"/>
           <p:cNvSpPr/>
           <p:nvPr/>
         </p:nvSpPr>
@@ -27986,7 +28949,7 @@
       </p:sp>
       <p:sp>
         <p:nvSpPr>
-          <p:cNvPr id="28" name="Shape 26"/>
+          <p:cNvPr id="31" name="Shape 29"/>
           <p:cNvSpPr/>
           <p:nvPr/>
         </p:nvSpPr>
@@ -28013,7 +28976,7 @@
       </p:sp>
       <p:sp>
         <p:nvSpPr>
-          <p:cNvPr id="29" name="Text 27"/>
+          <p:cNvPr id="32" name="Text 30"/>
           <p:cNvSpPr/>
           <p:nvPr/>
         </p:nvSpPr>
@@ -28044,7 +29007,7 @@
                 <a:ea typeface="Trebuchet MS" pitchFamily="34" charset="-122"/>
                 <a:cs typeface="Trebuchet MS" pitchFamily="34" charset="-120"/>
               </a:rPr>
-              <a:t>ti</a:t>
+              <a:t>ces</a:t>
             </a:r>
             <a:endParaRPr lang="en-US" sz="1400" dirty="0"/>
           </a:p>
@@ -28052,7 +29015,7 @@
       </p:sp>
       <p:sp>
         <p:nvSpPr>
-          <p:cNvPr id="30" name="Text 28"/>
+          <p:cNvPr id="33" name="Text 31"/>
           <p:cNvSpPr/>
           <p:nvPr/>
         </p:nvSpPr>
@@ -28091,7 +29054,7 @@
       </p:sp>
       <p:sp>
         <p:nvSpPr>
-          <p:cNvPr id="31" name="Shape 29"/>
+          <p:cNvPr id="34" name="Shape 32"/>
           <p:cNvSpPr/>
           <p:nvPr/>
         </p:nvSpPr>
@@ -28118,7 +29081,7 @@
       </p:sp>
       <p:sp>
         <p:nvSpPr>
-          <p:cNvPr id="32" name="Text 30"/>
+          <p:cNvPr id="35" name="Text 33"/>
           <p:cNvSpPr/>
           <p:nvPr/>
         </p:nvSpPr>
@@ -28149,7 +29112,7 @@
                 <a:ea typeface="Trebuchet MS" pitchFamily="34" charset="-122"/>
                 <a:cs typeface="Trebuchet MS" pitchFamily="34" charset="-120"/>
               </a:rPr>
-              <a:t>tle</a:t>
+              <a:t>sive</a:t>
             </a:r>
             <a:endParaRPr lang="en-US" sz="1400" dirty="0"/>
           </a:p>
@@ -28157,7 +29120,7 @@
       </p:sp>
       <p:sp>
         <p:nvSpPr>
-          <p:cNvPr id="33" name="Shape 31"/>
+          <p:cNvPr id="36" name="Shape 34"/>
           <p:cNvSpPr/>
           <p:nvPr/>
         </p:nvSpPr>
@@ -28184,7 +29147,7 @@
       </p:sp>
       <p:sp>
         <p:nvSpPr>
-          <p:cNvPr id="34" name="Text 32"/>
+          <p:cNvPr id="37" name="Text 35"/>
           <p:cNvSpPr/>
           <p:nvPr/>
         </p:nvSpPr>
@@ -28223,18 +29186,18 @@
       </p:sp>
       <p:sp>
         <p:nvSpPr>
-          <p:cNvPr id="35" name="Shape 33"/>
+          <p:cNvPr id="38" name="Shape 36"/>
           <p:cNvSpPr/>
           <p:nvPr/>
         </p:nvSpPr>
         <p:spPr>
           <a:xfrm>
             <a:off x="1874520" y="4096512"/>
-            <a:ext cx="6903720" cy="804672"/>
+            <a:ext cx="6903720" cy="658368"/>
           </a:xfrm>
           <a:prstGeom prst="rect">
             <a:avLst>
-              <a:gd name="adj" fmla="val 6818"/>
+              <a:gd name="adj" fmla="val 8333"/>
             </a:avLst>
           </a:prstGeom>
           <a:solidFill>
@@ -28250,18 +29213,18 @@
       </p:sp>
       <p:sp>
         <p:nvSpPr>
-          <p:cNvPr id="36" name="Shape 34"/>
-          <p:cNvSpPr/>
-          <p:nvPr/>
-        </p:nvSpPr>
-        <p:spPr>
-          <a:xfrm>
-            <a:off x="2124837" y="4169664"/>
-            <a:ext cx="685800" cy="384048"/>
+          <p:cNvPr id="39" name="Shape 37"/>
+          <p:cNvSpPr/>
+          <p:nvPr/>
+        </p:nvSpPr>
+        <p:spPr>
+          <a:xfrm>
+            <a:off x="1951828" y="4169664"/>
+            <a:ext cx="603504" cy="475488"/>
           </a:xfrm>
           <a:prstGeom prst="rect">
             <a:avLst>
-              <a:gd name="adj" fmla="val 9524"/>
+              <a:gd name="adj" fmla="val 7692"/>
             </a:avLst>
           </a:prstGeom>
           <a:solidFill>
@@ -28277,14 +29240,14 @@
       </p:sp>
       <p:sp>
         <p:nvSpPr>
-          <p:cNvPr id="37" name="Text 35"/>
-          <p:cNvSpPr/>
-          <p:nvPr/>
-        </p:nvSpPr>
-        <p:spPr>
-          <a:xfrm>
-            <a:off x="2124837" y="4169664"/>
-            <a:ext cx="685800" cy="384048"/>
+          <p:cNvPr id="40" name="Text 38"/>
+          <p:cNvSpPr/>
+          <p:nvPr/>
+        </p:nvSpPr>
+        <p:spPr>
+          <a:xfrm>
+            <a:off x="1951828" y="4169664"/>
+            <a:ext cx="603504" cy="475488"/>
           </a:xfrm>
           <a:prstGeom prst="rect">
             <a:avLst/>
@@ -28316,18 +29279,18 @@
       </p:sp>
       <p:sp>
         <p:nvSpPr>
-          <p:cNvPr id="38" name="Shape 36"/>
-          <p:cNvSpPr/>
-          <p:nvPr/>
-        </p:nvSpPr>
-        <p:spPr>
-          <a:xfrm>
-            <a:off x="3033522" y="4169664"/>
-            <a:ext cx="685800" cy="384048"/>
+          <p:cNvPr id="41" name="Shape 39"/>
+          <p:cNvSpPr/>
+          <p:nvPr/>
+        </p:nvSpPr>
+        <p:spPr>
+          <a:xfrm>
+            <a:off x="2605209" y="4169664"/>
+            <a:ext cx="603504" cy="475488"/>
           </a:xfrm>
           <a:prstGeom prst="rect">
             <a:avLst>
-              <a:gd name="adj" fmla="val 9524"/>
+              <a:gd name="adj" fmla="val 7692"/>
             </a:avLst>
           </a:prstGeom>
           <a:solidFill>
@@ -28343,14 +29306,14 @@
       </p:sp>
       <p:sp>
         <p:nvSpPr>
-          <p:cNvPr id="39" name="Text 37"/>
-          <p:cNvSpPr/>
-          <p:nvPr/>
-        </p:nvSpPr>
-        <p:spPr>
-          <a:xfrm>
-            <a:off x="3033522" y="4169664"/>
-            <a:ext cx="685800" cy="384048"/>
+          <p:cNvPr id="42" name="Text 40"/>
+          <p:cNvSpPr/>
+          <p:nvPr/>
+        </p:nvSpPr>
+        <p:spPr>
+          <a:xfrm>
+            <a:off x="2605209" y="4169664"/>
+            <a:ext cx="603504" cy="475488"/>
           </a:xfrm>
           <a:prstGeom prst="rect">
             <a:avLst/>
@@ -28382,18 +29345,18 @@
       </p:sp>
       <p:sp>
         <p:nvSpPr>
-          <p:cNvPr id="40" name="Shape 38"/>
-          <p:cNvSpPr/>
-          <p:nvPr/>
-        </p:nvSpPr>
-        <p:spPr>
-          <a:xfrm>
-            <a:off x="3942207" y="4169664"/>
-            <a:ext cx="685800" cy="384048"/>
+          <p:cNvPr id="43" name="Shape 41"/>
+          <p:cNvSpPr/>
+          <p:nvPr/>
+        </p:nvSpPr>
+        <p:spPr>
+          <a:xfrm>
+            <a:off x="3258589" y="4169664"/>
+            <a:ext cx="603504" cy="475488"/>
           </a:xfrm>
           <a:prstGeom prst="rect">
             <a:avLst>
-              <a:gd name="adj" fmla="val 9524"/>
+              <a:gd name="adj" fmla="val 7692"/>
             </a:avLst>
           </a:prstGeom>
           <a:solidFill>
@@ -28409,14 +29372,14 @@
       </p:sp>
       <p:sp>
         <p:nvSpPr>
-          <p:cNvPr id="41" name="Text 39"/>
-          <p:cNvSpPr/>
-          <p:nvPr/>
-        </p:nvSpPr>
-        <p:spPr>
-          <a:xfrm>
-            <a:off x="3942207" y="4169664"/>
-            <a:ext cx="685800" cy="384048"/>
+          <p:cNvPr id="44" name="Text 42"/>
+          <p:cNvSpPr/>
+          <p:nvPr/>
+        </p:nvSpPr>
+        <p:spPr>
+          <a:xfrm>
+            <a:off x="3258589" y="4169664"/>
+            <a:ext cx="603504" cy="475488"/>
           </a:xfrm>
           <a:prstGeom prst="rect">
             <a:avLst/>
@@ -28440,7 +29403,7 @@
                 <a:ea typeface="Trebuchet MS" pitchFamily="34" charset="-122"/>
                 <a:cs typeface="Trebuchet MS" pitchFamily="34" charset="-120"/>
               </a:rPr>
-              <a:t>b</a:t>
+              <a:t>c</a:t>
             </a:r>
             <a:endParaRPr lang="en-US" sz="900" dirty="0"/>
           </a:p>
@@ -28448,18 +29411,18 @@
       </p:sp>
       <p:sp>
         <p:nvSpPr>
-          <p:cNvPr id="42" name="Shape 40"/>
-          <p:cNvSpPr/>
-          <p:nvPr/>
-        </p:nvSpPr>
-        <p:spPr>
-          <a:xfrm>
-            <a:off x="4850892" y="4169664"/>
-            <a:ext cx="685800" cy="384048"/>
+          <p:cNvPr id="45" name="Shape 43"/>
+          <p:cNvSpPr/>
+          <p:nvPr/>
+        </p:nvSpPr>
+        <p:spPr>
+          <a:xfrm>
+            <a:off x="3911969" y="4169664"/>
+            <a:ext cx="603504" cy="475488"/>
           </a:xfrm>
           <a:prstGeom prst="rect">
             <a:avLst>
-              <a:gd name="adj" fmla="val 9524"/>
+              <a:gd name="adj" fmla="val 7692"/>
             </a:avLst>
           </a:prstGeom>
           <a:solidFill>
@@ -28475,14 +29438,14 @@
       </p:sp>
       <p:sp>
         <p:nvSpPr>
-          <p:cNvPr id="43" name="Text 41"/>
-          <p:cNvSpPr/>
-          <p:nvPr/>
-        </p:nvSpPr>
-        <p:spPr>
-          <a:xfrm>
-            <a:off x="4850892" y="4169664"/>
-            <a:ext cx="685800" cy="384048"/>
+          <p:cNvPr id="46" name="Text 44"/>
+          <p:cNvSpPr/>
+          <p:nvPr/>
+        </p:nvSpPr>
+        <p:spPr>
+          <a:xfrm>
+            <a:off x="3911969" y="4169664"/>
+            <a:ext cx="603504" cy="475488"/>
           </a:xfrm>
           <a:prstGeom prst="rect">
             <a:avLst/>
@@ -28506,7 +29469,7 @@
                 <a:ea typeface="Trebuchet MS" pitchFamily="34" charset="-122"/>
                 <a:cs typeface="Trebuchet MS" pitchFamily="34" charset="-120"/>
               </a:rPr>
-              <a:t>t</a:t>
+              <a:t>c</a:t>
             </a:r>
             <a:endParaRPr lang="en-US" sz="900" dirty="0"/>
           </a:p>
@@ -28514,18 +29477,18 @@
       </p:sp>
       <p:sp>
         <p:nvSpPr>
-          <p:cNvPr id="44" name="Shape 42"/>
-          <p:cNvSpPr/>
-          <p:nvPr/>
-        </p:nvSpPr>
-        <p:spPr>
-          <a:xfrm>
-            <a:off x="5759577" y="4169664"/>
-            <a:ext cx="685800" cy="384048"/>
+          <p:cNvPr id="47" name="Shape 45"/>
+          <p:cNvSpPr/>
+          <p:nvPr/>
+        </p:nvSpPr>
+        <p:spPr>
+          <a:xfrm>
+            <a:off x="4565350" y="4169664"/>
+            <a:ext cx="603504" cy="475488"/>
           </a:xfrm>
           <a:prstGeom prst="rect">
             <a:avLst>
-              <a:gd name="adj" fmla="val 9524"/>
+              <a:gd name="adj" fmla="val 7692"/>
             </a:avLst>
           </a:prstGeom>
           <a:solidFill>
@@ -28541,14 +29504,14 @@
       </p:sp>
       <p:sp>
         <p:nvSpPr>
-          <p:cNvPr id="45" name="Text 43"/>
-          <p:cNvSpPr/>
-          <p:nvPr/>
-        </p:nvSpPr>
-        <p:spPr>
-          <a:xfrm>
-            <a:off x="5759577" y="4169664"/>
-            <a:ext cx="685800" cy="384048"/>
+          <p:cNvPr id="48" name="Text 46"/>
+          <p:cNvSpPr/>
+          <p:nvPr/>
+        </p:nvSpPr>
+        <p:spPr>
+          <a:xfrm>
+            <a:off x="4565350" y="4169664"/>
+            <a:ext cx="603504" cy="475488"/>
           </a:xfrm>
           <a:prstGeom prst="rect">
             <a:avLst/>
@@ -28572,7 +29535,7 @@
                 <a:ea typeface="Trebuchet MS" pitchFamily="34" charset="-122"/>
                 <a:cs typeface="Trebuchet MS" pitchFamily="34" charset="-120"/>
               </a:rPr>
-              <a:t>i</a:t>
+              <a:t>e</a:t>
             </a:r>
             <a:endParaRPr lang="en-US" sz="900" dirty="0"/>
           </a:p>
@@ -28580,18 +29543,18 @@
       </p:sp>
       <p:sp>
         <p:nvSpPr>
-          <p:cNvPr id="46" name="Shape 44"/>
-          <p:cNvSpPr/>
-          <p:nvPr/>
-        </p:nvSpPr>
-        <p:spPr>
-          <a:xfrm>
-            <a:off x="6668262" y="4169664"/>
-            <a:ext cx="685800" cy="384048"/>
+          <p:cNvPr id="49" name="Shape 47"/>
+          <p:cNvSpPr/>
+          <p:nvPr/>
+        </p:nvSpPr>
+        <p:spPr>
+          <a:xfrm>
+            <a:off x="5218730" y="4169664"/>
+            <a:ext cx="603504" cy="475488"/>
           </a:xfrm>
           <a:prstGeom prst="rect">
             <a:avLst>
-              <a:gd name="adj" fmla="val 9524"/>
+              <a:gd name="adj" fmla="val 7692"/>
             </a:avLst>
           </a:prstGeom>
           <a:solidFill>
@@ -28607,14 +29570,14 @@
       </p:sp>
       <p:sp>
         <p:nvSpPr>
-          <p:cNvPr id="47" name="Text 45"/>
-          <p:cNvSpPr/>
-          <p:nvPr/>
-        </p:nvSpPr>
-        <p:spPr>
-          <a:xfrm>
-            <a:off x="6668262" y="4169664"/>
-            <a:ext cx="685800" cy="384048"/>
+          <p:cNvPr id="50" name="Text 48"/>
+          <p:cNvSpPr/>
+          <p:nvPr/>
+        </p:nvSpPr>
+        <p:spPr>
+          <a:xfrm>
+            <a:off x="5218730" y="4169664"/>
+            <a:ext cx="603504" cy="475488"/>
           </a:xfrm>
           <a:prstGeom prst="rect">
             <a:avLst/>
@@ -28638,7 +29601,7 @@
                 <a:ea typeface="Trebuchet MS" pitchFamily="34" charset="-122"/>
                 <a:cs typeface="Trebuchet MS" pitchFamily="34" charset="-120"/>
               </a:rPr>
-              <a:t>t</a:t>
+              <a:t>s</a:t>
             </a:r>
             <a:endParaRPr lang="en-US" sz="900" dirty="0"/>
           </a:p>
@@ -28646,18 +29609,18 @@
       </p:sp>
       <p:sp>
         <p:nvSpPr>
-          <p:cNvPr id="48" name="Shape 46"/>
-          <p:cNvSpPr/>
-          <p:nvPr/>
-        </p:nvSpPr>
-        <p:spPr>
-          <a:xfrm>
-            <a:off x="7576947" y="4169664"/>
-            <a:ext cx="685800" cy="384048"/>
+          <p:cNvPr id="51" name="Shape 49"/>
+          <p:cNvSpPr/>
+          <p:nvPr/>
+        </p:nvSpPr>
+        <p:spPr>
+          <a:xfrm>
+            <a:off x="5872111" y="4169664"/>
+            <a:ext cx="603504" cy="475488"/>
           </a:xfrm>
           <a:prstGeom prst="rect">
             <a:avLst>
-              <a:gd name="adj" fmla="val 9524"/>
+              <a:gd name="adj" fmla="val 7692"/>
             </a:avLst>
           </a:prstGeom>
           <a:solidFill>
@@ -28673,14 +29636,14 @@
       </p:sp>
       <p:sp>
         <p:nvSpPr>
-          <p:cNvPr id="49" name="Text 47"/>
-          <p:cNvSpPr/>
-          <p:nvPr/>
-        </p:nvSpPr>
-        <p:spPr>
-          <a:xfrm>
-            <a:off x="7576947" y="4169664"/>
-            <a:ext cx="685800" cy="384048"/>
+          <p:cNvPr id="52" name="Text 50"/>
+          <p:cNvSpPr/>
+          <p:nvPr/>
+        </p:nvSpPr>
+        <p:spPr>
+          <a:xfrm>
+            <a:off x="5872111" y="4169664"/>
+            <a:ext cx="603504" cy="475488"/>
           </a:xfrm>
           <a:prstGeom prst="rect">
             <a:avLst/>
@@ -28704,7 +29667,7 @@
                 <a:ea typeface="Trebuchet MS" pitchFamily="34" charset="-122"/>
                 <a:cs typeface="Trebuchet MS" pitchFamily="34" charset="-120"/>
               </a:rPr>
-              <a:t>le</a:t>
+              <a:t>s</a:t>
             </a:r>
             <a:endParaRPr lang="en-US" sz="900" dirty="0"/>
           </a:p>
@@ -28712,40 +29675,199 @@
       </p:sp>
       <p:sp>
         <p:nvSpPr>
-          <p:cNvPr id="50" name="Text 48"/>
-          <p:cNvSpPr/>
-          <p:nvPr/>
-        </p:nvSpPr>
-        <p:spPr>
-          <a:xfrm>
-            <a:off x="7576947" y="4572000"/>
-            <a:ext cx="685800" cy="219456"/>
-          </a:xfrm>
-          <a:prstGeom prst="rect">
-            <a:avLst/>
-          </a:prstGeom>
-          <a:noFill/>
-          <a:ln/>
-        </p:spPr>
-        <p:txBody>
-          <a:bodyPr wrap="square" lIns="0" tIns="0" rIns="0" bIns="0" rtlCol="0" anchor="t"/>
-          <a:lstStyle/>
-          <a:p>
-            <a:pPr algn="ctr" indent="0" marL="0">
-              <a:buNone/>
-            </a:pPr>
-            <a:r>
-              <a:rPr lang="en-US" sz="750" i="1" dirty="0">
-                <a:solidFill>
-                  <a:srgbClr val="94A3B8"/>
-                </a:solidFill>
-                <a:latin typeface="Calibri" pitchFamily="34" charset="0"/>
-                <a:ea typeface="Calibri" pitchFamily="34" charset="-122"/>
-                <a:cs typeface="Calibri" pitchFamily="34" charset="-120"/>
-              </a:rPr>
-              <a:t>/ul/</a:t>
-            </a:r>
-            <a:endParaRPr lang="en-US" sz="750" dirty="0"/>
+          <p:cNvPr id="53" name="Shape 51"/>
+          <p:cNvSpPr/>
+          <p:nvPr/>
+        </p:nvSpPr>
+        <p:spPr>
+          <a:xfrm>
+            <a:off x="6525491" y="4169664"/>
+            <a:ext cx="603504" cy="475488"/>
+          </a:xfrm>
+          <a:prstGeom prst="rect">
+            <a:avLst>
+              <a:gd name="adj" fmla="val 7692"/>
+            </a:avLst>
+          </a:prstGeom>
+          <a:solidFill>
+            <a:srgbClr val="FFFFFF"/>
+          </a:solidFill>
+          <a:ln w="12700">
+            <a:solidFill>
+              <a:srgbClr val="DB2777"/>
+            </a:solidFill>
+            <a:prstDash val="solid"/>
+          </a:ln>
+        </p:spPr>
+      </p:sp>
+      <p:sp>
+        <p:nvSpPr>
+          <p:cNvPr id="54" name="Text 52"/>
+          <p:cNvSpPr/>
+          <p:nvPr/>
+        </p:nvSpPr>
+        <p:spPr>
+          <a:xfrm>
+            <a:off x="6525491" y="4169664"/>
+            <a:ext cx="603504" cy="475488"/>
+          </a:xfrm>
+          <a:prstGeom prst="rect">
+            <a:avLst/>
+          </a:prstGeom>
+          <a:noFill/>
+          <a:ln/>
+        </p:spPr>
+        <p:txBody>
+          <a:bodyPr wrap="square" lIns="0" tIns="0" rIns="0" bIns="0" rtlCol="0" anchor="ctr"/>
+          <a:lstStyle/>
+          <a:p>
+            <a:pPr algn="ctr" indent="0" marL="0">
+              <a:buNone/>
+            </a:pPr>
+            <a:r>
+              <a:rPr lang="en-US" sz="900" b="1" dirty="0">
+                <a:solidFill>
+                  <a:srgbClr val="9D174D"/>
+                </a:solidFill>
+                <a:latin typeface="Trebuchet MS" pitchFamily="34" charset="0"/>
+                <a:ea typeface="Trebuchet MS" pitchFamily="34" charset="-122"/>
+                <a:cs typeface="Trebuchet MS" pitchFamily="34" charset="-120"/>
+              </a:rPr>
+              <a:t>i</a:t>
+            </a:r>
+            <a:endParaRPr lang="en-US" sz="900" dirty="0"/>
+          </a:p>
+        </p:txBody>
+      </p:sp>
+      <p:sp>
+        <p:nvSpPr>
+          <p:cNvPr id="55" name="Shape 53"/>
+          <p:cNvSpPr/>
+          <p:nvPr/>
+        </p:nvSpPr>
+        <p:spPr>
+          <a:xfrm>
+            <a:off x="7178871" y="4169664"/>
+            <a:ext cx="603504" cy="475488"/>
+          </a:xfrm>
+          <a:prstGeom prst="rect">
+            <a:avLst>
+              <a:gd name="adj" fmla="val 7692"/>
+            </a:avLst>
+          </a:prstGeom>
+          <a:solidFill>
+            <a:srgbClr val="FFFFFF"/>
+          </a:solidFill>
+          <a:ln w="12700">
+            <a:solidFill>
+              <a:srgbClr val="DB2777"/>
+            </a:solidFill>
+            <a:prstDash val="solid"/>
+          </a:ln>
+        </p:spPr>
+      </p:sp>
+      <p:sp>
+        <p:nvSpPr>
+          <p:cNvPr id="56" name="Text 54"/>
+          <p:cNvSpPr/>
+          <p:nvPr/>
+        </p:nvSpPr>
+        <p:spPr>
+          <a:xfrm>
+            <a:off x="7178871" y="4169664"/>
+            <a:ext cx="603504" cy="475488"/>
+          </a:xfrm>
+          <a:prstGeom prst="rect">
+            <a:avLst/>
+          </a:prstGeom>
+          <a:noFill/>
+          <a:ln/>
+        </p:spPr>
+        <p:txBody>
+          <a:bodyPr wrap="square" lIns="0" tIns="0" rIns="0" bIns="0" rtlCol="0" anchor="ctr"/>
+          <a:lstStyle/>
+          <a:p>
+            <a:pPr algn="ctr" indent="0" marL="0">
+              <a:buNone/>
+            </a:pPr>
+            <a:r>
+              <a:rPr lang="en-US" sz="900" b="1" dirty="0">
+                <a:solidFill>
+                  <a:srgbClr val="9D174D"/>
+                </a:solidFill>
+                <a:latin typeface="Trebuchet MS" pitchFamily="34" charset="0"/>
+                <a:ea typeface="Trebuchet MS" pitchFamily="34" charset="-122"/>
+                <a:cs typeface="Trebuchet MS" pitchFamily="34" charset="-120"/>
+              </a:rPr>
+              <a:t>v</a:t>
+            </a:r>
+            <a:endParaRPr lang="en-US" sz="900" dirty="0"/>
+          </a:p>
+        </p:txBody>
+      </p:sp>
+      <p:sp>
+        <p:nvSpPr>
+          <p:cNvPr id="57" name="Shape 55"/>
+          <p:cNvSpPr/>
+          <p:nvPr/>
+        </p:nvSpPr>
+        <p:spPr>
+          <a:xfrm>
+            <a:off x="7832252" y="4169664"/>
+            <a:ext cx="603504" cy="475488"/>
+          </a:xfrm>
+          <a:prstGeom prst="rect">
+            <a:avLst>
+              <a:gd name="adj" fmla="val 7692"/>
+            </a:avLst>
+          </a:prstGeom>
+          <a:solidFill>
+            <a:srgbClr val="FFFFFF"/>
+          </a:solidFill>
+          <a:ln w="12700">
+            <a:solidFill>
+              <a:srgbClr val="DB2777"/>
+            </a:solidFill>
+            <a:prstDash val="solid"/>
+          </a:ln>
+        </p:spPr>
+      </p:sp>
+      <p:sp>
+        <p:nvSpPr>
+          <p:cNvPr id="58" name="Text 56"/>
+          <p:cNvSpPr/>
+          <p:nvPr/>
+        </p:nvSpPr>
+        <p:spPr>
+          <a:xfrm>
+            <a:off x="7832252" y="4169664"/>
+            <a:ext cx="603504" cy="475488"/>
+          </a:xfrm>
+          <a:prstGeom prst="rect">
+            <a:avLst/>
+          </a:prstGeom>
+          <a:noFill/>
+          <a:ln/>
+        </p:spPr>
+        <p:txBody>
+          <a:bodyPr wrap="square" lIns="0" tIns="0" rIns="0" bIns="0" rtlCol="0" anchor="ctr"/>
+          <a:lstStyle/>
+          <a:p>
+            <a:pPr algn="ctr" indent="0" marL="0">
+              <a:buNone/>
+            </a:pPr>
+            <a:r>
+              <a:rPr lang="en-US" sz="900" b="1" dirty="0">
+                <a:solidFill>
+                  <a:srgbClr val="9D174D"/>
+                </a:solidFill>
+                <a:latin typeface="Trebuchet MS" pitchFamily="34" charset="0"/>
+                <a:ea typeface="Trebuchet MS" pitchFamily="34" charset="-122"/>
+                <a:cs typeface="Trebuchet MS" pitchFamily="34" charset="-120"/>
+              </a:rPr>
+              <a:t>e</a:t>
+            </a:r>
+            <a:endParaRPr lang="en-US" sz="900" dirty="0"/>
           </a:p>
         </p:txBody>
       </p:sp>
@@ -29035,7 +30157,7 @@
                 <a:ea typeface="Calibri" pitchFamily="34" charset="-122"/>
                 <a:cs typeface="Calibri" pitchFamily="34" charset="-120"/>
               </a:rPr>
-              <a:t>Word Labs  •  wordlabs.app  •  Prefix: 'sub-' = under, below, less than</a:t>
+              <a:t>Word Labs  •  wordlabs.app  •  Prefix: 'sub-' = under; below</a:t>
             </a:r>
             <a:endParaRPr lang="en-US" sz="800" dirty="0"/>
           </a:p>
@@ -29174,7 +30296,7 @@
                 <a:ea typeface="Trebuchet MS" pitchFamily="34" charset="-122"/>
                 <a:cs typeface="Trebuchet MS" pitchFamily="34" charset="-120"/>
               </a:rPr>
-              <a:t>subheading</a:t>
+              <a:t>successfully</a:t>
             </a:r>
             <a:endParaRPr lang="en-US" sz="2800" dirty="0"/>
           </a:p>
@@ -29862,7 +30984,7 @@
                 <a:ea typeface="Calibri" pitchFamily="34" charset="-122"/>
                 <a:cs typeface="Calibri" pitchFamily="34" charset="-120"/>
               </a:rPr>
-              <a:t>Word Labs  •  wordlabs.app  •  Prefix: 'sub-' = under, below, less than</a:t>
+              <a:t>Word Labs  •  wordlabs.app  •  Prefix: 'sub-' = under; below</a:t>
             </a:r>
             <a:endParaRPr lang="en-US" sz="800" dirty="0"/>
           </a:p>
@@ -30001,7 +31123,7 @@
                 <a:ea typeface="Trebuchet MS" pitchFamily="34" charset="-122"/>
                 <a:cs typeface="Trebuchet MS" pitchFamily="34" charset="-120"/>
               </a:rPr>
-              <a:t>subheading</a:t>
+              <a:t>successfully</a:t>
             </a:r>
             <a:endParaRPr lang="en-US" sz="2800" dirty="0"/>
           </a:p>
@@ -30081,8 +31203,8 @@
         </p:nvSpPr>
         <p:spPr>
           <a:xfrm>
-            <a:off x="2221992" y="2258568"/>
-            <a:ext cx="1828800" cy="292608"/>
+            <a:off x="1989734" y="2258568"/>
+            <a:ext cx="1581912" cy="292608"/>
           </a:xfrm>
           <a:prstGeom prst="rect">
             <a:avLst>
@@ -30115,8 +31237,8 @@
         </p:nvSpPr>
         <p:spPr>
           <a:xfrm>
-            <a:off x="2221992" y="2258568"/>
-            <a:ext cx="1828800" cy="292608"/>
+            <a:off x="1989734" y="2258568"/>
+            <a:ext cx="1581912" cy="292608"/>
           </a:xfrm>
           <a:prstGeom prst="rect">
             <a:avLst/>
@@ -30154,8 +31276,8 @@
         </p:nvSpPr>
         <p:spPr>
           <a:xfrm>
-            <a:off x="2221992" y="2569464"/>
-            <a:ext cx="1828800" cy="201168"/>
+            <a:off x="1989734" y="2569464"/>
+            <a:ext cx="1581912" cy="201168"/>
           </a:xfrm>
           <a:prstGeom prst="rect">
             <a:avLst/>
@@ -30179,7 +31301,7 @@
                 <a:ea typeface="Calibri" pitchFamily="34" charset="-122"/>
                 <a:cs typeface="Calibri" pitchFamily="34" charset="-120"/>
               </a:rPr>
-              <a:t>under, below</a:t>
+              <a:t>under; below</a:t>
             </a:r>
             <a:endParaRPr lang="en-US" sz="850" dirty="0"/>
           </a:p>
@@ -30193,8 +31315,8 @@
         </p:nvSpPr>
         <p:spPr>
           <a:xfrm>
-            <a:off x="4370832" y="2258568"/>
-            <a:ext cx="1828800" cy="292608"/>
+            <a:off x="3659429" y="2258568"/>
+            <a:ext cx="1581912" cy="292608"/>
           </a:xfrm>
           <a:prstGeom prst="rect">
             <a:avLst>
@@ -30227,8 +31349,8 @@
         </p:nvSpPr>
         <p:spPr>
           <a:xfrm>
-            <a:off x="4370832" y="2258568"/>
-            <a:ext cx="1828800" cy="292608"/>
+            <a:off x="3659429" y="2258568"/>
+            <a:ext cx="1581912" cy="292608"/>
           </a:xfrm>
           <a:prstGeom prst="rect">
             <a:avLst/>
@@ -30252,7 +31374,7 @@
                 <a:ea typeface="Trebuchet MS" pitchFamily="34" charset="-122"/>
                 <a:cs typeface="Trebuchet MS" pitchFamily="34" charset="-120"/>
               </a:rPr>
-              <a:t>head</a:t>
+              <a:t>cess</a:t>
             </a:r>
             <a:endParaRPr lang="en-US" sz="1300" dirty="0"/>
           </a:p>
@@ -30266,8 +31388,8 @@
         </p:nvSpPr>
         <p:spPr>
           <a:xfrm>
-            <a:off x="4370832" y="2569464"/>
-            <a:ext cx="1828800" cy="201168"/>
+            <a:off x="3659429" y="2569464"/>
+            <a:ext cx="1581912" cy="201168"/>
           </a:xfrm>
           <a:prstGeom prst="rect">
             <a:avLst/>
@@ -30291,7 +31413,7 @@
                 <a:ea typeface="Calibri" pitchFamily="34" charset="-122"/>
                 <a:cs typeface="Calibri" pitchFamily="34" charset="-120"/>
               </a:rPr>
-              <a:t>top, leading part</a:t>
+              <a:t>go; yield; give way</a:t>
             </a:r>
             <a:endParaRPr lang="en-US" sz="850" dirty="0"/>
           </a:p>
@@ -30305,8 +31427,8 @@
         </p:nvSpPr>
         <p:spPr>
           <a:xfrm>
-            <a:off x="6519672" y="2258568"/>
-            <a:ext cx="1828800" cy="292608"/>
+            <a:off x="5329123" y="2258568"/>
+            <a:ext cx="1581912" cy="292608"/>
           </a:xfrm>
           <a:prstGeom prst="rect">
             <a:avLst>
@@ -30339,8 +31461,8 @@
         </p:nvSpPr>
         <p:spPr>
           <a:xfrm>
-            <a:off x="6519672" y="2258568"/>
-            <a:ext cx="1828800" cy="292608"/>
+            <a:off x="5329123" y="2258568"/>
+            <a:ext cx="1581912" cy="292608"/>
           </a:xfrm>
           <a:prstGeom prst="rect">
             <a:avLst/>
@@ -30364,7 +31486,7 @@
                 <a:ea typeface="Trebuchet MS" pitchFamily="34" charset="-122"/>
                 <a:cs typeface="Trebuchet MS" pitchFamily="34" charset="-120"/>
               </a:rPr>
-              <a:t>ing</a:t>
+              <a:t>ful</a:t>
             </a:r>
             <a:endParaRPr lang="en-US" sz="1300" dirty="0"/>
           </a:p>
@@ -30378,8 +31500,8 @@
         </p:nvSpPr>
         <p:spPr>
           <a:xfrm>
-            <a:off x="6519672" y="2569464"/>
-            <a:ext cx="1828800" cy="201168"/>
+            <a:off x="5329123" y="2569464"/>
+            <a:ext cx="1581912" cy="201168"/>
           </a:xfrm>
           <a:prstGeom prst="rect">
             <a:avLst/>
@@ -30403,7 +31525,7 @@
                 <a:ea typeface="Calibri" pitchFamily="34" charset="-122"/>
                 <a:cs typeface="Calibri" pitchFamily="34" charset="-120"/>
               </a:rPr>
-              <a:t>ongoing action or state</a:t>
+              <a:t>full of</a:t>
             </a:r>
             <a:endParaRPr lang="en-US" sz="850" dirty="0"/>
           </a:p>
@@ -30412,6 +31534,118 @@
       <p:sp>
         <p:nvSpPr>
           <p:cNvPr id="25" name="Shape 23"/>
+          <p:cNvSpPr/>
+          <p:nvPr/>
+        </p:nvSpPr>
+        <p:spPr>
+          <a:xfrm>
+            <a:off x="6998818" y="2258568"/>
+            <a:ext cx="1581912" cy="292608"/>
+          </a:xfrm>
+          <a:prstGeom prst="rect">
+            <a:avLst>
+              <a:gd name="adj" fmla="val 25000"/>
+            </a:avLst>
+          </a:prstGeom>
+          <a:solidFill>
+            <a:srgbClr val="FCE7F3"/>
+          </a:solidFill>
+          <a:ln w="19050">
+            <a:solidFill>
+              <a:srgbClr val="DB2777"/>
+            </a:solidFill>
+            <a:prstDash val="solid"/>
+          </a:ln>
+          <a:effectLst>
+            <a:outerShdw sx="100000" sy="100000" kx="0" ky="0" algn="bl" rotWithShape="0" blurRad="101600" dist="38100" dir="8100000">
+              <a:srgbClr val="000000">
+                <a:alpha val="12000"/>
+              </a:srgbClr>
+            </a:outerShdw>
+          </a:effectLst>
+        </p:spPr>
+      </p:sp>
+      <p:sp>
+        <p:nvSpPr>
+          <p:cNvPr id="26" name="Text 24"/>
+          <p:cNvSpPr/>
+          <p:nvPr/>
+        </p:nvSpPr>
+        <p:spPr>
+          <a:xfrm>
+            <a:off x="6998818" y="2258568"/>
+            <a:ext cx="1581912" cy="292608"/>
+          </a:xfrm>
+          <a:prstGeom prst="rect">
+            <a:avLst/>
+          </a:prstGeom>
+          <a:noFill/>
+          <a:ln/>
+        </p:spPr>
+        <p:txBody>
+          <a:bodyPr wrap="square" lIns="0" tIns="0" rIns="0" bIns="0" rtlCol="0" anchor="ctr"/>
+          <a:lstStyle/>
+          <a:p>
+            <a:pPr algn="ctr" indent="0" marL="0">
+              <a:buNone/>
+            </a:pPr>
+            <a:r>
+              <a:rPr lang="en-US" sz="1300" b="1" dirty="0">
+                <a:solidFill>
+                  <a:srgbClr val="9D174D"/>
+                </a:solidFill>
+                <a:latin typeface="Trebuchet MS" pitchFamily="34" charset="0"/>
+                <a:ea typeface="Trebuchet MS" pitchFamily="34" charset="-122"/>
+                <a:cs typeface="Trebuchet MS" pitchFamily="34" charset="-120"/>
+              </a:rPr>
+              <a:t>ly</a:t>
+            </a:r>
+            <a:endParaRPr lang="en-US" sz="1300" dirty="0"/>
+          </a:p>
+        </p:txBody>
+      </p:sp>
+      <p:sp>
+        <p:nvSpPr>
+          <p:cNvPr id="27" name="Text 25"/>
+          <p:cNvSpPr/>
+          <p:nvPr/>
+        </p:nvSpPr>
+        <p:spPr>
+          <a:xfrm>
+            <a:off x="6998818" y="2569464"/>
+            <a:ext cx="1581912" cy="201168"/>
+          </a:xfrm>
+          <a:prstGeom prst="rect">
+            <a:avLst/>
+          </a:prstGeom>
+          <a:noFill/>
+          <a:ln/>
+        </p:spPr>
+        <p:txBody>
+          <a:bodyPr wrap="square" lIns="0" tIns="0" rIns="0" bIns="0" rtlCol="0" anchor="t"/>
+          <a:lstStyle/>
+          <a:p>
+            <a:pPr algn="ctr" indent="0" marL="0">
+              <a:buNone/>
+            </a:pPr>
+            <a:r>
+              <a:rPr lang="en-US" sz="850" dirty="0">
+                <a:solidFill>
+                  <a:srgbClr val="475569"/>
+                </a:solidFill>
+                <a:latin typeface="Calibri" pitchFamily="34" charset="0"/>
+                <a:ea typeface="Calibri" pitchFamily="34" charset="-122"/>
+                <a:cs typeface="Calibri" pitchFamily="34" charset="-120"/>
+              </a:rPr>
+              <a:t>in a way</a:t>
+            </a:r>
+            <a:endParaRPr lang="en-US" sz="850" dirty="0"/>
+          </a:p>
+        </p:txBody>
+      </p:sp>
+      <p:sp>
+        <p:nvSpPr>
+          <p:cNvPr id="28" name="Shape 26"/>
           <p:cNvSpPr/>
           <p:nvPr/>
         </p:nvSpPr>
@@ -30438,7 +31672,7 @@
       </p:sp>
       <p:sp>
         <p:nvSpPr>
-          <p:cNvPr id="26" name="Text 24"/>
+          <p:cNvPr id="29" name="Text 27"/>
           <p:cNvSpPr/>
           <p:nvPr/>
         </p:nvSpPr>
@@ -30477,7 +31711,7 @@
       </p:sp>
       <p:sp>
         <p:nvSpPr>
-          <p:cNvPr id="27" name="Shape 25"/>
+          <p:cNvPr id="30" name="Shape 28"/>
           <p:cNvSpPr/>
           <p:nvPr/>
         </p:nvSpPr>
@@ -30504,7 +31738,7 @@
       </p:sp>
       <p:sp>
         <p:nvSpPr>
-          <p:cNvPr id="28" name="Text 26"/>
+          <p:cNvPr id="31" name="Text 29"/>
           <p:cNvSpPr/>
           <p:nvPr/>
         </p:nvSpPr>
@@ -30543,7 +31777,7 @@
       </p:sp>
       <p:sp>
         <p:nvSpPr>
-          <p:cNvPr id="29" name="Shape 27"/>
+          <p:cNvPr id="32" name="Shape 30"/>
           <p:cNvSpPr/>
           <p:nvPr/>
         </p:nvSpPr>
@@ -30570,7 +31804,7 @@
       </p:sp>
       <p:sp>
         <p:nvSpPr>
-          <p:cNvPr id="30" name="Text 28"/>
+          <p:cNvPr id="33" name="Text 31"/>
           <p:cNvSpPr/>
           <p:nvPr/>
         </p:nvSpPr>
@@ -30609,7 +31843,7 @@
       </p:sp>
       <p:sp>
         <p:nvSpPr>
-          <p:cNvPr id="31" name="Shape 29"/>
+          <p:cNvPr id="34" name="Shape 32"/>
           <p:cNvSpPr/>
           <p:nvPr/>
         </p:nvSpPr>
@@ -30636,7 +31870,7 @@
       </p:sp>
       <p:sp>
         <p:nvSpPr>
-          <p:cNvPr id="32" name="Text 30"/>
+          <p:cNvPr id="35" name="Text 33"/>
           <p:cNvSpPr/>
           <p:nvPr/>
         </p:nvSpPr>
@@ -30959,7 +32193,7 @@
                 <a:ea typeface="Calibri" pitchFamily="34" charset="-122"/>
                 <a:cs typeface="Calibri" pitchFamily="34" charset="-120"/>
               </a:rPr>
-              <a:t>Word Labs  •  wordlabs.app  •  Prefix: 'sub-' = under, below, less than</a:t>
+              <a:t>Word Labs  •  wordlabs.app  •  Prefix: 'sub-' = under; below</a:t>
             </a:r>
             <a:endParaRPr lang="en-US" sz="800" dirty="0"/>
           </a:p>
@@ -31098,7 +32332,7 @@
                 <a:ea typeface="Trebuchet MS" pitchFamily="34" charset="-122"/>
                 <a:cs typeface="Trebuchet MS" pitchFamily="34" charset="-120"/>
               </a:rPr>
-              <a:t>subheading</a:t>
+              <a:t>successfully</a:t>
             </a:r>
             <a:endParaRPr lang="en-US" sz="2800" dirty="0"/>
           </a:p>
@@ -31178,8 +32412,8 @@
         </p:nvSpPr>
         <p:spPr>
           <a:xfrm>
-            <a:off x="2221992" y="2258568"/>
-            <a:ext cx="1828800" cy="292608"/>
+            <a:off x="1989734" y="2258568"/>
+            <a:ext cx="1581912" cy="292608"/>
           </a:xfrm>
           <a:prstGeom prst="rect">
             <a:avLst>
@@ -31212,8 +32446,8 @@
         </p:nvSpPr>
         <p:spPr>
           <a:xfrm>
-            <a:off x="2221992" y="2258568"/>
-            <a:ext cx="1828800" cy="292608"/>
+            <a:off x="1989734" y="2258568"/>
+            <a:ext cx="1581912" cy="292608"/>
           </a:xfrm>
           <a:prstGeom prst="rect">
             <a:avLst/>
@@ -31251,8 +32485,8 @@
         </p:nvSpPr>
         <p:spPr>
           <a:xfrm>
-            <a:off x="2221992" y="2569464"/>
-            <a:ext cx="1828800" cy="201168"/>
+            <a:off x="1989734" y="2569464"/>
+            <a:ext cx="1581912" cy="201168"/>
           </a:xfrm>
           <a:prstGeom prst="rect">
             <a:avLst/>
@@ -31276,7 +32510,7 @@
                 <a:ea typeface="Calibri" pitchFamily="34" charset="-122"/>
                 <a:cs typeface="Calibri" pitchFamily="34" charset="-120"/>
               </a:rPr>
-              <a:t>under, below</a:t>
+              <a:t>under; below</a:t>
             </a:r>
             <a:endParaRPr lang="en-US" sz="850" dirty="0"/>
           </a:p>
@@ -31290,8 +32524,8 @@
         </p:nvSpPr>
         <p:spPr>
           <a:xfrm>
-            <a:off x="4370832" y="2258568"/>
-            <a:ext cx="1828800" cy="292608"/>
+            <a:off x="3659429" y="2258568"/>
+            <a:ext cx="1581912" cy="292608"/>
           </a:xfrm>
           <a:prstGeom prst="rect">
             <a:avLst>
@@ -31324,8 +32558,8 @@
         </p:nvSpPr>
         <p:spPr>
           <a:xfrm>
-            <a:off x="4370832" y="2258568"/>
-            <a:ext cx="1828800" cy="292608"/>
+            <a:off x="3659429" y="2258568"/>
+            <a:ext cx="1581912" cy="292608"/>
           </a:xfrm>
           <a:prstGeom prst="rect">
             <a:avLst/>
@@ -31349,7 +32583,7 @@
                 <a:ea typeface="Trebuchet MS" pitchFamily="34" charset="-122"/>
                 <a:cs typeface="Trebuchet MS" pitchFamily="34" charset="-120"/>
               </a:rPr>
-              <a:t>head</a:t>
+              <a:t>cess</a:t>
             </a:r>
             <a:endParaRPr lang="en-US" sz="1300" dirty="0"/>
           </a:p>
@@ -31363,8 +32597,8 @@
         </p:nvSpPr>
         <p:spPr>
           <a:xfrm>
-            <a:off x="4370832" y="2569464"/>
-            <a:ext cx="1828800" cy="201168"/>
+            <a:off x="3659429" y="2569464"/>
+            <a:ext cx="1581912" cy="201168"/>
           </a:xfrm>
           <a:prstGeom prst="rect">
             <a:avLst/>
@@ -31388,7 +32622,7 @@
                 <a:ea typeface="Calibri" pitchFamily="34" charset="-122"/>
                 <a:cs typeface="Calibri" pitchFamily="34" charset="-120"/>
               </a:rPr>
-              <a:t>top, leading part</a:t>
+              <a:t>go; yield; give way</a:t>
             </a:r>
             <a:endParaRPr lang="en-US" sz="850" dirty="0"/>
           </a:p>
@@ -31402,8 +32636,8 @@
         </p:nvSpPr>
         <p:spPr>
           <a:xfrm>
-            <a:off x="6519672" y="2258568"/>
-            <a:ext cx="1828800" cy="292608"/>
+            <a:off x="5329123" y="2258568"/>
+            <a:ext cx="1581912" cy="292608"/>
           </a:xfrm>
           <a:prstGeom prst="rect">
             <a:avLst>
@@ -31436,8 +32670,8 @@
         </p:nvSpPr>
         <p:spPr>
           <a:xfrm>
-            <a:off x="6519672" y="2258568"/>
-            <a:ext cx="1828800" cy="292608"/>
+            <a:off x="5329123" y="2258568"/>
+            <a:ext cx="1581912" cy="292608"/>
           </a:xfrm>
           <a:prstGeom prst="rect">
             <a:avLst/>
@@ -31461,7 +32695,7 @@
                 <a:ea typeface="Trebuchet MS" pitchFamily="34" charset="-122"/>
                 <a:cs typeface="Trebuchet MS" pitchFamily="34" charset="-120"/>
               </a:rPr>
-              <a:t>ing</a:t>
+              <a:t>ful</a:t>
             </a:r>
             <a:endParaRPr lang="en-US" sz="1300" dirty="0"/>
           </a:p>
@@ -31475,8 +32709,8 @@
         </p:nvSpPr>
         <p:spPr>
           <a:xfrm>
-            <a:off x="6519672" y="2569464"/>
-            <a:ext cx="1828800" cy="201168"/>
+            <a:off x="5329123" y="2569464"/>
+            <a:ext cx="1581912" cy="201168"/>
           </a:xfrm>
           <a:prstGeom prst="rect">
             <a:avLst/>
@@ -31500,7 +32734,7 @@
                 <a:ea typeface="Calibri" pitchFamily="34" charset="-122"/>
                 <a:cs typeface="Calibri" pitchFamily="34" charset="-120"/>
               </a:rPr>
-              <a:t>ongoing action or state</a:t>
+              <a:t>full of</a:t>
             </a:r>
             <a:endParaRPr lang="en-US" sz="850" dirty="0"/>
           </a:p>
@@ -31509,6 +32743,118 @@
       <p:sp>
         <p:nvSpPr>
           <p:cNvPr id="25" name="Shape 23"/>
+          <p:cNvSpPr/>
+          <p:nvPr/>
+        </p:nvSpPr>
+        <p:spPr>
+          <a:xfrm>
+            <a:off x="6998818" y="2258568"/>
+            <a:ext cx="1581912" cy="292608"/>
+          </a:xfrm>
+          <a:prstGeom prst="rect">
+            <a:avLst>
+              <a:gd name="adj" fmla="val 25000"/>
+            </a:avLst>
+          </a:prstGeom>
+          <a:solidFill>
+            <a:srgbClr val="FCE7F3"/>
+          </a:solidFill>
+          <a:ln w="19050">
+            <a:solidFill>
+              <a:srgbClr val="DB2777"/>
+            </a:solidFill>
+            <a:prstDash val="solid"/>
+          </a:ln>
+          <a:effectLst>
+            <a:outerShdw sx="100000" sy="100000" kx="0" ky="0" algn="bl" rotWithShape="0" blurRad="101600" dist="38100" dir="8100000">
+              <a:srgbClr val="000000">
+                <a:alpha val="12000"/>
+              </a:srgbClr>
+            </a:outerShdw>
+          </a:effectLst>
+        </p:spPr>
+      </p:sp>
+      <p:sp>
+        <p:nvSpPr>
+          <p:cNvPr id="26" name="Text 24"/>
+          <p:cNvSpPr/>
+          <p:nvPr/>
+        </p:nvSpPr>
+        <p:spPr>
+          <a:xfrm>
+            <a:off x="6998818" y="2258568"/>
+            <a:ext cx="1581912" cy="292608"/>
+          </a:xfrm>
+          <a:prstGeom prst="rect">
+            <a:avLst/>
+          </a:prstGeom>
+          <a:noFill/>
+          <a:ln/>
+        </p:spPr>
+        <p:txBody>
+          <a:bodyPr wrap="square" lIns="0" tIns="0" rIns="0" bIns="0" rtlCol="0" anchor="ctr"/>
+          <a:lstStyle/>
+          <a:p>
+            <a:pPr algn="ctr" indent="0" marL="0">
+              <a:buNone/>
+            </a:pPr>
+            <a:r>
+              <a:rPr lang="en-US" sz="1300" b="1" dirty="0">
+                <a:solidFill>
+                  <a:srgbClr val="9D174D"/>
+                </a:solidFill>
+                <a:latin typeface="Trebuchet MS" pitchFamily="34" charset="0"/>
+                <a:ea typeface="Trebuchet MS" pitchFamily="34" charset="-122"/>
+                <a:cs typeface="Trebuchet MS" pitchFamily="34" charset="-120"/>
+              </a:rPr>
+              <a:t>ly</a:t>
+            </a:r>
+            <a:endParaRPr lang="en-US" sz="1300" dirty="0"/>
+          </a:p>
+        </p:txBody>
+      </p:sp>
+      <p:sp>
+        <p:nvSpPr>
+          <p:cNvPr id="27" name="Text 25"/>
+          <p:cNvSpPr/>
+          <p:nvPr/>
+        </p:nvSpPr>
+        <p:spPr>
+          <a:xfrm>
+            <a:off x="6998818" y="2569464"/>
+            <a:ext cx="1581912" cy="201168"/>
+          </a:xfrm>
+          <a:prstGeom prst="rect">
+            <a:avLst/>
+          </a:prstGeom>
+          <a:noFill/>
+          <a:ln/>
+        </p:spPr>
+        <p:txBody>
+          <a:bodyPr wrap="square" lIns="0" tIns="0" rIns="0" bIns="0" rtlCol="0" anchor="t"/>
+          <a:lstStyle/>
+          <a:p>
+            <a:pPr algn="ctr" indent="0" marL="0">
+              <a:buNone/>
+            </a:pPr>
+            <a:r>
+              <a:rPr lang="en-US" sz="850" dirty="0">
+                <a:solidFill>
+                  <a:srgbClr val="475569"/>
+                </a:solidFill>
+                <a:latin typeface="Calibri" pitchFamily="34" charset="0"/>
+                <a:ea typeface="Calibri" pitchFamily="34" charset="-122"/>
+                <a:cs typeface="Calibri" pitchFamily="34" charset="-120"/>
+              </a:rPr>
+              <a:t>in a way</a:t>
+            </a:r>
+            <a:endParaRPr lang="en-US" sz="850" dirty="0"/>
+          </a:p>
+        </p:txBody>
+      </p:sp>
+      <p:sp>
+        <p:nvSpPr>
+          <p:cNvPr id="28" name="Shape 26"/>
           <p:cNvSpPr/>
           <p:nvPr/>
         </p:nvSpPr>
@@ -31535,7 +32881,7 @@
       </p:sp>
       <p:sp>
         <p:nvSpPr>
-          <p:cNvPr id="26" name="Text 24"/>
+          <p:cNvPr id="29" name="Text 27"/>
           <p:cNvSpPr/>
           <p:nvPr/>
         </p:nvSpPr>
@@ -31574,7 +32920,7 @@
       </p:sp>
       <p:sp>
         <p:nvSpPr>
-          <p:cNvPr id="27" name="Shape 25"/>
+          <p:cNvPr id="30" name="Shape 28"/>
           <p:cNvSpPr/>
           <p:nvPr/>
         </p:nvSpPr>
@@ -31601,14 +32947,14 @@
       </p:sp>
       <p:sp>
         <p:nvSpPr>
-          <p:cNvPr id="28" name="Shape 26"/>
-          <p:cNvSpPr/>
-          <p:nvPr/>
-        </p:nvSpPr>
-        <p:spPr>
-          <a:xfrm>
-            <a:off x="2313432" y="3364992"/>
-            <a:ext cx="1645920" cy="475488"/>
+          <p:cNvPr id="31" name="Shape 29"/>
+          <p:cNvSpPr/>
+          <p:nvPr/>
+        </p:nvSpPr>
+        <p:spPr>
+          <a:xfrm>
+            <a:off x="1975104" y="3364992"/>
+            <a:ext cx="1554480" cy="475488"/>
           </a:xfrm>
           <a:prstGeom prst="rect">
             <a:avLst>
@@ -31628,14 +32974,14 @@
       </p:sp>
       <p:sp>
         <p:nvSpPr>
-          <p:cNvPr id="29" name="Text 27"/>
-          <p:cNvSpPr/>
-          <p:nvPr/>
-        </p:nvSpPr>
-        <p:spPr>
-          <a:xfrm>
-            <a:off x="2313432" y="3364992"/>
-            <a:ext cx="1645920" cy="475488"/>
+          <p:cNvPr id="32" name="Text 30"/>
+          <p:cNvSpPr/>
+          <p:nvPr/>
+        </p:nvSpPr>
+        <p:spPr>
+          <a:xfrm>
+            <a:off x="1975104" y="3364992"/>
+            <a:ext cx="1554480" cy="475488"/>
           </a:xfrm>
           <a:prstGeom prst="rect">
             <a:avLst/>
@@ -31659,7 +33005,7 @@
                 <a:ea typeface="Trebuchet MS" pitchFamily="34" charset="-122"/>
                 <a:cs typeface="Trebuchet MS" pitchFamily="34" charset="-120"/>
               </a:rPr>
-              <a:t>sub</a:t>
+              <a:t>suc</a:t>
             </a:r>
             <a:endParaRPr lang="en-US" sz="1400" dirty="0"/>
           </a:p>
@@ -31667,14 +33013,14 @@
       </p:sp>
       <p:sp>
         <p:nvSpPr>
-          <p:cNvPr id="30" name="Text 28"/>
-          <p:cNvSpPr/>
-          <p:nvPr/>
-        </p:nvSpPr>
-        <p:spPr>
-          <a:xfrm>
-            <a:off x="3959352" y="3364992"/>
-            <a:ext cx="411480" cy="475488"/>
+          <p:cNvPr id="33" name="Text 31"/>
+          <p:cNvSpPr/>
+          <p:nvPr/>
+        </p:nvSpPr>
+        <p:spPr>
+          <a:xfrm>
+            <a:off x="3529584" y="3364992"/>
+            <a:ext cx="73152" cy="475488"/>
           </a:xfrm>
           <a:prstGeom prst="rect">
             <a:avLst/>
@@ -31706,14 +33052,14 @@
       </p:sp>
       <p:sp>
         <p:nvSpPr>
-          <p:cNvPr id="31" name="Shape 29"/>
-          <p:cNvSpPr/>
-          <p:nvPr/>
-        </p:nvSpPr>
-        <p:spPr>
-          <a:xfrm>
-            <a:off x="4370832" y="3364992"/>
-            <a:ext cx="1645920" cy="475488"/>
+          <p:cNvPr id="34" name="Shape 32"/>
+          <p:cNvSpPr/>
+          <p:nvPr/>
+        </p:nvSpPr>
+        <p:spPr>
+          <a:xfrm>
+            <a:off x="3602736" y="3364992"/>
+            <a:ext cx="1554480" cy="475488"/>
           </a:xfrm>
           <a:prstGeom prst="rect">
             <a:avLst>
@@ -31733,14 +33079,14 @@
       </p:sp>
       <p:sp>
         <p:nvSpPr>
-          <p:cNvPr id="32" name="Text 30"/>
-          <p:cNvSpPr/>
-          <p:nvPr/>
-        </p:nvSpPr>
-        <p:spPr>
-          <a:xfrm>
-            <a:off x="4370832" y="3364992"/>
-            <a:ext cx="1645920" cy="475488"/>
+          <p:cNvPr id="35" name="Text 33"/>
+          <p:cNvSpPr/>
+          <p:nvPr/>
+        </p:nvSpPr>
+        <p:spPr>
+          <a:xfrm>
+            <a:off x="3602736" y="3364992"/>
+            <a:ext cx="1554480" cy="475488"/>
           </a:xfrm>
           <a:prstGeom prst="rect">
             <a:avLst/>
@@ -31764,7 +33110,7 @@
                 <a:ea typeface="Trebuchet MS" pitchFamily="34" charset="-122"/>
                 <a:cs typeface="Trebuchet MS" pitchFamily="34" charset="-120"/>
               </a:rPr>
-              <a:t>head</a:t>
+              <a:t>cess</a:t>
             </a:r>
             <a:endParaRPr lang="en-US" sz="1400" dirty="0"/>
           </a:p>
@@ -31772,14 +33118,14 @@
       </p:sp>
       <p:sp>
         <p:nvSpPr>
-          <p:cNvPr id="33" name="Text 31"/>
-          <p:cNvSpPr/>
-          <p:nvPr/>
-        </p:nvSpPr>
-        <p:spPr>
-          <a:xfrm>
-            <a:off x="6016752" y="3364992"/>
-            <a:ext cx="411480" cy="475488"/>
+          <p:cNvPr id="36" name="Text 34"/>
+          <p:cNvSpPr/>
+          <p:nvPr/>
+        </p:nvSpPr>
+        <p:spPr>
+          <a:xfrm>
+            <a:off x="5157216" y="3364992"/>
+            <a:ext cx="73152" cy="475488"/>
           </a:xfrm>
           <a:prstGeom prst="rect">
             <a:avLst/>
@@ -31811,14 +33157,14 @@
       </p:sp>
       <p:sp>
         <p:nvSpPr>
-          <p:cNvPr id="34" name="Shape 32"/>
-          <p:cNvSpPr/>
-          <p:nvPr/>
-        </p:nvSpPr>
-        <p:spPr>
-          <a:xfrm>
-            <a:off x="6428232" y="3364992"/>
-            <a:ext cx="1645920" cy="475488"/>
+          <p:cNvPr id="37" name="Shape 35"/>
+          <p:cNvSpPr/>
+          <p:nvPr/>
+        </p:nvSpPr>
+        <p:spPr>
+          <a:xfrm>
+            <a:off x="5230368" y="3364992"/>
+            <a:ext cx="1554480" cy="475488"/>
           </a:xfrm>
           <a:prstGeom prst="rect">
             <a:avLst>
@@ -31838,14 +33184,14 @@
       </p:sp>
       <p:sp>
         <p:nvSpPr>
-          <p:cNvPr id="35" name="Text 33"/>
-          <p:cNvSpPr/>
-          <p:nvPr/>
-        </p:nvSpPr>
-        <p:spPr>
-          <a:xfrm>
-            <a:off x="6428232" y="3364992"/>
-            <a:ext cx="1645920" cy="475488"/>
+          <p:cNvPr id="38" name="Text 36"/>
+          <p:cNvSpPr/>
+          <p:nvPr/>
+        </p:nvSpPr>
+        <p:spPr>
+          <a:xfrm>
+            <a:off x="5230368" y="3364992"/>
+            <a:ext cx="1554480" cy="475488"/>
           </a:xfrm>
           <a:prstGeom prst="rect">
             <a:avLst/>
@@ -31869,7 +33215,7 @@
                 <a:ea typeface="Trebuchet MS" pitchFamily="34" charset="-122"/>
                 <a:cs typeface="Trebuchet MS" pitchFamily="34" charset="-120"/>
               </a:rPr>
-              <a:t>ing</a:t>
+              <a:t>ful</a:t>
             </a:r>
             <a:endParaRPr lang="en-US" sz="1400" dirty="0"/>
           </a:p>
@@ -31877,7 +33223,112 @@
       </p:sp>
       <p:sp>
         <p:nvSpPr>
-          <p:cNvPr id="36" name="Shape 34"/>
+          <p:cNvPr id="39" name="Text 37"/>
+          <p:cNvSpPr/>
+          <p:nvPr/>
+        </p:nvSpPr>
+        <p:spPr>
+          <a:xfrm>
+            <a:off x="6784848" y="3364992"/>
+            <a:ext cx="73152" cy="475488"/>
+          </a:xfrm>
+          <a:prstGeom prst="rect">
+            <a:avLst/>
+          </a:prstGeom>
+          <a:noFill/>
+          <a:ln/>
+        </p:spPr>
+        <p:txBody>
+          <a:bodyPr wrap="square" lIns="0" tIns="0" rIns="0" bIns="0" rtlCol="0" anchor="ctr"/>
+          <a:lstStyle/>
+          <a:p>
+            <a:pPr algn="ctr" indent="0" marL="0">
+              <a:buNone/>
+            </a:pPr>
+            <a:r>
+              <a:rPr lang="en-US" sz="1600" b="1" dirty="0">
+                <a:solidFill>
+                  <a:srgbClr val="0D9488"/>
+                </a:solidFill>
+                <a:latin typeface="Trebuchet MS" pitchFamily="34" charset="0"/>
+                <a:ea typeface="Trebuchet MS" pitchFamily="34" charset="-122"/>
+                <a:cs typeface="Trebuchet MS" pitchFamily="34" charset="-120"/>
+              </a:rPr>
+              <a:t>·</a:t>
+            </a:r>
+            <a:endParaRPr lang="en-US" sz="1600" dirty="0"/>
+          </a:p>
+        </p:txBody>
+      </p:sp>
+      <p:sp>
+        <p:nvSpPr>
+          <p:cNvPr id="40" name="Shape 38"/>
+          <p:cNvSpPr/>
+          <p:nvPr/>
+        </p:nvSpPr>
+        <p:spPr>
+          <a:xfrm>
+            <a:off x="6858000" y="3364992"/>
+            <a:ext cx="1554480" cy="475488"/>
+          </a:xfrm>
+          <a:prstGeom prst="rect">
+            <a:avLst>
+              <a:gd name="adj" fmla="val 9615"/>
+            </a:avLst>
+          </a:prstGeom>
+          <a:solidFill>
+            <a:srgbClr val="FFFFFF"/>
+          </a:solidFill>
+          <a:ln w="12700">
+            <a:solidFill>
+              <a:srgbClr val="0D9488"/>
+            </a:solidFill>
+            <a:prstDash val="solid"/>
+          </a:ln>
+        </p:spPr>
+      </p:sp>
+      <p:sp>
+        <p:nvSpPr>
+          <p:cNvPr id="41" name="Text 39"/>
+          <p:cNvSpPr/>
+          <p:nvPr/>
+        </p:nvSpPr>
+        <p:spPr>
+          <a:xfrm>
+            <a:off x="6858000" y="3364992"/>
+            <a:ext cx="1554480" cy="475488"/>
+          </a:xfrm>
+          <a:prstGeom prst="rect">
+            <a:avLst/>
+          </a:prstGeom>
+          <a:noFill/>
+          <a:ln/>
+        </p:spPr>
+        <p:txBody>
+          <a:bodyPr wrap="square" lIns="0" tIns="0" rIns="0" bIns="0" rtlCol="0" anchor="ctr"/>
+          <a:lstStyle/>
+          <a:p>
+            <a:pPr algn="ctr" indent="0" marL="0">
+              <a:buNone/>
+            </a:pPr>
+            <a:r>
+              <a:rPr lang="en-US" sz="1400" b="1" dirty="0">
+                <a:solidFill>
+                  <a:srgbClr val="0D9488"/>
+                </a:solidFill>
+                <a:latin typeface="Trebuchet MS" pitchFamily="34" charset="0"/>
+                <a:ea typeface="Trebuchet MS" pitchFamily="34" charset="-122"/>
+                <a:cs typeface="Trebuchet MS" pitchFamily="34" charset="-120"/>
+              </a:rPr>
+              <a:t>ly</a:t>
+            </a:r>
+            <a:endParaRPr lang="en-US" sz="1400" dirty="0"/>
+          </a:p>
+        </p:txBody>
+      </p:sp>
+      <p:sp>
+        <p:nvSpPr>
+          <p:cNvPr id="42" name="Shape 40"/>
           <p:cNvSpPr/>
           <p:nvPr/>
         </p:nvSpPr>
@@ -31904,7 +33355,7 @@
       </p:sp>
       <p:sp>
         <p:nvSpPr>
-          <p:cNvPr id="37" name="Text 35"/>
+          <p:cNvPr id="43" name="Text 41"/>
           <p:cNvSpPr/>
           <p:nvPr/>
         </p:nvSpPr>
@@ -31943,7 +33394,7 @@
       </p:sp>
       <p:sp>
         <p:nvSpPr>
-          <p:cNvPr id="38" name="Shape 36"/>
+          <p:cNvPr id="44" name="Shape 42"/>
           <p:cNvSpPr/>
           <p:nvPr/>
         </p:nvSpPr>
@@ -31970,7 +33421,7 @@
       </p:sp>
       <p:sp>
         <p:nvSpPr>
-          <p:cNvPr id="39" name="Text 37"/>
+          <p:cNvPr id="45" name="Text 43"/>
           <p:cNvSpPr/>
           <p:nvPr/>
         </p:nvSpPr>
@@ -32293,7 +33744,7 @@
                 <a:ea typeface="Calibri" pitchFamily="34" charset="-122"/>
                 <a:cs typeface="Calibri" pitchFamily="34" charset="-120"/>
               </a:rPr>
-              <a:t>Word Labs  •  wordlabs.app  •  Prefix: 'sub-' = under, below, less than</a:t>
+              <a:t>Word Labs  •  wordlabs.app  •  Prefix: 'sub-' = under; below</a:t>
             </a:r>
             <a:endParaRPr lang="en-US" sz="800" dirty="0"/>
           </a:p>
@@ -32432,7 +33883,7 @@
                 <a:ea typeface="Trebuchet MS" pitchFamily="34" charset="-122"/>
                 <a:cs typeface="Trebuchet MS" pitchFamily="34" charset="-120"/>
               </a:rPr>
-              <a:t>subheading</a:t>
+              <a:t>successfully</a:t>
             </a:r>
             <a:endParaRPr lang="en-US" sz="2800" dirty="0"/>
           </a:p>
@@ -32512,8 +33963,8 @@
         </p:nvSpPr>
         <p:spPr>
           <a:xfrm>
-            <a:off x="2221992" y="2258568"/>
-            <a:ext cx="1828800" cy="292608"/>
+            <a:off x="1989734" y="2258568"/>
+            <a:ext cx="1581912" cy="292608"/>
           </a:xfrm>
           <a:prstGeom prst="rect">
             <a:avLst>
@@ -32546,8 +33997,8 @@
         </p:nvSpPr>
         <p:spPr>
           <a:xfrm>
-            <a:off x="2221992" y="2258568"/>
-            <a:ext cx="1828800" cy="292608"/>
+            <a:off x="1989734" y="2258568"/>
+            <a:ext cx="1581912" cy="292608"/>
           </a:xfrm>
           <a:prstGeom prst="rect">
             <a:avLst/>
@@ -32585,8 +34036,8 @@
         </p:nvSpPr>
         <p:spPr>
           <a:xfrm>
-            <a:off x="2221992" y="2569464"/>
-            <a:ext cx="1828800" cy="201168"/>
+            <a:off x="1989734" y="2569464"/>
+            <a:ext cx="1581912" cy="201168"/>
           </a:xfrm>
           <a:prstGeom prst="rect">
             <a:avLst/>
@@ -32610,7 +34061,7 @@
                 <a:ea typeface="Calibri" pitchFamily="34" charset="-122"/>
                 <a:cs typeface="Calibri" pitchFamily="34" charset="-120"/>
               </a:rPr>
-              <a:t>under, below</a:t>
+              <a:t>under; below</a:t>
             </a:r>
             <a:endParaRPr lang="en-US" sz="850" dirty="0"/>
           </a:p>
@@ -32624,8 +34075,8 @@
         </p:nvSpPr>
         <p:spPr>
           <a:xfrm>
-            <a:off x="4370832" y="2258568"/>
-            <a:ext cx="1828800" cy="292608"/>
+            <a:off x="3659429" y="2258568"/>
+            <a:ext cx="1581912" cy="292608"/>
           </a:xfrm>
           <a:prstGeom prst="rect">
             <a:avLst>
@@ -32658,8 +34109,8 @@
         </p:nvSpPr>
         <p:spPr>
           <a:xfrm>
-            <a:off x="4370832" y="2258568"/>
-            <a:ext cx="1828800" cy="292608"/>
+            <a:off x="3659429" y="2258568"/>
+            <a:ext cx="1581912" cy="292608"/>
           </a:xfrm>
           <a:prstGeom prst="rect">
             <a:avLst/>
@@ -32683,7 +34134,7 @@
                 <a:ea typeface="Trebuchet MS" pitchFamily="34" charset="-122"/>
                 <a:cs typeface="Trebuchet MS" pitchFamily="34" charset="-120"/>
               </a:rPr>
-              <a:t>head</a:t>
+              <a:t>cess</a:t>
             </a:r>
             <a:endParaRPr lang="en-US" sz="1300" dirty="0"/>
           </a:p>
@@ -32697,8 +34148,8 @@
         </p:nvSpPr>
         <p:spPr>
           <a:xfrm>
-            <a:off x="4370832" y="2569464"/>
-            <a:ext cx="1828800" cy="201168"/>
+            <a:off x="3659429" y="2569464"/>
+            <a:ext cx="1581912" cy="201168"/>
           </a:xfrm>
           <a:prstGeom prst="rect">
             <a:avLst/>
@@ -32722,7 +34173,7 @@
                 <a:ea typeface="Calibri" pitchFamily="34" charset="-122"/>
                 <a:cs typeface="Calibri" pitchFamily="34" charset="-120"/>
               </a:rPr>
-              <a:t>top, leading part</a:t>
+              <a:t>go; yield; give way</a:t>
             </a:r>
             <a:endParaRPr lang="en-US" sz="850" dirty="0"/>
           </a:p>
@@ -32736,8 +34187,8 @@
         </p:nvSpPr>
         <p:spPr>
           <a:xfrm>
-            <a:off x="6519672" y="2258568"/>
-            <a:ext cx="1828800" cy="292608"/>
+            <a:off x="5329123" y="2258568"/>
+            <a:ext cx="1581912" cy="292608"/>
           </a:xfrm>
           <a:prstGeom prst="rect">
             <a:avLst>
@@ -32770,8 +34221,8 @@
         </p:nvSpPr>
         <p:spPr>
           <a:xfrm>
-            <a:off x="6519672" y="2258568"/>
-            <a:ext cx="1828800" cy="292608"/>
+            <a:off x="5329123" y="2258568"/>
+            <a:ext cx="1581912" cy="292608"/>
           </a:xfrm>
           <a:prstGeom prst="rect">
             <a:avLst/>
@@ -32795,7 +34246,7 @@
                 <a:ea typeface="Trebuchet MS" pitchFamily="34" charset="-122"/>
                 <a:cs typeface="Trebuchet MS" pitchFamily="34" charset="-120"/>
               </a:rPr>
-              <a:t>ing</a:t>
+              <a:t>ful</a:t>
             </a:r>
             <a:endParaRPr lang="en-US" sz="1300" dirty="0"/>
           </a:p>
@@ -32809,8 +34260,8 @@
         </p:nvSpPr>
         <p:spPr>
           <a:xfrm>
-            <a:off x="6519672" y="2569464"/>
-            <a:ext cx="1828800" cy="201168"/>
+            <a:off x="5329123" y="2569464"/>
+            <a:ext cx="1581912" cy="201168"/>
           </a:xfrm>
           <a:prstGeom prst="rect">
             <a:avLst/>
@@ -32834,7 +34285,7 @@
                 <a:ea typeface="Calibri" pitchFamily="34" charset="-122"/>
                 <a:cs typeface="Calibri" pitchFamily="34" charset="-120"/>
               </a:rPr>
-              <a:t>ongoing action or state</a:t>
+              <a:t>full of</a:t>
             </a:r>
             <a:endParaRPr lang="en-US" sz="850" dirty="0"/>
           </a:p>
@@ -32843,6 +34294,118 @@
       <p:sp>
         <p:nvSpPr>
           <p:cNvPr id="25" name="Shape 23"/>
+          <p:cNvSpPr/>
+          <p:nvPr/>
+        </p:nvSpPr>
+        <p:spPr>
+          <a:xfrm>
+            <a:off x="6998818" y="2258568"/>
+            <a:ext cx="1581912" cy="292608"/>
+          </a:xfrm>
+          <a:prstGeom prst="rect">
+            <a:avLst>
+              <a:gd name="adj" fmla="val 25000"/>
+            </a:avLst>
+          </a:prstGeom>
+          <a:solidFill>
+            <a:srgbClr val="FCE7F3"/>
+          </a:solidFill>
+          <a:ln w="19050">
+            <a:solidFill>
+              <a:srgbClr val="DB2777"/>
+            </a:solidFill>
+            <a:prstDash val="solid"/>
+          </a:ln>
+          <a:effectLst>
+            <a:outerShdw sx="100000" sy="100000" kx="0" ky="0" algn="bl" rotWithShape="0" blurRad="101600" dist="38100" dir="8100000">
+              <a:srgbClr val="000000">
+                <a:alpha val="12000"/>
+              </a:srgbClr>
+            </a:outerShdw>
+          </a:effectLst>
+        </p:spPr>
+      </p:sp>
+      <p:sp>
+        <p:nvSpPr>
+          <p:cNvPr id="26" name="Text 24"/>
+          <p:cNvSpPr/>
+          <p:nvPr/>
+        </p:nvSpPr>
+        <p:spPr>
+          <a:xfrm>
+            <a:off x="6998818" y="2258568"/>
+            <a:ext cx="1581912" cy="292608"/>
+          </a:xfrm>
+          <a:prstGeom prst="rect">
+            <a:avLst/>
+          </a:prstGeom>
+          <a:noFill/>
+          <a:ln/>
+        </p:spPr>
+        <p:txBody>
+          <a:bodyPr wrap="square" lIns="0" tIns="0" rIns="0" bIns="0" rtlCol="0" anchor="ctr"/>
+          <a:lstStyle/>
+          <a:p>
+            <a:pPr algn="ctr" indent="0" marL="0">
+              <a:buNone/>
+            </a:pPr>
+            <a:r>
+              <a:rPr lang="en-US" sz="1300" b="1" dirty="0">
+                <a:solidFill>
+                  <a:srgbClr val="9D174D"/>
+                </a:solidFill>
+                <a:latin typeface="Trebuchet MS" pitchFamily="34" charset="0"/>
+                <a:ea typeface="Trebuchet MS" pitchFamily="34" charset="-122"/>
+                <a:cs typeface="Trebuchet MS" pitchFamily="34" charset="-120"/>
+              </a:rPr>
+              <a:t>ly</a:t>
+            </a:r>
+            <a:endParaRPr lang="en-US" sz="1300" dirty="0"/>
+          </a:p>
+        </p:txBody>
+      </p:sp>
+      <p:sp>
+        <p:nvSpPr>
+          <p:cNvPr id="27" name="Text 25"/>
+          <p:cNvSpPr/>
+          <p:nvPr/>
+        </p:nvSpPr>
+        <p:spPr>
+          <a:xfrm>
+            <a:off x="6998818" y="2569464"/>
+            <a:ext cx="1581912" cy="201168"/>
+          </a:xfrm>
+          <a:prstGeom prst="rect">
+            <a:avLst/>
+          </a:prstGeom>
+          <a:noFill/>
+          <a:ln/>
+        </p:spPr>
+        <p:txBody>
+          <a:bodyPr wrap="square" lIns="0" tIns="0" rIns="0" bIns="0" rtlCol="0" anchor="t"/>
+          <a:lstStyle/>
+          <a:p>
+            <a:pPr algn="ctr" indent="0" marL="0">
+              <a:buNone/>
+            </a:pPr>
+            <a:r>
+              <a:rPr lang="en-US" sz="850" dirty="0">
+                <a:solidFill>
+                  <a:srgbClr val="475569"/>
+                </a:solidFill>
+                <a:latin typeface="Calibri" pitchFamily="34" charset="0"/>
+                <a:ea typeface="Calibri" pitchFamily="34" charset="-122"/>
+                <a:cs typeface="Calibri" pitchFamily="34" charset="-120"/>
+              </a:rPr>
+              <a:t>in a way</a:t>
+            </a:r>
+            <a:endParaRPr lang="en-US" sz="850" dirty="0"/>
+          </a:p>
+        </p:txBody>
+      </p:sp>
+      <p:sp>
+        <p:nvSpPr>
+          <p:cNvPr id="28" name="Shape 26"/>
           <p:cNvSpPr/>
           <p:nvPr/>
         </p:nvSpPr>
@@ -32869,7 +34432,7 @@
       </p:sp>
       <p:sp>
         <p:nvSpPr>
-          <p:cNvPr id="26" name="Text 24"/>
+          <p:cNvPr id="29" name="Text 27"/>
           <p:cNvSpPr/>
           <p:nvPr/>
         </p:nvSpPr>
@@ -32908,7 +34471,7 @@
       </p:sp>
       <p:sp>
         <p:nvSpPr>
-          <p:cNvPr id="27" name="Shape 25"/>
+          <p:cNvPr id="30" name="Shape 28"/>
           <p:cNvSpPr/>
           <p:nvPr/>
         </p:nvSpPr>
@@ -32935,14 +34498,14 @@
       </p:sp>
       <p:sp>
         <p:nvSpPr>
-          <p:cNvPr id="28" name="Shape 26"/>
-          <p:cNvSpPr/>
-          <p:nvPr/>
-        </p:nvSpPr>
-        <p:spPr>
-          <a:xfrm>
-            <a:off x="2313432" y="3364992"/>
-            <a:ext cx="1645920" cy="475488"/>
+          <p:cNvPr id="31" name="Shape 29"/>
+          <p:cNvSpPr/>
+          <p:nvPr/>
+        </p:nvSpPr>
+        <p:spPr>
+          <a:xfrm>
+            <a:off x="1975104" y="3364992"/>
+            <a:ext cx="1554480" cy="475488"/>
           </a:xfrm>
           <a:prstGeom prst="rect">
             <a:avLst>
@@ -32962,14 +34525,14 @@
       </p:sp>
       <p:sp>
         <p:nvSpPr>
-          <p:cNvPr id="29" name="Text 27"/>
-          <p:cNvSpPr/>
-          <p:nvPr/>
-        </p:nvSpPr>
-        <p:spPr>
-          <a:xfrm>
-            <a:off x="2313432" y="3364992"/>
-            <a:ext cx="1645920" cy="475488"/>
+          <p:cNvPr id="32" name="Text 30"/>
+          <p:cNvSpPr/>
+          <p:nvPr/>
+        </p:nvSpPr>
+        <p:spPr>
+          <a:xfrm>
+            <a:off x="1975104" y="3364992"/>
+            <a:ext cx="1554480" cy="475488"/>
           </a:xfrm>
           <a:prstGeom prst="rect">
             <a:avLst/>
@@ -32993,7 +34556,7 @@
                 <a:ea typeface="Trebuchet MS" pitchFamily="34" charset="-122"/>
                 <a:cs typeface="Trebuchet MS" pitchFamily="34" charset="-120"/>
               </a:rPr>
-              <a:t>sub</a:t>
+              <a:t>suc</a:t>
             </a:r>
             <a:endParaRPr lang="en-US" sz="1400" dirty="0"/>
           </a:p>
@@ -33001,14 +34564,14 @@
       </p:sp>
       <p:sp>
         <p:nvSpPr>
-          <p:cNvPr id="30" name="Text 28"/>
-          <p:cNvSpPr/>
-          <p:nvPr/>
-        </p:nvSpPr>
-        <p:spPr>
-          <a:xfrm>
-            <a:off x="3959352" y="3364992"/>
-            <a:ext cx="411480" cy="475488"/>
+          <p:cNvPr id="33" name="Text 31"/>
+          <p:cNvSpPr/>
+          <p:nvPr/>
+        </p:nvSpPr>
+        <p:spPr>
+          <a:xfrm>
+            <a:off x="3529584" y="3364992"/>
+            <a:ext cx="73152" cy="475488"/>
           </a:xfrm>
           <a:prstGeom prst="rect">
             <a:avLst/>
@@ -33040,14 +34603,14 @@
       </p:sp>
       <p:sp>
         <p:nvSpPr>
-          <p:cNvPr id="31" name="Shape 29"/>
-          <p:cNvSpPr/>
-          <p:nvPr/>
-        </p:nvSpPr>
-        <p:spPr>
-          <a:xfrm>
-            <a:off x="4370832" y="3364992"/>
-            <a:ext cx="1645920" cy="475488"/>
+          <p:cNvPr id="34" name="Shape 32"/>
+          <p:cNvSpPr/>
+          <p:nvPr/>
+        </p:nvSpPr>
+        <p:spPr>
+          <a:xfrm>
+            <a:off x="3602736" y="3364992"/>
+            <a:ext cx="1554480" cy="475488"/>
           </a:xfrm>
           <a:prstGeom prst="rect">
             <a:avLst>
@@ -33067,14 +34630,14 @@
       </p:sp>
       <p:sp>
         <p:nvSpPr>
-          <p:cNvPr id="32" name="Text 30"/>
-          <p:cNvSpPr/>
-          <p:nvPr/>
-        </p:nvSpPr>
-        <p:spPr>
-          <a:xfrm>
-            <a:off x="4370832" y="3364992"/>
-            <a:ext cx="1645920" cy="475488"/>
+          <p:cNvPr id="35" name="Text 33"/>
+          <p:cNvSpPr/>
+          <p:nvPr/>
+        </p:nvSpPr>
+        <p:spPr>
+          <a:xfrm>
+            <a:off x="3602736" y="3364992"/>
+            <a:ext cx="1554480" cy="475488"/>
           </a:xfrm>
           <a:prstGeom prst="rect">
             <a:avLst/>
@@ -33098,7 +34661,7 @@
                 <a:ea typeface="Trebuchet MS" pitchFamily="34" charset="-122"/>
                 <a:cs typeface="Trebuchet MS" pitchFamily="34" charset="-120"/>
               </a:rPr>
-              <a:t>head</a:t>
+              <a:t>cess</a:t>
             </a:r>
             <a:endParaRPr lang="en-US" sz="1400" dirty="0"/>
           </a:p>
@@ -33106,14 +34669,14 @@
       </p:sp>
       <p:sp>
         <p:nvSpPr>
-          <p:cNvPr id="33" name="Text 31"/>
-          <p:cNvSpPr/>
-          <p:nvPr/>
-        </p:nvSpPr>
-        <p:spPr>
-          <a:xfrm>
-            <a:off x="6016752" y="3364992"/>
-            <a:ext cx="411480" cy="475488"/>
+          <p:cNvPr id="36" name="Text 34"/>
+          <p:cNvSpPr/>
+          <p:nvPr/>
+        </p:nvSpPr>
+        <p:spPr>
+          <a:xfrm>
+            <a:off x="5157216" y="3364992"/>
+            <a:ext cx="73152" cy="475488"/>
           </a:xfrm>
           <a:prstGeom prst="rect">
             <a:avLst/>
@@ -33145,14 +34708,14 @@
       </p:sp>
       <p:sp>
         <p:nvSpPr>
-          <p:cNvPr id="34" name="Shape 32"/>
-          <p:cNvSpPr/>
-          <p:nvPr/>
-        </p:nvSpPr>
-        <p:spPr>
-          <a:xfrm>
-            <a:off x="6428232" y="3364992"/>
-            <a:ext cx="1645920" cy="475488"/>
+          <p:cNvPr id="37" name="Shape 35"/>
+          <p:cNvSpPr/>
+          <p:nvPr/>
+        </p:nvSpPr>
+        <p:spPr>
+          <a:xfrm>
+            <a:off x="5230368" y="3364992"/>
+            <a:ext cx="1554480" cy="475488"/>
           </a:xfrm>
           <a:prstGeom prst="rect">
             <a:avLst>
@@ -33172,14 +34735,14 @@
       </p:sp>
       <p:sp>
         <p:nvSpPr>
-          <p:cNvPr id="35" name="Text 33"/>
-          <p:cNvSpPr/>
-          <p:nvPr/>
-        </p:nvSpPr>
-        <p:spPr>
-          <a:xfrm>
-            <a:off x="6428232" y="3364992"/>
-            <a:ext cx="1645920" cy="475488"/>
+          <p:cNvPr id="38" name="Text 36"/>
+          <p:cNvSpPr/>
+          <p:nvPr/>
+        </p:nvSpPr>
+        <p:spPr>
+          <a:xfrm>
+            <a:off x="5230368" y="3364992"/>
+            <a:ext cx="1554480" cy="475488"/>
           </a:xfrm>
           <a:prstGeom prst="rect">
             <a:avLst/>
@@ -33203,7 +34766,7 @@
                 <a:ea typeface="Trebuchet MS" pitchFamily="34" charset="-122"/>
                 <a:cs typeface="Trebuchet MS" pitchFamily="34" charset="-120"/>
               </a:rPr>
-              <a:t>ing</a:t>
+              <a:t>ful</a:t>
             </a:r>
             <a:endParaRPr lang="en-US" sz="1400" dirty="0"/>
           </a:p>
@@ -33211,7 +34774,112 @@
       </p:sp>
       <p:sp>
         <p:nvSpPr>
-          <p:cNvPr id="36" name="Shape 34"/>
+          <p:cNvPr id="39" name="Text 37"/>
+          <p:cNvSpPr/>
+          <p:nvPr/>
+        </p:nvSpPr>
+        <p:spPr>
+          <a:xfrm>
+            <a:off x="6784848" y="3364992"/>
+            <a:ext cx="73152" cy="475488"/>
+          </a:xfrm>
+          <a:prstGeom prst="rect">
+            <a:avLst/>
+          </a:prstGeom>
+          <a:noFill/>
+          <a:ln/>
+        </p:spPr>
+        <p:txBody>
+          <a:bodyPr wrap="square" lIns="0" tIns="0" rIns="0" bIns="0" rtlCol="0" anchor="ctr"/>
+          <a:lstStyle/>
+          <a:p>
+            <a:pPr algn="ctr" indent="0" marL="0">
+              <a:buNone/>
+            </a:pPr>
+            <a:r>
+              <a:rPr lang="en-US" sz="1600" b="1" dirty="0">
+                <a:solidFill>
+                  <a:srgbClr val="0D9488"/>
+                </a:solidFill>
+                <a:latin typeface="Trebuchet MS" pitchFamily="34" charset="0"/>
+                <a:ea typeface="Trebuchet MS" pitchFamily="34" charset="-122"/>
+                <a:cs typeface="Trebuchet MS" pitchFamily="34" charset="-120"/>
+              </a:rPr>
+              <a:t>·</a:t>
+            </a:r>
+            <a:endParaRPr lang="en-US" sz="1600" dirty="0"/>
+          </a:p>
+        </p:txBody>
+      </p:sp>
+      <p:sp>
+        <p:nvSpPr>
+          <p:cNvPr id="40" name="Shape 38"/>
+          <p:cNvSpPr/>
+          <p:nvPr/>
+        </p:nvSpPr>
+        <p:spPr>
+          <a:xfrm>
+            <a:off x="6858000" y="3364992"/>
+            <a:ext cx="1554480" cy="475488"/>
+          </a:xfrm>
+          <a:prstGeom prst="rect">
+            <a:avLst>
+              <a:gd name="adj" fmla="val 9615"/>
+            </a:avLst>
+          </a:prstGeom>
+          <a:solidFill>
+            <a:srgbClr val="FFFFFF"/>
+          </a:solidFill>
+          <a:ln w="12700">
+            <a:solidFill>
+              <a:srgbClr val="0D9488"/>
+            </a:solidFill>
+            <a:prstDash val="solid"/>
+          </a:ln>
+        </p:spPr>
+      </p:sp>
+      <p:sp>
+        <p:nvSpPr>
+          <p:cNvPr id="41" name="Text 39"/>
+          <p:cNvSpPr/>
+          <p:nvPr/>
+        </p:nvSpPr>
+        <p:spPr>
+          <a:xfrm>
+            <a:off x="6858000" y="3364992"/>
+            <a:ext cx="1554480" cy="475488"/>
+          </a:xfrm>
+          <a:prstGeom prst="rect">
+            <a:avLst/>
+          </a:prstGeom>
+          <a:noFill/>
+          <a:ln/>
+        </p:spPr>
+        <p:txBody>
+          <a:bodyPr wrap="square" lIns="0" tIns="0" rIns="0" bIns="0" rtlCol="0" anchor="ctr"/>
+          <a:lstStyle/>
+          <a:p>
+            <a:pPr algn="ctr" indent="0" marL="0">
+              <a:buNone/>
+            </a:pPr>
+            <a:r>
+              <a:rPr lang="en-US" sz="1400" b="1" dirty="0">
+                <a:solidFill>
+                  <a:srgbClr val="0D9488"/>
+                </a:solidFill>
+                <a:latin typeface="Trebuchet MS" pitchFamily="34" charset="0"/>
+                <a:ea typeface="Trebuchet MS" pitchFamily="34" charset="-122"/>
+                <a:cs typeface="Trebuchet MS" pitchFamily="34" charset="-120"/>
+              </a:rPr>
+              <a:t>ly</a:t>
+            </a:r>
+            <a:endParaRPr lang="en-US" sz="1400" dirty="0"/>
+          </a:p>
+        </p:txBody>
+      </p:sp>
+      <p:sp>
+        <p:nvSpPr>
+          <p:cNvPr id="42" name="Shape 40"/>
           <p:cNvSpPr/>
           <p:nvPr/>
         </p:nvSpPr>
@@ -33238,7 +34906,7 @@
       </p:sp>
       <p:sp>
         <p:nvSpPr>
-          <p:cNvPr id="37" name="Text 35"/>
+          <p:cNvPr id="43" name="Text 41"/>
           <p:cNvSpPr/>
           <p:nvPr/>
         </p:nvSpPr>
@@ -33277,18 +34945,18 @@
       </p:sp>
       <p:sp>
         <p:nvSpPr>
-          <p:cNvPr id="38" name="Shape 36"/>
+          <p:cNvPr id="44" name="Shape 42"/>
           <p:cNvSpPr/>
           <p:nvPr/>
         </p:nvSpPr>
         <p:spPr>
           <a:xfrm>
             <a:off x="1874520" y="4096512"/>
-            <a:ext cx="6903720" cy="804672"/>
+            <a:ext cx="6903720" cy="658368"/>
           </a:xfrm>
           <a:prstGeom prst="rect">
             <a:avLst>
-              <a:gd name="adj" fmla="val 6818"/>
+              <a:gd name="adj" fmla="val 8333"/>
             </a:avLst>
           </a:prstGeom>
           <a:solidFill>
@@ -33304,18 +34972,18 @@
       </p:sp>
       <p:sp>
         <p:nvSpPr>
-          <p:cNvPr id="39" name="Shape 37"/>
-          <p:cNvSpPr/>
-          <p:nvPr/>
-        </p:nvSpPr>
-        <p:spPr>
-          <a:xfrm>
-            <a:off x="2023872" y="4169664"/>
-            <a:ext cx="685800" cy="384048"/>
+          <p:cNvPr id="45" name="Shape 43"/>
+          <p:cNvSpPr/>
+          <p:nvPr/>
+        </p:nvSpPr>
+        <p:spPr>
+          <a:xfrm>
+            <a:off x="1952596" y="4169664"/>
+            <a:ext cx="493776" cy="475488"/>
           </a:xfrm>
           <a:prstGeom prst="rect">
             <a:avLst>
-              <a:gd name="adj" fmla="val 9524"/>
+              <a:gd name="adj" fmla="val 7692"/>
             </a:avLst>
           </a:prstGeom>
           <a:solidFill>
@@ -33331,14 +34999,14 @@
       </p:sp>
       <p:sp>
         <p:nvSpPr>
-          <p:cNvPr id="40" name="Text 38"/>
-          <p:cNvSpPr/>
-          <p:nvPr/>
-        </p:nvSpPr>
-        <p:spPr>
-          <a:xfrm>
-            <a:off x="2023872" y="4169664"/>
-            <a:ext cx="685800" cy="384048"/>
+          <p:cNvPr id="46" name="Text 44"/>
+          <p:cNvSpPr/>
+          <p:nvPr/>
+        </p:nvSpPr>
+        <p:spPr>
+          <a:xfrm>
+            <a:off x="1952596" y="4169664"/>
+            <a:ext cx="493776" cy="475488"/>
           </a:xfrm>
           <a:prstGeom prst="rect">
             <a:avLst/>
@@ -33370,18 +35038,18 @@
       </p:sp>
       <p:sp>
         <p:nvSpPr>
-          <p:cNvPr id="41" name="Shape 39"/>
-          <p:cNvSpPr/>
-          <p:nvPr/>
-        </p:nvSpPr>
-        <p:spPr>
-          <a:xfrm>
-            <a:off x="2831592" y="4169664"/>
-            <a:ext cx="685800" cy="384048"/>
+          <p:cNvPr id="47" name="Shape 45"/>
+          <p:cNvSpPr/>
+          <p:nvPr/>
+        </p:nvSpPr>
+        <p:spPr>
+          <a:xfrm>
+            <a:off x="2497015" y="4169664"/>
+            <a:ext cx="493776" cy="475488"/>
           </a:xfrm>
           <a:prstGeom prst="rect">
             <a:avLst>
-              <a:gd name="adj" fmla="val 9524"/>
+              <a:gd name="adj" fmla="val 7692"/>
             </a:avLst>
           </a:prstGeom>
           <a:solidFill>
@@ -33397,14 +35065,14 @@
       </p:sp>
       <p:sp>
         <p:nvSpPr>
-          <p:cNvPr id="42" name="Text 40"/>
-          <p:cNvSpPr/>
-          <p:nvPr/>
-        </p:nvSpPr>
-        <p:spPr>
-          <a:xfrm>
-            <a:off x="2831592" y="4169664"/>
-            <a:ext cx="685800" cy="384048"/>
+          <p:cNvPr id="48" name="Text 46"/>
+          <p:cNvSpPr/>
+          <p:nvPr/>
+        </p:nvSpPr>
+        <p:spPr>
+          <a:xfrm>
+            <a:off x="2497015" y="4169664"/>
+            <a:ext cx="493776" cy="475488"/>
           </a:xfrm>
           <a:prstGeom prst="rect">
             <a:avLst/>
@@ -33436,18 +35104,18 @@
       </p:sp>
       <p:sp>
         <p:nvSpPr>
-          <p:cNvPr id="43" name="Shape 41"/>
-          <p:cNvSpPr/>
-          <p:nvPr/>
-        </p:nvSpPr>
-        <p:spPr>
-          <a:xfrm>
-            <a:off x="3639312" y="4169664"/>
-            <a:ext cx="685800" cy="384048"/>
+          <p:cNvPr id="49" name="Shape 47"/>
+          <p:cNvSpPr/>
+          <p:nvPr/>
+        </p:nvSpPr>
+        <p:spPr>
+          <a:xfrm>
+            <a:off x="3041435" y="4169664"/>
+            <a:ext cx="493776" cy="475488"/>
           </a:xfrm>
           <a:prstGeom prst="rect">
             <a:avLst>
-              <a:gd name="adj" fmla="val 9524"/>
+              <a:gd name="adj" fmla="val 7692"/>
             </a:avLst>
           </a:prstGeom>
           <a:solidFill>
@@ -33463,14 +35131,14 @@
       </p:sp>
       <p:sp>
         <p:nvSpPr>
-          <p:cNvPr id="44" name="Text 42"/>
-          <p:cNvSpPr/>
-          <p:nvPr/>
-        </p:nvSpPr>
-        <p:spPr>
-          <a:xfrm>
-            <a:off x="3639312" y="4169664"/>
-            <a:ext cx="685800" cy="384048"/>
+          <p:cNvPr id="50" name="Text 48"/>
+          <p:cNvSpPr/>
+          <p:nvPr/>
+        </p:nvSpPr>
+        <p:spPr>
+          <a:xfrm>
+            <a:off x="3041435" y="4169664"/>
+            <a:ext cx="493776" cy="475488"/>
           </a:xfrm>
           <a:prstGeom prst="rect">
             <a:avLst/>
@@ -33494,7 +35162,7 @@
                 <a:ea typeface="Trebuchet MS" pitchFamily="34" charset="-122"/>
                 <a:cs typeface="Trebuchet MS" pitchFamily="34" charset="-120"/>
               </a:rPr>
-              <a:t>b</a:t>
+              <a:t>c</a:t>
             </a:r>
             <a:endParaRPr lang="en-US" sz="900" dirty="0"/>
           </a:p>
@@ -33502,18 +35170,18 @@
       </p:sp>
       <p:sp>
         <p:nvSpPr>
-          <p:cNvPr id="45" name="Shape 43"/>
-          <p:cNvSpPr/>
-          <p:nvPr/>
-        </p:nvSpPr>
-        <p:spPr>
-          <a:xfrm>
-            <a:off x="4447032" y="4169664"/>
-            <a:ext cx="685800" cy="384048"/>
+          <p:cNvPr id="51" name="Shape 49"/>
+          <p:cNvSpPr/>
+          <p:nvPr/>
+        </p:nvSpPr>
+        <p:spPr>
+          <a:xfrm>
+            <a:off x="3585855" y="4169664"/>
+            <a:ext cx="493776" cy="475488"/>
           </a:xfrm>
           <a:prstGeom prst="rect">
             <a:avLst>
-              <a:gd name="adj" fmla="val 9524"/>
+              <a:gd name="adj" fmla="val 7692"/>
             </a:avLst>
           </a:prstGeom>
           <a:solidFill>
@@ -33529,14 +35197,14 @@
       </p:sp>
       <p:sp>
         <p:nvSpPr>
-          <p:cNvPr id="46" name="Text 44"/>
-          <p:cNvSpPr/>
-          <p:nvPr/>
-        </p:nvSpPr>
-        <p:spPr>
-          <a:xfrm>
-            <a:off x="4447032" y="4169664"/>
-            <a:ext cx="685800" cy="384048"/>
+          <p:cNvPr id="52" name="Text 50"/>
+          <p:cNvSpPr/>
+          <p:nvPr/>
+        </p:nvSpPr>
+        <p:spPr>
+          <a:xfrm>
+            <a:off x="3585855" y="4169664"/>
+            <a:ext cx="493776" cy="475488"/>
           </a:xfrm>
           <a:prstGeom prst="rect">
             <a:avLst/>
@@ -33560,7 +35228,7 @@
                 <a:ea typeface="Trebuchet MS" pitchFamily="34" charset="-122"/>
                 <a:cs typeface="Trebuchet MS" pitchFamily="34" charset="-120"/>
               </a:rPr>
-              <a:t>h</a:t>
+              <a:t>c</a:t>
             </a:r>
             <a:endParaRPr lang="en-US" sz="900" dirty="0"/>
           </a:p>
@@ -33568,18 +35236,18 @@
       </p:sp>
       <p:sp>
         <p:nvSpPr>
-          <p:cNvPr id="47" name="Shape 45"/>
-          <p:cNvSpPr/>
-          <p:nvPr/>
-        </p:nvSpPr>
-        <p:spPr>
-          <a:xfrm>
-            <a:off x="5254752" y="4169664"/>
-            <a:ext cx="685800" cy="384048"/>
+          <p:cNvPr id="53" name="Shape 51"/>
+          <p:cNvSpPr/>
+          <p:nvPr/>
+        </p:nvSpPr>
+        <p:spPr>
+          <a:xfrm>
+            <a:off x="4130274" y="4169664"/>
+            <a:ext cx="493776" cy="475488"/>
           </a:xfrm>
           <a:prstGeom prst="rect">
             <a:avLst>
-              <a:gd name="adj" fmla="val 9524"/>
+              <a:gd name="adj" fmla="val 7692"/>
             </a:avLst>
           </a:prstGeom>
           <a:solidFill>
@@ -33595,14 +35263,14 @@
       </p:sp>
       <p:sp>
         <p:nvSpPr>
-          <p:cNvPr id="48" name="Text 46"/>
-          <p:cNvSpPr/>
-          <p:nvPr/>
-        </p:nvSpPr>
-        <p:spPr>
-          <a:xfrm>
-            <a:off x="5254752" y="4169664"/>
-            <a:ext cx="685800" cy="384048"/>
+          <p:cNvPr id="54" name="Text 52"/>
+          <p:cNvSpPr/>
+          <p:nvPr/>
+        </p:nvSpPr>
+        <p:spPr>
+          <a:xfrm>
+            <a:off x="4130274" y="4169664"/>
+            <a:ext cx="493776" cy="475488"/>
           </a:xfrm>
           <a:prstGeom prst="rect">
             <a:avLst/>
@@ -33626,7 +35294,7 @@
                 <a:ea typeface="Trebuchet MS" pitchFamily="34" charset="-122"/>
                 <a:cs typeface="Trebuchet MS" pitchFamily="34" charset="-120"/>
               </a:rPr>
-              <a:t>ea</a:t>
+              <a:t>e</a:t>
             </a:r>
             <a:endParaRPr lang="en-US" sz="900" dirty="0"/>
           </a:p>
@@ -33634,57 +35302,18 @@
       </p:sp>
       <p:sp>
         <p:nvSpPr>
-          <p:cNvPr id="49" name="Text 47"/>
-          <p:cNvSpPr/>
-          <p:nvPr/>
-        </p:nvSpPr>
-        <p:spPr>
-          <a:xfrm>
-            <a:off x="5254752" y="4572000"/>
-            <a:ext cx="685800" cy="219456"/>
-          </a:xfrm>
-          <a:prstGeom prst="rect">
-            <a:avLst/>
-          </a:prstGeom>
-          <a:noFill/>
-          <a:ln/>
-        </p:spPr>
-        <p:txBody>
-          <a:bodyPr wrap="square" lIns="0" tIns="0" rIns="0" bIns="0" rtlCol="0" anchor="t"/>
-          <a:lstStyle/>
-          <a:p>
-            <a:pPr algn="ctr" indent="0" marL="0">
-              <a:buNone/>
-            </a:pPr>
-            <a:r>
-              <a:rPr lang="en-US" sz="750" i="1" dirty="0">
-                <a:solidFill>
-                  <a:srgbClr val="94A3B8"/>
-                </a:solidFill>
-                <a:latin typeface="Calibri" pitchFamily="34" charset="0"/>
-                <a:ea typeface="Calibri" pitchFamily="34" charset="-122"/>
-                <a:cs typeface="Calibri" pitchFamily="34" charset="-120"/>
-              </a:rPr>
-              <a:t>/e/</a:t>
-            </a:r>
-            <a:endParaRPr lang="en-US" sz="750" dirty="0"/>
-          </a:p>
-        </p:txBody>
-      </p:sp>
-      <p:sp>
-        <p:nvSpPr>
-          <p:cNvPr id="50" name="Shape 48"/>
-          <p:cNvSpPr/>
-          <p:nvPr/>
-        </p:nvSpPr>
-        <p:spPr>
-          <a:xfrm>
-            <a:off x="6062472" y="4169664"/>
-            <a:ext cx="685800" cy="384048"/>
+          <p:cNvPr id="55" name="Shape 53"/>
+          <p:cNvSpPr/>
+          <p:nvPr/>
+        </p:nvSpPr>
+        <p:spPr>
+          <a:xfrm>
+            <a:off x="4674694" y="4169664"/>
+            <a:ext cx="493776" cy="475488"/>
           </a:xfrm>
           <a:prstGeom prst="rect">
             <a:avLst>
-              <a:gd name="adj" fmla="val 9524"/>
+              <a:gd name="adj" fmla="val 7692"/>
             </a:avLst>
           </a:prstGeom>
           <a:solidFill>
@@ -33700,14 +35329,14 @@
       </p:sp>
       <p:sp>
         <p:nvSpPr>
-          <p:cNvPr id="51" name="Text 49"/>
-          <p:cNvSpPr/>
-          <p:nvPr/>
-        </p:nvSpPr>
-        <p:spPr>
-          <a:xfrm>
-            <a:off x="6062472" y="4169664"/>
-            <a:ext cx="685800" cy="384048"/>
+          <p:cNvPr id="56" name="Text 54"/>
+          <p:cNvSpPr/>
+          <p:nvPr/>
+        </p:nvSpPr>
+        <p:spPr>
+          <a:xfrm>
+            <a:off x="4674694" y="4169664"/>
+            <a:ext cx="493776" cy="475488"/>
           </a:xfrm>
           <a:prstGeom prst="rect">
             <a:avLst/>
@@ -33731,7 +35360,7 @@
                 <a:ea typeface="Trebuchet MS" pitchFamily="34" charset="-122"/>
                 <a:cs typeface="Trebuchet MS" pitchFamily="34" charset="-120"/>
               </a:rPr>
-              <a:t>d</a:t>
+              <a:t>s</a:t>
             </a:r>
             <a:endParaRPr lang="en-US" sz="900" dirty="0"/>
           </a:p>
@@ -33739,18 +35368,18 @@
       </p:sp>
       <p:sp>
         <p:nvSpPr>
-          <p:cNvPr id="52" name="Shape 50"/>
-          <p:cNvSpPr/>
-          <p:nvPr/>
-        </p:nvSpPr>
-        <p:spPr>
-          <a:xfrm>
-            <a:off x="6870192" y="4169664"/>
-            <a:ext cx="685800" cy="384048"/>
+          <p:cNvPr id="57" name="Shape 55"/>
+          <p:cNvSpPr/>
+          <p:nvPr/>
+        </p:nvSpPr>
+        <p:spPr>
+          <a:xfrm>
+            <a:off x="5219114" y="4169664"/>
+            <a:ext cx="493776" cy="475488"/>
           </a:xfrm>
           <a:prstGeom prst="rect">
             <a:avLst>
-              <a:gd name="adj" fmla="val 9524"/>
+              <a:gd name="adj" fmla="val 7692"/>
             </a:avLst>
           </a:prstGeom>
           <a:solidFill>
@@ -33766,14 +35395,14 @@
       </p:sp>
       <p:sp>
         <p:nvSpPr>
-          <p:cNvPr id="53" name="Text 51"/>
-          <p:cNvSpPr/>
-          <p:nvPr/>
-        </p:nvSpPr>
-        <p:spPr>
-          <a:xfrm>
-            <a:off x="6870192" y="4169664"/>
-            <a:ext cx="685800" cy="384048"/>
+          <p:cNvPr id="58" name="Text 56"/>
+          <p:cNvSpPr/>
+          <p:nvPr/>
+        </p:nvSpPr>
+        <p:spPr>
+          <a:xfrm>
+            <a:off x="5219114" y="4169664"/>
+            <a:ext cx="493776" cy="475488"/>
           </a:xfrm>
           <a:prstGeom prst="rect">
             <a:avLst/>
@@ -33797,7 +35426,7 @@
                 <a:ea typeface="Trebuchet MS" pitchFamily="34" charset="-122"/>
                 <a:cs typeface="Trebuchet MS" pitchFamily="34" charset="-120"/>
               </a:rPr>
-              <a:t>i</a:t>
+              <a:t>s</a:t>
             </a:r>
             <a:endParaRPr lang="en-US" sz="900" dirty="0"/>
           </a:p>
@@ -33805,18 +35434,18 @@
       </p:sp>
       <p:sp>
         <p:nvSpPr>
-          <p:cNvPr id="54" name="Shape 52"/>
-          <p:cNvSpPr/>
-          <p:nvPr/>
-        </p:nvSpPr>
-        <p:spPr>
-          <a:xfrm>
-            <a:off x="7677912" y="4169664"/>
-            <a:ext cx="685800" cy="384048"/>
+          <p:cNvPr id="59" name="Shape 57"/>
+          <p:cNvSpPr/>
+          <p:nvPr/>
+        </p:nvSpPr>
+        <p:spPr>
+          <a:xfrm>
+            <a:off x="5763534" y="4169664"/>
+            <a:ext cx="493776" cy="475488"/>
           </a:xfrm>
           <a:prstGeom prst="rect">
             <a:avLst>
-              <a:gd name="adj" fmla="val 9524"/>
+              <a:gd name="adj" fmla="val 7692"/>
             </a:avLst>
           </a:prstGeom>
           <a:solidFill>
@@ -33832,14 +35461,14 @@
       </p:sp>
       <p:sp>
         <p:nvSpPr>
-          <p:cNvPr id="55" name="Text 53"/>
-          <p:cNvSpPr/>
-          <p:nvPr/>
-        </p:nvSpPr>
-        <p:spPr>
-          <a:xfrm>
-            <a:off x="7677912" y="4169664"/>
-            <a:ext cx="685800" cy="384048"/>
+          <p:cNvPr id="60" name="Text 58"/>
+          <p:cNvSpPr/>
+          <p:nvPr/>
+        </p:nvSpPr>
+        <p:spPr>
+          <a:xfrm>
+            <a:off x="5763534" y="4169664"/>
+            <a:ext cx="493776" cy="475488"/>
           </a:xfrm>
           <a:prstGeom prst="rect">
             <a:avLst/>
@@ -33863,7 +35492,271 @@
                 <a:ea typeface="Trebuchet MS" pitchFamily="34" charset="-122"/>
                 <a:cs typeface="Trebuchet MS" pitchFamily="34" charset="-120"/>
               </a:rPr>
-              <a:t>ng</a:t>
+              <a:t>f</a:t>
+            </a:r>
+            <a:endParaRPr lang="en-US" sz="900" dirty="0"/>
+          </a:p>
+        </p:txBody>
+      </p:sp>
+      <p:sp>
+        <p:nvSpPr>
+          <p:cNvPr id="61" name="Shape 59"/>
+          <p:cNvSpPr/>
+          <p:nvPr/>
+        </p:nvSpPr>
+        <p:spPr>
+          <a:xfrm>
+            <a:off x="6307953" y="4169664"/>
+            <a:ext cx="493776" cy="475488"/>
+          </a:xfrm>
+          <a:prstGeom prst="rect">
+            <a:avLst>
+              <a:gd name="adj" fmla="val 7692"/>
+            </a:avLst>
+          </a:prstGeom>
+          <a:solidFill>
+            <a:srgbClr val="FFFFFF"/>
+          </a:solidFill>
+          <a:ln w="12700">
+            <a:solidFill>
+              <a:srgbClr val="DB2777"/>
+            </a:solidFill>
+            <a:prstDash val="solid"/>
+          </a:ln>
+        </p:spPr>
+      </p:sp>
+      <p:sp>
+        <p:nvSpPr>
+          <p:cNvPr id="62" name="Text 60"/>
+          <p:cNvSpPr/>
+          <p:nvPr/>
+        </p:nvSpPr>
+        <p:spPr>
+          <a:xfrm>
+            <a:off x="6307953" y="4169664"/>
+            <a:ext cx="493776" cy="475488"/>
+          </a:xfrm>
+          <a:prstGeom prst="rect">
+            <a:avLst/>
+          </a:prstGeom>
+          <a:noFill/>
+          <a:ln/>
+        </p:spPr>
+        <p:txBody>
+          <a:bodyPr wrap="square" lIns="0" tIns="0" rIns="0" bIns="0" rtlCol="0" anchor="ctr"/>
+          <a:lstStyle/>
+          <a:p>
+            <a:pPr algn="ctr" indent="0" marL="0">
+              <a:buNone/>
+            </a:pPr>
+            <a:r>
+              <a:rPr lang="en-US" sz="900" b="1" dirty="0">
+                <a:solidFill>
+                  <a:srgbClr val="9D174D"/>
+                </a:solidFill>
+                <a:latin typeface="Trebuchet MS" pitchFamily="34" charset="0"/>
+                <a:ea typeface="Trebuchet MS" pitchFamily="34" charset="-122"/>
+                <a:cs typeface="Trebuchet MS" pitchFamily="34" charset="-120"/>
+              </a:rPr>
+              <a:t>u</a:t>
+            </a:r>
+            <a:endParaRPr lang="en-US" sz="900" dirty="0"/>
+          </a:p>
+        </p:txBody>
+      </p:sp>
+      <p:sp>
+        <p:nvSpPr>
+          <p:cNvPr id="63" name="Shape 61"/>
+          <p:cNvSpPr/>
+          <p:nvPr/>
+        </p:nvSpPr>
+        <p:spPr>
+          <a:xfrm>
+            <a:off x="6852373" y="4169664"/>
+            <a:ext cx="493776" cy="475488"/>
+          </a:xfrm>
+          <a:prstGeom prst="rect">
+            <a:avLst>
+              <a:gd name="adj" fmla="val 7692"/>
+            </a:avLst>
+          </a:prstGeom>
+          <a:solidFill>
+            <a:srgbClr val="FFFFFF"/>
+          </a:solidFill>
+          <a:ln w="12700">
+            <a:solidFill>
+              <a:srgbClr val="DB2777"/>
+            </a:solidFill>
+            <a:prstDash val="solid"/>
+          </a:ln>
+        </p:spPr>
+      </p:sp>
+      <p:sp>
+        <p:nvSpPr>
+          <p:cNvPr id="64" name="Text 62"/>
+          <p:cNvSpPr/>
+          <p:nvPr/>
+        </p:nvSpPr>
+        <p:spPr>
+          <a:xfrm>
+            <a:off x="6852373" y="4169664"/>
+            <a:ext cx="493776" cy="475488"/>
+          </a:xfrm>
+          <a:prstGeom prst="rect">
+            <a:avLst/>
+          </a:prstGeom>
+          <a:noFill/>
+          <a:ln/>
+        </p:spPr>
+        <p:txBody>
+          <a:bodyPr wrap="square" lIns="0" tIns="0" rIns="0" bIns="0" rtlCol="0" anchor="ctr"/>
+          <a:lstStyle/>
+          <a:p>
+            <a:pPr algn="ctr" indent="0" marL="0">
+              <a:buNone/>
+            </a:pPr>
+            <a:r>
+              <a:rPr lang="en-US" sz="900" b="1" dirty="0">
+                <a:solidFill>
+                  <a:srgbClr val="9D174D"/>
+                </a:solidFill>
+                <a:latin typeface="Trebuchet MS" pitchFamily="34" charset="0"/>
+                <a:ea typeface="Trebuchet MS" pitchFamily="34" charset="-122"/>
+                <a:cs typeface="Trebuchet MS" pitchFamily="34" charset="-120"/>
+              </a:rPr>
+              <a:t>l</a:t>
+            </a:r>
+            <a:endParaRPr lang="en-US" sz="900" dirty="0"/>
+          </a:p>
+        </p:txBody>
+      </p:sp>
+      <p:sp>
+        <p:nvSpPr>
+          <p:cNvPr id="65" name="Shape 63"/>
+          <p:cNvSpPr/>
+          <p:nvPr/>
+        </p:nvSpPr>
+        <p:spPr>
+          <a:xfrm>
+            <a:off x="7396793" y="4169664"/>
+            <a:ext cx="493776" cy="475488"/>
+          </a:xfrm>
+          <a:prstGeom prst="rect">
+            <a:avLst>
+              <a:gd name="adj" fmla="val 7692"/>
+            </a:avLst>
+          </a:prstGeom>
+          <a:solidFill>
+            <a:srgbClr val="FFFFFF"/>
+          </a:solidFill>
+          <a:ln w="12700">
+            <a:solidFill>
+              <a:srgbClr val="DB2777"/>
+            </a:solidFill>
+            <a:prstDash val="solid"/>
+          </a:ln>
+        </p:spPr>
+      </p:sp>
+      <p:sp>
+        <p:nvSpPr>
+          <p:cNvPr id="66" name="Text 64"/>
+          <p:cNvSpPr/>
+          <p:nvPr/>
+        </p:nvSpPr>
+        <p:spPr>
+          <a:xfrm>
+            <a:off x="7396793" y="4169664"/>
+            <a:ext cx="493776" cy="475488"/>
+          </a:xfrm>
+          <a:prstGeom prst="rect">
+            <a:avLst/>
+          </a:prstGeom>
+          <a:noFill/>
+          <a:ln/>
+        </p:spPr>
+        <p:txBody>
+          <a:bodyPr wrap="square" lIns="0" tIns="0" rIns="0" bIns="0" rtlCol="0" anchor="ctr"/>
+          <a:lstStyle/>
+          <a:p>
+            <a:pPr algn="ctr" indent="0" marL="0">
+              <a:buNone/>
+            </a:pPr>
+            <a:r>
+              <a:rPr lang="en-US" sz="900" b="1" dirty="0">
+                <a:solidFill>
+                  <a:srgbClr val="9D174D"/>
+                </a:solidFill>
+                <a:latin typeface="Trebuchet MS" pitchFamily="34" charset="0"/>
+                <a:ea typeface="Trebuchet MS" pitchFamily="34" charset="-122"/>
+                <a:cs typeface="Trebuchet MS" pitchFamily="34" charset="-120"/>
+              </a:rPr>
+              <a:t>l</a:t>
+            </a:r>
+            <a:endParaRPr lang="en-US" sz="900" dirty="0"/>
+          </a:p>
+        </p:txBody>
+      </p:sp>
+      <p:sp>
+        <p:nvSpPr>
+          <p:cNvPr id="67" name="Shape 65"/>
+          <p:cNvSpPr/>
+          <p:nvPr/>
+        </p:nvSpPr>
+        <p:spPr>
+          <a:xfrm>
+            <a:off x="7941212" y="4169664"/>
+            <a:ext cx="493776" cy="475488"/>
+          </a:xfrm>
+          <a:prstGeom prst="rect">
+            <a:avLst>
+              <a:gd name="adj" fmla="val 7692"/>
+            </a:avLst>
+          </a:prstGeom>
+          <a:solidFill>
+            <a:srgbClr val="FFFFFF"/>
+          </a:solidFill>
+          <a:ln w="12700">
+            <a:solidFill>
+              <a:srgbClr val="DB2777"/>
+            </a:solidFill>
+            <a:prstDash val="solid"/>
+          </a:ln>
+        </p:spPr>
+      </p:sp>
+      <p:sp>
+        <p:nvSpPr>
+          <p:cNvPr id="68" name="Text 66"/>
+          <p:cNvSpPr/>
+          <p:nvPr/>
+        </p:nvSpPr>
+        <p:spPr>
+          <a:xfrm>
+            <a:off x="7941212" y="4169664"/>
+            <a:ext cx="493776" cy="475488"/>
+          </a:xfrm>
+          <a:prstGeom prst="rect">
+            <a:avLst/>
+          </a:prstGeom>
+          <a:noFill/>
+          <a:ln/>
+        </p:spPr>
+        <p:txBody>
+          <a:bodyPr wrap="square" lIns="0" tIns="0" rIns="0" bIns="0" rtlCol="0" anchor="ctr"/>
+          <a:lstStyle/>
+          <a:p>
+            <a:pPr algn="ctr" indent="0" marL="0">
+              <a:buNone/>
+            </a:pPr>
+            <a:r>
+              <a:rPr lang="en-US" sz="900" b="1" dirty="0">
+                <a:solidFill>
+                  <a:srgbClr val="9D174D"/>
+                </a:solidFill>
+                <a:latin typeface="Trebuchet MS" pitchFamily="34" charset="0"/>
+                <a:ea typeface="Trebuchet MS" pitchFamily="34" charset="-122"/>
+                <a:cs typeface="Trebuchet MS" pitchFamily="34" charset="-120"/>
+              </a:rPr>
+              <a:t>y</a:t>
             </a:r>
             <a:endParaRPr lang="en-US" sz="900" dirty="0"/>
           </a:p>
@@ -34155,7 +36048,7 @@
                 <a:ea typeface="Calibri" pitchFamily="34" charset="-122"/>
                 <a:cs typeface="Calibri" pitchFamily="34" charset="-120"/>
               </a:rPr>
-              <a:t>Word Labs  •  wordlabs.app  •  Prefix: 'sub-' = under, below, less than</a:t>
+              <a:t>Word Labs  •  wordlabs.app  •  Prefix: 'sub-' = under; below</a:t>
             </a:r>
             <a:endParaRPr lang="en-US" sz="800" dirty="0"/>
           </a:p>
@@ -35324,7 +37217,7 @@
                 <a:ea typeface="Calibri" pitchFamily="34" charset="-122"/>
                 <a:cs typeface="Calibri" pitchFamily="34" charset="-120"/>
               </a:rPr>
-              <a:t>Word Labs  •  wordlabs.app  •  Prefix: 'sub-' = under, below, less than</a:t>
+              <a:t>Word Labs  •  wordlabs.app  •  Prefix: 'sub-' = under; below</a:t>
             </a:r>
             <a:endParaRPr lang="en-US" sz="800" dirty="0"/>
           </a:p>
@@ -35689,7 +37582,7 @@
                 <a:ea typeface="Trebuchet MS" pitchFamily="34" charset="-122"/>
                 <a:cs typeface="Trebuchet MS" pitchFamily="34" charset="-120"/>
               </a:rPr>
-              <a:t>merge</a:t>
+              <a:t>ject</a:t>
             </a:r>
             <a:endParaRPr lang="en-US" sz="1300" dirty="0"/>
           </a:p>
@@ -35906,7 +37799,7 @@
                 <a:ea typeface="Trebuchet MS" pitchFamily="34" charset="-122"/>
                 <a:cs typeface="Trebuchet MS" pitchFamily="34" charset="-120"/>
               </a:rPr>
-              <a:t>-ing</a:t>
+              <a:t>-ive</a:t>
             </a:r>
             <a:endParaRPr lang="en-US" sz="1300" dirty="0"/>
           </a:p>
@@ -35995,7 +37888,7 @@
                 <a:ea typeface="Trebuchet MS" pitchFamily="34" charset="-122"/>
                 <a:cs typeface="Trebuchet MS" pitchFamily="34" charset="-120"/>
               </a:rPr>
-              <a:t>way</a:t>
+              <a:t>merge</a:t>
             </a:r>
             <a:endParaRPr lang="en-US" sz="1300" dirty="0"/>
           </a:p>
@@ -36059,7 +37952,7 @@
                 <a:ea typeface="Trebuchet MS" pitchFamily="34" charset="-122"/>
                 <a:cs typeface="Trebuchet MS" pitchFamily="34" charset="-120"/>
               </a:rPr>
-              <a:t>-ion</a:t>
+              <a:t>-s</a:t>
             </a:r>
             <a:endParaRPr lang="en-US" sz="1300" dirty="0"/>
           </a:p>
@@ -36148,7 +38041,7 @@
                 <a:ea typeface="Trebuchet MS" pitchFamily="34" charset="-122"/>
                 <a:cs typeface="Trebuchet MS" pitchFamily="34" charset="-120"/>
               </a:rPr>
-              <a:t>title</a:t>
+              <a:t>miss</a:t>
             </a:r>
             <a:endParaRPr lang="en-US" sz="1300" dirty="0"/>
           </a:p>
@@ -36212,7 +38105,7 @@
                 <a:ea typeface="Trebuchet MS" pitchFamily="34" charset="-122"/>
                 <a:cs typeface="Trebuchet MS" pitchFamily="34" charset="-120"/>
               </a:rPr>
-              <a:t>-ible</a:t>
+              <a:t>-ing</a:t>
             </a:r>
             <a:endParaRPr lang="en-US" sz="1300" dirty="0"/>
           </a:p>
@@ -36301,7 +38194,7 @@
                 <a:ea typeface="Trebuchet MS" pitchFamily="34" charset="-122"/>
                 <a:cs typeface="Trebuchet MS" pitchFamily="34" charset="-120"/>
               </a:rPr>
-              <a:t>tract</a:t>
+              <a:t>mit</a:t>
             </a:r>
             <a:endParaRPr lang="en-US" sz="1300" dirty="0"/>
           </a:p>
@@ -36365,7 +38258,7 @@
                 <a:ea typeface="Trebuchet MS" pitchFamily="34" charset="-122"/>
                 <a:cs typeface="Trebuchet MS" pitchFamily="34" charset="-120"/>
               </a:rPr>
-              <a:t>-ly</a:t>
+              <a:t>-ion</a:t>
             </a:r>
             <a:endParaRPr lang="en-US" sz="1300" dirty="0"/>
           </a:p>
@@ -36373,37 +38266,190 @@
       </p:sp>
       <p:sp>
         <p:nvSpPr>
-          <p:cNvPr id="43" name="Text 41"/>
-          <p:cNvSpPr/>
-          <p:nvPr/>
-        </p:nvSpPr>
-        <p:spPr>
-          <a:xfrm>
-            <a:off x="365760" y="3611880"/>
-            <a:ext cx="1828800" cy="347472"/>
-          </a:xfrm>
-          <a:prstGeom prst="rect">
-            <a:avLst/>
-          </a:prstGeom>
-          <a:noFill/>
-          <a:ln/>
-        </p:spPr>
-        <p:txBody>
-          <a:bodyPr wrap="square" lIns="0" tIns="0" rIns="0" bIns="0" rtlCol="0" anchor="ctr"/>
-          <a:lstStyle/>
-          <a:p>
-            <a:pPr algn="l" indent="0" marL="0">
-              <a:buNone/>
-            </a:pPr>
-            <a:r>
-              <a:rPr lang="en-US" sz="1200" b="1" dirty="0">
-                <a:solidFill>
-                  <a:srgbClr val="0F172A"/>
+          <p:cNvPr id="43" name="Shape 41"/>
+          <p:cNvSpPr/>
+          <p:nvPr/>
+        </p:nvSpPr>
+        <p:spPr>
+          <a:xfrm>
+            <a:off x="365760" y="3666744"/>
+            <a:ext cx="2468880" cy="402336"/>
+          </a:xfrm>
+          <a:prstGeom prst="rect">
+            <a:avLst/>
+          </a:prstGeom>
+          <a:solidFill>
+            <a:srgbClr val="F1F5F9"/>
+          </a:solidFill>
+          <a:ln w="12700">
+            <a:solidFill>
+              <a:srgbClr val="E2E8F0"/>
+            </a:solidFill>
+            <a:prstDash val="solid"/>
+          </a:ln>
+        </p:spPr>
+      </p:sp>
+      <p:sp>
+        <p:nvSpPr>
+          <p:cNvPr id="44" name="Shape 42"/>
+          <p:cNvSpPr/>
+          <p:nvPr/>
+        </p:nvSpPr>
+        <p:spPr>
+          <a:xfrm>
+            <a:off x="2971800" y="3666744"/>
+            <a:ext cx="2834640" cy="402336"/>
+          </a:xfrm>
+          <a:prstGeom prst="rect">
+            <a:avLst/>
+          </a:prstGeom>
+          <a:solidFill>
+            <a:srgbClr val="CCFBF1"/>
+          </a:solidFill>
+          <a:ln w="12700">
+            <a:solidFill>
+              <a:srgbClr val="E2E8F0"/>
+            </a:solidFill>
+            <a:prstDash val="solid"/>
+          </a:ln>
+        </p:spPr>
+      </p:sp>
+      <p:sp>
+        <p:nvSpPr>
+          <p:cNvPr id="45" name="Text 43"/>
+          <p:cNvSpPr/>
+          <p:nvPr/>
+        </p:nvSpPr>
+        <p:spPr>
+          <a:xfrm>
+            <a:off x="2971800" y="3666744"/>
+            <a:ext cx="2834640" cy="402336"/>
+          </a:xfrm>
+          <a:prstGeom prst="rect">
+            <a:avLst/>
+          </a:prstGeom>
+          <a:noFill/>
+          <a:ln/>
+        </p:spPr>
+        <p:txBody>
+          <a:bodyPr wrap="square" lIns="0" tIns="0" rIns="0" bIns="0" rtlCol="0" anchor="ctr"/>
+          <a:lstStyle/>
+          <a:p>
+            <a:pPr algn="ctr" indent="0" marL="0">
+              <a:buNone/>
+            </a:pPr>
+            <a:r>
+              <a:rPr lang="en-US" sz="1300" b="1" dirty="0">
+                <a:solidFill>
+                  <a:srgbClr val="0F766E"/>
                 </a:solidFill>
                 <a:latin typeface="Trebuchet MS" pitchFamily="34" charset="0"/>
                 <a:ea typeface="Trebuchet MS" pitchFamily="34" charset="-122"/>
                 <a:cs typeface="Trebuchet MS" pitchFamily="34" charset="-120"/>
               </a:rPr>
+              <a:t>vers</a:t>
+            </a:r>
+            <a:endParaRPr lang="en-US" sz="1300" dirty="0"/>
+          </a:p>
+        </p:txBody>
+      </p:sp>
+      <p:sp>
+        <p:nvSpPr>
+          <p:cNvPr id="46" name="Shape 44"/>
+          <p:cNvSpPr/>
+          <p:nvPr/>
+        </p:nvSpPr>
+        <p:spPr>
+          <a:xfrm>
+            <a:off x="5943600" y="3666744"/>
+            <a:ext cx="2834640" cy="402336"/>
+          </a:xfrm>
+          <a:prstGeom prst="rect">
+            <a:avLst/>
+          </a:prstGeom>
+          <a:solidFill>
+            <a:srgbClr val="FCE7F3"/>
+          </a:solidFill>
+          <a:ln w="12700">
+            <a:solidFill>
+              <a:srgbClr val="E2E8F0"/>
+            </a:solidFill>
+            <a:prstDash val="solid"/>
+          </a:ln>
+        </p:spPr>
+      </p:sp>
+      <p:sp>
+        <p:nvSpPr>
+          <p:cNvPr id="47" name="Text 45"/>
+          <p:cNvSpPr/>
+          <p:nvPr/>
+        </p:nvSpPr>
+        <p:spPr>
+          <a:xfrm>
+            <a:off x="5943600" y="3666744"/>
+            <a:ext cx="2834640" cy="402336"/>
+          </a:xfrm>
+          <a:prstGeom prst="rect">
+            <a:avLst/>
+          </a:prstGeom>
+          <a:noFill/>
+          <a:ln/>
+        </p:spPr>
+        <p:txBody>
+          <a:bodyPr wrap="square" lIns="0" tIns="0" rIns="0" bIns="0" rtlCol="0" anchor="ctr"/>
+          <a:lstStyle/>
+          <a:p>
+            <a:pPr algn="ctr" indent="0" marL="0">
+              <a:buNone/>
+            </a:pPr>
+            <a:r>
+              <a:rPr lang="en-US" sz="1300" b="1" dirty="0">
+                <a:solidFill>
+                  <a:srgbClr val="9D174D"/>
+                </a:solidFill>
+                <a:latin typeface="Trebuchet MS" pitchFamily="34" charset="0"/>
+                <a:ea typeface="Trebuchet MS" pitchFamily="34" charset="-122"/>
+                <a:cs typeface="Trebuchet MS" pitchFamily="34" charset="-120"/>
+              </a:rPr>
+              <a:t>-es</a:t>
+            </a:r>
+            <a:endParaRPr lang="en-US" sz="1300" dirty="0"/>
+          </a:p>
+        </p:txBody>
+      </p:sp>
+      <p:sp>
+        <p:nvSpPr>
+          <p:cNvPr id="48" name="Text 46"/>
+          <p:cNvSpPr/>
+          <p:nvPr/>
+        </p:nvSpPr>
+        <p:spPr>
+          <a:xfrm>
+            <a:off x="365760" y="3611880"/>
+            <a:ext cx="1828800" cy="347472"/>
+          </a:xfrm>
+          <a:prstGeom prst="rect">
+            <a:avLst/>
+          </a:prstGeom>
+          <a:noFill/>
+          <a:ln/>
+        </p:spPr>
+        <p:txBody>
+          <a:bodyPr wrap="square" lIns="0" tIns="0" rIns="0" bIns="0" rtlCol="0" anchor="ctr"/>
+          <a:lstStyle/>
+          <a:p>
+            <a:pPr algn="l" indent="0" marL="0">
+              <a:buNone/>
+            </a:pPr>
+            <a:r>
+              <a:rPr lang="en-US" sz="1200" b="1" dirty="0">
+                <a:solidFill>
+                  <a:srgbClr val="0F172A"/>
+                </a:solidFill>
+                <a:latin typeface="Trebuchet MS" pitchFamily="34" charset="0"/>
+                <a:ea typeface="Trebuchet MS" pitchFamily="34" charset="-122"/>
+                <a:cs typeface="Trebuchet MS" pitchFamily="34" charset="-120"/>
+              </a:rPr>
               <a:t>Sample words:</a:t>
             </a:r>
             <a:endParaRPr lang="en-US" sz="1200" dirty="0"/>
@@ -36412,7 +38458,7 @@
       </p:sp>
       <p:sp>
         <p:nvSpPr>
-          <p:cNvPr id="44" name="Shape 42"/>
+          <p:cNvPr id="49" name="Shape 47"/>
           <p:cNvSpPr/>
           <p:nvPr/>
         </p:nvSpPr>
@@ -36439,7 +38485,7 @@
       </p:sp>
       <p:sp>
         <p:nvSpPr>
-          <p:cNvPr id="45" name="Text 43"/>
+          <p:cNvPr id="50" name="Text 48"/>
           <p:cNvSpPr/>
           <p:nvPr/>
         </p:nvSpPr>
@@ -36470,7 +38516,7 @@
                 <a:ea typeface="Trebuchet MS" pitchFamily="34" charset="-122"/>
                 <a:cs typeface="Trebuchet MS" pitchFamily="34" charset="-120"/>
               </a:rPr>
-              <a:t>submarine</a:t>
+              <a:t>subway</a:t>
             </a:r>
             <a:endParaRPr lang="en-US" sz="1200" dirty="0"/>
           </a:p>
@@ -36478,7 +38524,7 @@
       </p:sp>
       <p:sp>
         <p:nvSpPr>
-          <p:cNvPr id="46" name="Shape 44"/>
+          <p:cNvPr id="51" name="Shape 49"/>
           <p:cNvSpPr/>
           <p:nvPr/>
         </p:nvSpPr>
@@ -36505,7 +38551,7 @@
       </p:sp>
       <p:sp>
         <p:nvSpPr>
-          <p:cNvPr id="47" name="Text 45"/>
+          <p:cNvPr id="52" name="Text 50"/>
           <p:cNvSpPr/>
           <p:nvPr/>
         </p:nvSpPr>
@@ -36544,7 +38590,7 @@
       </p:sp>
       <p:sp>
         <p:nvSpPr>
-          <p:cNvPr id="48" name="Shape 46"/>
+          <p:cNvPr id="53" name="Shape 51"/>
           <p:cNvSpPr/>
           <p:nvPr/>
         </p:nvSpPr>
@@ -36571,7 +38617,7 @@
       </p:sp>
       <p:sp>
         <p:nvSpPr>
-          <p:cNvPr id="49" name="Text 47"/>
+          <p:cNvPr id="54" name="Text 52"/>
           <p:cNvSpPr/>
           <p:nvPr/>
         </p:nvSpPr>
@@ -36602,7 +38648,7 @@
                 <a:ea typeface="Trebuchet MS" pitchFamily="34" charset="-122"/>
                 <a:cs typeface="Trebuchet MS" pitchFamily="34" charset="-120"/>
               </a:rPr>
-              <a:t>subtract</a:t>
+              <a:t>submerged</a:t>
             </a:r>
             <a:endParaRPr lang="en-US" sz="1200" dirty="0"/>
           </a:p>
@@ -36610,7 +38656,7 @@
       </p:sp>
       <p:sp>
         <p:nvSpPr>
-          <p:cNvPr id="50" name="Shape 48"/>
+          <p:cNvPr id="55" name="Shape 53"/>
           <p:cNvSpPr/>
           <p:nvPr/>
         </p:nvSpPr>
@@ -36637,7 +38683,7 @@
       </p:sp>
       <p:sp>
         <p:nvSpPr>
-          <p:cNvPr id="51" name="Text 49"/>
+          <p:cNvPr id="56" name="Text 54"/>
           <p:cNvSpPr/>
           <p:nvPr/>
         </p:nvSpPr>
@@ -36668,7 +38714,7 @@
                 <a:ea typeface="Trebuchet MS" pitchFamily="34" charset="-122"/>
                 <a:cs typeface="Trebuchet MS" pitchFamily="34" charset="-120"/>
               </a:rPr>
-              <a:t>subway</a:t>
+              <a:t>submerging</a:t>
             </a:r>
             <a:endParaRPr lang="en-US" sz="1200" dirty="0"/>
           </a:p>
@@ -36676,7 +38722,7 @@
       </p:sp>
       <p:sp>
         <p:nvSpPr>
-          <p:cNvPr id="52" name="Shape 50"/>
+          <p:cNvPr id="57" name="Shape 55"/>
           <p:cNvSpPr/>
           <p:nvPr/>
         </p:nvSpPr>
@@ -36703,7 +38749,7 @@
       </p:sp>
       <p:sp>
         <p:nvSpPr>
-          <p:cNvPr id="53" name="Text 51"/>
+          <p:cNvPr id="58" name="Text 56"/>
           <p:cNvSpPr/>
           <p:nvPr/>
         </p:nvSpPr>
@@ -36734,7 +38780,7 @@
                 <a:ea typeface="Trebuchet MS" pitchFamily="34" charset="-122"/>
                 <a:cs typeface="Trebuchet MS" pitchFamily="34" charset="-120"/>
               </a:rPr>
-              <a:t>subtitle</a:t>
+              <a:t>subject</a:t>
             </a:r>
             <a:endParaRPr lang="en-US" sz="1200" dirty="0"/>
           </a:p>
@@ -36742,7 +38788,7 @@
       </p:sp>
       <p:sp>
         <p:nvSpPr>
-          <p:cNvPr id="54" name="Shape 52"/>
+          <p:cNvPr id="59" name="Shape 57"/>
           <p:cNvSpPr/>
           <p:nvPr/>
         </p:nvSpPr>
@@ -36769,7 +38815,7 @@
       </p:sp>
       <p:sp>
         <p:nvSpPr>
-          <p:cNvPr id="55" name="Text 53"/>
+          <p:cNvPr id="60" name="Text 58"/>
           <p:cNvSpPr/>
           <p:nvPr/>
         </p:nvSpPr>
@@ -36800,7 +38846,7 @@
                 <a:ea typeface="Trebuchet MS" pitchFamily="34" charset="-122"/>
                 <a:cs typeface="Trebuchet MS" pitchFamily="34" charset="-120"/>
               </a:rPr>
-              <a:t>subdivide</a:t>
+              <a:t>subjects</a:t>
             </a:r>
             <a:endParaRPr lang="en-US" sz="1200" dirty="0"/>
           </a:p>
@@ -36808,7 +38854,7 @@
       </p:sp>
       <p:sp>
         <p:nvSpPr>
-          <p:cNvPr id="56" name="Shape 54"/>
+          <p:cNvPr id="61" name="Shape 59"/>
           <p:cNvSpPr/>
           <p:nvPr/>
         </p:nvSpPr>
@@ -36835,7 +38881,7 @@
       </p:sp>
       <p:sp>
         <p:nvSpPr>
-          <p:cNvPr id="57" name="Text 55"/>
+          <p:cNvPr id="62" name="Text 60"/>
           <p:cNvSpPr/>
           <p:nvPr/>
         </p:nvSpPr>
@@ -36866,73 +38912,7 @@
                 <a:ea typeface="Trebuchet MS" pitchFamily="34" charset="-122"/>
                 <a:cs typeface="Trebuchet MS" pitchFamily="34" charset="-120"/>
               </a:rPr>
-              <a:t>subheading</a:t>
-            </a:r>
-            <a:endParaRPr lang="en-US" sz="1200" dirty="0"/>
-          </a:p>
-        </p:txBody>
-      </p:sp>
-      <p:sp>
-        <p:nvSpPr>
-          <p:cNvPr id="58" name="Shape 56"/>
-          <p:cNvSpPr/>
-          <p:nvPr/>
-        </p:nvSpPr>
-        <p:spPr>
-          <a:xfrm>
-            <a:off x="6894576" y="4498848"/>
-            <a:ext cx="2011680" cy="402336"/>
-          </a:xfrm>
-          <a:prstGeom prst="rect">
-            <a:avLst>
-              <a:gd name="adj" fmla="val 13636"/>
-            </a:avLst>
-          </a:prstGeom>
-          <a:solidFill>
-            <a:srgbClr val="EEF2FF"/>
-          </a:solidFill>
-          <a:ln w="12700">
-            <a:solidFill>
-              <a:srgbClr val="6366F1"/>
-            </a:solidFill>
-            <a:prstDash val="solid"/>
-          </a:ln>
-        </p:spPr>
-      </p:sp>
-      <p:sp>
-        <p:nvSpPr>
-          <p:cNvPr id="59" name="Text 57"/>
-          <p:cNvSpPr/>
-          <p:nvPr/>
-        </p:nvSpPr>
-        <p:spPr>
-          <a:xfrm>
-            <a:off x="6894576" y="4498848"/>
-            <a:ext cx="2011680" cy="402336"/>
-          </a:xfrm>
-          <a:prstGeom prst="rect">
-            <a:avLst/>
-          </a:prstGeom>
-          <a:noFill/>
-          <a:ln/>
-        </p:spPr>
-        <p:txBody>
-          <a:bodyPr wrap="square" lIns="0" tIns="0" rIns="0" bIns="0" rtlCol="0" anchor="ctr"/>
-          <a:lstStyle/>
-          <a:p>
-            <a:pPr algn="ctr" indent="0" marL="0">
-              <a:buNone/>
-            </a:pPr>
-            <a:r>
-              <a:rPr lang="en-US" sz="1200" b="1" dirty="0">
-                <a:solidFill>
-                  <a:srgbClr val="4338CA"/>
-                </a:solidFill>
-                <a:latin typeface="Trebuchet MS" pitchFamily="34" charset="0"/>
-                <a:ea typeface="Trebuchet MS" pitchFamily="34" charset="-122"/>
-                <a:cs typeface="Trebuchet MS" pitchFamily="34" charset="-120"/>
-              </a:rPr>
-              <a:t>substitute</a:t>
+              <a:t>subjected</a:t>
             </a:r>
             <a:endParaRPr lang="en-US" sz="1200" dirty="0"/>
           </a:p>
@@ -37224,7 +39204,7 @@
                 <a:ea typeface="Calibri" pitchFamily="34" charset="-122"/>
                 <a:cs typeface="Calibri" pitchFamily="34" charset="-120"/>
               </a:rPr>
-              <a:t>Word Labs  •  wordlabs.app  •  Prefix: 'sub-' = under, below, less than</a:t>
+              <a:t>Word Labs  •  wordlabs.app  •  Prefix: 'sub-' = under; below</a:t>
             </a:r>
             <a:endParaRPr lang="en-US" sz="800" dirty="0"/>
           </a:p>
@@ -37388,7 +39368,7 @@
                 <a:ea typeface="Calibri" pitchFamily="34" charset="-122"/>
                 <a:cs typeface="Calibri" pitchFamily="34" charset="-120"/>
               </a:rPr>
-              <a:t>A meaningful word part added to the beginning of a root to change its meaning. The prefix 'sub-' means 'under, below, less than'.</a:t>
+              <a:t>A meaningful word part added to the beginning of a root to change its meaning. The prefix 'sub-' means 'under; below'.</a:t>
             </a:r>
             <a:endParaRPr lang="en-US" sz="1350" dirty="0"/>
           </a:p>
@@ -37552,7 +39532,7 @@
                 <a:ea typeface="Calibri" pitchFamily="34" charset="-122"/>
                 <a:cs typeface="Calibri" pitchFamily="34" charset="-120"/>
               </a:rPr>
-              <a:t>The core part of a word carrying its basic meaning. In 'submarine', the root is the part after the prefix 'sub-'.</a:t>
+              <a:t>The core part of a word carrying its basic meaning. In 'subway', the root is the part after the prefix 'sub-'.</a:t>
             </a:r>
             <a:endParaRPr lang="en-US" sz="1350" dirty="0"/>
           </a:p>
@@ -38008,7 +39988,7 @@
                 <a:ea typeface="Calibri" pitchFamily="34" charset="-122"/>
                 <a:cs typeface="Calibri" pitchFamily="34" charset="-120"/>
               </a:rPr>
-              <a:t>Word Labs  •  wordlabs.app  •  Prefix: 'sub-' = under, below, less than</a:t>
+              <a:t>Word Labs  •  wordlabs.app  •  Prefix: 'sub-' = under; below</a:t>
             </a:r>
             <a:endParaRPr lang="en-US" sz="800" dirty="0"/>
           </a:p>
@@ -38120,7 +40100,7 @@
                 <a:ea typeface="Calibri" pitchFamily="34" charset="-122"/>
                 <a:cs typeface="Calibri" pitchFamily="34" charset="-120"/>
               </a:rPr>
-              <a:t>1.  The prefix 'sub-' means above or over something.</a:t>
+              <a:t>1.  'sub' means 'under; below'.</a:t>
             </a:r>
             <a:endParaRPr lang="en-US" sz="1300" dirty="0"/>
           </a:p>
@@ -38143,11 +40123,11 @@
             </a:avLst>
           </a:prstGeom>
           <a:solidFill>
-            <a:srgbClr val="FEE2E2"/>
-          </a:solidFill>
-          <a:ln w="12700">
-            <a:solidFill>
-              <a:srgbClr val="DC2626"/>
+            <a:srgbClr val="DCFCE7"/>
+          </a:solidFill>
+          <a:ln w="12700">
+            <a:solidFill>
+              <a:srgbClr val="16A34A"/>
             </a:solidFill>
             <a:prstDash val="solid"/>
           </a:ln>
@@ -38180,13 +40160,13 @@
             <a:r>
               <a:rPr lang="en-US" sz="1100" b="1" dirty="0">
                 <a:solidFill>
-                  <a:srgbClr val="DC2626"/>
+                  <a:srgbClr val="16A34A"/>
                 </a:solidFill>
                 <a:latin typeface="Trebuchet MS" pitchFamily="34" charset="0"/>
                 <a:ea typeface="Trebuchet MS" pitchFamily="34" charset="-122"/>
                 <a:cs typeface="Trebuchet MS" pitchFamily="34" charset="-120"/>
               </a:rPr>
-              <a:t>FALSE</a:t>
+              <a:t>TRUE</a:t>
             </a:r>
             <a:endParaRPr lang="en-US" sz="1100" dirty="0"/>
           </a:p>
@@ -38259,7 +40239,7 @@
                 <a:ea typeface="Calibri" pitchFamily="34" charset="-122"/>
                 <a:cs typeface="Calibri" pitchFamily="34" charset="-120"/>
               </a:rPr>
-              <a:t>2.  The prefix 'sub-' comes from Latin.</a:t>
+              <a:t>2.  'submerge' means 'to go completely under the surface of water or another liquid'.</a:t>
             </a:r>
             <a:endParaRPr lang="en-US" sz="1300" dirty="0"/>
           </a:p>
@@ -38398,7 +40378,7 @@
                 <a:ea typeface="Calibri" pitchFamily="34" charset="-122"/>
                 <a:cs typeface="Calibri" pitchFamily="34" charset="-120"/>
               </a:rPr>
-              <a:t>3.  The word 'submarine' means a ship that sails on top of the ocean.</a:t>
+              <a:t>3.  'subway' means 'an underground tunnel or railway used for trains or for walking under a road'.</a:t>
             </a:r>
             <a:endParaRPr lang="en-US" sz="1300" dirty="0"/>
           </a:p>
@@ -38421,11 +40401,11 @@
             </a:avLst>
           </a:prstGeom>
           <a:solidFill>
-            <a:srgbClr val="FEE2E2"/>
-          </a:solidFill>
-          <a:ln w="12700">
-            <a:solidFill>
-              <a:srgbClr val="DC2626"/>
+            <a:srgbClr val="DCFCE7"/>
+          </a:solidFill>
+          <a:ln w="12700">
+            <a:solidFill>
+              <a:srgbClr val="16A34A"/>
             </a:solidFill>
             <a:prstDash val="solid"/>
           </a:ln>
@@ -38458,13 +40438,13 @@
             <a:r>
               <a:rPr lang="en-US" sz="1100" b="1" dirty="0">
                 <a:solidFill>
-                  <a:srgbClr val="DC2626"/>
+                  <a:srgbClr val="16A34A"/>
                 </a:solidFill>
                 <a:latin typeface="Trebuchet MS" pitchFamily="34" charset="0"/>
                 <a:ea typeface="Trebuchet MS" pitchFamily="34" charset="-122"/>
                 <a:cs typeface="Trebuchet MS" pitchFamily="34" charset="-120"/>
               </a:rPr>
-              <a:t>FALSE</a:t>
+              <a:t>TRUE</a:t>
             </a:r>
             <a:endParaRPr lang="en-US" sz="1100" dirty="0"/>
           </a:p>
@@ -38537,7 +40517,7 @@
                 <a:ea typeface="Calibri" pitchFamily="34" charset="-122"/>
                 <a:cs typeface="Calibri" pitchFamily="34" charset="-120"/>
               </a:rPr>
-              <a:t>4.  A subtitle appears below the main title.</a:t>
+              <a:t>4.  'submerge' means 'to rise up quickly into the air'.</a:t>
             </a:r>
             <a:endParaRPr lang="en-US" sz="1300" dirty="0"/>
           </a:p>
@@ -38560,11 +40540,11 @@
             </a:avLst>
           </a:prstGeom>
           <a:solidFill>
-            <a:srgbClr val="DCFCE7"/>
-          </a:solidFill>
-          <a:ln w="12700">
-            <a:solidFill>
-              <a:srgbClr val="16A34A"/>
+            <a:srgbClr val="FEE2E2"/>
+          </a:solidFill>
+          <a:ln w="12700">
+            <a:solidFill>
+              <a:srgbClr val="DC2626"/>
             </a:solidFill>
             <a:prstDash val="solid"/>
           </a:ln>
@@ -38597,13 +40577,13 @@
             <a:r>
               <a:rPr lang="en-US" sz="1100" b="1" dirty="0">
                 <a:solidFill>
-                  <a:srgbClr val="16A34A"/>
+                  <a:srgbClr val="DC2626"/>
                 </a:solidFill>
                 <a:latin typeface="Trebuchet MS" pitchFamily="34" charset="0"/>
                 <a:ea typeface="Trebuchet MS" pitchFamily="34" charset="-122"/>
                 <a:cs typeface="Trebuchet MS" pitchFamily="34" charset="-120"/>
               </a:rPr>
-              <a:t>TRUE</a:t>
+              <a:t>FALSE</a:t>
             </a:r>
             <a:endParaRPr lang="en-US" sz="1100" dirty="0"/>
           </a:p>
@@ -38676,7 +40656,7 @@
                 <a:ea typeface="Calibri" pitchFamily="34" charset="-122"/>
                 <a:cs typeface="Calibri" pitchFamily="34" charset="-120"/>
               </a:rPr>
-              <a:t>5.  The prefix 'sub-' means under or below.</a:t>
+              <a:t>5.  'subway' means 'a small sandwich shop'.</a:t>
             </a:r>
             <a:endParaRPr lang="en-US" sz="1300" dirty="0"/>
           </a:p>
@@ -38699,11 +40679,11 @@
             </a:avLst>
           </a:prstGeom>
           <a:solidFill>
-            <a:srgbClr val="DCFCE7"/>
-          </a:solidFill>
-          <a:ln w="12700">
-            <a:solidFill>
-              <a:srgbClr val="16A34A"/>
+            <a:srgbClr val="FEE2E2"/>
+          </a:solidFill>
+          <a:ln w="12700">
+            <a:solidFill>
+              <a:srgbClr val="DC2626"/>
             </a:solidFill>
             <a:prstDash val="solid"/>
           </a:ln>
@@ -38736,13 +40716,13 @@
             <a:r>
               <a:rPr lang="en-US" sz="1100" b="1" dirty="0">
                 <a:solidFill>
-                  <a:srgbClr val="16A34A"/>
+                  <a:srgbClr val="DC2626"/>
                 </a:solidFill>
                 <a:latin typeface="Trebuchet MS" pitchFamily="34" charset="0"/>
                 <a:ea typeface="Trebuchet MS" pitchFamily="34" charset="-122"/>
                 <a:cs typeface="Trebuchet MS" pitchFamily="34" charset="-120"/>
               </a:rPr>
-              <a:t>TRUE</a:t>
+              <a:t>FALSE</a:t>
             </a:r>
             <a:endParaRPr lang="en-US" sz="1100" dirty="0"/>
           </a:p>
@@ -39034,7 +41014,7 @@
                 <a:ea typeface="Calibri" pitchFamily="34" charset="-122"/>
                 <a:cs typeface="Calibri" pitchFamily="34" charset="-120"/>
               </a:rPr>
-              <a:t>Word Labs  •  wordlabs.app  •  Prefix: 'sub-' = under, below, less than</a:t>
+              <a:t>Word Labs  •  wordlabs.app  •  Prefix: 'sub-' = under; below</a:t>
             </a:r>
             <a:endParaRPr lang="en-US" sz="800" dirty="0"/>
           </a:p>
@@ -39171,7 +41151,7 @@
                 <a:ea typeface="Trebuchet MS" pitchFamily="34" charset="-122"/>
                 <a:cs typeface="Trebuchet MS" pitchFamily="34" charset="-120"/>
               </a:rPr>
-              <a:t>under, below, less than</a:t>
+              <a:t>under; below</a:t>
             </a:r>
             <a:endParaRPr lang="en-US" sz="2000" dirty="0"/>
           </a:p>
@@ -39210,7 +41190,7 @@
                 <a:ea typeface="Calibri" pitchFamily="34" charset="-122"/>
                 <a:cs typeface="Calibri" pitchFamily="34" charset="-120"/>
               </a:rPr>
-              <a:t>Origin: Latin: sub</a:t>
+              <a:t>Origin: Prefix</a:t>
             </a:r>
             <a:endParaRPr lang="en-US" sz="1100" dirty="0"/>
           </a:p>
@@ -39315,7 +41295,7 @@
                 <a:ea typeface="Trebuchet MS" pitchFamily="34" charset="-122"/>
                 <a:cs typeface="Trebuchet MS" pitchFamily="34" charset="-120"/>
               </a:rPr>
-              <a:t>submarine</a:t>
+              <a:t>subway</a:t>
             </a:r>
             <a:endParaRPr lang="en-US" sz="1300" dirty="0"/>
           </a:p>
@@ -39447,7 +41427,7 @@
                 <a:ea typeface="Trebuchet MS" pitchFamily="34" charset="-122"/>
                 <a:cs typeface="Trebuchet MS" pitchFamily="34" charset="-120"/>
               </a:rPr>
-              <a:t>subtract</a:t>
+              <a:t>submerged</a:t>
             </a:r>
             <a:endParaRPr lang="en-US" sz="1300" dirty="0"/>
           </a:p>
@@ -39513,7 +41493,7 @@
                 <a:ea typeface="Trebuchet MS" pitchFamily="34" charset="-122"/>
                 <a:cs typeface="Trebuchet MS" pitchFamily="34" charset="-120"/>
               </a:rPr>
-              <a:t>subway</a:t>
+              <a:t>submerging</a:t>
             </a:r>
             <a:endParaRPr lang="en-US" sz="1300" dirty="0"/>
           </a:p>
@@ -39579,7 +41559,7 @@
                 <a:ea typeface="Trebuchet MS" pitchFamily="34" charset="-122"/>
                 <a:cs typeface="Trebuchet MS" pitchFamily="34" charset="-120"/>
               </a:rPr>
-              <a:t>subtitle</a:t>
+              <a:t>subject</a:t>
             </a:r>
             <a:endParaRPr lang="en-US" sz="1300" dirty="0"/>
           </a:p>
@@ -39645,7 +41625,7 @@
                 <a:ea typeface="Trebuchet MS" pitchFamily="34" charset="-122"/>
                 <a:cs typeface="Trebuchet MS" pitchFamily="34" charset="-120"/>
               </a:rPr>
-              <a:t>subdivide</a:t>
+              <a:t>subjects</a:t>
             </a:r>
             <a:endParaRPr lang="en-US" sz="1300" dirty="0"/>
           </a:p>
@@ -39711,7 +41691,7 @@
                 <a:ea typeface="Trebuchet MS" pitchFamily="34" charset="-122"/>
                 <a:cs typeface="Trebuchet MS" pitchFamily="34" charset="-120"/>
               </a:rPr>
-              <a:t>subheading</a:t>
+              <a:t>subjected</a:t>
             </a:r>
             <a:endParaRPr lang="en-US" sz="1300" dirty="0"/>
           </a:p>
@@ -40003,7 +41983,7 @@
                 <a:ea typeface="Calibri" pitchFamily="34" charset="-122"/>
                 <a:cs typeface="Calibri" pitchFamily="34" charset="-120"/>
               </a:rPr>
-              <a:t>Word Labs  •  wordlabs.app  •  Prefix: 'sub-' = under, below, less than</a:t>
+              <a:t>Word Labs  •  wordlabs.app  •  Prefix: 'sub-' = under; below</a:t>
             </a:r>
             <a:endParaRPr lang="en-US" sz="800" dirty="0"/>
           </a:p>
@@ -40368,7 +42348,7 @@
                 <a:ea typeface="Trebuchet MS" pitchFamily="34" charset="-122"/>
                 <a:cs typeface="Trebuchet MS" pitchFamily="34" charset="-120"/>
               </a:rPr>
-              <a:t>merge</a:t>
+              <a:t>ject</a:t>
             </a:r>
             <a:endParaRPr lang="en-US" sz="1300" dirty="0"/>
           </a:p>
@@ -40585,7 +42565,7 @@
                 <a:ea typeface="Trebuchet MS" pitchFamily="34" charset="-122"/>
                 <a:cs typeface="Trebuchet MS" pitchFamily="34" charset="-120"/>
               </a:rPr>
-              <a:t>-ing</a:t>
+              <a:t>-ive</a:t>
             </a:r>
             <a:endParaRPr lang="en-US" sz="1300" dirty="0"/>
           </a:p>
@@ -40674,7 +42654,7 @@
                 <a:ea typeface="Trebuchet MS" pitchFamily="34" charset="-122"/>
                 <a:cs typeface="Trebuchet MS" pitchFamily="34" charset="-120"/>
               </a:rPr>
-              <a:t>way</a:t>
+              <a:t>merge</a:t>
             </a:r>
             <a:endParaRPr lang="en-US" sz="1300" dirty="0"/>
           </a:p>
@@ -40738,7 +42718,7 @@
                 <a:ea typeface="Trebuchet MS" pitchFamily="34" charset="-122"/>
                 <a:cs typeface="Trebuchet MS" pitchFamily="34" charset="-120"/>
               </a:rPr>
-              <a:t>-ion</a:t>
+              <a:t>-s</a:t>
             </a:r>
             <a:endParaRPr lang="en-US" sz="1300" dirty="0"/>
           </a:p>
@@ -40827,7 +42807,7 @@
                 <a:ea typeface="Trebuchet MS" pitchFamily="34" charset="-122"/>
                 <a:cs typeface="Trebuchet MS" pitchFamily="34" charset="-120"/>
               </a:rPr>
-              <a:t>title</a:t>
+              <a:t>miss</a:t>
             </a:r>
             <a:endParaRPr lang="en-US" sz="1300" dirty="0"/>
           </a:p>
@@ -40891,7 +42871,7 @@
                 <a:ea typeface="Trebuchet MS" pitchFamily="34" charset="-122"/>
                 <a:cs typeface="Trebuchet MS" pitchFamily="34" charset="-120"/>
               </a:rPr>
-              <a:t>-ible</a:t>
+              <a:t>-ing</a:t>
             </a:r>
             <a:endParaRPr lang="en-US" sz="1300" dirty="0"/>
           </a:p>
@@ -40980,7 +42960,7 @@
                 <a:ea typeface="Trebuchet MS" pitchFamily="34" charset="-122"/>
                 <a:cs typeface="Trebuchet MS" pitchFamily="34" charset="-120"/>
               </a:rPr>
-              <a:t>tract</a:t>
+              <a:t>mit</a:t>
             </a:r>
             <a:endParaRPr lang="en-US" sz="1300" dirty="0"/>
           </a:p>
@@ -41044,7 +43024,7 @@
                 <a:ea typeface="Trebuchet MS" pitchFamily="34" charset="-122"/>
                 <a:cs typeface="Trebuchet MS" pitchFamily="34" charset="-120"/>
               </a:rPr>
-              <a:t>-ly</a:t>
+              <a:t>-ion</a:t>
             </a:r>
             <a:endParaRPr lang="en-US" sz="1300" dirty="0"/>
           </a:p>
@@ -41052,13 +43032,166 @@
       </p:sp>
       <p:sp>
         <p:nvSpPr>
-          <p:cNvPr id="43" name="Text 41"/>
-          <p:cNvSpPr/>
-          <p:nvPr/>
-        </p:nvSpPr>
-        <p:spPr>
-          <a:xfrm>
-            <a:off x="365760" y="4178808"/>
+          <p:cNvPr id="43" name="Shape 41"/>
+          <p:cNvSpPr/>
+          <p:nvPr/>
+        </p:nvSpPr>
+        <p:spPr>
+          <a:xfrm>
+            <a:off x="640080" y="4041648"/>
+            <a:ext cx="1463040" cy="420624"/>
+          </a:xfrm>
+          <a:prstGeom prst="rect">
+            <a:avLst/>
+          </a:prstGeom>
+          <a:solidFill>
+            <a:srgbClr val="F1F5F9"/>
+          </a:solidFill>
+          <a:ln w="12700">
+            <a:solidFill>
+              <a:srgbClr val="E5E7EB"/>
+            </a:solidFill>
+            <a:prstDash val="solid"/>
+          </a:ln>
+        </p:spPr>
+      </p:sp>
+      <p:sp>
+        <p:nvSpPr>
+          <p:cNvPr id="44" name="Shape 42"/>
+          <p:cNvSpPr/>
+          <p:nvPr/>
+        </p:nvSpPr>
+        <p:spPr>
+          <a:xfrm>
+            <a:off x="3291840" y="4041648"/>
+            <a:ext cx="1645920" cy="420624"/>
+          </a:xfrm>
+          <a:prstGeom prst="rect">
+            <a:avLst/>
+          </a:prstGeom>
+          <a:solidFill>
+            <a:srgbClr val="CCFBF1"/>
+          </a:solidFill>
+          <a:ln w="12700">
+            <a:solidFill>
+              <a:srgbClr val="E5E7EB"/>
+            </a:solidFill>
+            <a:prstDash val="solid"/>
+          </a:ln>
+        </p:spPr>
+      </p:sp>
+      <p:sp>
+        <p:nvSpPr>
+          <p:cNvPr id="45" name="Text 43"/>
+          <p:cNvSpPr/>
+          <p:nvPr/>
+        </p:nvSpPr>
+        <p:spPr>
+          <a:xfrm>
+            <a:off x="3291840" y="4041648"/>
+            <a:ext cx="1645920" cy="420624"/>
+          </a:xfrm>
+          <a:prstGeom prst="rect">
+            <a:avLst/>
+          </a:prstGeom>
+          <a:noFill/>
+          <a:ln/>
+        </p:spPr>
+        <p:txBody>
+          <a:bodyPr wrap="square" lIns="0" tIns="0" rIns="0" bIns="0" rtlCol="0" anchor="ctr"/>
+          <a:lstStyle/>
+          <a:p>
+            <a:pPr algn="ctr" indent="0" marL="0">
+              <a:buNone/>
+            </a:pPr>
+            <a:r>
+              <a:rPr lang="en-US" sz="1300" b="1" dirty="0">
+                <a:solidFill>
+                  <a:srgbClr val="0F766E"/>
+                </a:solidFill>
+                <a:latin typeface="Trebuchet MS" pitchFamily="34" charset="0"/>
+                <a:ea typeface="Trebuchet MS" pitchFamily="34" charset="-122"/>
+                <a:cs typeface="Trebuchet MS" pitchFamily="34" charset="-120"/>
+              </a:rPr>
+              <a:t>vers</a:t>
+            </a:r>
+            <a:endParaRPr lang="en-US" sz="1300" dirty="0"/>
+          </a:p>
+        </p:txBody>
+      </p:sp>
+      <p:sp>
+        <p:nvSpPr>
+          <p:cNvPr id="46" name="Shape 44"/>
+          <p:cNvSpPr/>
+          <p:nvPr/>
+        </p:nvSpPr>
+        <p:spPr>
+          <a:xfrm>
+            <a:off x="5943600" y="4041648"/>
+            <a:ext cx="1463040" cy="420624"/>
+          </a:xfrm>
+          <a:prstGeom prst="rect">
+            <a:avLst/>
+          </a:prstGeom>
+          <a:solidFill>
+            <a:srgbClr val="FCE7F3"/>
+          </a:solidFill>
+          <a:ln w="12700">
+            <a:solidFill>
+              <a:srgbClr val="E5E7EB"/>
+            </a:solidFill>
+            <a:prstDash val="solid"/>
+          </a:ln>
+        </p:spPr>
+      </p:sp>
+      <p:sp>
+        <p:nvSpPr>
+          <p:cNvPr id="47" name="Text 45"/>
+          <p:cNvSpPr/>
+          <p:nvPr/>
+        </p:nvSpPr>
+        <p:spPr>
+          <a:xfrm>
+            <a:off x="5943600" y="4041648"/>
+            <a:ext cx="1463040" cy="420624"/>
+          </a:xfrm>
+          <a:prstGeom prst="rect">
+            <a:avLst/>
+          </a:prstGeom>
+          <a:noFill/>
+          <a:ln/>
+        </p:spPr>
+        <p:txBody>
+          <a:bodyPr wrap="square" lIns="0" tIns="0" rIns="0" bIns="0" rtlCol="0" anchor="ctr"/>
+          <a:lstStyle/>
+          <a:p>
+            <a:pPr algn="ctr" indent="0" marL="0">
+              <a:buNone/>
+            </a:pPr>
+            <a:r>
+              <a:rPr lang="en-US" sz="1300" b="1" dirty="0">
+                <a:solidFill>
+                  <a:srgbClr val="9D174D"/>
+                </a:solidFill>
+                <a:latin typeface="Trebuchet MS" pitchFamily="34" charset="0"/>
+                <a:ea typeface="Trebuchet MS" pitchFamily="34" charset="-122"/>
+                <a:cs typeface="Trebuchet MS" pitchFamily="34" charset="-120"/>
+              </a:rPr>
+              <a:t>-es</a:t>
+            </a:r>
+            <a:endParaRPr lang="en-US" sz="1300" dirty="0"/>
+          </a:p>
+        </p:txBody>
+      </p:sp>
+      <p:sp>
+        <p:nvSpPr>
+          <p:cNvPr id="48" name="Text 46"/>
+          <p:cNvSpPr/>
+          <p:nvPr/>
+        </p:nvSpPr>
+        <p:spPr>
+          <a:xfrm>
+            <a:off x="365760" y="4636008"/>
             <a:ext cx="1097280" cy="420624"/>
           </a:xfrm>
           <a:prstGeom prst="rect">
@@ -41091,13 +43224,13 @@
       </p:sp>
       <p:sp>
         <p:nvSpPr>
-          <p:cNvPr id="44" name="Shape 42"/>
-          <p:cNvSpPr/>
-          <p:nvPr/>
-        </p:nvSpPr>
-        <p:spPr>
-          <a:xfrm>
-            <a:off x="1508760" y="4178808"/>
+          <p:cNvPr id="49" name="Shape 47"/>
+          <p:cNvSpPr/>
+          <p:nvPr/>
+        </p:nvSpPr>
+        <p:spPr>
+          <a:xfrm>
+            <a:off x="1508760" y="4636008"/>
             <a:ext cx="950976" cy="420624"/>
           </a:xfrm>
           <a:prstGeom prst="rect">
@@ -41125,13 +43258,13 @@
       </p:sp>
       <p:sp>
         <p:nvSpPr>
-          <p:cNvPr id="45" name="Text 43"/>
-          <p:cNvSpPr/>
-          <p:nvPr/>
-        </p:nvSpPr>
-        <p:spPr>
-          <a:xfrm>
-            <a:off x="1508760" y="4178808"/>
+          <p:cNvPr id="50" name="Text 48"/>
+          <p:cNvSpPr/>
+          <p:nvPr/>
+        </p:nvSpPr>
+        <p:spPr>
+          <a:xfrm>
+            <a:off x="1508760" y="4636008"/>
             <a:ext cx="950976" cy="420624"/>
           </a:xfrm>
           <a:prstGeom prst="rect">
@@ -41164,13 +43297,13 @@
       </p:sp>
       <p:sp>
         <p:nvSpPr>
-          <p:cNvPr id="46" name="Text 44"/>
-          <p:cNvSpPr/>
-          <p:nvPr/>
-        </p:nvSpPr>
-        <p:spPr>
-          <a:xfrm>
-            <a:off x="2487168" y="4178808"/>
+          <p:cNvPr id="51" name="Text 49"/>
+          <p:cNvSpPr/>
+          <p:nvPr/>
+        </p:nvSpPr>
+        <p:spPr>
+          <a:xfrm>
+            <a:off x="2487168" y="4636008"/>
             <a:ext cx="320040" cy="420624"/>
           </a:xfrm>
           <a:prstGeom prst="rect">
@@ -41203,14 +43336,14 @@
       </p:sp>
       <p:sp>
         <p:nvSpPr>
-          <p:cNvPr id="47" name="Shape 45"/>
-          <p:cNvSpPr/>
-          <p:nvPr/>
-        </p:nvSpPr>
-        <p:spPr>
-          <a:xfrm>
-            <a:off x="2834640" y="4178808"/>
-            <a:ext cx="1097280" cy="420624"/>
+          <p:cNvPr id="52" name="Shape 50"/>
+          <p:cNvSpPr/>
+          <p:nvPr/>
+        </p:nvSpPr>
+        <p:spPr>
+          <a:xfrm>
+            <a:off x="2834640" y="4636008"/>
+            <a:ext cx="950976" cy="420624"/>
           </a:xfrm>
           <a:prstGeom prst="rect">
             <a:avLst>
@@ -41237,14 +43370,14 @@
       </p:sp>
       <p:sp>
         <p:nvSpPr>
-          <p:cNvPr id="48" name="Text 46"/>
-          <p:cNvSpPr/>
-          <p:nvPr/>
-        </p:nvSpPr>
-        <p:spPr>
-          <a:xfrm>
-            <a:off x="2834640" y="4178808"/>
-            <a:ext cx="1097280" cy="420624"/>
+          <p:cNvPr id="53" name="Text 51"/>
+          <p:cNvSpPr/>
+          <p:nvPr/>
+        </p:nvSpPr>
+        <p:spPr>
+          <a:xfrm>
+            <a:off x="2834640" y="4636008"/>
+            <a:ext cx="950976" cy="420624"/>
           </a:xfrm>
           <a:prstGeom prst="rect">
             <a:avLst/>
@@ -41268,7 +43401,7 @@
                 <a:ea typeface="Trebuchet MS" pitchFamily="34" charset="-122"/>
                 <a:cs typeface="Trebuchet MS" pitchFamily="34" charset="-120"/>
               </a:rPr>
-              <a:t>merge</a:t>
+              <a:t>ject</a:t>
             </a:r>
             <a:endParaRPr lang="en-US" sz="1300" dirty="0"/>
           </a:p>
@@ -41276,13 +43409,13 @@
       </p:sp>
       <p:sp>
         <p:nvSpPr>
-          <p:cNvPr id="49" name="Text 47"/>
-          <p:cNvSpPr/>
-          <p:nvPr/>
-        </p:nvSpPr>
-        <p:spPr>
-          <a:xfrm>
-            <a:off x="3959352" y="4178808"/>
+          <p:cNvPr id="54" name="Text 52"/>
+          <p:cNvSpPr/>
+          <p:nvPr/>
+        </p:nvSpPr>
+        <p:spPr>
+          <a:xfrm>
+            <a:off x="3813048" y="4636008"/>
             <a:ext cx="320040" cy="420624"/>
           </a:xfrm>
           <a:prstGeom prst="rect">
@@ -41315,13 +43448,13 @@
       </p:sp>
       <p:sp>
         <p:nvSpPr>
-          <p:cNvPr id="50" name="Shape 48"/>
-          <p:cNvSpPr/>
-          <p:nvPr/>
-        </p:nvSpPr>
-        <p:spPr>
-          <a:xfrm>
-            <a:off x="4306824" y="4178808"/>
+          <p:cNvPr id="55" name="Shape 53"/>
+          <p:cNvSpPr/>
+          <p:nvPr/>
+        </p:nvSpPr>
+        <p:spPr>
+          <a:xfrm>
+            <a:off x="4160520" y="4636008"/>
             <a:ext cx="822960" cy="420624"/>
           </a:xfrm>
           <a:prstGeom prst="rect">
@@ -41349,13 +43482,13 @@
       </p:sp>
       <p:sp>
         <p:nvSpPr>
-          <p:cNvPr id="51" name="Text 49"/>
-          <p:cNvSpPr/>
-          <p:nvPr/>
-        </p:nvSpPr>
-        <p:spPr>
-          <a:xfrm>
-            <a:off x="4306824" y="4178808"/>
+          <p:cNvPr id="56" name="Text 54"/>
+          <p:cNvSpPr/>
+          <p:nvPr/>
+        </p:nvSpPr>
+        <p:spPr>
+          <a:xfrm>
+            <a:off x="4160520" y="4636008"/>
             <a:ext cx="822960" cy="420624"/>
           </a:xfrm>
           <a:prstGeom prst="rect">
@@ -41388,13 +43521,13 @@
       </p:sp>
       <p:sp>
         <p:nvSpPr>
-          <p:cNvPr id="52" name="Text 50"/>
-          <p:cNvSpPr/>
-          <p:nvPr/>
-        </p:nvSpPr>
-        <p:spPr>
-          <a:xfrm>
-            <a:off x="5202936" y="4178808"/>
+          <p:cNvPr id="57" name="Text 55"/>
+          <p:cNvSpPr/>
+          <p:nvPr/>
+        </p:nvSpPr>
+        <p:spPr>
+          <a:xfrm>
+            <a:off x="5056632" y="4636008"/>
             <a:ext cx="365760" cy="420624"/>
           </a:xfrm>
           <a:prstGeom prst="rect">
@@ -41427,13 +43560,13 @@
       </p:sp>
       <p:sp>
         <p:nvSpPr>
-          <p:cNvPr id="53" name="Shape 51"/>
-          <p:cNvSpPr/>
-          <p:nvPr/>
-        </p:nvSpPr>
-        <p:spPr>
-          <a:xfrm>
-            <a:off x="5614416" y="4178808"/>
+          <p:cNvPr id="58" name="Shape 56"/>
+          <p:cNvSpPr/>
+          <p:nvPr/>
+        </p:nvSpPr>
+        <p:spPr>
+          <a:xfrm>
+            <a:off x="5468112" y="4636008"/>
             <a:ext cx="2194560" cy="420624"/>
           </a:xfrm>
           <a:prstGeom prst="rect">
@@ -41454,13 +43587,13 @@
       </p:sp>
       <p:sp>
         <p:nvSpPr>
-          <p:cNvPr id="54" name="Text 52"/>
-          <p:cNvSpPr/>
-          <p:nvPr/>
-        </p:nvSpPr>
-        <p:spPr>
-          <a:xfrm>
-            <a:off x="5614416" y="4178808"/>
+          <p:cNvPr id="59" name="Text 57"/>
+          <p:cNvSpPr/>
+          <p:nvPr/>
+        </p:nvSpPr>
+        <p:spPr>
+          <a:xfrm>
+            <a:off x="5468112" y="4636008"/>
             <a:ext cx="2194560" cy="420624"/>
           </a:xfrm>
           <a:prstGeom prst="rect">
@@ -41485,7 +43618,7 @@
                 <a:ea typeface="Trebuchet MS" pitchFamily="34" charset="-122"/>
                 <a:cs typeface="Trebuchet MS" pitchFamily="34" charset="-120"/>
               </a:rPr>
-              <a:t>submarine</a:t>
+              <a:t>subway</a:t>
             </a:r>
             <a:endParaRPr lang="en-US" sz="1400" dirty="0"/>
           </a:p>
@@ -41777,7 +43910,7 @@
                 <a:ea typeface="Calibri" pitchFamily="34" charset="-122"/>
                 <a:cs typeface="Calibri" pitchFamily="34" charset="-120"/>
               </a:rPr>
-              <a:t>Word Labs  •  wordlabs.app  •  Prefix: 'sub-' = under, below, less than</a:t>
+              <a:t>Word Labs  •  wordlabs.app  •  Prefix: 'sub-' = under; below</a:t>
             </a:r>
             <a:endParaRPr lang="en-US" sz="800" dirty="0"/>
           </a:p>
@@ -41889,7 +44022,7 @@
                 <a:ea typeface="Trebuchet MS" pitchFamily="34" charset="-122"/>
                 <a:cs typeface="Trebuchet MS" pitchFamily="34" charset="-120"/>
               </a:rPr>
-              <a:t>submarine</a:t>
+              <a:t>subway</a:t>
             </a:r>
             <a:endParaRPr lang="en-US" sz="1200" dirty="0"/>
           </a:p>
@@ -41955,7 +44088,7 @@
                 <a:ea typeface="Calibri" pitchFamily="34" charset="-122"/>
                 <a:cs typeface="Calibri" pitchFamily="34" charset="-120"/>
               </a:rPr>
-              <a:t>A smaller title that appears below the main heading in a piece of writing.</a:t>
+              <a:t>made to go through or experience something, often unpleasant</a:t>
             </a:r>
             <a:endParaRPr lang="en-US" sz="1200" dirty="0"/>
           </a:p>
@@ -42094,7 +44227,7 @@
                 <a:ea typeface="Calibri" pitchFamily="34" charset="-122"/>
                 <a:cs typeface="Calibri" pitchFamily="34" charset="-120"/>
               </a:rPr>
-              <a:t>Words shown at the bottom of a screen that display what people are saying.</a:t>
+              <a:t>a topic or area of study, or the main person or thing a sentence is about</a:t>
             </a:r>
             <a:endParaRPr lang="en-US" sz="1200" dirty="0"/>
           </a:p>
@@ -42167,7 +44300,7 @@
                 <a:ea typeface="Trebuchet MS" pitchFamily="34" charset="-122"/>
                 <a:cs typeface="Trebuchet MS" pitchFamily="34" charset="-120"/>
               </a:rPr>
-              <a:t>subtract</a:t>
+              <a:t>submerged</a:t>
             </a:r>
             <a:endParaRPr lang="en-US" sz="1200" dirty="0"/>
           </a:p>
@@ -42233,7 +44366,7 @@
                 <a:ea typeface="Calibri" pitchFamily="34" charset="-122"/>
                 <a:cs typeface="Calibri" pitchFamily="34" charset="-120"/>
               </a:rPr>
-              <a:t>An underground tunnel or train system that runs below the streets.</a:t>
+              <a:t>going completely under the surface of water or another liquid</a:t>
             </a:r>
             <a:endParaRPr lang="en-US" sz="1200" dirty="0"/>
           </a:p>
@@ -42306,7 +44439,7 @@
                 <a:ea typeface="Trebuchet MS" pitchFamily="34" charset="-122"/>
                 <a:cs typeface="Trebuchet MS" pitchFamily="34" charset="-120"/>
               </a:rPr>
-              <a:t>subway</a:t>
+              <a:t>submerging</a:t>
             </a:r>
             <a:endParaRPr lang="en-US" sz="1200" dirty="0"/>
           </a:p>
@@ -42372,7 +44505,7 @@
                 <a:ea typeface="Calibri" pitchFamily="34" charset="-122"/>
                 <a:cs typeface="Calibri" pitchFamily="34" charset="-120"/>
               </a:rPr>
-              <a:t>To divide something that has already been divided into even smaller parts.</a:t>
+              <a:t>topics of study, or people or things a sentence or ruler is about</a:t>
             </a:r>
             <a:endParaRPr lang="en-US" sz="1200" dirty="0"/>
           </a:p>
@@ -42445,7 +44578,7 @@
                 <a:ea typeface="Trebuchet MS" pitchFamily="34" charset="-122"/>
                 <a:cs typeface="Trebuchet MS" pitchFamily="34" charset="-120"/>
               </a:rPr>
-              <a:t>subtitle</a:t>
+              <a:t>subject</a:t>
             </a:r>
             <a:endParaRPr lang="en-US" sz="1200" dirty="0"/>
           </a:p>
@@ -42511,7 +44644,7 @@
                 <a:ea typeface="Calibri" pitchFamily="34" charset="-122"/>
                 <a:cs typeface="Calibri" pitchFamily="34" charset="-120"/>
               </a:rPr>
-              <a:t>To take one number away from another in maths.</a:t>
+              <a:t>completely covered by water or another liquid</a:t>
             </a:r>
             <a:endParaRPr lang="en-US" sz="1200" dirty="0"/>
           </a:p>
@@ -42584,7 +44717,7 @@
                 <a:ea typeface="Trebuchet MS" pitchFamily="34" charset="-122"/>
                 <a:cs typeface="Trebuchet MS" pitchFamily="34" charset="-120"/>
               </a:rPr>
-              <a:t>subdivide</a:t>
+              <a:t>subjects</a:t>
             </a:r>
             <a:endParaRPr lang="en-US" sz="1200" dirty="0"/>
           </a:p>
@@ -42650,7 +44783,7 @@
                 <a:ea typeface="Calibri" pitchFamily="34" charset="-122"/>
                 <a:cs typeface="Calibri" pitchFamily="34" charset="-120"/>
               </a:rPr>
-              <a:t>A vehicle that can travel underwater, often used by the navy.</a:t>
+              <a:t>an underground tunnel or railway used for trains or for walking under a road</a:t>
             </a:r>
             <a:endParaRPr lang="en-US" sz="1200" dirty="0"/>
           </a:p>
@@ -42723,7 +44856,7 @@
                 <a:ea typeface="Trebuchet MS" pitchFamily="34" charset="-122"/>
                 <a:cs typeface="Trebuchet MS" pitchFamily="34" charset="-120"/>
               </a:rPr>
-              <a:t>subheading</a:t>
+              <a:t>subjected</a:t>
             </a:r>
             <a:endParaRPr lang="en-US" sz="1200" dirty="0"/>
           </a:p>
@@ -42789,7 +44922,7 @@
                 <a:ea typeface="Calibri" pitchFamily="34" charset="-122"/>
                 <a:cs typeface="Calibri" pitchFamily="34" charset="-120"/>
               </a:rPr>
-              <a:t>To go completely under water or another liquid.</a:t>
+              <a:t>to go completely under the surface of water or another liquid</a:t>
             </a:r>
             <a:endParaRPr lang="en-US" sz="1200" dirty="0"/>
           </a:p>
@@ -43081,7 +45214,7 @@
                 <a:ea typeface="Calibri" pitchFamily="34" charset="-122"/>
                 <a:cs typeface="Calibri" pitchFamily="34" charset="-120"/>
               </a:rPr>
-              <a:t>Word Labs  •  wordlabs.app  •  Prefix: 'sub-' = under, below, less than</a:t>
+              <a:t>Word Labs  •  wordlabs.app  •  Prefix: 'sub-' = under; below</a:t>
             </a:r>
             <a:endParaRPr lang="en-US" sz="800" dirty="0"/>
           </a:p>
@@ -43284,7 +45417,7 @@
                 <a:ea typeface="Calibri" pitchFamily="34" charset="-122"/>
                 <a:cs typeface="Calibri" pitchFamily="34" charset="-120"/>
               </a:rPr>
-              <a:t>The submarine dived deep below the surface of the ocean.</a:t>
+              <a:t>We took the subway to get across the city quickly.</a:t>
             </a:r>
             <a:endParaRPr lang="en-US" sz="1500" dirty="0"/>
           </a:p>
@@ -43448,7 +45581,7 @@
                 <a:ea typeface="Calibri" pitchFamily="34" charset="-122"/>
                 <a:cs typeface="Calibri" pitchFamily="34" charset="-120"/>
               </a:rPr>
-              <a:t>Our teacher asked us to subtract twelve from fifty in our heads.</a:t>
+              <a:t>The diver watched the fish submerge beneath the coral reef.</a:t>
             </a:r>
             <a:endParaRPr lang="en-US" sz="1500" dirty="0"/>
           </a:p>
@@ -43612,7 +45745,7 @@
                 <a:ea typeface="Calibri" pitchFamily="34" charset="-122"/>
                 <a:cs typeface="Calibri" pitchFamily="34" charset="-120"/>
               </a:rPr>
-              <a:t>The documentary had subtitles so we could read what was being said.</a:t>
+              <a:t>The old shipwreck lay submerged at the bottom of the ocean.</a:t>
             </a:r>
             <a:endParaRPr lang="en-US" sz="1500" dirty="0"/>
           </a:p>
